--- a/slides/docker-session1-basics-setup.pptx
+++ b/slides/docker-session1-basics-setup.pptx
@@ -2,39 +2,36 @@
 <file path=ppt/presentation.xml><?xml version="1.0" encoding="utf-8"?>
 <p:presentation xmlns:p="http://schemas.openxmlformats.org/presentationml/2006/main">
   <p:sldMasterIdLst>
-    <p:sldMasterId xmlns:r="http://schemas.openxmlformats.org/officeDocument/2006/relationships" id="2147483648" r:id="R71682037539842c1"/>
+    <p:sldMasterId xmlns:r="http://schemas.openxmlformats.org/officeDocument/2006/relationships" id="2147483648" r:id="R43e294b9c21b4e9b"/>
   </p:sldMasterIdLst>
-  <p:notesMasterIdLst>
-    <p:notesMasterId xmlns:r="http://schemas.openxmlformats.org/officeDocument/2006/relationships" r:id="R94a4c5b484bb49ed"/>
-  </p:notesMasterIdLst>
   <p:sldIdLst>
-    <p:sldId xmlns:r="http://schemas.openxmlformats.org/officeDocument/2006/relationships" id="256" r:id="Rf69da4c77aa14877"/>
-    <p:sldId xmlns:r="http://schemas.openxmlformats.org/officeDocument/2006/relationships" id="257" r:id="Ra62d737291a341f8"/>
-    <p:sldId xmlns:r="http://schemas.openxmlformats.org/officeDocument/2006/relationships" id="258" r:id="R64fcee04469d4b34"/>
-    <p:sldId xmlns:r="http://schemas.openxmlformats.org/officeDocument/2006/relationships" id="259" r:id="R8afb3298b4c34037"/>
-    <p:sldId xmlns:r="http://schemas.openxmlformats.org/officeDocument/2006/relationships" id="260" r:id="R3e81faa42b1f45a9"/>
-    <p:sldId xmlns:r="http://schemas.openxmlformats.org/officeDocument/2006/relationships" id="261" r:id="R16b1c99a102a4e2c"/>
-    <p:sldId xmlns:r="http://schemas.openxmlformats.org/officeDocument/2006/relationships" id="262" r:id="R8443818646e1418a"/>
-    <p:sldId xmlns:r="http://schemas.openxmlformats.org/officeDocument/2006/relationships" id="263" r:id="Rfe4d8626476b4b89"/>
-    <p:sldId xmlns:r="http://schemas.openxmlformats.org/officeDocument/2006/relationships" id="264" r:id="R38d571769b8b4fb7"/>
-    <p:sldId xmlns:r="http://schemas.openxmlformats.org/officeDocument/2006/relationships" id="265" r:id="R2be77daeb5794d29"/>
-    <p:sldId xmlns:r="http://schemas.openxmlformats.org/officeDocument/2006/relationships" id="266" r:id="R4592594911174db7"/>
-    <p:sldId xmlns:r="http://schemas.openxmlformats.org/officeDocument/2006/relationships" id="267" r:id="Rbfc1196c73d14fee"/>
-    <p:sldId xmlns:r="http://schemas.openxmlformats.org/officeDocument/2006/relationships" id="268" r:id="R3bd45e89ae0840a3"/>
-    <p:sldId xmlns:r="http://schemas.openxmlformats.org/officeDocument/2006/relationships" id="269" r:id="Rcbc4603c5fcc418d"/>
-    <p:sldId xmlns:r="http://schemas.openxmlformats.org/officeDocument/2006/relationships" id="270" r:id="R7ead831eb8d4479b"/>
-    <p:sldId xmlns:r="http://schemas.openxmlformats.org/officeDocument/2006/relationships" id="271" r:id="R1e890ab4f2f34fea"/>
-    <p:sldId xmlns:r="http://schemas.openxmlformats.org/officeDocument/2006/relationships" id="272" r:id="Ra404254c708f46fc"/>
-    <p:sldId xmlns:r="http://schemas.openxmlformats.org/officeDocument/2006/relationships" id="273" r:id="R415a74d3aa4f42c1"/>
-    <p:sldId xmlns:r="http://schemas.openxmlformats.org/officeDocument/2006/relationships" id="274" r:id="Re4bc8bbeadd64223"/>
-    <p:sldId xmlns:r="http://schemas.openxmlformats.org/officeDocument/2006/relationships" id="275" r:id="R951e11affcac4112"/>
-    <p:sldId xmlns:r="http://schemas.openxmlformats.org/officeDocument/2006/relationships" id="276" r:id="R4524bbdd2be74179"/>
-    <p:sldId xmlns:r="http://schemas.openxmlformats.org/officeDocument/2006/relationships" id="277" r:id="R447b2860a5214d90"/>
-    <p:sldId xmlns:r="http://schemas.openxmlformats.org/officeDocument/2006/relationships" id="278" r:id="R423d82f930894519"/>
-    <p:sldId xmlns:r="http://schemas.openxmlformats.org/officeDocument/2006/relationships" id="279" r:id="R19c0e5820dfd4ecc"/>
-    <p:sldId xmlns:r="http://schemas.openxmlformats.org/officeDocument/2006/relationships" id="280" r:id="Ra9ff63b3e4234b63"/>
-    <p:sldId xmlns:r="http://schemas.openxmlformats.org/officeDocument/2006/relationships" id="281" r:id="R98d1d3b70bf74cff"/>
-    <p:sldId xmlns:r="http://schemas.openxmlformats.org/officeDocument/2006/relationships" id="282" r:id="Rf45c91722c264975"/>
+    <p:sldId xmlns:r="http://schemas.openxmlformats.org/officeDocument/2006/relationships" id="256" r:id="Rafb80402c4b64a15"/>
+    <p:sldId xmlns:r="http://schemas.openxmlformats.org/officeDocument/2006/relationships" id="257" r:id="R4ff45aacb81d4ff7"/>
+    <p:sldId xmlns:r="http://schemas.openxmlformats.org/officeDocument/2006/relationships" id="258" r:id="Rc55a6fa3ff404697"/>
+    <p:sldId xmlns:r="http://schemas.openxmlformats.org/officeDocument/2006/relationships" id="259" r:id="Reaf9421e1633459a"/>
+    <p:sldId xmlns:r="http://schemas.openxmlformats.org/officeDocument/2006/relationships" id="260" r:id="R78c477f96b4f48e5"/>
+    <p:sldId xmlns:r="http://schemas.openxmlformats.org/officeDocument/2006/relationships" id="261" r:id="R9ef852f5343b4d6d"/>
+    <p:sldId xmlns:r="http://schemas.openxmlformats.org/officeDocument/2006/relationships" id="262" r:id="R5905056220ce454a"/>
+    <p:sldId xmlns:r="http://schemas.openxmlformats.org/officeDocument/2006/relationships" id="263" r:id="R83c6540a0a0748b7"/>
+    <p:sldId xmlns:r="http://schemas.openxmlformats.org/officeDocument/2006/relationships" id="264" r:id="Rd003a8696a4648cf"/>
+    <p:sldId xmlns:r="http://schemas.openxmlformats.org/officeDocument/2006/relationships" id="265" r:id="R897320a0158f4872"/>
+    <p:sldId xmlns:r="http://schemas.openxmlformats.org/officeDocument/2006/relationships" id="266" r:id="R1bb31d5399c24aef"/>
+    <p:sldId xmlns:r="http://schemas.openxmlformats.org/officeDocument/2006/relationships" id="267" r:id="R16e547b4c3ea4e7c"/>
+    <p:sldId xmlns:r="http://schemas.openxmlformats.org/officeDocument/2006/relationships" id="268" r:id="Rd4a4d234627c4f1e"/>
+    <p:sldId xmlns:r="http://schemas.openxmlformats.org/officeDocument/2006/relationships" id="269" r:id="Rb02cb25556e44831"/>
+    <p:sldId xmlns:r="http://schemas.openxmlformats.org/officeDocument/2006/relationships" id="270" r:id="Rc2ae40f3cdb440b5"/>
+    <p:sldId xmlns:r="http://schemas.openxmlformats.org/officeDocument/2006/relationships" id="271" r:id="R74dde4a93c1044d0"/>
+    <p:sldId xmlns:r="http://schemas.openxmlformats.org/officeDocument/2006/relationships" id="272" r:id="R087ac154a8e14c2d"/>
+    <p:sldId xmlns:r="http://schemas.openxmlformats.org/officeDocument/2006/relationships" id="273" r:id="Rd2896612a69d4967"/>
+    <p:sldId xmlns:r="http://schemas.openxmlformats.org/officeDocument/2006/relationships" id="274" r:id="R099d9a79a18040cb"/>
+    <p:sldId xmlns:r="http://schemas.openxmlformats.org/officeDocument/2006/relationships" id="275" r:id="R631de70a9b524f2a"/>
+    <p:sldId xmlns:r="http://schemas.openxmlformats.org/officeDocument/2006/relationships" id="276" r:id="R76ea71f2b5e3436c"/>
+    <p:sldId xmlns:r="http://schemas.openxmlformats.org/officeDocument/2006/relationships" id="277" r:id="Re3ccc8fe3f194967"/>
+    <p:sldId xmlns:r="http://schemas.openxmlformats.org/officeDocument/2006/relationships" id="278" r:id="R997c7a3e7fe94727"/>
+    <p:sldId xmlns:r="http://schemas.openxmlformats.org/officeDocument/2006/relationships" id="279" r:id="R523e56ed19ca4939"/>
+    <p:sldId xmlns:r="http://schemas.openxmlformats.org/officeDocument/2006/relationships" id="280" r:id="R17667690b9224814"/>
+    <p:sldId xmlns:r="http://schemas.openxmlformats.org/officeDocument/2006/relationships" id="281" r:id="Ra5f29b033f154389"/>
+    <p:sldId xmlns:r="http://schemas.openxmlformats.org/officeDocument/2006/relationships" id="282" r:id="R43390519fc5949a8"/>
   </p:sldIdLst>
   <p:sldSz cx="12192000" cy="6858000"/>
   <p:notesSz cx="6858000" cy="9144000"/>
@@ -136,2283 +133,6 @@
 </p:presentation>
 </file>
 
-<file path=ppt/notesMasters/notesMaster1.xml><?xml version="1.0" encoding="utf-8"?>
-<p:notesMaster xmlns:p="http://schemas.openxmlformats.org/presentationml/2006/main">
-  <p:cSld>
-    <p:bg>
-      <p:bgRef idx="1001">
-        <a:schemeClr xmlns:a="http://schemas.openxmlformats.org/drawingml/2006/main" val="bg1"/>
-      </p:bgRef>
-    </p:bg>
-    <p:spTree>
-      <p:nvGrpSpPr>
-        <p:cNvPr id="1" name=""/>
-        <p:cNvGrpSpPr/>
-        <p:nvPr/>
-      </p:nvGrpSpPr>
-      <p:grpSpPr>
-        <a:xfrm xmlns:a="http://schemas.openxmlformats.org/drawingml/2006/main"/>
-      </p:grpSpPr>
-      <p:sp>
-        <p:nvSpPr>
-          <p:cNvPr id="2" name="Header Placeholder"/>
-          <p:cNvSpPr/>
-          <p:nvPr>
-            <p:ph type="hdr" sz="quarter"/>
-          </p:nvPr>
-        </p:nvSpPr>
-        <p:spPr>
-          <a:prstGeom xmlns:a="http://schemas.openxmlformats.org/drawingml/2006/main" prst="rect">
-            <a:avLst/>
-          </a:prstGeom>
-        </p:spPr>
-        <p:txBody>
-          <a:bodyPr xmlns:a="http://schemas.openxmlformats.org/drawingml/2006/main"/>
-          <a:lstStyle xmlns:a="http://schemas.openxmlformats.org/drawingml/2006/main"/>
-          <a:p xmlns:a="http://schemas.openxmlformats.org/drawingml/2006/main"/>
-        </p:txBody>
-      </p:sp>
-      <p:sp>
-        <p:nvSpPr>
-          <p:cNvPr id="3" name="Date Placeholder"/>
-          <p:cNvSpPr/>
-          <p:nvPr>
-            <p:ph type="dt" sz="quarter" idx="1"/>
-          </p:nvPr>
-        </p:nvSpPr>
-        <p:spPr>
-          <a:prstGeom xmlns:a="http://schemas.openxmlformats.org/drawingml/2006/main" prst="rect">
-            <a:avLst/>
-          </a:prstGeom>
-        </p:spPr>
-        <p:txBody>
-          <a:bodyPr xmlns:a="http://schemas.openxmlformats.org/drawingml/2006/main"/>
-          <a:lstStyle xmlns:a="http://schemas.openxmlformats.org/drawingml/2006/main"/>
-          <a:p xmlns:a="http://schemas.openxmlformats.org/drawingml/2006/main"/>
-        </p:txBody>
-      </p:sp>
-      <p:sp>
-        <p:nvSpPr>
-          <p:cNvPr id="4" name="Slide Image Placeholder"/>
-          <p:cNvSpPr/>
-          <p:nvPr>
-            <p:ph type="sldImg" idx="2"/>
-          </p:nvPr>
-        </p:nvSpPr>
-        <p:spPr>
-          <a:prstGeom xmlns:a="http://schemas.openxmlformats.org/drawingml/2006/main" prst="rect">
-            <a:avLst/>
-          </a:prstGeom>
-        </p:spPr>
-        <p:txBody>
-          <a:bodyPr xmlns:a="http://schemas.openxmlformats.org/drawingml/2006/main"/>
-          <a:lstStyle xmlns:a="http://schemas.openxmlformats.org/drawingml/2006/main"/>
-          <a:p xmlns:a="http://schemas.openxmlformats.org/drawingml/2006/main"/>
-        </p:txBody>
-      </p:sp>
-      <p:sp>
-        <p:nvSpPr>
-          <p:cNvPr id="5" name="Notes Placeholder"/>
-          <p:cNvSpPr/>
-          <p:nvPr>
-            <p:ph type="body" sz="quarter" idx="3"/>
-          </p:nvPr>
-        </p:nvSpPr>
-        <p:spPr>
-          <a:prstGeom xmlns:a="http://schemas.openxmlformats.org/drawingml/2006/main" prst="rect">
-            <a:avLst/>
-          </a:prstGeom>
-        </p:spPr>
-        <p:txBody>
-          <a:bodyPr xmlns:a="http://schemas.openxmlformats.org/drawingml/2006/main"/>
-          <a:lstStyle xmlns:a="http://schemas.openxmlformats.org/drawingml/2006/main"/>
-          <a:p xmlns:a="http://schemas.openxmlformats.org/drawingml/2006/main"/>
-        </p:txBody>
-      </p:sp>
-      <p:sp>
-        <p:nvSpPr>
-          <p:cNvPr id="6" name="Footer Placeholder"/>
-          <p:cNvSpPr/>
-          <p:nvPr>
-            <p:ph type="ftr" sz="quarter" idx="4"/>
-          </p:nvPr>
-        </p:nvSpPr>
-        <p:spPr>
-          <a:prstGeom xmlns:a="http://schemas.openxmlformats.org/drawingml/2006/main" prst="rect">
-            <a:avLst/>
-          </a:prstGeom>
-        </p:spPr>
-        <p:txBody>
-          <a:bodyPr xmlns:a="http://schemas.openxmlformats.org/drawingml/2006/main"/>
-          <a:lstStyle xmlns:a="http://schemas.openxmlformats.org/drawingml/2006/main"/>
-          <a:p xmlns:a="http://schemas.openxmlformats.org/drawingml/2006/main"/>
-        </p:txBody>
-      </p:sp>
-      <p:sp>
-        <p:nvSpPr>
-          <p:cNvPr id="7" name="Slide Number Placeholder"/>
-          <p:cNvSpPr/>
-          <p:nvPr>
-            <p:ph type="sldNum" sz="quarter" idx="5"/>
-          </p:nvPr>
-        </p:nvSpPr>
-        <p:spPr>
-          <a:prstGeom xmlns:a="http://schemas.openxmlformats.org/drawingml/2006/main" prst="rect">
-            <a:avLst/>
-          </a:prstGeom>
-        </p:spPr>
-        <p:txBody>
-          <a:bodyPr xmlns:a="http://schemas.openxmlformats.org/drawingml/2006/main"/>
-          <a:lstStyle xmlns:a="http://schemas.openxmlformats.org/drawingml/2006/main"/>
-          <a:p xmlns:a="http://schemas.openxmlformats.org/drawingml/2006/main"/>
-        </p:txBody>
-      </p:sp>
-    </p:spTree>
-  </p:cSld>
-  <p:clrMap bg1="lt1" tx1="dk1" bg2="lt2" tx2="dk2" accent1="accent1" accent2="accent2" accent3="accent3" accent4="accent4" accent5="accent5" accent6="accent6" hlink="hlink" folHlink="folHlink"/>
-  <p:notesStyle>
-    <a:lvl1pPr xmlns:a="http://schemas.openxmlformats.org/drawingml/2006/main" marL="0" algn="l" defTabSz="914400" rtl="0" eaLnBrk="1" latinLnBrk="0" hangingPunct="1">
-      <a:defRPr sz="1200" kern="1200"/>
-    </a:lvl1pPr>
-  </p:notesStyle>
-</p:notesMaster>
-</file>
-
-<file path=ppt/notesMasters/theme/theme3.xml><?xml version="1.0" encoding="utf-8"?>
-<a:theme xmlns:a="http://schemas.openxmlformats.org/drawingml/2006/main" name="ChatGPT">
-  <a:themeElements>
-    <a:clrScheme name="ChatGPT">
-      <a:dk1>
-        <a:srgbClr val="000000"/>
-      </a:dk1>
-      <a:lt1>
-        <a:srgbClr val="FFFFFF"/>
-      </a:lt1>
-      <a:dk2>
-        <a:srgbClr val="0E2841"/>
-      </a:dk2>
-      <a:lt2>
-        <a:srgbClr val="E8E8E8"/>
-      </a:lt2>
-      <a:accent1>
-        <a:srgbClr val="156082"/>
-      </a:accent1>
-      <a:accent2>
-        <a:srgbClr val="E97132"/>
-      </a:accent2>
-      <a:accent3>
-        <a:srgbClr val="196B24"/>
-      </a:accent3>
-      <a:accent4>
-        <a:srgbClr val="0F9ED5"/>
-      </a:accent4>
-      <a:accent5>
-        <a:srgbClr val="A02B93"/>
-      </a:accent5>
-      <a:accent6>
-        <a:srgbClr val="4EA72E"/>
-      </a:accent6>
-      <a:hlink>
-        <a:srgbClr val="467886"/>
-      </a:hlink>
-      <a:folHlink>
-        <a:srgbClr val="96607D"/>
-      </a:folHlink>
-    </a:clrScheme>
-    <a:fontScheme name="Office">
-      <a:majorFont>
-        <a:latin typeface="Calibri Light"/>
-        <a:ea typeface="Calibri Light"/>
-        <a:cs typeface="Calibri Light"/>
-      </a:majorFont>
-      <a:minorFont>
-        <a:latin typeface="Calibri"/>
-        <a:ea typeface="Calibri"/>
-        <a:cs typeface="Calibri"/>
-      </a:minorFont>
-    </a:fontScheme>
-    <a:fmtScheme name="ChatGPT">
-      <a:fillStyleLst>
-        <a:solidFill>
-          <a:schemeClr val="phClr"/>
-        </a:solidFill>
-        <a:gradFill>
-          <a:gsLst>
-            <a:gs pos="0">
-              <a:schemeClr val="phClr">
-                <a:tint val="67000"/>
-                <a:lumMod val="110000"/>
-                <a:satMod val="105000"/>
-              </a:schemeClr>
-            </a:gs>
-            <a:gs pos="50000">
-              <a:schemeClr val="phClr">
-                <a:tint val="73000"/>
-                <a:lumMod val="105000"/>
-                <a:satMod val="103000"/>
-              </a:schemeClr>
-            </a:gs>
-            <a:gs pos="100000">
-              <a:schemeClr val="phClr">
-                <a:tint val="81000"/>
-                <a:lumMod val="105000"/>
-                <a:satMod val="109000"/>
-              </a:schemeClr>
-            </a:gs>
-          </a:gsLst>
-          <a:lin ang="5400000" scaled="0"/>
-        </a:gradFill>
-        <a:gradFill>
-          <a:gsLst>
-            <a:gs pos="0">
-              <a:schemeClr val="phClr">
-                <a:tint val="94000"/>
-                <a:lumMod val="102000"/>
-                <a:satMod val="103000"/>
-              </a:schemeClr>
-            </a:gs>
-            <a:gs pos="50000">
-              <a:schemeClr val="phClr">
-                <a:shade val="100000"/>
-                <a:lumMod val="100000"/>
-                <a:satMod val="110000"/>
-              </a:schemeClr>
-            </a:gs>
-            <a:gs pos="100000">
-              <a:schemeClr val="phClr">
-                <a:shade val="78000"/>
-                <a:lumMod val="99000"/>
-                <a:satMod val="120000"/>
-              </a:schemeClr>
-            </a:gs>
-          </a:gsLst>
-          <a:lin ang="5400000" scaled="0"/>
-        </a:gradFill>
-      </a:fillStyleLst>
-      <a:lnStyleLst>
-        <a:ln w="12700">
-          <a:solidFill>
-            <a:schemeClr val="phClr"/>
-          </a:solidFill>
-          <a:prstDash val="solid"/>
-        </a:ln>
-        <a:ln w="19050">
-          <a:solidFill>
-            <a:schemeClr val="phClr"/>
-          </a:solidFill>
-          <a:prstDash val="solid"/>
-        </a:ln>
-        <a:ln w="25400">
-          <a:solidFill>
-            <a:schemeClr val="phClr"/>
-          </a:solidFill>
-          <a:prstDash val="solid"/>
-        </a:ln>
-      </a:lnStyleLst>
-      <a:effectStyleLst>
-        <a:effectStyle>
-          <a:effectLst/>
-        </a:effectStyle>
-        <a:effectStyle>
-          <a:effectLst/>
-        </a:effectStyle>
-        <a:effectStyle>
-          <a:effectLst>
-            <a:outerShdw blurRad="57150" dist="19050" dir="5400000">
-              <a:srgbClr val="000000">
-                <a:alpha val="16000"/>
-              </a:srgbClr>
-            </a:outerShdw>
-          </a:effectLst>
-        </a:effectStyle>
-        <a:effectStyle>
-          <a:effectLst>
-            <a:outerShdw blurRad="19050" dist="9525" dir="5400000">
-              <a:srgbClr val="000000">
-                <a:alpha val="6000"/>
-              </a:srgbClr>
-            </a:outerShdw>
-          </a:effectLst>
-        </a:effectStyle>
-        <a:effectStyle>
-          <a:effectLst>
-            <a:outerShdw blurRad="28575" dist="9525" dir="5400000">
-              <a:srgbClr val="000000">
-                <a:alpha val="8000"/>
-              </a:srgbClr>
-            </a:outerShdw>
-          </a:effectLst>
-        </a:effectStyle>
-        <a:effectStyle>
-          <a:effectLst>
-            <a:outerShdw blurRad="57150" dist="19050" dir="5400000">
-              <a:srgbClr val="000000">
-                <a:alpha val="10000"/>
-              </a:srgbClr>
-            </a:outerShdw>
-          </a:effectLst>
-        </a:effectStyle>
-        <a:effectStyle>
-          <a:effectLst>
-            <a:outerShdw blurRad="114300" dist="38100" dir="5400000">
-              <a:srgbClr val="000000">
-                <a:alpha val="12000"/>
-              </a:srgbClr>
-            </a:outerShdw>
-          </a:effectLst>
-        </a:effectStyle>
-        <a:effectStyle>
-          <a:effectLst>
-            <a:outerShdw blurRad="171450" dist="57150" dir="5400000">
-              <a:srgbClr val="000000">
-                <a:alpha val="16000"/>
-              </a:srgbClr>
-            </a:outerShdw>
-          </a:effectLst>
-        </a:effectStyle>
-        <a:effectStyle>
-          <a:effectLst>
-            <a:outerShdw blurRad="266700" dist="95250" dir="5400000">
-              <a:srgbClr val="000000">
-                <a:alpha val="24000"/>
-              </a:srgbClr>
-            </a:outerShdw>
-          </a:effectLst>
-        </a:effectStyle>
-      </a:effectStyleLst>
-      <a:bgFillStyleLst>
-        <a:solidFill>
-          <a:schemeClr val="phClr"/>
-        </a:solidFill>
-        <a:solidFill>
-          <a:schemeClr val="phClr">
-            <a:tint val="95000"/>
-            <a:satMod val="170000"/>
-          </a:schemeClr>
-        </a:solidFill>
-        <a:gradFill>
-          <a:gsLst>
-            <a:gs pos="0">
-              <a:schemeClr val="phClr">
-                <a:tint val="93000"/>
-                <a:shade val="98000"/>
-                <a:lumMod val="102000"/>
-                <a:satMod val="150000"/>
-              </a:schemeClr>
-            </a:gs>
-            <a:gs pos="50000">
-              <a:schemeClr val="phClr">
-                <a:tint val="98000"/>
-                <a:shade val="90000"/>
-                <a:lumMod val="103000"/>
-                <a:satMod val="130000"/>
-              </a:schemeClr>
-            </a:gs>
-            <a:gs pos="100000">
-              <a:schemeClr val="phClr">
-                <a:shade val="63000"/>
-                <a:satMod val="120000"/>
-              </a:schemeClr>
-            </a:gs>
-          </a:gsLst>
-          <a:lin ang="5400000" scaled="0"/>
-        </a:gradFill>
-      </a:bgFillStyleLst>
-    </a:fmtScheme>
-  </a:themeElements>
-</a:theme>
-</file>
-
-<file path=ppt/notesSlides/notesSlide1.xml><?xml version="1.0" encoding="utf-8"?>
-<p:notes xmlns:p="http://schemas.openxmlformats.org/presentationml/2006/main">
-  <p:cSld>
-    <p:spTree>
-      <p:nvGrpSpPr>
-        <p:cNvPr id="1" name=""/>
-        <p:cNvGrpSpPr/>
-        <p:nvPr/>
-      </p:nvGrpSpPr>
-      <p:grpSpPr>
-        <a:xfrm xmlns:a="http://schemas.openxmlformats.org/drawingml/2006/main"/>
-      </p:grpSpPr>
-      <p:sp>
-        <p:nvSpPr>
-          <p:cNvPr id="2" name="Slide Image Placeholder 1"/>
-          <p:cNvSpPr>
-            <a:spLocks xmlns:a="http://schemas.openxmlformats.org/drawingml/2006/main" noGrp="1"/>
-          </p:cNvSpPr>
-          <p:nvPr>
-            <p:ph type="sldImg" idx="0"/>
-          </p:nvPr>
-        </p:nvSpPr>
-        <p:spPr/>
-      </p:sp>
-      <p:sp>
-        <p:nvSpPr>
-          <p:cNvPr id="3" name="Notes Placeholder 2"/>
-          <p:cNvSpPr>
-            <a:spLocks xmlns:a="http://schemas.openxmlformats.org/drawingml/2006/main" noGrp="1"/>
-          </p:cNvSpPr>
-          <p:nvPr>
-            <p:ph type="body" idx="1"/>
-          </p:nvPr>
-        </p:nvSpPr>
-        <p:spPr/>
-        <p:txBody>
-          <a:bodyPr xmlns:a="http://schemas.openxmlformats.org/drawingml/2006/main"/>
-          <a:lstStyle xmlns:a="http://schemas.openxmlformats.org/drawingml/2006/main"/>
-          <a:p xmlns:a="http://schemas.openxmlformats.org/drawingml/2006/main">
-            <a:r>
-              <a:t>開場先建立課程目標：這堂不是要背指令，而是要理解容器為什麼存在，然後親手跑起第一個 Web 伺服器。</a:t>
-            </a:r>
-          </a:p>
-        </p:txBody>
-      </p:sp>
-      <p:sp>
-        <p:nvSpPr>
-          <p:cNvPr id="4" name="Slide Number Placeholder 3"/>
-          <p:cNvSpPr>
-            <a:spLocks xmlns:a="http://schemas.openxmlformats.org/drawingml/2006/main" noGrp="1"/>
-          </p:cNvSpPr>
-          <p:nvPr>
-            <p:ph type="sldNum" idx="5"/>
-          </p:nvPr>
-        </p:nvSpPr>
-        <p:spPr/>
-        <p:txBody>
-          <a:bodyPr xmlns:a="http://schemas.openxmlformats.org/drawingml/2006/main"/>
-          <a:lstStyle xmlns:a="http://schemas.openxmlformats.org/drawingml/2006/main"/>
-          <a:p xmlns:a="http://schemas.openxmlformats.org/drawingml/2006/main"/>
-        </p:txBody>
-      </p:sp>
-    </p:spTree>
-  </p:cSld>
-  <p:clrMapOvr>
-    <a:masterClrMapping xmlns:a="http://schemas.openxmlformats.org/drawingml/2006/main"/>
-  </p:clrMapOvr>
-</p:notes>
-</file>
-
-<file path=ppt/notesSlides/notesSlide10.xml><?xml version="1.0" encoding="utf-8"?>
-<p:notes xmlns:p="http://schemas.openxmlformats.org/presentationml/2006/main">
-  <p:cSld>
-    <p:spTree>
-      <p:nvGrpSpPr>
-        <p:cNvPr id="1" name=""/>
-        <p:cNvGrpSpPr/>
-        <p:nvPr/>
-      </p:nvGrpSpPr>
-      <p:grpSpPr>
-        <a:xfrm xmlns:a="http://schemas.openxmlformats.org/drawingml/2006/main"/>
-      </p:grpSpPr>
-      <p:sp>
-        <p:nvSpPr>
-          <p:cNvPr id="2" name="Slide Image Placeholder 1"/>
-          <p:cNvSpPr>
-            <a:spLocks xmlns:a="http://schemas.openxmlformats.org/drawingml/2006/main" noGrp="1"/>
-          </p:cNvSpPr>
-          <p:nvPr>
-            <p:ph type="sldImg" idx="0"/>
-          </p:nvPr>
-        </p:nvSpPr>
-        <p:spPr/>
-      </p:sp>
-      <p:sp>
-        <p:nvSpPr>
-          <p:cNvPr id="3" name="Notes Placeholder 2"/>
-          <p:cNvSpPr>
-            <a:spLocks xmlns:a="http://schemas.openxmlformats.org/drawingml/2006/main" noGrp="1"/>
-          </p:cNvSpPr>
-          <p:nvPr>
-            <p:ph type="body" idx="1"/>
-          </p:nvPr>
-        </p:nvSpPr>
-        <p:spPr/>
-        <p:txBody>
-          <a:bodyPr xmlns:a="http://schemas.openxmlformats.org/drawingml/2006/main"/>
-          <a:lstStyle xmlns:a="http://schemas.openxmlformats.org/drawingml/2006/main"/>
-          <a:p xmlns:a="http://schemas.openxmlformats.org/drawingml/2006/main">
-            <a:r>
-              <a:t>練習題來自 exercises.md 第 1 堂概念題 Q2 與 Q4。</a:t>
-            </a:r>
-          </a:p>
-        </p:txBody>
-      </p:sp>
-      <p:sp>
-        <p:nvSpPr>
-          <p:cNvPr id="4" name="Slide Number Placeholder 3"/>
-          <p:cNvSpPr>
-            <a:spLocks xmlns:a="http://schemas.openxmlformats.org/drawingml/2006/main" noGrp="1"/>
-          </p:cNvSpPr>
-          <p:nvPr>
-            <p:ph type="sldNum" idx="5"/>
-          </p:nvPr>
-        </p:nvSpPr>
-        <p:spPr/>
-        <p:txBody>
-          <a:bodyPr xmlns:a="http://schemas.openxmlformats.org/drawingml/2006/main"/>
-          <a:lstStyle xmlns:a="http://schemas.openxmlformats.org/drawingml/2006/main"/>
-          <a:p xmlns:a="http://schemas.openxmlformats.org/drawingml/2006/main"/>
-        </p:txBody>
-      </p:sp>
-    </p:spTree>
-  </p:cSld>
-  <p:clrMapOvr>
-    <a:masterClrMapping xmlns:a="http://schemas.openxmlformats.org/drawingml/2006/main"/>
-  </p:clrMapOvr>
-</p:notes>
-</file>
-
-<file path=ppt/notesSlides/notesSlide11.xml><?xml version="1.0" encoding="utf-8"?>
-<p:notes xmlns:p="http://schemas.openxmlformats.org/presentationml/2006/main">
-  <p:cSld>
-    <p:spTree>
-      <p:nvGrpSpPr>
-        <p:cNvPr id="1" name=""/>
-        <p:cNvGrpSpPr/>
-        <p:nvPr/>
-      </p:nvGrpSpPr>
-      <p:grpSpPr>
-        <a:xfrm xmlns:a="http://schemas.openxmlformats.org/drawingml/2006/main"/>
-      </p:grpSpPr>
-      <p:sp>
-        <p:nvSpPr>
-          <p:cNvPr id="2" name="Slide Image Placeholder 1"/>
-          <p:cNvSpPr>
-            <a:spLocks xmlns:a="http://schemas.openxmlformats.org/drawingml/2006/main" noGrp="1"/>
-          </p:cNvSpPr>
-          <p:nvPr>
-            <p:ph type="sldImg" idx="0"/>
-          </p:nvPr>
-        </p:nvSpPr>
-        <p:spPr/>
-      </p:sp>
-      <p:sp>
-        <p:nvSpPr>
-          <p:cNvPr id="3" name="Notes Placeholder 2"/>
-          <p:cNvSpPr>
-            <a:spLocks xmlns:a="http://schemas.openxmlformats.org/drawingml/2006/main" noGrp="1"/>
-          </p:cNvSpPr>
-          <p:nvPr>
-            <p:ph type="body" idx="1"/>
-          </p:nvPr>
-        </p:nvSpPr>
-        <p:spPr/>
-        <p:txBody>
-          <a:bodyPr xmlns:a="http://schemas.openxmlformats.org/drawingml/2006/main"/>
-          <a:lstStyle xmlns:a="http://schemas.openxmlformats.org/drawingml/2006/main"/>
-          <a:p xmlns:a="http://schemas.openxmlformats.org/drawingml/2006/main">
-            <a:r>
-              <a:t>這頁可以請學生現場打開工作管理員看虛擬化狀態。先排除環境問題，後面實作會順很多。</a:t>
-            </a:r>
-          </a:p>
-        </p:txBody>
-      </p:sp>
-      <p:sp>
-        <p:nvSpPr>
-          <p:cNvPr id="4" name="Slide Number Placeholder 3"/>
-          <p:cNvSpPr>
-            <a:spLocks xmlns:a="http://schemas.openxmlformats.org/drawingml/2006/main" noGrp="1"/>
-          </p:cNvSpPr>
-          <p:nvPr>
-            <p:ph type="sldNum" idx="5"/>
-          </p:nvPr>
-        </p:nvSpPr>
-        <p:spPr/>
-        <p:txBody>
-          <a:bodyPr xmlns:a="http://schemas.openxmlformats.org/drawingml/2006/main"/>
-          <a:lstStyle xmlns:a="http://schemas.openxmlformats.org/drawingml/2006/main"/>
-          <a:p xmlns:a="http://schemas.openxmlformats.org/drawingml/2006/main"/>
-        </p:txBody>
-      </p:sp>
-    </p:spTree>
-  </p:cSld>
-  <p:clrMapOvr>
-    <a:masterClrMapping xmlns:a="http://schemas.openxmlformats.org/drawingml/2006/main"/>
-  </p:clrMapOvr>
-</p:notes>
-</file>
-
-<file path=ppt/notesSlides/notesSlide12.xml><?xml version="1.0" encoding="utf-8"?>
-<p:notes xmlns:p="http://schemas.openxmlformats.org/presentationml/2006/main">
-  <p:cSld>
-    <p:spTree>
-      <p:nvGrpSpPr>
-        <p:cNvPr id="1" name=""/>
-        <p:cNvGrpSpPr/>
-        <p:nvPr/>
-      </p:nvGrpSpPr>
-      <p:grpSpPr>
-        <a:xfrm xmlns:a="http://schemas.openxmlformats.org/drawingml/2006/main"/>
-      </p:grpSpPr>
-      <p:sp>
-        <p:nvSpPr>
-          <p:cNvPr id="2" name="Slide Image Placeholder 1"/>
-          <p:cNvSpPr>
-            <a:spLocks xmlns:a="http://schemas.openxmlformats.org/drawingml/2006/main" noGrp="1"/>
-          </p:cNvSpPr>
-          <p:nvPr>
-            <p:ph type="sldImg" idx="0"/>
-          </p:nvPr>
-        </p:nvSpPr>
-        <p:spPr/>
-      </p:sp>
-      <p:sp>
-        <p:nvSpPr>
-          <p:cNvPr id="3" name="Notes Placeholder 2"/>
-          <p:cNvSpPr>
-            <a:spLocks xmlns:a="http://schemas.openxmlformats.org/drawingml/2006/main" noGrp="1"/>
-          </p:cNvSpPr>
-          <p:nvPr>
-            <p:ph type="body" idx="1"/>
-          </p:nvPr>
-        </p:nvSpPr>
-        <p:spPr/>
-        <p:txBody>
-          <a:bodyPr xmlns:a="http://schemas.openxmlformats.org/drawingml/2006/main"/>
-          <a:lstStyle xmlns:a="http://schemas.openxmlformats.org/drawingml/2006/main"/>
-          <a:p xmlns:a="http://schemas.openxmlformats.org/drawingml/2006/main">
-            <a:r>
-              <a:t>強調 WSL 2 平常不用手動啟動，Docker Desktop 啟動時會自己使用它。遇到卡住時再用 wsl --shutdown。</a:t>
-            </a:r>
-          </a:p>
-        </p:txBody>
-      </p:sp>
-      <p:sp>
-        <p:nvSpPr>
-          <p:cNvPr id="4" name="Slide Number Placeholder 3"/>
-          <p:cNvSpPr>
-            <a:spLocks xmlns:a="http://schemas.openxmlformats.org/drawingml/2006/main" noGrp="1"/>
-          </p:cNvSpPr>
-          <p:nvPr>
-            <p:ph type="sldNum" idx="5"/>
-          </p:nvPr>
-        </p:nvSpPr>
-        <p:spPr/>
-        <p:txBody>
-          <a:bodyPr xmlns:a="http://schemas.openxmlformats.org/drawingml/2006/main"/>
-          <a:lstStyle xmlns:a="http://schemas.openxmlformats.org/drawingml/2006/main"/>
-          <a:p xmlns:a="http://schemas.openxmlformats.org/drawingml/2006/main"/>
-        </p:txBody>
-      </p:sp>
-    </p:spTree>
-  </p:cSld>
-  <p:clrMapOvr>
-    <a:masterClrMapping xmlns:a="http://schemas.openxmlformats.org/drawingml/2006/main"/>
-  </p:clrMapOvr>
-</p:notes>
-</file>
-
-<file path=ppt/notesSlides/notesSlide13.xml><?xml version="1.0" encoding="utf-8"?>
-<p:notes xmlns:p="http://schemas.openxmlformats.org/presentationml/2006/main">
-  <p:cSld>
-    <p:spTree>
-      <p:nvGrpSpPr>
-        <p:cNvPr id="1" name=""/>
-        <p:cNvGrpSpPr/>
-        <p:nvPr/>
-      </p:nvGrpSpPr>
-      <p:grpSpPr>
-        <a:xfrm xmlns:a="http://schemas.openxmlformats.org/drawingml/2006/main"/>
-      </p:grpSpPr>
-      <p:sp>
-        <p:nvSpPr>
-          <p:cNvPr id="2" name="Slide Image Placeholder 1"/>
-          <p:cNvSpPr>
-            <a:spLocks xmlns:a="http://schemas.openxmlformats.org/drawingml/2006/main" noGrp="1"/>
-          </p:cNvSpPr>
-          <p:nvPr>
-            <p:ph type="sldImg" idx="0"/>
-          </p:nvPr>
-        </p:nvSpPr>
-        <p:spPr/>
-      </p:sp>
-      <p:sp>
-        <p:nvSpPr>
-          <p:cNvPr id="3" name="Notes Placeholder 2"/>
-          <p:cNvSpPr>
-            <a:spLocks xmlns:a="http://schemas.openxmlformats.org/drawingml/2006/main" noGrp="1"/>
-          </p:cNvSpPr>
-          <p:nvPr>
-            <p:ph type="body" idx="1"/>
-          </p:nvPr>
-        </p:nvSpPr>
-        <p:spPr/>
-        <p:txBody>
-          <a:bodyPr xmlns:a="http://schemas.openxmlformats.org/drawingml/2006/main"/>
-          <a:lstStyle xmlns:a="http://schemas.openxmlformats.org/drawingml/2006/main"/>
-          <a:p xmlns:a="http://schemas.openxmlformats.org/drawingml/2006/main">
-            <a:r>
-              <a:t>這頁幫學生建立 GUI 與 CLI 的定位。GUI 不是不能用，但課程要培養能在伺服器與 CI/CD 中工作的能力。</a:t>
-            </a:r>
-          </a:p>
-        </p:txBody>
-      </p:sp>
-      <p:sp>
-        <p:nvSpPr>
-          <p:cNvPr id="4" name="Slide Number Placeholder 3"/>
-          <p:cNvSpPr>
-            <a:spLocks xmlns:a="http://schemas.openxmlformats.org/drawingml/2006/main" noGrp="1"/>
-          </p:cNvSpPr>
-          <p:nvPr>
-            <p:ph type="sldNum" idx="5"/>
-          </p:nvPr>
-        </p:nvSpPr>
-        <p:spPr/>
-        <p:txBody>
-          <a:bodyPr xmlns:a="http://schemas.openxmlformats.org/drawingml/2006/main"/>
-          <a:lstStyle xmlns:a="http://schemas.openxmlformats.org/drawingml/2006/main"/>
-          <a:p xmlns:a="http://schemas.openxmlformats.org/drawingml/2006/main"/>
-        </p:txBody>
-      </p:sp>
-    </p:spTree>
-  </p:cSld>
-  <p:clrMapOvr>
-    <a:masterClrMapping xmlns:a="http://schemas.openxmlformats.org/drawingml/2006/main"/>
-  </p:clrMapOvr>
-</p:notes>
-</file>
-
-<file path=ppt/notesSlides/notesSlide14.xml><?xml version="1.0" encoding="utf-8"?>
-<p:notes xmlns:p="http://schemas.openxmlformats.org/presentationml/2006/main">
-  <p:cSld>
-    <p:spTree>
-      <p:nvGrpSpPr>
-        <p:cNvPr id="1" name=""/>
-        <p:cNvGrpSpPr/>
-        <p:nvPr/>
-      </p:nvGrpSpPr>
-      <p:grpSpPr>
-        <a:xfrm xmlns:a="http://schemas.openxmlformats.org/drawingml/2006/main"/>
-      </p:grpSpPr>
-      <p:sp>
-        <p:nvSpPr>
-          <p:cNvPr id="2" name="Slide Image Placeholder 1"/>
-          <p:cNvSpPr>
-            <a:spLocks xmlns:a="http://schemas.openxmlformats.org/drawingml/2006/main" noGrp="1"/>
-          </p:cNvSpPr>
-          <p:nvPr>
-            <p:ph type="sldImg" idx="0"/>
-          </p:nvPr>
-        </p:nvSpPr>
-        <p:spPr/>
-      </p:sp>
-      <p:sp>
-        <p:nvSpPr>
-          <p:cNvPr id="3" name="Notes Placeholder 2"/>
-          <p:cNvSpPr>
-            <a:spLocks xmlns:a="http://schemas.openxmlformats.org/drawingml/2006/main" noGrp="1"/>
-          </p:cNvSpPr>
-          <p:nvPr>
-            <p:ph type="body" idx="1"/>
-          </p:nvPr>
-        </p:nvSpPr>
-        <p:spPr/>
-        <p:txBody>
-          <a:bodyPr xmlns:a="http://schemas.openxmlformats.org/drawingml/2006/main"/>
-          <a:lstStyle xmlns:a="http://schemas.openxmlformats.org/drawingml/2006/main"/>
-          <a:p xmlns:a="http://schemas.openxmlformats.org/drawingml/2006/main">
-            <a:r>
-              <a:t>hello-world 是第一個完整 Docker 流程，雖然看起來簡單，但已經包含 pull、create、start、stop。</a:t>
-            </a:r>
-          </a:p>
-        </p:txBody>
-      </p:sp>
-      <p:sp>
-        <p:nvSpPr>
-          <p:cNvPr id="4" name="Slide Number Placeholder 3"/>
-          <p:cNvSpPr>
-            <a:spLocks xmlns:a="http://schemas.openxmlformats.org/drawingml/2006/main" noGrp="1"/>
-          </p:cNvSpPr>
-          <p:nvPr>
-            <p:ph type="sldNum" idx="5"/>
-          </p:nvPr>
-        </p:nvSpPr>
-        <p:spPr/>
-        <p:txBody>
-          <a:bodyPr xmlns:a="http://schemas.openxmlformats.org/drawingml/2006/main"/>
-          <a:lstStyle xmlns:a="http://schemas.openxmlformats.org/drawingml/2006/main"/>
-          <a:p xmlns:a="http://schemas.openxmlformats.org/drawingml/2006/main"/>
-        </p:txBody>
-      </p:sp>
-    </p:spTree>
-  </p:cSld>
-  <p:clrMapOvr>
-    <a:masterClrMapping xmlns:a="http://schemas.openxmlformats.org/drawingml/2006/main"/>
-  </p:clrMapOvr>
-</p:notes>
-</file>
-
-<file path=ppt/notesSlides/notesSlide15.xml><?xml version="1.0" encoding="utf-8"?>
-<p:notes xmlns:p="http://schemas.openxmlformats.org/presentationml/2006/main">
-  <p:cSld>
-    <p:spTree>
-      <p:nvGrpSpPr>
-        <p:cNvPr id="1" name=""/>
-        <p:cNvGrpSpPr/>
-        <p:nvPr/>
-      </p:nvGrpSpPr>
-      <p:grpSpPr>
-        <a:xfrm xmlns:a="http://schemas.openxmlformats.org/drawingml/2006/main"/>
-      </p:grpSpPr>
-      <p:sp>
-        <p:nvSpPr>
-          <p:cNvPr id="2" name="Slide Image Placeholder 1"/>
-          <p:cNvSpPr>
-            <a:spLocks xmlns:a="http://schemas.openxmlformats.org/drawingml/2006/main" noGrp="1"/>
-          </p:cNvSpPr>
-          <p:nvPr>
-            <p:ph type="sldImg" idx="0"/>
-          </p:nvPr>
-        </p:nvSpPr>
-        <p:spPr/>
-      </p:sp>
-      <p:sp>
-        <p:nvSpPr>
-          <p:cNvPr id="3" name="Notes Placeholder 2"/>
-          <p:cNvSpPr>
-            <a:spLocks xmlns:a="http://schemas.openxmlformats.org/drawingml/2006/main" noGrp="1"/>
-          </p:cNvSpPr>
-          <p:nvPr>
-            <p:ph type="body" idx="1"/>
-          </p:nvPr>
-        </p:nvSpPr>
-        <p:spPr/>
-        <p:txBody>
-          <a:bodyPr xmlns:a="http://schemas.openxmlformats.org/drawingml/2006/main"/>
-          <a:lstStyle xmlns:a="http://schemas.openxmlformats.org/drawingml/2006/main"/>
-          <a:p xmlns:a="http://schemas.openxmlformats.org/drawingml/2006/main">
-            <a:r>
-              <a:t>這頁先鋪陳後面 Dockerfile 的 build cache。今天只需要學生理解 Image 不是一個大檔案，而是分層。</a:t>
-            </a:r>
-          </a:p>
-        </p:txBody>
-      </p:sp>
-      <p:sp>
-        <p:nvSpPr>
-          <p:cNvPr id="4" name="Slide Number Placeholder 3"/>
-          <p:cNvSpPr>
-            <a:spLocks xmlns:a="http://schemas.openxmlformats.org/drawingml/2006/main" noGrp="1"/>
-          </p:cNvSpPr>
-          <p:nvPr>
-            <p:ph type="sldNum" idx="5"/>
-          </p:nvPr>
-        </p:nvSpPr>
-        <p:spPr/>
-        <p:txBody>
-          <a:bodyPr xmlns:a="http://schemas.openxmlformats.org/drawingml/2006/main"/>
-          <a:lstStyle xmlns:a="http://schemas.openxmlformats.org/drawingml/2006/main"/>
-          <a:p xmlns:a="http://schemas.openxmlformats.org/drawingml/2006/main"/>
-        </p:txBody>
-      </p:sp>
-    </p:spTree>
-  </p:cSld>
-  <p:clrMapOvr>
-    <a:masterClrMapping xmlns:a="http://schemas.openxmlformats.org/drawingml/2006/main"/>
-  </p:clrMapOvr>
-</p:notes>
-</file>
-
-<file path=ppt/notesSlides/notesSlide16.xml><?xml version="1.0" encoding="utf-8"?>
-<p:notes xmlns:p="http://schemas.openxmlformats.org/presentationml/2006/main">
-  <p:cSld>
-    <p:spTree>
-      <p:nvGrpSpPr>
-        <p:cNvPr id="1" name=""/>
-        <p:cNvGrpSpPr/>
-        <p:nvPr/>
-      </p:nvGrpSpPr>
-      <p:grpSpPr>
-        <a:xfrm xmlns:a="http://schemas.openxmlformats.org/drawingml/2006/main"/>
-      </p:grpSpPr>
-      <p:sp>
-        <p:nvSpPr>
-          <p:cNvPr id="2" name="Slide Image Placeholder 1"/>
-          <p:cNvSpPr>
-            <a:spLocks xmlns:a="http://schemas.openxmlformats.org/drawingml/2006/main" noGrp="1"/>
-          </p:cNvSpPr>
-          <p:nvPr>
-            <p:ph type="sldImg" idx="0"/>
-          </p:nvPr>
-        </p:nvSpPr>
-        <p:spPr/>
-      </p:sp>
-      <p:sp>
-        <p:nvSpPr>
-          <p:cNvPr id="3" name="Notes Placeholder 2"/>
-          <p:cNvSpPr>
-            <a:spLocks xmlns:a="http://schemas.openxmlformats.org/drawingml/2006/main" noGrp="1"/>
-          </p:cNvSpPr>
-          <p:nvPr>
-            <p:ph type="body" idx="1"/>
-          </p:nvPr>
-        </p:nvSpPr>
-        <p:spPr/>
-        <p:txBody>
-          <a:bodyPr xmlns:a="http://schemas.openxmlformats.org/drawingml/2006/main"/>
-          <a:lstStyle xmlns:a="http://schemas.openxmlformats.org/drawingml/2006/main"/>
-          <a:p xmlns:a="http://schemas.openxmlformats.org/drawingml/2006/main">
-            <a:r>
-              <a:t>這頁重點是養成查 Docker Hub 官方文件的習慣。不同 Image 的環境變數、路徑、啟動方式都不一樣。</a:t>
-            </a:r>
-          </a:p>
-        </p:txBody>
-      </p:sp>
-      <p:sp>
-        <p:nvSpPr>
-          <p:cNvPr id="4" name="Slide Number Placeholder 3"/>
-          <p:cNvSpPr>
-            <a:spLocks xmlns:a="http://schemas.openxmlformats.org/drawingml/2006/main" noGrp="1"/>
-          </p:cNvSpPr>
-          <p:nvPr>
-            <p:ph type="sldNum" idx="5"/>
-          </p:nvPr>
-        </p:nvSpPr>
-        <p:spPr/>
-        <p:txBody>
-          <a:bodyPr xmlns:a="http://schemas.openxmlformats.org/drawingml/2006/main"/>
-          <a:lstStyle xmlns:a="http://schemas.openxmlformats.org/drawingml/2006/main"/>
-          <a:p xmlns:a="http://schemas.openxmlformats.org/drawingml/2006/main"/>
-        </p:txBody>
-      </p:sp>
-    </p:spTree>
-  </p:cSld>
-  <p:clrMapOvr>
-    <a:masterClrMapping xmlns:a="http://schemas.openxmlformats.org/drawingml/2006/main"/>
-  </p:clrMapOvr>
-</p:notes>
-</file>
-
-<file path=ppt/notesSlides/notesSlide17.xml><?xml version="1.0" encoding="utf-8"?>
-<p:notes xmlns:p="http://schemas.openxmlformats.org/presentationml/2006/main">
-  <p:cSld>
-    <p:spTree>
-      <p:nvGrpSpPr>
-        <p:cNvPr id="1" name=""/>
-        <p:cNvGrpSpPr/>
-        <p:nvPr/>
-      </p:nvGrpSpPr>
-      <p:grpSpPr>
-        <a:xfrm xmlns:a="http://schemas.openxmlformats.org/drawingml/2006/main"/>
-      </p:grpSpPr>
-      <p:sp>
-        <p:nvSpPr>
-          <p:cNvPr id="2" name="Slide Image Placeholder 1"/>
-          <p:cNvSpPr>
-            <a:spLocks xmlns:a="http://schemas.openxmlformats.org/drawingml/2006/main" noGrp="1"/>
-          </p:cNvSpPr>
-          <p:nvPr>
-            <p:ph type="sldImg" idx="0"/>
-          </p:nvPr>
-        </p:nvSpPr>
-        <p:spPr/>
-      </p:sp>
-      <p:sp>
-        <p:nvSpPr>
-          <p:cNvPr id="3" name="Notes Placeholder 2"/>
-          <p:cNvSpPr>
-            <a:spLocks xmlns:a="http://schemas.openxmlformats.org/drawingml/2006/main" noGrp="1"/>
-          </p:cNvSpPr>
-          <p:nvPr>
-            <p:ph type="body" idx="1"/>
-          </p:nvPr>
-        </p:nvSpPr>
-        <p:spPr/>
-        <p:txBody>
-          <a:bodyPr xmlns:a="http://schemas.openxmlformats.org/drawingml/2006/main"/>
-          <a:lstStyle xmlns:a="http://schemas.openxmlformats.org/drawingml/2006/main"/>
-          <a:p xmlns:a="http://schemas.openxmlformats.org/drawingml/2006/main">
-            <a:r>
-              <a:t>提醒 rmi 會失敗的常見原因：還有 container 使用該 Image，不管 container 是執行中或停止狀態。</a:t>
-            </a:r>
-          </a:p>
-        </p:txBody>
-      </p:sp>
-      <p:sp>
-        <p:nvSpPr>
-          <p:cNvPr id="4" name="Slide Number Placeholder 3"/>
-          <p:cNvSpPr>
-            <a:spLocks xmlns:a="http://schemas.openxmlformats.org/drawingml/2006/main" noGrp="1"/>
-          </p:cNvSpPr>
-          <p:nvPr>
-            <p:ph type="sldNum" idx="5"/>
-          </p:nvPr>
-        </p:nvSpPr>
-        <p:spPr/>
-        <p:txBody>
-          <a:bodyPr xmlns:a="http://schemas.openxmlformats.org/drawingml/2006/main"/>
-          <a:lstStyle xmlns:a="http://schemas.openxmlformats.org/drawingml/2006/main"/>
-          <a:p xmlns:a="http://schemas.openxmlformats.org/drawingml/2006/main"/>
-        </p:txBody>
-      </p:sp>
-    </p:spTree>
-  </p:cSld>
-  <p:clrMapOvr>
-    <a:masterClrMapping xmlns:a="http://schemas.openxmlformats.org/drawingml/2006/main"/>
-  </p:clrMapOvr>
-</p:notes>
-</file>
-
-<file path=ppt/notesSlides/notesSlide18.xml><?xml version="1.0" encoding="utf-8"?>
-<p:notes xmlns:p="http://schemas.openxmlformats.org/presentationml/2006/main">
-  <p:cSld>
-    <p:spTree>
-      <p:nvGrpSpPr>
-        <p:cNvPr id="1" name=""/>
-        <p:cNvGrpSpPr/>
-        <p:nvPr/>
-      </p:nvGrpSpPr>
-      <p:grpSpPr>
-        <a:xfrm xmlns:a="http://schemas.openxmlformats.org/drawingml/2006/main"/>
-      </p:grpSpPr>
-      <p:sp>
-        <p:nvSpPr>
-          <p:cNvPr id="2" name="Slide Image Placeholder 1"/>
-          <p:cNvSpPr>
-            <a:spLocks xmlns:a="http://schemas.openxmlformats.org/drawingml/2006/main" noGrp="1"/>
-          </p:cNvSpPr>
-          <p:nvPr>
-            <p:ph type="sldImg" idx="0"/>
-          </p:nvPr>
-        </p:nvSpPr>
-        <p:spPr/>
-      </p:sp>
-      <p:sp>
-        <p:nvSpPr>
-          <p:cNvPr id="3" name="Notes Placeholder 2"/>
-          <p:cNvSpPr>
-            <a:spLocks xmlns:a="http://schemas.openxmlformats.org/drawingml/2006/main" noGrp="1"/>
-          </p:cNvSpPr>
-          <p:nvPr>
-            <p:ph type="body" idx="1"/>
-          </p:nvPr>
-        </p:nvSpPr>
-        <p:spPr/>
-        <p:txBody>
-          <a:bodyPr xmlns:a="http://schemas.openxmlformats.org/drawingml/2006/main"/>
-          <a:lstStyle xmlns:a="http://schemas.openxmlformats.org/drawingml/2006/main"/>
-          <a:p xmlns:a="http://schemas.openxmlformats.org/drawingml/2006/main">
-            <a:r>
-              <a:t>練習題來自 exercises.md 第 1 堂實作題 P1。</a:t>
-            </a:r>
-          </a:p>
-        </p:txBody>
-      </p:sp>
-      <p:sp>
-        <p:nvSpPr>
-          <p:cNvPr id="4" name="Slide Number Placeholder 3"/>
-          <p:cNvSpPr>
-            <a:spLocks xmlns:a="http://schemas.openxmlformats.org/drawingml/2006/main" noGrp="1"/>
-          </p:cNvSpPr>
-          <p:nvPr>
-            <p:ph type="sldNum" idx="5"/>
-          </p:nvPr>
-        </p:nvSpPr>
-        <p:spPr/>
-        <p:txBody>
-          <a:bodyPr xmlns:a="http://schemas.openxmlformats.org/drawingml/2006/main"/>
-          <a:lstStyle xmlns:a="http://schemas.openxmlformats.org/drawingml/2006/main"/>
-          <a:p xmlns:a="http://schemas.openxmlformats.org/drawingml/2006/main"/>
-        </p:txBody>
-      </p:sp>
-    </p:spTree>
-  </p:cSld>
-  <p:clrMapOvr>
-    <a:masterClrMapping xmlns:a="http://schemas.openxmlformats.org/drawingml/2006/main"/>
-  </p:clrMapOvr>
-</p:notes>
-</file>
-
-<file path=ppt/notesSlides/notesSlide19.xml><?xml version="1.0" encoding="utf-8"?>
-<p:notes xmlns:p="http://schemas.openxmlformats.org/presentationml/2006/main">
-  <p:cSld>
-    <p:spTree>
-      <p:nvGrpSpPr>
-        <p:cNvPr id="1" name=""/>
-        <p:cNvGrpSpPr/>
-        <p:nvPr/>
-      </p:nvGrpSpPr>
-      <p:grpSpPr>
-        <a:xfrm xmlns:a="http://schemas.openxmlformats.org/drawingml/2006/main"/>
-      </p:grpSpPr>
-      <p:sp>
-        <p:nvSpPr>
-          <p:cNvPr id="2" name="Slide Image Placeholder 1"/>
-          <p:cNvSpPr>
-            <a:spLocks xmlns:a="http://schemas.openxmlformats.org/drawingml/2006/main" noGrp="1"/>
-          </p:cNvSpPr>
-          <p:nvPr>
-            <p:ph type="sldImg" idx="0"/>
-          </p:nvPr>
-        </p:nvSpPr>
-        <p:spPr/>
-      </p:sp>
-      <p:sp>
-        <p:nvSpPr>
-          <p:cNvPr id="3" name="Notes Placeholder 2"/>
-          <p:cNvSpPr>
-            <a:spLocks xmlns:a="http://schemas.openxmlformats.org/drawingml/2006/main" noGrp="1"/>
-          </p:cNvSpPr>
-          <p:nvPr>
-            <p:ph type="body" idx="1"/>
-          </p:nvPr>
-        </p:nvSpPr>
-        <p:spPr/>
-        <p:txBody>
-          <a:bodyPr xmlns:a="http://schemas.openxmlformats.org/drawingml/2006/main"/>
-          <a:lstStyle xmlns:a="http://schemas.openxmlformats.org/drawingml/2006/main"/>
-          <a:p xmlns:a="http://schemas.openxmlformats.org/drawingml/2006/main">
-            <a:r>
-              <a:t>不要花太多時間講 Nginx 歷史，重點是它在正式上線架構中常站在後端應用前面。</a:t>
-            </a:r>
-          </a:p>
-        </p:txBody>
-      </p:sp>
-      <p:sp>
-        <p:nvSpPr>
-          <p:cNvPr id="4" name="Slide Number Placeholder 3"/>
-          <p:cNvSpPr>
-            <a:spLocks xmlns:a="http://schemas.openxmlformats.org/drawingml/2006/main" noGrp="1"/>
-          </p:cNvSpPr>
-          <p:nvPr>
-            <p:ph type="sldNum" idx="5"/>
-          </p:nvPr>
-        </p:nvSpPr>
-        <p:spPr/>
-        <p:txBody>
-          <a:bodyPr xmlns:a="http://schemas.openxmlformats.org/drawingml/2006/main"/>
-          <a:lstStyle xmlns:a="http://schemas.openxmlformats.org/drawingml/2006/main"/>
-          <a:p xmlns:a="http://schemas.openxmlformats.org/drawingml/2006/main"/>
-        </p:txBody>
-      </p:sp>
-    </p:spTree>
-  </p:cSld>
-  <p:clrMapOvr>
-    <a:masterClrMapping xmlns:a="http://schemas.openxmlformats.org/drawingml/2006/main"/>
-  </p:clrMapOvr>
-</p:notes>
-</file>
-
-<file path=ppt/notesSlides/notesSlide2.xml><?xml version="1.0" encoding="utf-8"?>
-<p:notes xmlns:p="http://schemas.openxmlformats.org/presentationml/2006/main">
-  <p:cSld>
-    <p:spTree>
-      <p:nvGrpSpPr>
-        <p:cNvPr id="1" name=""/>
-        <p:cNvGrpSpPr/>
-        <p:nvPr/>
-      </p:nvGrpSpPr>
-      <p:grpSpPr>
-        <a:xfrm xmlns:a="http://schemas.openxmlformats.org/drawingml/2006/main"/>
-      </p:grpSpPr>
-      <p:sp>
-        <p:nvSpPr>
-          <p:cNvPr id="2" name="Slide Image Placeholder 1"/>
-          <p:cNvSpPr>
-            <a:spLocks xmlns:a="http://schemas.openxmlformats.org/drawingml/2006/main" noGrp="1"/>
-          </p:cNvSpPr>
-          <p:nvPr>
-            <p:ph type="sldImg" idx="0"/>
-          </p:nvPr>
-        </p:nvSpPr>
-        <p:spPr/>
-      </p:sp>
-      <p:sp>
-        <p:nvSpPr>
-          <p:cNvPr id="3" name="Notes Placeholder 2"/>
-          <p:cNvSpPr>
-            <a:spLocks xmlns:a="http://schemas.openxmlformats.org/drawingml/2006/main" noGrp="1"/>
-          </p:cNvSpPr>
-          <p:nvPr>
-            <p:ph type="body" idx="1"/>
-          </p:nvPr>
-        </p:nvSpPr>
-        <p:spPr/>
-        <p:txBody>
-          <a:bodyPr xmlns:a="http://schemas.openxmlformats.org/drawingml/2006/main"/>
-          <a:lstStyle xmlns:a="http://schemas.openxmlformats.org/drawingml/2006/main"/>
-          <a:p xmlns:a="http://schemas.openxmlformats.org/drawingml/2006/main">
-            <a:r>
-              <a:t>讓學生知道節奏：先概念、再安裝、最後跑 Nginx。每一段都應該搭配現場操作或檢查。</a:t>
-            </a:r>
-          </a:p>
-        </p:txBody>
-      </p:sp>
-      <p:sp>
-        <p:nvSpPr>
-          <p:cNvPr id="4" name="Slide Number Placeholder 3"/>
-          <p:cNvSpPr>
-            <a:spLocks xmlns:a="http://schemas.openxmlformats.org/drawingml/2006/main" noGrp="1"/>
-          </p:cNvSpPr>
-          <p:nvPr>
-            <p:ph type="sldNum" idx="5"/>
-          </p:nvPr>
-        </p:nvSpPr>
-        <p:spPr/>
-        <p:txBody>
-          <a:bodyPr xmlns:a="http://schemas.openxmlformats.org/drawingml/2006/main"/>
-          <a:lstStyle xmlns:a="http://schemas.openxmlformats.org/drawingml/2006/main"/>
-          <a:p xmlns:a="http://schemas.openxmlformats.org/drawingml/2006/main"/>
-        </p:txBody>
-      </p:sp>
-    </p:spTree>
-  </p:cSld>
-  <p:clrMapOvr>
-    <a:masterClrMapping xmlns:a="http://schemas.openxmlformats.org/drawingml/2006/main"/>
-  </p:clrMapOvr>
-</p:notes>
-</file>
-
-<file path=ppt/notesSlides/notesSlide20.xml><?xml version="1.0" encoding="utf-8"?>
-<p:notes xmlns:p="http://schemas.openxmlformats.org/presentationml/2006/main">
-  <p:cSld>
-    <p:spTree>
-      <p:nvGrpSpPr>
-        <p:cNvPr id="1" name=""/>
-        <p:cNvGrpSpPr/>
-        <p:nvPr/>
-      </p:nvGrpSpPr>
-      <p:grpSpPr>
-        <a:xfrm xmlns:a="http://schemas.openxmlformats.org/drawingml/2006/main"/>
-      </p:grpSpPr>
-      <p:sp>
-        <p:nvSpPr>
-          <p:cNvPr id="2" name="Slide Image Placeholder 1"/>
-          <p:cNvSpPr>
-            <a:spLocks xmlns:a="http://schemas.openxmlformats.org/drawingml/2006/main" noGrp="1"/>
-          </p:cNvSpPr>
-          <p:nvPr>
-            <p:ph type="sldImg" idx="0"/>
-          </p:nvPr>
-        </p:nvSpPr>
-        <p:spPr/>
-      </p:sp>
-      <p:sp>
-        <p:nvSpPr>
-          <p:cNvPr id="3" name="Notes Placeholder 2"/>
-          <p:cNvSpPr>
-            <a:spLocks xmlns:a="http://schemas.openxmlformats.org/drawingml/2006/main" noGrp="1"/>
-          </p:cNvSpPr>
-          <p:nvPr>
-            <p:ph type="body" idx="1"/>
-          </p:nvPr>
-        </p:nvSpPr>
-        <p:spPr/>
-        <p:txBody>
-          <a:bodyPr xmlns:a="http://schemas.openxmlformats.org/drawingml/2006/main"/>
-          <a:lstStyle xmlns:a="http://schemas.openxmlformats.org/drawingml/2006/main"/>
-          <a:p xmlns:a="http://schemas.openxmlformats.org/drawingml/2006/main">
-            <a:r>
-              <a:t>這頁是防止初學者誤解 localhost。正式上線還需要網域、憑證、部署和長時間運行的伺服器。</a:t>
-            </a:r>
-          </a:p>
-        </p:txBody>
-      </p:sp>
-      <p:sp>
-        <p:nvSpPr>
-          <p:cNvPr id="4" name="Slide Number Placeholder 3"/>
-          <p:cNvSpPr>
-            <a:spLocks xmlns:a="http://schemas.openxmlformats.org/drawingml/2006/main" noGrp="1"/>
-          </p:cNvSpPr>
-          <p:nvPr>
-            <p:ph type="sldNum" idx="5"/>
-          </p:nvPr>
-        </p:nvSpPr>
-        <p:spPr/>
-        <p:txBody>
-          <a:bodyPr xmlns:a="http://schemas.openxmlformats.org/drawingml/2006/main"/>
-          <a:lstStyle xmlns:a="http://schemas.openxmlformats.org/drawingml/2006/main"/>
-          <a:p xmlns:a="http://schemas.openxmlformats.org/drawingml/2006/main"/>
-        </p:txBody>
-      </p:sp>
-    </p:spTree>
-  </p:cSld>
-  <p:clrMapOvr>
-    <a:masterClrMapping xmlns:a="http://schemas.openxmlformats.org/drawingml/2006/main"/>
-  </p:clrMapOvr>
-</p:notes>
-</file>
-
-<file path=ppt/notesSlides/notesSlide21.xml><?xml version="1.0" encoding="utf-8"?>
-<p:notes xmlns:p="http://schemas.openxmlformats.org/presentationml/2006/main">
-  <p:cSld>
-    <p:spTree>
-      <p:nvGrpSpPr>
-        <p:cNvPr id="1" name=""/>
-        <p:cNvGrpSpPr/>
-        <p:nvPr/>
-      </p:nvGrpSpPr>
-      <p:grpSpPr>
-        <a:xfrm xmlns:a="http://schemas.openxmlformats.org/drawingml/2006/main"/>
-      </p:grpSpPr>
-      <p:sp>
-        <p:nvSpPr>
-          <p:cNvPr id="2" name="Slide Image Placeholder 1"/>
-          <p:cNvSpPr>
-            <a:spLocks xmlns:a="http://schemas.openxmlformats.org/drawingml/2006/main" noGrp="1"/>
-          </p:cNvSpPr>
-          <p:nvPr>
-            <p:ph type="sldImg" idx="0"/>
-          </p:nvPr>
-        </p:nvSpPr>
-        <p:spPr/>
-      </p:sp>
-      <p:sp>
-        <p:nvSpPr>
-          <p:cNvPr id="3" name="Notes Placeholder 2"/>
-          <p:cNvSpPr>
-            <a:spLocks xmlns:a="http://schemas.openxmlformats.org/drawingml/2006/main" noGrp="1"/>
-          </p:cNvSpPr>
-          <p:nvPr>
-            <p:ph type="body" idx="1"/>
-          </p:nvPr>
-        </p:nvSpPr>
-        <p:spPr/>
-        <p:txBody>
-          <a:bodyPr xmlns:a="http://schemas.openxmlformats.org/drawingml/2006/main"/>
-          <a:lstStyle xmlns:a="http://schemas.openxmlformats.org/drawingml/2006/main"/>
-          <a:p xmlns:a="http://schemas.openxmlformats.org/drawingml/2006/main">
-            <a:r>
-              <a:t>強調 -p 和 -v 都是主機:容器。Windows 路徑使用 -v 時要用雙引號，這在後續 Volume 會很重要。</a:t>
-            </a:r>
-          </a:p>
-        </p:txBody>
-      </p:sp>
-      <p:sp>
-        <p:nvSpPr>
-          <p:cNvPr id="4" name="Slide Number Placeholder 3"/>
-          <p:cNvSpPr>
-            <a:spLocks xmlns:a="http://schemas.openxmlformats.org/drawingml/2006/main" noGrp="1"/>
-          </p:cNvSpPr>
-          <p:nvPr>
-            <p:ph type="sldNum" idx="5"/>
-          </p:nvPr>
-        </p:nvSpPr>
-        <p:spPr/>
-        <p:txBody>
-          <a:bodyPr xmlns:a="http://schemas.openxmlformats.org/drawingml/2006/main"/>
-          <a:lstStyle xmlns:a="http://schemas.openxmlformats.org/drawingml/2006/main"/>
-          <a:p xmlns:a="http://schemas.openxmlformats.org/drawingml/2006/main"/>
-        </p:txBody>
-      </p:sp>
-    </p:spTree>
-  </p:cSld>
-  <p:clrMapOvr>
-    <a:masterClrMapping xmlns:a="http://schemas.openxmlformats.org/drawingml/2006/main"/>
-  </p:clrMapOvr>
-</p:notes>
-</file>
-
-<file path=ppt/notesSlides/notesSlide22.xml><?xml version="1.0" encoding="utf-8"?>
-<p:notes xmlns:p="http://schemas.openxmlformats.org/presentationml/2006/main">
-  <p:cSld>
-    <p:spTree>
-      <p:nvGrpSpPr>
-        <p:cNvPr id="1" name=""/>
-        <p:cNvGrpSpPr/>
-        <p:nvPr/>
-      </p:nvGrpSpPr>
-      <p:grpSpPr>
-        <a:xfrm xmlns:a="http://schemas.openxmlformats.org/drawingml/2006/main"/>
-      </p:grpSpPr>
-      <p:sp>
-        <p:nvSpPr>
-          <p:cNvPr id="2" name="Slide Image Placeholder 1"/>
-          <p:cNvSpPr>
-            <a:spLocks xmlns:a="http://schemas.openxmlformats.org/drawingml/2006/main" noGrp="1"/>
-          </p:cNvSpPr>
-          <p:nvPr>
-            <p:ph type="sldImg" idx="0"/>
-          </p:nvPr>
-        </p:nvSpPr>
-        <p:spPr/>
-      </p:sp>
-      <p:sp>
-        <p:nvSpPr>
-          <p:cNvPr id="3" name="Notes Placeholder 2"/>
-          <p:cNvSpPr>
-            <a:spLocks xmlns:a="http://schemas.openxmlformats.org/drawingml/2006/main" noGrp="1"/>
-          </p:cNvSpPr>
-          <p:nvPr>
-            <p:ph type="body" idx="1"/>
-          </p:nvPr>
-        </p:nvSpPr>
-        <p:spPr/>
-        <p:txBody>
-          <a:bodyPr xmlns:a="http://schemas.openxmlformats.org/drawingml/2006/main"/>
-          <a:lstStyle xmlns:a="http://schemas.openxmlformats.org/drawingml/2006/main"/>
-          <a:p xmlns:a="http://schemas.openxmlformats.org/drawingml/2006/main">
-            <a:r>
-              <a:t>這頁建議現場直接執行。先讓學生理解每個參數，再貼上完整指令。</a:t>
-            </a:r>
-          </a:p>
-        </p:txBody>
-      </p:sp>
-      <p:sp>
-        <p:nvSpPr>
-          <p:cNvPr id="4" name="Slide Number Placeholder 3"/>
-          <p:cNvSpPr>
-            <a:spLocks xmlns:a="http://schemas.openxmlformats.org/drawingml/2006/main" noGrp="1"/>
-          </p:cNvSpPr>
-          <p:nvPr>
-            <p:ph type="sldNum" idx="5"/>
-          </p:nvPr>
-        </p:nvSpPr>
-        <p:spPr/>
-        <p:txBody>
-          <a:bodyPr xmlns:a="http://schemas.openxmlformats.org/drawingml/2006/main"/>
-          <a:lstStyle xmlns:a="http://schemas.openxmlformats.org/drawingml/2006/main"/>
-          <a:p xmlns:a="http://schemas.openxmlformats.org/drawingml/2006/main"/>
-        </p:txBody>
-      </p:sp>
-    </p:spTree>
-  </p:cSld>
-  <p:clrMapOvr>
-    <a:masterClrMapping xmlns:a="http://schemas.openxmlformats.org/drawingml/2006/main"/>
-  </p:clrMapOvr>
-</p:notes>
-</file>
-
-<file path=ppt/notesSlides/notesSlide23.xml><?xml version="1.0" encoding="utf-8"?>
-<p:notes xmlns:p="http://schemas.openxmlformats.org/presentationml/2006/main">
-  <p:cSld>
-    <p:spTree>
-      <p:nvGrpSpPr>
-        <p:cNvPr id="1" name=""/>
-        <p:cNvGrpSpPr/>
-        <p:nvPr/>
-      </p:nvGrpSpPr>
-      <p:grpSpPr>
-        <a:xfrm xmlns:a="http://schemas.openxmlformats.org/drawingml/2006/main"/>
-      </p:grpSpPr>
-      <p:sp>
-        <p:nvSpPr>
-          <p:cNvPr id="2" name="Slide Image Placeholder 1"/>
-          <p:cNvSpPr>
-            <a:spLocks xmlns:a="http://schemas.openxmlformats.org/drawingml/2006/main" noGrp="1"/>
-          </p:cNvSpPr>
-          <p:nvPr>
-            <p:ph type="sldImg" idx="0"/>
-          </p:nvPr>
-        </p:nvSpPr>
-        <p:spPr/>
-      </p:sp>
-      <p:sp>
-        <p:nvSpPr>
-          <p:cNvPr id="3" name="Notes Placeholder 2"/>
-          <p:cNvSpPr>
-            <a:spLocks xmlns:a="http://schemas.openxmlformats.org/drawingml/2006/main" noGrp="1"/>
-          </p:cNvSpPr>
-          <p:nvPr>
-            <p:ph type="body" idx="1"/>
-          </p:nvPr>
-        </p:nvSpPr>
-        <p:spPr/>
-        <p:txBody>
-          <a:bodyPr xmlns:a="http://schemas.openxmlformats.org/drawingml/2006/main"/>
-          <a:lstStyle xmlns:a="http://schemas.openxmlformats.org/drawingml/2006/main"/>
-          <a:p xmlns:a="http://schemas.openxmlformats.org/drawingml/2006/main">
-            <a:r>
-              <a:t>如果看不到頁面，優先檢查 Docker Desktop 是否正在執行、容器是否 Up、8080 port 是否被其他程式佔用。</a:t>
-            </a:r>
-          </a:p>
-        </p:txBody>
-      </p:sp>
-      <p:sp>
-        <p:nvSpPr>
-          <p:cNvPr id="4" name="Slide Number Placeholder 3"/>
-          <p:cNvSpPr>
-            <a:spLocks xmlns:a="http://schemas.openxmlformats.org/drawingml/2006/main" noGrp="1"/>
-          </p:cNvSpPr>
-          <p:nvPr>
-            <p:ph type="sldNum" idx="5"/>
-          </p:nvPr>
-        </p:nvSpPr>
-        <p:spPr/>
-        <p:txBody>
-          <a:bodyPr xmlns:a="http://schemas.openxmlformats.org/drawingml/2006/main"/>
-          <a:lstStyle xmlns:a="http://schemas.openxmlformats.org/drawingml/2006/main"/>
-          <a:p xmlns:a="http://schemas.openxmlformats.org/drawingml/2006/main"/>
-        </p:txBody>
-      </p:sp>
-    </p:spTree>
-  </p:cSld>
-  <p:clrMapOvr>
-    <a:masterClrMapping xmlns:a="http://schemas.openxmlformats.org/drawingml/2006/main"/>
-  </p:clrMapOvr>
-</p:notes>
-</file>
-
-<file path=ppt/notesSlides/notesSlide24.xml><?xml version="1.0" encoding="utf-8"?>
-<p:notes xmlns:p="http://schemas.openxmlformats.org/presentationml/2006/main">
-  <p:cSld>
-    <p:spTree>
-      <p:nvGrpSpPr>
-        <p:cNvPr id="1" name=""/>
-        <p:cNvGrpSpPr/>
-        <p:nvPr/>
-      </p:nvGrpSpPr>
-      <p:grpSpPr>
-        <a:xfrm xmlns:a="http://schemas.openxmlformats.org/drawingml/2006/main"/>
-      </p:grpSpPr>
-      <p:sp>
-        <p:nvSpPr>
-          <p:cNvPr id="2" name="Slide Image Placeholder 1"/>
-          <p:cNvSpPr>
-            <a:spLocks xmlns:a="http://schemas.openxmlformats.org/drawingml/2006/main" noGrp="1"/>
-          </p:cNvSpPr>
-          <p:nvPr>
-            <p:ph type="sldImg" idx="0"/>
-          </p:nvPr>
-        </p:nvSpPr>
-        <p:spPr/>
-      </p:sp>
-      <p:sp>
-        <p:nvSpPr>
-          <p:cNvPr id="3" name="Notes Placeholder 2"/>
-          <p:cNvSpPr>
-            <a:spLocks xmlns:a="http://schemas.openxmlformats.org/drawingml/2006/main" noGrp="1"/>
-          </p:cNvSpPr>
-          <p:nvPr>
-            <p:ph type="body" idx="1"/>
-          </p:nvPr>
-        </p:nvSpPr>
-        <p:spPr/>
-        <p:txBody>
-          <a:bodyPr xmlns:a="http://schemas.openxmlformats.org/drawingml/2006/main"/>
-          <a:lstStyle xmlns:a="http://schemas.openxmlformats.org/drawingml/2006/main"/>
-          <a:p xmlns:a="http://schemas.openxmlformats.org/drawingml/2006/main">
-            <a:r>
-              <a:t>Nginx image 使用 sh 而不是 bash。這裡讓學生知道容器可以進去看，但它的檔案系統和 Windows 是分開的。</a:t>
-            </a:r>
-          </a:p>
-        </p:txBody>
-      </p:sp>
-      <p:sp>
-        <p:nvSpPr>
-          <p:cNvPr id="4" name="Slide Number Placeholder 3"/>
-          <p:cNvSpPr>
-            <a:spLocks xmlns:a="http://schemas.openxmlformats.org/drawingml/2006/main" noGrp="1"/>
-          </p:cNvSpPr>
-          <p:nvPr>
-            <p:ph type="sldNum" idx="5"/>
-          </p:nvPr>
-        </p:nvSpPr>
-        <p:spPr/>
-        <p:txBody>
-          <a:bodyPr xmlns:a="http://schemas.openxmlformats.org/drawingml/2006/main"/>
-          <a:lstStyle xmlns:a="http://schemas.openxmlformats.org/drawingml/2006/main"/>
-          <a:p xmlns:a="http://schemas.openxmlformats.org/drawingml/2006/main"/>
-        </p:txBody>
-      </p:sp>
-    </p:spTree>
-  </p:cSld>
-  <p:clrMapOvr>
-    <a:masterClrMapping xmlns:a="http://schemas.openxmlformats.org/drawingml/2006/main"/>
-  </p:clrMapOvr>
-</p:notes>
-</file>
-
-<file path=ppt/notesSlides/notesSlide25.xml><?xml version="1.0" encoding="utf-8"?>
-<p:notes xmlns:p="http://schemas.openxmlformats.org/presentationml/2006/main">
-  <p:cSld>
-    <p:spTree>
-      <p:nvGrpSpPr>
-        <p:cNvPr id="1" name=""/>
-        <p:cNvGrpSpPr/>
-        <p:nvPr/>
-      </p:nvGrpSpPr>
-      <p:grpSpPr>
-        <a:xfrm xmlns:a="http://schemas.openxmlformats.org/drawingml/2006/main"/>
-      </p:grpSpPr>
-      <p:sp>
-        <p:nvSpPr>
-          <p:cNvPr id="2" name="Slide Image Placeholder 1"/>
-          <p:cNvSpPr>
-            <a:spLocks xmlns:a="http://schemas.openxmlformats.org/drawingml/2006/main" noGrp="1"/>
-          </p:cNvSpPr>
-          <p:nvPr>
-            <p:ph type="sldImg" idx="0"/>
-          </p:nvPr>
-        </p:nvSpPr>
-        <p:spPr/>
-      </p:sp>
-      <p:sp>
-        <p:nvSpPr>
-          <p:cNvPr id="3" name="Notes Placeholder 2"/>
-          <p:cNvSpPr>
-            <a:spLocks xmlns:a="http://schemas.openxmlformats.org/drawingml/2006/main" noGrp="1"/>
-          </p:cNvSpPr>
-          <p:nvPr>
-            <p:ph type="body" idx="1"/>
-          </p:nvPr>
-        </p:nvSpPr>
-        <p:spPr/>
-        <p:txBody>
-          <a:bodyPr xmlns:a="http://schemas.openxmlformats.org/drawingml/2006/main"/>
-          <a:lstStyle xmlns:a="http://schemas.openxmlformats.org/drawingml/2006/main"/>
-          <a:p xmlns:a="http://schemas.openxmlformats.org/drawingml/2006/main">
-            <a:r>
-              <a:t>練習題來自 exercises.md 第 1 堂實作題 P2。也對應 docker-course-examples/session-01-basics/p2-nginx-custom-page。</a:t>
-            </a:r>
-          </a:p>
-        </p:txBody>
-      </p:sp>
-      <p:sp>
-        <p:nvSpPr>
-          <p:cNvPr id="4" name="Slide Number Placeholder 3"/>
-          <p:cNvSpPr>
-            <a:spLocks xmlns:a="http://schemas.openxmlformats.org/drawingml/2006/main" noGrp="1"/>
-          </p:cNvSpPr>
-          <p:nvPr>
-            <p:ph type="sldNum" idx="5"/>
-          </p:nvPr>
-        </p:nvSpPr>
-        <p:spPr/>
-        <p:txBody>
-          <a:bodyPr xmlns:a="http://schemas.openxmlformats.org/drawingml/2006/main"/>
-          <a:lstStyle xmlns:a="http://schemas.openxmlformats.org/drawingml/2006/main"/>
-          <a:p xmlns:a="http://schemas.openxmlformats.org/drawingml/2006/main"/>
-        </p:txBody>
-      </p:sp>
-    </p:spTree>
-  </p:cSld>
-  <p:clrMapOvr>
-    <a:masterClrMapping xmlns:a="http://schemas.openxmlformats.org/drawingml/2006/main"/>
-  </p:clrMapOvr>
-</p:notes>
-</file>
-
-<file path=ppt/notesSlides/notesSlide26.xml><?xml version="1.0" encoding="utf-8"?>
-<p:notes xmlns:p="http://schemas.openxmlformats.org/presentationml/2006/main">
-  <p:cSld>
-    <p:spTree>
-      <p:nvGrpSpPr>
-        <p:cNvPr id="1" name=""/>
-        <p:cNvGrpSpPr/>
-        <p:nvPr/>
-      </p:nvGrpSpPr>
-      <p:grpSpPr>
-        <a:xfrm xmlns:a="http://schemas.openxmlformats.org/drawingml/2006/main"/>
-      </p:grpSpPr>
-      <p:sp>
-        <p:nvSpPr>
-          <p:cNvPr id="2" name="Slide Image Placeholder 1"/>
-          <p:cNvSpPr>
-            <a:spLocks xmlns:a="http://schemas.openxmlformats.org/drawingml/2006/main" noGrp="1"/>
-          </p:cNvSpPr>
-          <p:nvPr>
-            <p:ph type="sldImg" idx="0"/>
-          </p:nvPr>
-        </p:nvSpPr>
-        <p:spPr/>
-      </p:sp>
-      <p:sp>
-        <p:nvSpPr>
-          <p:cNvPr id="3" name="Notes Placeholder 2"/>
-          <p:cNvSpPr>
-            <a:spLocks xmlns:a="http://schemas.openxmlformats.org/drawingml/2006/main" noGrp="1"/>
-          </p:cNvSpPr>
-          <p:nvPr>
-            <p:ph type="body" idx="1"/>
-          </p:nvPr>
-        </p:nvSpPr>
-        <p:spPr/>
-        <p:txBody>
-          <a:bodyPr xmlns:a="http://schemas.openxmlformats.org/drawingml/2006/main"/>
-          <a:lstStyle xmlns:a="http://schemas.openxmlformats.org/drawingml/2006/main"/>
-          <a:p xmlns:a="http://schemas.openxmlformats.org/drawingml/2006/main">
-            <a:r>
-              <a:t>這頁收斂成日常排查流程。初學者最常見問題是容器名稱重複、port 被佔用、Image 刪不掉。</a:t>
-            </a:r>
-          </a:p>
-        </p:txBody>
-      </p:sp>
-      <p:sp>
-        <p:nvSpPr>
-          <p:cNvPr id="4" name="Slide Number Placeholder 3"/>
-          <p:cNvSpPr>
-            <a:spLocks xmlns:a="http://schemas.openxmlformats.org/drawingml/2006/main" noGrp="1"/>
-          </p:cNvSpPr>
-          <p:nvPr>
-            <p:ph type="sldNum" idx="5"/>
-          </p:nvPr>
-        </p:nvSpPr>
-        <p:spPr/>
-        <p:txBody>
-          <a:bodyPr xmlns:a="http://schemas.openxmlformats.org/drawingml/2006/main"/>
-          <a:lstStyle xmlns:a="http://schemas.openxmlformats.org/drawingml/2006/main"/>
-          <a:p xmlns:a="http://schemas.openxmlformats.org/drawingml/2006/main"/>
-        </p:txBody>
-      </p:sp>
-    </p:spTree>
-  </p:cSld>
-  <p:clrMapOvr>
-    <a:masterClrMapping xmlns:a="http://schemas.openxmlformats.org/drawingml/2006/main"/>
-  </p:clrMapOvr>
-</p:notes>
-</file>
-
-<file path=ppt/notesSlides/notesSlide27.xml><?xml version="1.0" encoding="utf-8"?>
-<p:notes xmlns:p="http://schemas.openxmlformats.org/presentationml/2006/main">
-  <p:cSld>
-    <p:spTree>
-      <p:nvGrpSpPr>
-        <p:cNvPr id="1" name=""/>
-        <p:cNvGrpSpPr/>
-        <p:nvPr/>
-      </p:nvGrpSpPr>
-      <p:grpSpPr>
-        <a:xfrm xmlns:a="http://schemas.openxmlformats.org/drawingml/2006/main"/>
-      </p:grpSpPr>
-      <p:sp>
-        <p:nvSpPr>
-          <p:cNvPr id="2" name="Slide Image Placeholder 1"/>
-          <p:cNvSpPr>
-            <a:spLocks xmlns:a="http://schemas.openxmlformats.org/drawingml/2006/main" noGrp="1"/>
-          </p:cNvSpPr>
-          <p:nvPr>
-            <p:ph type="sldImg" idx="0"/>
-          </p:nvPr>
-        </p:nvSpPr>
-        <p:spPr/>
-      </p:sp>
-      <p:sp>
-        <p:nvSpPr>
-          <p:cNvPr id="3" name="Notes Placeholder 2"/>
-          <p:cNvSpPr>
-            <a:spLocks xmlns:a="http://schemas.openxmlformats.org/drawingml/2006/main" noGrp="1"/>
-          </p:cNvSpPr>
-          <p:nvPr>
-            <p:ph type="body" idx="1"/>
-          </p:nvPr>
-        </p:nvSpPr>
-        <p:spPr/>
-        <p:txBody>
-          <a:bodyPr xmlns:a="http://schemas.openxmlformats.org/drawingml/2006/main"/>
-          <a:lstStyle xmlns:a="http://schemas.openxmlformats.org/drawingml/2006/main"/>
-          <a:p xmlns:a="http://schemas.openxmlformats.org/drawingml/2006/main">
-            <a:r>
-              <a:t>練習題來自 exercises.md 第 1 堂實作題 P3 與挑戰題 C1。</a:t>
-            </a:r>
-          </a:p>
-        </p:txBody>
-      </p:sp>
-      <p:sp>
-        <p:nvSpPr>
-          <p:cNvPr id="4" name="Slide Number Placeholder 3"/>
-          <p:cNvSpPr>
-            <a:spLocks xmlns:a="http://schemas.openxmlformats.org/drawingml/2006/main" noGrp="1"/>
-          </p:cNvSpPr>
-          <p:nvPr>
-            <p:ph type="sldNum" idx="5"/>
-          </p:nvPr>
-        </p:nvSpPr>
-        <p:spPr/>
-        <p:txBody>
-          <a:bodyPr xmlns:a="http://schemas.openxmlformats.org/drawingml/2006/main"/>
-          <a:lstStyle xmlns:a="http://schemas.openxmlformats.org/drawingml/2006/main"/>
-          <a:p xmlns:a="http://schemas.openxmlformats.org/drawingml/2006/main"/>
-        </p:txBody>
-      </p:sp>
-    </p:spTree>
-  </p:cSld>
-  <p:clrMapOvr>
-    <a:masterClrMapping xmlns:a="http://schemas.openxmlformats.org/drawingml/2006/main"/>
-  </p:clrMapOvr>
-</p:notes>
-</file>
-
-<file path=ppt/notesSlides/notesSlide3.xml><?xml version="1.0" encoding="utf-8"?>
-<p:notes xmlns:p="http://schemas.openxmlformats.org/presentationml/2006/main">
-  <p:cSld>
-    <p:spTree>
-      <p:nvGrpSpPr>
-        <p:cNvPr id="1" name=""/>
-        <p:cNvGrpSpPr/>
-        <p:nvPr/>
-      </p:nvGrpSpPr>
-      <p:grpSpPr>
-        <a:xfrm xmlns:a="http://schemas.openxmlformats.org/drawingml/2006/main"/>
-      </p:grpSpPr>
-      <p:sp>
-        <p:nvSpPr>
-          <p:cNvPr id="2" name="Slide Image Placeholder 1"/>
-          <p:cNvSpPr>
-            <a:spLocks xmlns:a="http://schemas.openxmlformats.org/drawingml/2006/main" noGrp="1"/>
-          </p:cNvSpPr>
-          <p:nvPr>
-            <p:ph type="sldImg" idx="0"/>
-          </p:nvPr>
-        </p:nvSpPr>
-        <p:spPr/>
-      </p:sp>
-      <p:sp>
-        <p:nvSpPr>
-          <p:cNvPr id="3" name="Notes Placeholder 2"/>
-          <p:cNvSpPr>
-            <a:spLocks xmlns:a="http://schemas.openxmlformats.org/drawingml/2006/main" noGrp="1"/>
-          </p:cNvSpPr>
-          <p:nvPr>
-            <p:ph type="body" idx="1"/>
-          </p:nvPr>
-        </p:nvSpPr>
-        <p:spPr/>
-        <p:txBody>
-          <a:bodyPr xmlns:a="http://schemas.openxmlformats.org/drawingml/2006/main"/>
-          <a:lstStyle xmlns:a="http://schemas.openxmlformats.org/drawingml/2006/main"/>
-          <a:p xmlns:a="http://schemas.openxmlformats.org/drawingml/2006/main">
-            <a:r>
-              <a:t>用講義的搬家比喻或自己的部署經驗帶入。重點是 Docker 不只是方便，而是降低環境差異造成的部署失敗。</a:t>
-            </a:r>
-          </a:p>
-        </p:txBody>
-      </p:sp>
-      <p:sp>
-        <p:nvSpPr>
-          <p:cNvPr id="4" name="Slide Number Placeholder 3"/>
-          <p:cNvSpPr>
-            <a:spLocks xmlns:a="http://schemas.openxmlformats.org/drawingml/2006/main" noGrp="1"/>
-          </p:cNvSpPr>
-          <p:nvPr>
-            <p:ph type="sldNum" idx="5"/>
-          </p:nvPr>
-        </p:nvSpPr>
-        <p:spPr/>
-        <p:txBody>
-          <a:bodyPr xmlns:a="http://schemas.openxmlformats.org/drawingml/2006/main"/>
-          <a:lstStyle xmlns:a="http://schemas.openxmlformats.org/drawingml/2006/main"/>
-          <a:p xmlns:a="http://schemas.openxmlformats.org/drawingml/2006/main"/>
-        </p:txBody>
-      </p:sp>
-    </p:spTree>
-  </p:cSld>
-  <p:clrMapOvr>
-    <a:masterClrMapping xmlns:a="http://schemas.openxmlformats.org/drawingml/2006/main"/>
-  </p:clrMapOvr>
-</p:notes>
-</file>
-
-<file path=ppt/notesSlides/notesSlide4.xml><?xml version="1.0" encoding="utf-8"?>
-<p:notes xmlns:p="http://schemas.openxmlformats.org/presentationml/2006/main">
-  <p:cSld>
-    <p:spTree>
-      <p:nvGrpSpPr>
-        <p:cNvPr id="1" name=""/>
-        <p:cNvGrpSpPr/>
-        <p:nvPr/>
-      </p:nvGrpSpPr>
-      <p:grpSpPr>
-        <a:xfrm xmlns:a="http://schemas.openxmlformats.org/drawingml/2006/main"/>
-      </p:grpSpPr>
-      <p:sp>
-        <p:nvSpPr>
-          <p:cNvPr id="2" name="Slide Image Placeholder 1"/>
-          <p:cNvSpPr>
-            <a:spLocks xmlns:a="http://schemas.openxmlformats.org/drawingml/2006/main" noGrp="1"/>
-          </p:cNvSpPr>
-          <p:nvPr>
-            <p:ph type="sldImg" idx="0"/>
-          </p:nvPr>
-        </p:nvSpPr>
-        <p:spPr/>
-      </p:sp>
-      <p:sp>
-        <p:nvSpPr>
-          <p:cNvPr id="3" name="Notes Placeholder 2"/>
-          <p:cNvSpPr>
-            <a:spLocks xmlns:a="http://schemas.openxmlformats.org/drawingml/2006/main" noGrp="1"/>
-          </p:cNvSpPr>
-          <p:nvPr>
-            <p:ph type="body" idx="1"/>
-          </p:nvPr>
-        </p:nvSpPr>
-        <p:spPr/>
-        <p:txBody>
-          <a:bodyPr xmlns:a="http://schemas.openxmlformats.org/drawingml/2006/main"/>
-          <a:lstStyle xmlns:a="http://schemas.openxmlformats.org/drawingml/2006/main"/>
-          <a:p xmlns:a="http://schemas.openxmlformats.org/drawingml/2006/main">
-            <a:r>
-              <a:t>不要過度深入 Linux kernel；初學者只要記住容器不是 VM，它共用主機核心，所以比較輕、比較快。</a:t>
-            </a:r>
-          </a:p>
-        </p:txBody>
-      </p:sp>
-      <p:sp>
-        <p:nvSpPr>
-          <p:cNvPr id="4" name="Slide Number Placeholder 3"/>
-          <p:cNvSpPr>
-            <a:spLocks xmlns:a="http://schemas.openxmlformats.org/drawingml/2006/main" noGrp="1"/>
-          </p:cNvSpPr>
-          <p:nvPr>
-            <p:ph type="sldNum" idx="5"/>
-          </p:nvPr>
-        </p:nvSpPr>
-        <p:spPr/>
-        <p:txBody>
-          <a:bodyPr xmlns:a="http://schemas.openxmlformats.org/drawingml/2006/main"/>
-          <a:lstStyle xmlns:a="http://schemas.openxmlformats.org/drawingml/2006/main"/>
-          <a:p xmlns:a="http://schemas.openxmlformats.org/drawingml/2006/main"/>
-        </p:txBody>
-      </p:sp>
-    </p:spTree>
-  </p:cSld>
-  <p:clrMapOvr>
-    <a:masterClrMapping xmlns:a="http://schemas.openxmlformats.org/drawingml/2006/main"/>
-  </p:clrMapOvr>
-</p:notes>
-</file>
-
-<file path=ppt/notesSlides/notesSlide5.xml><?xml version="1.0" encoding="utf-8"?>
-<p:notes xmlns:p="http://schemas.openxmlformats.org/presentationml/2006/main">
-  <p:cSld>
-    <p:spTree>
-      <p:nvGrpSpPr>
-        <p:cNvPr id="1" name=""/>
-        <p:cNvGrpSpPr/>
-        <p:nvPr/>
-      </p:nvGrpSpPr>
-      <p:grpSpPr>
-        <a:xfrm xmlns:a="http://schemas.openxmlformats.org/drawingml/2006/main"/>
-      </p:grpSpPr>
-      <p:sp>
-        <p:nvSpPr>
-          <p:cNvPr id="2" name="Slide Image Placeholder 1"/>
-          <p:cNvSpPr>
-            <a:spLocks xmlns:a="http://schemas.openxmlformats.org/drawingml/2006/main" noGrp="1"/>
-          </p:cNvSpPr>
-          <p:nvPr>
-            <p:ph type="sldImg" idx="0"/>
-          </p:nvPr>
-        </p:nvSpPr>
-        <p:spPr/>
-      </p:sp>
-      <p:sp>
-        <p:nvSpPr>
-          <p:cNvPr id="3" name="Notes Placeholder 2"/>
-          <p:cNvSpPr>
-            <a:spLocks xmlns:a="http://schemas.openxmlformats.org/drawingml/2006/main" noGrp="1"/>
-          </p:cNvSpPr>
-          <p:nvPr>
-            <p:ph type="body" idx="1"/>
-          </p:nvPr>
-        </p:nvSpPr>
-        <p:spPr/>
-        <p:txBody>
-          <a:bodyPr xmlns:a="http://schemas.openxmlformats.org/drawingml/2006/main"/>
-          <a:lstStyle xmlns:a="http://schemas.openxmlformats.org/drawingml/2006/main"/>
-          <a:p xmlns:a="http://schemas.openxmlformats.org/drawingml/2006/main">
-            <a:r>
-              <a:t>練習題來自 exercises.md 第 1 堂概念題 Q1。</a:t>
-            </a:r>
-          </a:p>
-        </p:txBody>
-      </p:sp>
-      <p:sp>
-        <p:nvSpPr>
-          <p:cNvPr id="4" name="Slide Number Placeholder 3"/>
-          <p:cNvSpPr>
-            <a:spLocks xmlns:a="http://schemas.openxmlformats.org/drawingml/2006/main" noGrp="1"/>
-          </p:cNvSpPr>
-          <p:nvPr>
-            <p:ph type="sldNum" idx="5"/>
-          </p:nvPr>
-        </p:nvSpPr>
-        <p:spPr/>
-        <p:txBody>
-          <a:bodyPr xmlns:a="http://schemas.openxmlformats.org/drawingml/2006/main"/>
-          <a:lstStyle xmlns:a="http://schemas.openxmlformats.org/drawingml/2006/main"/>
-          <a:p xmlns:a="http://schemas.openxmlformats.org/drawingml/2006/main"/>
-        </p:txBody>
-      </p:sp>
-    </p:spTree>
-  </p:cSld>
-  <p:clrMapOvr>
-    <a:masterClrMapping xmlns:a="http://schemas.openxmlformats.org/drawingml/2006/main"/>
-  </p:clrMapOvr>
-</p:notes>
-</file>
-
-<file path=ppt/notesSlides/notesSlide6.xml><?xml version="1.0" encoding="utf-8"?>
-<p:notes xmlns:p="http://schemas.openxmlformats.org/presentationml/2006/main">
-  <p:cSld>
-    <p:spTree>
-      <p:nvGrpSpPr>
-        <p:cNvPr id="1" name=""/>
-        <p:cNvGrpSpPr/>
-        <p:nvPr/>
-      </p:nvGrpSpPr>
-      <p:grpSpPr>
-        <a:xfrm xmlns:a="http://schemas.openxmlformats.org/drawingml/2006/main"/>
-      </p:grpSpPr>
-      <p:sp>
-        <p:nvSpPr>
-          <p:cNvPr id="2" name="Slide Image Placeholder 1"/>
-          <p:cNvSpPr>
-            <a:spLocks xmlns:a="http://schemas.openxmlformats.org/drawingml/2006/main" noGrp="1"/>
-          </p:cNvSpPr>
-          <p:nvPr>
-            <p:ph type="sldImg" idx="0"/>
-          </p:nvPr>
-        </p:nvSpPr>
-        <p:spPr/>
-      </p:sp>
-      <p:sp>
-        <p:nvSpPr>
-          <p:cNvPr id="3" name="Notes Placeholder 2"/>
-          <p:cNvSpPr>
-            <a:spLocks xmlns:a="http://schemas.openxmlformats.org/drawingml/2006/main" noGrp="1"/>
-          </p:cNvSpPr>
-          <p:nvPr>
-            <p:ph type="body" idx="1"/>
-          </p:nvPr>
-        </p:nvSpPr>
-        <p:spPr/>
-        <p:txBody>
-          <a:bodyPr xmlns:a="http://schemas.openxmlformats.org/drawingml/2006/main"/>
-          <a:lstStyle xmlns:a="http://schemas.openxmlformats.org/drawingml/2006/main"/>
-          <a:p xmlns:a="http://schemas.openxmlformats.org/drawingml/2006/main">
-            <a:r>
-              <a:t>這頁很適合補充 Apple Silicon 的案例。講義的目標學生使用 Windows，因此課堂上不會是主要問題，但實務上一定要知道。</a:t>
-            </a:r>
-          </a:p>
-        </p:txBody>
-      </p:sp>
-      <p:sp>
-        <p:nvSpPr>
-          <p:cNvPr id="4" name="Slide Number Placeholder 3"/>
-          <p:cNvSpPr>
-            <a:spLocks xmlns:a="http://schemas.openxmlformats.org/drawingml/2006/main" noGrp="1"/>
-          </p:cNvSpPr>
-          <p:nvPr>
-            <p:ph type="sldNum" idx="5"/>
-          </p:nvPr>
-        </p:nvSpPr>
-        <p:spPr/>
-        <p:txBody>
-          <a:bodyPr xmlns:a="http://schemas.openxmlformats.org/drawingml/2006/main"/>
-          <a:lstStyle xmlns:a="http://schemas.openxmlformats.org/drawingml/2006/main"/>
-          <a:p xmlns:a="http://schemas.openxmlformats.org/drawingml/2006/main"/>
-        </p:txBody>
-      </p:sp>
-    </p:spTree>
-  </p:cSld>
-  <p:clrMapOvr>
-    <a:masterClrMapping xmlns:a="http://schemas.openxmlformats.org/drawingml/2006/main"/>
-  </p:clrMapOvr>
-</p:notes>
-</file>
-
-<file path=ppt/notesSlides/notesSlide7.xml><?xml version="1.0" encoding="utf-8"?>
-<p:notes xmlns:p="http://schemas.openxmlformats.org/presentationml/2006/main">
-  <p:cSld>
-    <p:spTree>
-      <p:nvGrpSpPr>
-        <p:cNvPr id="1" name=""/>
-        <p:cNvGrpSpPr/>
-        <p:nvPr/>
-      </p:nvGrpSpPr>
-      <p:grpSpPr>
-        <a:xfrm xmlns:a="http://schemas.openxmlformats.org/drawingml/2006/main"/>
-      </p:grpSpPr>
-      <p:sp>
-        <p:nvSpPr>
-          <p:cNvPr id="2" name="Slide Image Placeholder 1"/>
-          <p:cNvSpPr>
-            <a:spLocks xmlns:a="http://schemas.openxmlformats.org/drawingml/2006/main" noGrp="1"/>
-          </p:cNvSpPr>
-          <p:nvPr>
-            <p:ph type="sldImg" idx="0"/>
-          </p:nvPr>
-        </p:nvSpPr>
-        <p:spPr/>
-      </p:sp>
-      <p:sp>
-        <p:nvSpPr>
-          <p:cNvPr id="3" name="Notes Placeholder 2"/>
-          <p:cNvSpPr>
-            <a:spLocks xmlns:a="http://schemas.openxmlformats.org/drawingml/2006/main" noGrp="1"/>
-          </p:cNvSpPr>
-          <p:nvPr>
-            <p:ph type="body" idx="1"/>
-          </p:nvPr>
-        </p:nvSpPr>
-        <p:spPr/>
-        <p:txBody>
-          <a:bodyPr xmlns:a="http://schemas.openxmlformats.org/drawingml/2006/main"/>
-          <a:lstStyle xmlns:a="http://schemas.openxmlformats.org/drawingml/2006/main"/>
-          <a:p xmlns:a="http://schemas.openxmlformats.org/drawingml/2006/main">
-            <a:r>
-              <a:t>練習題來自 exercises.md 第 1 堂概念題 Q3。答案是 B。</a:t>
-            </a:r>
-          </a:p>
-        </p:txBody>
-      </p:sp>
-      <p:sp>
-        <p:nvSpPr>
-          <p:cNvPr id="4" name="Slide Number Placeholder 3"/>
-          <p:cNvSpPr>
-            <a:spLocks xmlns:a="http://schemas.openxmlformats.org/drawingml/2006/main" noGrp="1"/>
-          </p:cNvSpPr>
-          <p:nvPr>
-            <p:ph type="sldNum" idx="5"/>
-          </p:nvPr>
-        </p:nvSpPr>
-        <p:spPr/>
-        <p:txBody>
-          <a:bodyPr xmlns:a="http://schemas.openxmlformats.org/drawingml/2006/main"/>
-          <a:lstStyle xmlns:a="http://schemas.openxmlformats.org/drawingml/2006/main"/>
-          <a:p xmlns:a="http://schemas.openxmlformats.org/drawingml/2006/main"/>
-        </p:txBody>
-      </p:sp>
-    </p:spTree>
-  </p:cSld>
-  <p:clrMapOvr>
-    <a:masterClrMapping xmlns:a="http://schemas.openxmlformats.org/drawingml/2006/main"/>
-  </p:clrMapOvr>
-</p:notes>
-</file>
-
-<file path=ppt/notesSlides/notesSlide8.xml><?xml version="1.0" encoding="utf-8"?>
-<p:notes xmlns:p="http://schemas.openxmlformats.org/presentationml/2006/main">
-  <p:cSld>
-    <p:spTree>
-      <p:nvGrpSpPr>
-        <p:cNvPr id="1" name=""/>
-        <p:cNvGrpSpPr/>
-        <p:nvPr/>
-      </p:nvGrpSpPr>
-      <p:grpSpPr>
-        <a:xfrm xmlns:a="http://schemas.openxmlformats.org/drawingml/2006/main"/>
-      </p:grpSpPr>
-      <p:sp>
-        <p:nvSpPr>
-          <p:cNvPr id="2" name="Slide Image Placeholder 1"/>
-          <p:cNvSpPr>
-            <a:spLocks xmlns:a="http://schemas.openxmlformats.org/drawingml/2006/main" noGrp="1"/>
-          </p:cNvSpPr>
-          <p:nvPr>
-            <p:ph type="sldImg" idx="0"/>
-          </p:nvPr>
-        </p:nvSpPr>
-        <p:spPr/>
-      </p:sp>
-      <p:sp>
-        <p:nvSpPr>
-          <p:cNvPr id="3" name="Notes Placeholder 2"/>
-          <p:cNvSpPr>
-            <a:spLocks xmlns:a="http://schemas.openxmlformats.org/drawingml/2006/main" noGrp="1"/>
-          </p:cNvSpPr>
-          <p:nvPr>
-            <p:ph type="body" idx="1"/>
-          </p:nvPr>
-        </p:nvSpPr>
-        <p:spPr/>
-        <p:txBody>
-          <a:bodyPr xmlns:a="http://schemas.openxmlformats.org/drawingml/2006/main"/>
-          <a:lstStyle xmlns:a="http://schemas.openxmlformats.org/drawingml/2006/main"/>
-          <a:p xmlns:a="http://schemas.openxmlformats.org/drawingml/2006/main">
-            <a:r>
-              <a:t>避免把 Docker 講成銀彈。這頁是建立工程判斷：Docker 優點大，但使用時要知道代價。</a:t>
-            </a:r>
-          </a:p>
-        </p:txBody>
-      </p:sp>
-      <p:sp>
-        <p:nvSpPr>
-          <p:cNvPr id="4" name="Slide Number Placeholder 3"/>
-          <p:cNvSpPr>
-            <a:spLocks xmlns:a="http://schemas.openxmlformats.org/drawingml/2006/main" noGrp="1"/>
-          </p:cNvSpPr>
-          <p:nvPr>
-            <p:ph type="sldNum" idx="5"/>
-          </p:nvPr>
-        </p:nvSpPr>
-        <p:spPr/>
-        <p:txBody>
-          <a:bodyPr xmlns:a="http://schemas.openxmlformats.org/drawingml/2006/main"/>
-          <a:lstStyle xmlns:a="http://schemas.openxmlformats.org/drawingml/2006/main"/>
-          <a:p xmlns:a="http://schemas.openxmlformats.org/drawingml/2006/main"/>
-        </p:txBody>
-      </p:sp>
-    </p:spTree>
-  </p:cSld>
-  <p:clrMapOvr>
-    <a:masterClrMapping xmlns:a="http://schemas.openxmlformats.org/drawingml/2006/main"/>
-  </p:clrMapOvr>
-</p:notes>
-</file>
-
-<file path=ppt/notesSlides/notesSlide9.xml><?xml version="1.0" encoding="utf-8"?>
-<p:notes xmlns:p="http://schemas.openxmlformats.org/presentationml/2006/main">
-  <p:cSld>
-    <p:spTree>
-      <p:nvGrpSpPr>
-        <p:cNvPr id="1" name=""/>
-        <p:cNvGrpSpPr/>
-        <p:nvPr/>
-      </p:nvGrpSpPr>
-      <p:grpSpPr>
-        <a:xfrm xmlns:a="http://schemas.openxmlformats.org/drawingml/2006/main"/>
-      </p:grpSpPr>
-      <p:sp>
-        <p:nvSpPr>
-          <p:cNvPr id="2" name="Slide Image Placeholder 1"/>
-          <p:cNvSpPr>
-            <a:spLocks xmlns:a="http://schemas.openxmlformats.org/drawingml/2006/main" noGrp="1"/>
-          </p:cNvSpPr>
-          <p:nvPr>
-            <p:ph type="sldImg" idx="0"/>
-          </p:nvPr>
-        </p:nvSpPr>
-        <p:spPr/>
-      </p:sp>
-      <p:sp>
-        <p:nvSpPr>
-          <p:cNvPr id="3" name="Notes Placeholder 2"/>
-          <p:cNvSpPr>
-            <a:spLocks xmlns:a="http://schemas.openxmlformats.org/drawingml/2006/main" noGrp="1"/>
-          </p:cNvSpPr>
-          <p:nvPr>
-            <p:ph type="body" idx="1"/>
-          </p:nvPr>
-        </p:nvSpPr>
-        <p:spPr/>
-        <p:txBody>
-          <a:bodyPr xmlns:a="http://schemas.openxmlformats.org/drawingml/2006/main"/>
-          <a:lstStyle xmlns:a="http://schemas.openxmlformats.org/drawingml/2006/main"/>
-          <a:p xmlns:a="http://schemas.openxmlformats.org/drawingml/2006/main">
-            <a:r>
-              <a:t>這是後面所有指令的核心模型。docker pull 對 Image，docker run 產生 Container。</a:t>
-            </a:r>
-          </a:p>
-        </p:txBody>
-      </p:sp>
-      <p:sp>
-        <p:nvSpPr>
-          <p:cNvPr id="4" name="Slide Number Placeholder 3"/>
-          <p:cNvSpPr>
-            <a:spLocks xmlns:a="http://schemas.openxmlformats.org/drawingml/2006/main" noGrp="1"/>
-          </p:cNvSpPr>
-          <p:nvPr>
-            <p:ph type="sldNum" idx="5"/>
-          </p:nvPr>
-        </p:nvSpPr>
-        <p:spPr/>
-        <p:txBody>
-          <a:bodyPr xmlns:a="http://schemas.openxmlformats.org/drawingml/2006/main"/>
-          <a:lstStyle xmlns:a="http://schemas.openxmlformats.org/drawingml/2006/main"/>
-          <a:p xmlns:a="http://schemas.openxmlformats.org/drawingml/2006/main"/>
-        </p:txBody>
-      </p:sp>
-    </p:spTree>
-  </p:cSld>
-  <p:clrMapOvr>
-    <a:masterClrMapping xmlns:a="http://schemas.openxmlformats.org/drawingml/2006/main"/>
-  </p:clrMapOvr>
-</p:notes>
-</file>
-
 <file path=ppt/slideLayouts/slideLayout1.xml><?xml version="1.0" encoding="utf-8"?>
 <p:sldLayout xmlns:p="http://schemas.openxmlformats.org/presentationml/2006/main" type="title">
   <p:cSld name="Title Slide">
@@ -2451,7 +171,7 @@
   </p:cSld>
   <p:clrMap bg1="lt1" tx1="dk1" bg2="lt2" tx2="dk2" accent1="accent1" accent2="accent2" accent3="accent3" accent4="accent4" accent5="accent5" accent6="accent6" hlink="hlink" folHlink="folHlink"/>
   <p:sldLayoutIdLst>
-    <p:sldLayoutId xmlns:r="http://schemas.openxmlformats.org/officeDocument/2006/relationships" id="2147483649" r:id="Re56b90e3d4544c57"/>
+    <p:sldLayoutId xmlns:r="http://schemas.openxmlformats.org/officeDocument/2006/relationships" id="2147483649" r:id="R18d424fa0a364d7e"/>
   </p:sldLayoutIdLst>
   <p:txStyles>
     <p:titleStyle>
@@ -3041,14 +761,14 @@
       </p:sp>
       <p:pic>
         <p:nvPicPr>
-          <p:cNvPr id="14" name=""/>
+          <p:cNvPr id="15" name=""/>
           <p:cNvPicPr>
             <a:picLocks xmlns:a="http://schemas.openxmlformats.org/drawingml/2006/main" noChangeAspect="1"/>
           </p:cNvPicPr>
           <p:nvPr/>
         </p:nvPicPr>
         <p:blipFill>
-          <a:blip xmlns:r="http://schemas.openxmlformats.org/officeDocument/2006/relationships" xmlns:a="http://schemas.openxmlformats.org/drawingml/2006/main" r:embed="R12c4a6b3dbc845f2"/>
+          <a:blip xmlns:r="http://schemas.openxmlformats.org/officeDocument/2006/relationships" xmlns:a="http://schemas.openxmlformats.org/drawingml/2006/main" r:embed="R825bada15ef54c72"/>
           <a:srcRect xmlns:a="http://schemas.openxmlformats.org/drawingml/2006/main" l="20297" t="0" r="20297" b="0"/>
           <a:stretch xmlns:a="http://schemas.openxmlformats.org/drawingml/2006/main">
             <a:fillRect l="0" t="0" r="0" b="0"/>
@@ -34238,14 +31958,14 @@
       </p:sp>
       <p:pic>
         <p:nvPicPr>
-          <p:cNvPr id="22" name=""/>
+          <p:cNvPr id="23" name=""/>
           <p:cNvPicPr>
             <a:picLocks xmlns:a="http://schemas.openxmlformats.org/drawingml/2006/main" noChangeAspect="1"/>
           </p:cNvPicPr>
           <p:nvPr/>
         </p:nvPicPr>
         <p:blipFill>
-          <a:blip xmlns:r="http://schemas.openxmlformats.org/officeDocument/2006/relationships" xmlns:a="http://schemas.openxmlformats.org/drawingml/2006/main" r:embed="Raa8b74676f6740c9"/>
+          <a:blip xmlns:r="http://schemas.openxmlformats.org/officeDocument/2006/relationships" xmlns:a="http://schemas.openxmlformats.org/drawingml/2006/main" r:embed="R678addf24761433b"/>
           <a:srcRect xmlns:a="http://schemas.openxmlformats.org/drawingml/2006/main" l="106" t="0" r="106" b="0"/>
           <a:stretch xmlns:a="http://schemas.openxmlformats.org/drawingml/2006/main">
             <a:fillRect l="0" t="0" r="0" b="0"/>
@@ -34257,9 +31977,7 @@
             <a:ext cx="4762500" cy="2686050"/>
           </a:xfrm>
           <a:prstGeom xmlns:a="http://schemas.openxmlformats.org/drawingml/2006/main" prst="roundRect">
-            <a:avLst>
-              <a:gd name="adj" fmla="val 4965"/>
-            </a:avLst>
+            <a:avLst/>
           </a:prstGeom>
         </p:spPr>
       </p:pic>

--- a/slides/docker-session1-basics-setup.pptx
+++ b/slides/docker-session1-basics-setup.pptx
@@ -30,15 +30,15 @@
     <p:sldId xmlns:r="http://schemas.openxmlformats.org/officeDocument/2006/relationships" id="275" r:id="Re7909a35720f4790"/>
     <p:sldId xmlns:r="http://schemas.openxmlformats.org/officeDocument/2006/relationships" id="276" r:id="Rad7faa5a408b4e58"/>
     <p:sldId xmlns:r="http://schemas.openxmlformats.org/officeDocument/2006/relationships" id="277" r:id="R48e424fea76c4627"/>
+    <p:sldId id="283" r:id="rId1"/>
     <p:sldId xmlns:r="http://schemas.openxmlformats.org/officeDocument/2006/relationships" id="278" r:id="Rf14069a11143499b"/>
     <p:sldId xmlns:r="http://schemas.openxmlformats.org/officeDocument/2006/relationships" id="279" r:id="R8c2bfe1ccc954101"/>
+    <p:sldId id="284" r:id="rId2"/>
+    <p:sldId id="285" r:id="rId3"/>
     <p:sldId xmlns:r="http://schemas.openxmlformats.org/officeDocument/2006/relationships" id="280" r:id="R8b3293098fd74ef5"/>
     <p:sldId xmlns:r="http://schemas.openxmlformats.org/officeDocument/2006/relationships" id="281" r:id="Reb2a6ab6c203454b"/>
+    <p:sldId id="286" r:id="rId4"/>
     <p:sldId xmlns:r="http://schemas.openxmlformats.org/officeDocument/2006/relationships" id="282" r:id="Rbd1f54cec190419b"/>
-    <p:sldId id="283" r:id="rId1"/>
-    <p:sldId id="284" r:id="rId2"/>
-    <p:sldId id="285" r:id="rId3"/>
-    <p:sldId id="286" r:id="rId4"/>
   </p:sldIdLst>
   <p:sldSz cx="12192000" cy="6858000"/>
   <p:notesSz cx="6858000" cy="9144000"/>
@@ -24743,7 +24743,7 @@
 
 <file path=ppt/slides/slide28.xml><?xml version="1.0" encoding="utf-8"?>
 <p:sld xmlns:a="http://schemas.openxmlformats.org/drawingml/2006/main" xmlns:r="http://schemas.openxmlformats.org/officeDocument/2006/relationships" xmlns:p="http://schemas.openxmlformats.org/presentationml/2006/main">
-  <p:cSld name="程式碼附錄 1: Nginx 起手式">
+  <p:cSld name="範例程式碼：Nginx 起手式">
     <p:bg>
       <p:bgPr>
         <a:solidFill>
@@ -24800,7 +24800,7 @@
                 <a:ea typeface="Aptos"/>
                 <a:cs typeface="Aptos"/>
               </a:rPr>
-              <a:t>CODE APPENDIX</a:t>
+              <a:t>CODE EXAMPLE</a:t>
             </a:r>
           </a:p>
         </p:txBody>
@@ -24839,7 +24839,7 @@
                 <a:ea typeface="Aptos"/>
                 <a:cs typeface="Aptos"/>
               </a:rPr>
-              <a:t>程式碼附錄 1: Nginx 起手式</a:t>
+              <a:t>範例程式碼：Nginx 起手式</a:t>
             </a:r>
           </a:p>
         </p:txBody>
@@ -25064,7 +25064,7 @@
                 <a:ea typeface="Aptos"/>
                 <a:cs typeface="Aptos"/>
               </a:rPr>
-              <a:t>Docker 基礎教學 | 第 1 堂 | Code 1/4</a:t>
+              <a:t>Docker 基礎教學 | 第 1 堂 | 範例程式碼</a:t>
             </a:r>
           </a:p>
         </p:txBody>
@@ -25103,7 +25103,7 @@
                 <a:ea typeface="Aptos"/>
                 <a:cs typeface="Aptos"/>
               </a:rPr>
-              <a:t>A1</a:t>
+              <a:t>CODE</a:t>
             </a:r>
           </a:p>
         </p:txBody>
@@ -25118,7 +25118,7 @@
 
 <file path=ppt/slides/slide29.xml><?xml version="1.0" encoding="utf-8"?>
 <p:sld xmlns:a="http://schemas.openxmlformats.org/drawingml/2006/main" xmlns:r="http://schemas.openxmlformats.org/officeDocument/2006/relationships" xmlns:p="http://schemas.openxmlformats.org/presentationml/2006/main">
-  <p:cSld name="程式碼附錄 2: 進入 Nginx 容器檢查 (1/2)">
+  <p:cSld name="範例程式碼：進入 Nginx 容器檢查 (1/2)">
     <p:bg>
       <p:bgPr>
         <a:solidFill>
@@ -25175,7 +25175,7 @@
                 <a:ea typeface="Aptos"/>
                 <a:cs typeface="Aptos"/>
               </a:rPr>
-              <a:t>CODE APPENDIX</a:t>
+              <a:t>CODE EXAMPLE</a:t>
             </a:r>
           </a:p>
         </p:txBody>
@@ -25214,7 +25214,7 @@
                 <a:ea typeface="Aptos"/>
                 <a:cs typeface="Aptos"/>
               </a:rPr>
-              <a:t>程式碼附錄 2: 進入 Nginx 容器檢查 (1/2)</a:t>
+              <a:t>範例程式碼：進入 Nginx 容器檢查 (1/2)</a:t>
             </a:r>
           </a:p>
         </p:txBody>
@@ -25647,7 +25647,7 @@
                 <a:ea typeface="Aptos"/>
                 <a:cs typeface="Aptos"/>
               </a:rPr>
-              <a:t>Docker 基礎教學 | 第 1 堂 | Code 2/4</a:t>
+              <a:t>Docker 基礎教學 | 第 1 堂 | 範例程式碼</a:t>
             </a:r>
           </a:p>
         </p:txBody>
@@ -25686,7 +25686,7 @@
                 <a:ea typeface="Aptos"/>
                 <a:cs typeface="Aptos"/>
               </a:rPr>
-              <a:t>A2</a:t>
+              <a:t>CODE</a:t>
             </a:r>
           </a:p>
         </p:txBody>
@@ -27049,7 +27049,7 @@
 
 <file path=ppt/slides/slide30.xml><?xml version="1.0" encoding="utf-8"?>
 <p:sld xmlns:a="http://schemas.openxmlformats.org/drawingml/2006/main" xmlns:r="http://schemas.openxmlformats.org/officeDocument/2006/relationships" xmlns:p="http://schemas.openxmlformats.org/presentationml/2006/main">
-  <p:cSld name="程式碼附錄 3: 進入 Nginx 容器檢查 (2/2)">
+  <p:cSld name="範例程式碼：進入 Nginx 容器檢查 (2/2)">
     <p:bg>
       <p:bgPr>
         <a:solidFill>
@@ -27106,7 +27106,7 @@
                 <a:ea typeface="Aptos"/>
                 <a:cs typeface="Aptos"/>
               </a:rPr>
-              <a:t>CODE APPENDIX</a:t>
+              <a:t>CODE EXAMPLE</a:t>
             </a:r>
           </a:p>
         </p:txBody>
@@ -27145,7 +27145,7 @@
                 <a:ea typeface="Aptos"/>
                 <a:cs typeface="Aptos"/>
               </a:rPr>
-              <a:t>程式碼附錄 3: 進入 Nginx 容器檢查 (2/2)</a:t>
+              <a:t>範例程式碼：進入 Nginx 容器檢查 (2/2)</a:t>
             </a:r>
           </a:p>
         </p:txBody>
@@ -27318,7 +27318,7 @@
                 <a:ea typeface="Aptos"/>
                 <a:cs typeface="Aptos"/>
               </a:rPr>
-              <a:t>Docker 基礎教學 | 第 1 堂 | Code 3/4</a:t>
+              <a:t>Docker 基礎教學 | 第 1 堂 | 範例程式碼</a:t>
             </a:r>
           </a:p>
         </p:txBody>
@@ -27357,7 +27357,7 @@
                 <a:ea typeface="Aptos"/>
                 <a:cs typeface="Aptos"/>
               </a:rPr>
-              <a:t>A3</a:t>
+              <a:t>CODE</a:t>
             </a:r>
           </a:p>
         </p:txBody>
@@ -27372,7 +27372,7 @@
 
 <file path=ppt/slides/slide31.xml><?xml version="1.0" encoding="utf-8"?>
 <p:sld xmlns:a="http://schemas.openxmlformats.org/drawingml/2006/main" xmlns:r="http://schemas.openxmlformats.org/officeDocument/2006/relationships" xmlns:p="http://schemas.openxmlformats.org/presentationml/2006/main">
-  <p:cSld name="程式碼附錄 4: 狀態查看與清理">
+  <p:cSld name="範例程式碼：狀態查看與清理">
     <p:bg>
       <p:bgPr>
         <a:solidFill>
@@ -27429,7 +27429,7 @@
                 <a:ea typeface="Aptos"/>
                 <a:cs typeface="Aptos"/>
               </a:rPr>
-              <a:t>CODE APPENDIX</a:t>
+              <a:t>CODE EXAMPLE</a:t>
             </a:r>
           </a:p>
         </p:txBody>
@@ -27468,7 +27468,7 @@
                 <a:ea typeface="Aptos"/>
                 <a:cs typeface="Aptos"/>
               </a:rPr>
-              <a:t>程式碼附錄 4: 狀態查看與清理</a:t>
+              <a:t>範例程式碼：狀態查看與清理</a:t>
             </a:r>
           </a:p>
         </p:txBody>
@@ -27797,7 +27797,7 @@
                 <a:ea typeface="Aptos"/>
                 <a:cs typeface="Aptos"/>
               </a:rPr>
-              <a:t>Docker 基礎教學 | 第 1 堂 | Code 4/4</a:t>
+              <a:t>Docker 基礎教學 | 第 1 堂 | 範例程式碼</a:t>
             </a:r>
           </a:p>
         </p:txBody>
@@ -27836,7 +27836,7 @@
                 <a:ea typeface="Aptos"/>
                 <a:cs typeface="Aptos"/>
               </a:rPr>
-              <a:t>A4</a:t>
+              <a:t>CODE</a:t>
             </a:r>
           </a:p>
         </p:txBody>

--- a/slides/docker-session1-basics-setup.pptx
+++ b/slides/docker-session1-basics-setup.pptx
@@ -1,52 +1,49 @@
 
 <file path=ppt/presentation.xml><?xml version="1.0" encoding="utf-8"?>
-<p:presentation xmlns:p="http://schemas.openxmlformats.org/presentationml/2006/main" xmlns:r="http://schemas.openxmlformats.org/officeDocument/2006/relationships">
+<p:presentation xmlns:a="http://schemas.openxmlformats.org/drawingml/2006/main" xmlns:p="http://schemas.openxmlformats.org/presentationml/2006/main" xmlns:r="http://schemas.openxmlformats.org/officeDocument/2006/relationships">
   <p:sldMasterIdLst>
-    <p:sldMasterId xmlns:r="http://schemas.openxmlformats.org/officeDocument/2006/relationships" id="2147483648" r:id="R9d95461ccd5a435d"/>
+    <p:sldMasterId id="2147483648" r:id="R9d95461ccd5a435d"/>
   </p:sldMasterIdLst>
-  <p:notesMasterIdLst>
-    <p:notesMasterId xmlns:r="http://schemas.openxmlformats.org/officeDocument/2006/relationships" r:id="Re7c72efc286f43a9"/>
-  </p:notesMasterIdLst>
   <p:sldIdLst>
-    <p:sldId xmlns:r="http://schemas.openxmlformats.org/officeDocument/2006/relationships" id="256" r:id="R534a20be6a554624"/>
-    <p:sldId xmlns:r="http://schemas.openxmlformats.org/officeDocument/2006/relationships" id="257" r:id="R85c70f84879a4812"/>
-    <p:sldId xmlns:r="http://schemas.openxmlformats.org/officeDocument/2006/relationships" id="258" r:id="R7874a43df70e48cb"/>
-    <p:sldId xmlns:r="http://schemas.openxmlformats.org/officeDocument/2006/relationships" id="259" r:id="Re99b3704889f4d49"/>
-    <p:sldId xmlns:r="http://schemas.openxmlformats.org/officeDocument/2006/relationships" id="260" r:id="R3236acdfcab64870"/>
-    <p:sldId xmlns:r="http://schemas.openxmlformats.org/officeDocument/2006/relationships" id="261" r:id="R64bbdd81cd314281"/>
-    <p:sldId xmlns:r="http://schemas.openxmlformats.org/officeDocument/2006/relationships" id="262" r:id="R6d3793b2232145df"/>
-    <p:sldId xmlns:r="http://schemas.openxmlformats.org/officeDocument/2006/relationships" id="263" r:id="Rc0ae04078daa441c"/>
-    <p:sldId xmlns:r="http://schemas.openxmlformats.org/officeDocument/2006/relationships" id="264" r:id="R3a357448888548ed"/>
-    <p:sldId xmlns:r="http://schemas.openxmlformats.org/officeDocument/2006/relationships" id="265" r:id="Rc8b84611a13249ad"/>
-    <p:sldId xmlns:r="http://schemas.openxmlformats.org/officeDocument/2006/relationships" id="266" r:id="R13a519ccef9e4d67"/>
-    <p:sldId xmlns:r="http://schemas.openxmlformats.org/officeDocument/2006/relationships" id="267" r:id="Rfab575397dc2490f"/>
-    <p:sldId xmlns:r="http://schemas.openxmlformats.org/officeDocument/2006/relationships" id="268" r:id="R41cb82ad261f454c"/>
-    <p:sldId xmlns:r="http://schemas.openxmlformats.org/officeDocument/2006/relationships" id="269" r:id="R51dc3817afe045b5"/>
-    <p:sldId xmlns:r="http://schemas.openxmlformats.org/officeDocument/2006/relationships" id="270" r:id="Re8af338f0f9e4a6d"/>
-    <p:sldId xmlns:r="http://schemas.openxmlformats.org/officeDocument/2006/relationships" id="271" r:id="Rdb3f5a3796534bd7"/>
-    <p:sldId xmlns:r="http://schemas.openxmlformats.org/officeDocument/2006/relationships" id="272" r:id="R6ee63b6ecda0406c"/>
-    <p:sldId xmlns:r="http://schemas.openxmlformats.org/officeDocument/2006/relationships" id="273" r:id="R32181bae7ddf4814"/>
-    <p:sldId xmlns:r="http://schemas.openxmlformats.org/officeDocument/2006/relationships" id="274" r:id="R280fb19bbba24d46"/>
-    <p:sldId xmlns:r="http://schemas.openxmlformats.org/officeDocument/2006/relationships" id="275" r:id="Re7909a35720f4790"/>
-    <p:sldId xmlns:r="http://schemas.openxmlformats.org/officeDocument/2006/relationships" id="276" r:id="Rad7faa5a408b4e58"/>
-    <p:sldId xmlns:r="http://schemas.openxmlformats.org/officeDocument/2006/relationships" id="277" r:id="R48e424fea76c4627"/>
+    <p:sldId id="256" r:id="R534a20be6a554624"/>
+    <p:sldId id="257" r:id="R85c70f84879a4812"/>
+    <p:sldId id="258" r:id="R7874a43df70e48cb"/>
+    <p:sldId id="259" r:id="Re99b3704889f4d49"/>
+    <p:sldId id="260" r:id="R3236acdfcab64870"/>
+    <p:sldId id="261" r:id="R64bbdd81cd314281"/>
+    <p:sldId id="262" r:id="R6d3793b2232145df"/>
+    <p:sldId id="263" r:id="Rc0ae04078daa441c"/>
+    <p:sldId id="264" r:id="R3a357448888548ed"/>
+    <p:sldId id="265" r:id="Rc8b84611a13249ad"/>
+    <p:sldId id="266" r:id="R13a519ccef9e4d67"/>
+    <p:sldId id="267" r:id="Rfab575397dc2490f"/>
+    <p:sldId id="268" r:id="R41cb82ad261f454c"/>
+    <p:sldId id="269" r:id="R51dc3817afe045b5"/>
+    <p:sldId id="270" r:id="Re8af338f0f9e4a6d"/>
+    <p:sldId id="271" r:id="Rdb3f5a3796534bd7"/>
+    <p:sldId id="272" r:id="R6ee63b6ecda0406c"/>
+    <p:sldId id="273" r:id="R32181bae7ddf4814"/>
+    <p:sldId id="274" r:id="R280fb19bbba24d46"/>
+    <p:sldId id="275" r:id="Re7909a35720f4790"/>
+    <p:sldId id="276" r:id="Rad7faa5a408b4e58"/>
+    <p:sldId id="277" r:id="R48e424fea76c4627"/>
     <p:sldId id="283" r:id="rId1"/>
-    <p:sldId xmlns:r="http://schemas.openxmlformats.org/officeDocument/2006/relationships" id="278" r:id="Rf14069a11143499b"/>
-    <p:sldId xmlns:r="http://schemas.openxmlformats.org/officeDocument/2006/relationships" id="279" r:id="R8c2bfe1ccc954101"/>
+    <p:sldId id="278" r:id="Rf14069a11143499b"/>
+    <p:sldId id="279" r:id="R8c2bfe1ccc954101"/>
     <p:sldId id="284" r:id="rId2"/>
     <p:sldId id="285" r:id="rId3"/>
-    <p:sldId xmlns:r="http://schemas.openxmlformats.org/officeDocument/2006/relationships" id="280" r:id="R8b3293098fd74ef5"/>
-    <p:sldId xmlns:r="http://schemas.openxmlformats.org/officeDocument/2006/relationships" id="281" r:id="Reb2a6ab6c203454b"/>
+    <p:sldId id="280" r:id="R8b3293098fd74ef5"/>
+    <p:sldId id="281" r:id="Reb2a6ab6c203454b"/>
     <p:sldId id="286" r:id="rId4"/>
-    <p:sldId xmlns:r="http://schemas.openxmlformats.org/officeDocument/2006/relationships" id="282" r:id="Rbd1f54cec190419b"/>
+    <p:sldId id="282" r:id="Rbd1f54cec190419b"/>
   </p:sldIdLst>
   <p:sldSz cx="12192000" cy="6858000"/>
   <p:notesSz cx="6858000" cy="9144000"/>
   <p:defaultTextStyle>
-    <a:defPPr xmlns:a="http://schemas.openxmlformats.org/drawingml/2006/main">
+    <a:defPPr>
       <a:defRPr lang="en-US"/>
     </a:defPPr>
-    <a:lvl1pPr xmlns:a="http://schemas.openxmlformats.org/drawingml/2006/main" marL="0" indent="0" algn="l" defTabSz="914400">
+    <a:lvl1pPr marL="0" indent="0" algn="l" defTabSz="914400">
       <a:defRPr sz="1800" kern="1200">
         <a:solidFill>
           <a:schemeClr val="tx1"/>
@@ -56,7 +53,7 @@
         <a:cs typeface="+mn-cs"/>
       </a:defRPr>
     </a:lvl1pPr>
-    <a:lvl2pPr xmlns:a="http://schemas.openxmlformats.org/drawingml/2006/main" marL="457200" indent="0" algn="l" defTabSz="914400">
+    <a:lvl2pPr marL="457200" indent="0" algn="l" defTabSz="914400">
       <a:defRPr sz="1800" kern="1200">
         <a:solidFill>
           <a:schemeClr val="tx1"/>
@@ -66,7 +63,7 @@
         <a:cs typeface="+mn-cs"/>
       </a:defRPr>
     </a:lvl2pPr>
-    <a:lvl3pPr xmlns:a="http://schemas.openxmlformats.org/drawingml/2006/main" marL="914400" indent="0" algn="l" defTabSz="914400">
+    <a:lvl3pPr marL="914400" indent="0" algn="l" defTabSz="914400">
       <a:defRPr sz="1800" kern="1200">
         <a:solidFill>
           <a:schemeClr val="tx1"/>
@@ -76,7 +73,7 @@
         <a:cs typeface="+mn-cs"/>
       </a:defRPr>
     </a:lvl3pPr>
-    <a:lvl4pPr xmlns:a="http://schemas.openxmlformats.org/drawingml/2006/main" marL="1371600" indent="0" algn="l" defTabSz="914400">
+    <a:lvl4pPr marL="1371600" indent="0" algn="l" defTabSz="914400">
       <a:defRPr sz="1800" kern="1200">
         <a:solidFill>
           <a:schemeClr val="tx1"/>
@@ -86,7 +83,7 @@
         <a:cs typeface="+mn-cs"/>
       </a:defRPr>
     </a:lvl4pPr>
-    <a:lvl5pPr xmlns:a="http://schemas.openxmlformats.org/drawingml/2006/main" marL="1828800" indent="0" algn="l" defTabSz="914400">
+    <a:lvl5pPr marL="1828800" indent="0" algn="l" defTabSz="914400">
       <a:defRPr sz="1800" kern="1200">
         <a:solidFill>
           <a:schemeClr val="tx1"/>
@@ -96,7 +93,7 @@
         <a:cs typeface="+mn-cs"/>
       </a:defRPr>
     </a:lvl5pPr>
-    <a:lvl6pPr xmlns:a="http://schemas.openxmlformats.org/drawingml/2006/main" marL="2286000" indent="0" algn="l" defTabSz="914400">
+    <a:lvl6pPr marL="2286000" indent="0" algn="l" defTabSz="914400">
       <a:defRPr sz="1800" kern="1200">
         <a:solidFill>
           <a:schemeClr val="tx1"/>
@@ -106,7 +103,7 @@
         <a:cs typeface="+mn-cs"/>
       </a:defRPr>
     </a:lvl6pPr>
-    <a:lvl7pPr xmlns:a="http://schemas.openxmlformats.org/drawingml/2006/main" marL="2743200" indent="0" algn="l" defTabSz="914400">
+    <a:lvl7pPr marL="2743200" indent="0" algn="l" defTabSz="914400">
       <a:defRPr sz="1800" kern="1200">
         <a:solidFill>
           <a:schemeClr val="tx1"/>
@@ -116,7 +113,7 @@
         <a:cs typeface="+mn-cs"/>
       </a:defRPr>
     </a:lvl7pPr>
-    <a:lvl8pPr xmlns:a="http://schemas.openxmlformats.org/drawingml/2006/main" marL="3200400" indent="0" algn="l" defTabSz="914400">
+    <a:lvl8pPr marL="3200400" indent="0" algn="l" defTabSz="914400">
       <a:defRPr sz="1800" kern="1200">
         <a:solidFill>
           <a:schemeClr val="tx1"/>
@@ -126,7 +123,7 @@
         <a:cs typeface="+mn-cs"/>
       </a:defRPr>
     </a:lvl8pPr>
-    <a:lvl9pPr xmlns:a="http://schemas.openxmlformats.org/drawingml/2006/main" marL="3657600" indent="0" algn="l" defTabSz="914400">
+    <a:lvl9pPr marL="3657600" indent="0" algn="l" defTabSz="914400">
       <a:defRPr sz="1800" kern="1200">
         <a:solidFill>
           <a:schemeClr val="tx1"/>
@@ -1632,8 +1629,8 @@
         </p:nvSpPr>
         <p:spPr>
           <a:xfrm>
-            <a:off x="1047750" y="2628900"/>
-            <a:ext cx="323850" cy="-190500"/>
+            <a:off x="1047750" y="2438400"/>
+            <a:ext cx="323850" cy="190500"/>
           </a:xfrm>
           <a:prstGeom prst="rect">
             <a:avLst/>
@@ -1775,8 +1772,8 @@
         </p:nvSpPr>
         <p:spPr>
           <a:xfrm>
-            <a:off x="1962150" y="2628900"/>
-            <a:ext cx="323850" cy="-190500"/>
+            <a:off x="1962150" y="2438400"/>
+            <a:ext cx="323850" cy="190500"/>
           </a:xfrm>
           <a:prstGeom prst="rect">
             <a:avLst/>
@@ -1918,8 +1915,8 @@
         </p:nvSpPr>
         <p:spPr>
           <a:xfrm>
-            <a:off x="2876550" y="2628900"/>
-            <a:ext cx="323850" cy="-190500"/>
+            <a:off x="2876550" y="2438400"/>
+            <a:ext cx="323850" cy="190500"/>
           </a:xfrm>
           <a:prstGeom prst="rect">
             <a:avLst/>
@@ -2061,8 +2058,8 @@
         </p:nvSpPr>
         <p:spPr>
           <a:xfrm>
-            <a:off x="1047750" y="3371850"/>
-            <a:ext cx="2171700" cy="-190500"/>
+            <a:off x="1047750" y="3181350"/>
+            <a:ext cx="2171700" cy="190500"/>
           </a:xfrm>
           <a:prstGeom prst="rect">
             <a:avLst/>
@@ -2204,8 +2201,8 @@
         </p:nvSpPr>
         <p:spPr>
           <a:xfrm>
-            <a:off x="1047750" y="4095750"/>
-            <a:ext cx="2171700" cy="-190500"/>
+            <a:off x="1047750" y="3905250"/>
+            <a:ext cx="2171700" cy="190500"/>
           </a:xfrm>
           <a:prstGeom prst="rect">
             <a:avLst/>
@@ -2347,8 +2344,8 @@
         </p:nvSpPr>
         <p:spPr>
           <a:xfrm>
-            <a:off x="1047750" y="4819650"/>
-            <a:ext cx="2171700" cy="-190500"/>
+            <a:off x="1047750" y="4629150"/>
+            <a:ext cx="2171700" cy="190500"/>
           </a:xfrm>
           <a:prstGeom prst="rect">
             <a:avLst/>
@@ -3095,8 +3092,8 @@
         </p:nvSpPr>
         <p:spPr>
           <a:xfrm>
-            <a:off x="4838700" y="4095750"/>
-            <a:ext cx="2019300" cy="-247650"/>
+            <a:off x="4838700" y="3848100"/>
+            <a:ext cx="2019300" cy="247650"/>
           </a:xfrm>
           <a:prstGeom prst="rect">
             <a:avLst/>
@@ -3238,8 +3235,8 @@
         </p:nvSpPr>
         <p:spPr>
           <a:xfrm>
-            <a:off x="4838700" y="4762500"/>
-            <a:ext cx="2019300" cy="-247650"/>
+            <a:off x="4838700" y="4514850"/>
+            <a:ext cx="2019300" cy="247650"/>
           </a:xfrm>
           <a:prstGeom prst="rect">
             <a:avLst/>
@@ -4097,8 +4094,8 @@
         </p:nvSpPr>
         <p:spPr>
           <a:xfrm>
-            <a:off x="8362950" y="3848100"/>
-            <a:ext cx="2228850" cy="-247650"/>
+            <a:off x="8362950" y="3600450"/>
+            <a:ext cx="2228850" cy="247650"/>
           </a:xfrm>
           <a:prstGeom prst="rect">
             <a:avLst/>
@@ -4240,8 +4237,8 @@
         </p:nvSpPr>
         <p:spPr>
           <a:xfrm>
-            <a:off x="8362950" y="4514850"/>
-            <a:ext cx="2228850" cy="-247650"/>
+            <a:off x="8362950" y="4267200"/>
+            <a:ext cx="2228850" cy="247650"/>
           </a:xfrm>
           <a:prstGeom prst="rect">
             <a:avLst/>
@@ -4383,8 +4380,8 @@
         </p:nvSpPr>
         <p:spPr>
           <a:xfrm>
-            <a:off x="8362950" y="5181600"/>
-            <a:ext cx="2228850" cy="-323850"/>
+            <a:off x="8362950" y="4857750"/>
+            <a:ext cx="2228850" cy="323850"/>
           </a:xfrm>
           <a:prstGeom prst="rect">
             <a:avLst/>

--- a/slides/docker-session1-basics-setup.pptx
+++ b/slides/docker-session1-basics-setup.pptx
@@ -32,10 +32,9 @@
     <p:sldId id="279" r:id="rId26"/>
     <p:sldId id="284" r:id="rId27"/>
     <p:sldId id="285" r:id="rId28"/>
-    <p:sldId id="280" r:id="rId29"/>
-    <p:sldId id="281" r:id="rId30"/>
-    <p:sldId id="286" r:id="rId31"/>
-    <p:sldId id="282" r:id="rId32"/>
+    <p:sldId id="281" r:id="rId29"/>
+    <p:sldId id="286" r:id="rId30"/>
+    <p:sldId id="282" r:id="rId31"/>
   </p:sldIdLst>
   <p:sldSz cx="12192000" cy="6858000"/>
   <p:notesSz cx="6858000" cy="9144000"/>
@@ -20301,7 +20300,7 @@
           <a:lstStyle/>
           <a:p>
             <a:r>
-              <a:rPr lang="zh-TW" sz="1150">
+              <a:rPr lang="zh-TW" sz="1150" dirty="0">
                 <a:solidFill>
                   <a:srgbClr val="E5E7EB"/>
                 </a:solidFill>
@@ -20314,7 +20313,7 @@
           </a:p>
           <a:p>
             <a:r>
-              <a:rPr lang="zh-TW" sz="1150">
+              <a:rPr lang="zh-TW" sz="1150" dirty="0">
                 <a:solidFill>
                   <a:srgbClr val="E5E7EB"/>
                 </a:solidFill>
@@ -20327,7 +20326,7 @@
           </a:p>
           <a:p>
             <a:r>
-              <a:rPr lang="zh-TW" sz="1150">
+              <a:rPr lang="zh-TW" sz="1150" dirty="0">
                 <a:solidFill>
                   <a:srgbClr val="E5E7EB"/>
                 </a:solidFill>
@@ -20340,7 +20339,7 @@
           </a:p>
           <a:p>
             <a:r>
-              <a:rPr lang="zh-TW" sz="1150">
+              <a:rPr lang="zh-TW" sz="1150" dirty="0">
                 <a:solidFill>
                   <a:srgbClr val="E5E7EB"/>
                 </a:solidFill>
@@ -20353,7 +20352,7 @@
           </a:p>
           <a:p>
             <a:r>
-              <a:rPr lang="zh-TW" sz="1150">
+              <a:rPr lang="zh-TW" sz="1150" dirty="0">
                 <a:solidFill>
                   <a:srgbClr val="E5E7EB"/>
                 </a:solidFill>
@@ -20366,7 +20365,7 @@
           </a:p>
           <a:p>
             <a:r>
-              <a:rPr lang="zh-TW" sz="1150">
+              <a:rPr lang="zh-TW" sz="1150" dirty="0">
                 <a:solidFill>
                   <a:srgbClr val="E5E7EB"/>
                 </a:solidFill>
@@ -21493,7 +21492,7 @@
               </a:defRPr>
             </a:pPr>
             <a:r>
-              <a:rPr sz="1650" b="0">
+              <a:rPr sz="1650" b="0" dirty="0">
                 <a:solidFill>
                   <a:srgbClr val="E5E7EB"/>
                 </a:solidFill>
@@ -21501,11 +21500,20 @@
                 <a:ea typeface="Consolas"/>
                 <a:cs typeface="Consolas"/>
               </a:rPr>
-              <a:t>docker exec -it my-web sh</a:t>
-            </a:r>
-          </a:p>
-          <a:p>
-            <a:endParaRPr sz="1650" b="0">
+              <a:t>docker exec -it my-web </a:t>
+            </a:r>
+            <a:r>
+              <a:rPr lang="en-US" sz="1650" b="0" dirty="0">
+                <a:solidFill>
+                  <a:srgbClr val="E5E7EB"/>
+                </a:solidFill>
+                <a:latin typeface="Consolas"/>
+                <a:ea typeface="Consolas"/>
+                <a:cs typeface="Consolas"/>
+              </a:rPr>
+              <a:t>bash</a:t>
+            </a:r>
+            <a:endParaRPr sz="1650" b="0" dirty="0">
               <a:solidFill>
                 <a:srgbClr val="E5E7EB"/>
               </a:solidFill>
@@ -21515,6 +21523,16 @@
             </a:endParaRPr>
           </a:p>
           <a:p>
+            <a:endParaRPr sz="1650" b="0" dirty="0">
+              <a:solidFill>
+                <a:srgbClr val="E5E7EB"/>
+              </a:solidFill>
+              <a:latin typeface="Consolas"/>
+              <a:ea typeface="Consolas"/>
+              <a:cs typeface="Consolas"/>
+            </a:endParaRPr>
+          </a:p>
+          <a:p>
             <a:pPr algn="l">
               <a:lnSpc>
                 <a:spcPct val="104000"/>
@@ -21530,7 +21548,7 @@
               </a:defRPr>
             </a:pPr>
             <a:r>
-              <a:rPr sz="1650" b="0">
+              <a:rPr sz="1650" b="0" dirty="0" err="1">
                 <a:solidFill>
                   <a:srgbClr val="E5E7EB"/>
                 </a:solidFill>
@@ -21540,6 +21558,14 @@
               </a:rPr>
               <a:t>pwd</a:t>
             </a:r>
+            <a:endParaRPr sz="1650" b="0" dirty="0">
+              <a:solidFill>
+                <a:srgbClr val="E5E7EB"/>
+              </a:solidFill>
+              <a:latin typeface="Consolas"/>
+              <a:ea typeface="Consolas"/>
+              <a:cs typeface="Consolas"/>
+            </a:endParaRPr>
           </a:p>
           <a:p>
             <a:pPr algn="l">
@@ -21557,7 +21583,7 @@
               </a:defRPr>
             </a:pPr>
             <a:r>
-              <a:rPr sz="1650" b="0">
+              <a:rPr sz="1650" b="0" dirty="0">
                 <a:solidFill>
                   <a:srgbClr val="E5E7EB"/>
                 </a:solidFill>
@@ -21584,7 +21610,7 @@
               </a:defRPr>
             </a:pPr>
             <a:r>
-              <a:rPr sz="1650" b="0">
+              <a:rPr sz="1650" b="0" dirty="0">
                 <a:solidFill>
                   <a:srgbClr val="E5E7EB"/>
                 </a:solidFill>
@@ -21592,7 +21618,29 @@
                 <a:ea typeface="Consolas"/>
                 <a:cs typeface="Consolas"/>
               </a:rPr>
-              <a:t>cd /usr/share/nginx/html</a:t>
+              <a:t>cd /</a:t>
+            </a:r>
+            <a:r>
+              <a:rPr sz="1650" b="0" dirty="0" err="1">
+                <a:solidFill>
+                  <a:srgbClr val="E5E7EB"/>
+                </a:solidFill>
+                <a:latin typeface="Consolas"/>
+                <a:ea typeface="Consolas"/>
+                <a:cs typeface="Consolas"/>
+              </a:rPr>
+              <a:t>usr</a:t>
+            </a:r>
+            <a:r>
+              <a:rPr sz="1650" b="0" dirty="0">
+                <a:solidFill>
+                  <a:srgbClr val="E5E7EB"/>
+                </a:solidFill>
+                <a:latin typeface="Consolas"/>
+                <a:ea typeface="Consolas"/>
+                <a:cs typeface="Consolas"/>
+              </a:rPr>
+              <a:t>/share/nginx/html</a:t>
             </a:r>
           </a:p>
           <a:p>
@@ -21611,7 +21659,7 @@
               </a:defRPr>
             </a:pPr>
             <a:r>
-              <a:rPr sz="1650" b="0">
+              <a:rPr sz="1650" b="0" dirty="0">
                 <a:solidFill>
                   <a:srgbClr val="E5E7EB"/>
                 </a:solidFill>
@@ -21638,7 +21686,7 @@
               </a:defRPr>
             </a:pPr>
             <a:r>
-              <a:rPr sz="1650" b="0">
+              <a:rPr sz="1650" b="0" dirty="0">
                 <a:solidFill>
                   <a:srgbClr val="E5E7EB"/>
                 </a:solidFill>
@@ -21665,7 +21713,7 @@
               </a:defRPr>
             </a:pPr>
             <a:r>
-              <a:rPr sz="1650" b="0">
+              <a:rPr sz="1650" b="0" dirty="0">
                 <a:solidFill>
                   <a:srgbClr val="E5E7EB"/>
                 </a:solidFill>
@@ -22954,10 +23002,10 @@
       </p:grpSpPr>
       <p:sp>
         <p:nvSpPr>
-          <p:cNvPr id="27" name="矩形 26">
-            <a:extLst>
-              <a:ext uri="{FF2B5EF4-FFF2-40B4-BE49-F238E27FC236}">
-                <a16:creationId xmlns:a16="http://schemas.microsoft.com/office/drawing/2014/main" id="{3785A105-2B81-4B56-AE1D-EA18C41AC846}"/>
+          <p:cNvPr id="17" name="矩形 16">
+            <a:extLst>
+              <a:ext uri="{FF2B5EF4-FFF2-40B4-BE49-F238E27FC236}">
+                <a16:creationId xmlns:a16="http://schemas.microsoft.com/office/drawing/2014/main" id="{32D72500-4ECE-4EF4-AF6D-1C7103D552AE}"/>
               </a:ext>
             </a:extLst>
           </p:cNvPr>
@@ -23009,7 +23057,7 @@
                 <a:ea typeface="Aptos"/>
                 <a:cs typeface="Aptos"/>
               </a:rPr>
-              <a:t>EXERCISE P2</a:t>
+              <a:t>CONTAINER LIFECYCLE</a:t>
             </a:r>
           </a:p>
         </p:txBody>
@@ -23019,7 +23067,7 @@
           <p:cNvPr id="2" name="矩形 1">
             <a:extLst>
               <a:ext uri="{FF2B5EF4-FFF2-40B4-BE49-F238E27FC236}">
-                <a16:creationId xmlns:a16="http://schemas.microsoft.com/office/drawing/2014/main" id="{6CDB3B6A-D03E-46B2-B8A4-08F608B7F1AA}"/>
+                <a16:creationId xmlns:a16="http://schemas.microsoft.com/office/drawing/2014/main" id="{7279AA9D-1CB6-4577-A990-F24C3203D30B}"/>
               </a:ext>
             </a:extLst>
           </p:cNvPr>
@@ -23071,909 +23119,33 @@
                 <a:ea typeface="Aptos Display"/>
                 <a:cs typeface="Aptos Display"/>
               </a:rPr>
-              <a:t>實作題 P2：啟動 Nginx 並自訂歡迎頁</a:t>
-            </a:r>
-          </a:p>
-        </p:txBody>
-      </p:sp>
-      <p:sp>
-        <p:nvSpPr>
-          <p:cNvPr id="3" name="橢圓 2">
-            <a:extLst>
-              <a:ext uri="{FF2B5EF4-FFF2-40B4-BE49-F238E27FC236}">
-                <a16:creationId xmlns:a16="http://schemas.microsoft.com/office/drawing/2014/main" id="{F5065FCA-FFE9-4F18-A159-749E7EA57CF9}"/>
-              </a:ext>
-            </a:extLst>
-          </p:cNvPr>
-          <p:cNvSpPr>
-            <a:spLocks noGrp="1"/>
-          </p:cNvSpPr>
-          <p:nvPr/>
-        </p:nvSpPr>
-        <p:spPr>
-          <a:xfrm>
-            <a:off x="952500" y="1733550"/>
-            <a:ext cx="457200" cy="457200"/>
-          </a:xfrm>
-          <a:prstGeom prst="ellipse">
-            <a:avLst/>
-          </a:prstGeom>
-          <a:solidFill>
-            <a:srgbClr val="E8F3FF"/>
-          </a:solidFill>
-          <a:ln w="9525">
-            <a:solidFill>
-              <a:srgbClr val="2496ED"/>
-            </a:solidFill>
-            <a:prstDash val="solid"/>
-          </a:ln>
-        </p:spPr>
-      </p:sp>
-      <p:sp>
-        <p:nvSpPr>
-          <p:cNvPr id="4" name="矩形 3">
-            <a:extLst>
-              <a:ext uri="{FF2B5EF4-FFF2-40B4-BE49-F238E27FC236}">
-                <a16:creationId xmlns:a16="http://schemas.microsoft.com/office/drawing/2014/main" id="{5ED22F91-AE3E-4429-947D-2A20D3E7CEB1}"/>
-              </a:ext>
-            </a:extLst>
-          </p:cNvPr>
-          <p:cNvSpPr>
-            <a:spLocks noGrp="1"/>
-          </p:cNvSpPr>
-          <p:nvPr/>
-        </p:nvSpPr>
-        <p:spPr>
-          <a:xfrm>
-            <a:off x="952500" y="1857375"/>
-            <a:ext cx="457200" cy="190500"/>
-          </a:xfrm>
-          <a:prstGeom prst="rect">
-            <a:avLst/>
-          </a:prstGeom>
-          <a:noFill/>
-          <a:ln w="0">
-            <a:noFill/>
-            <a:prstDash val="solid"/>
-          </a:ln>
-        </p:spPr>
-        <p:txBody>
-          <a:bodyPr lIns="0" tIns="0" rIns="0" bIns="0" anchor="t">
-            <a:normAutofit fontScale="93371"/>
-          </a:bodyPr>
-          <a:lstStyle/>
-          <a:p>
-            <a:pPr algn="ctr">
-              <a:lnSpc>
-                <a:spcPct val="105000"/>
-              </a:lnSpc>
-              <a:buNone/>
-              <a:defRPr sz="1275" b="1">
-                <a:solidFill>
-                  <a:srgbClr val="0B5CAD"/>
-                </a:solidFill>
-                <a:latin typeface="Aptos"/>
-                <a:ea typeface="Aptos"/>
-                <a:cs typeface="Aptos"/>
-              </a:defRPr>
-            </a:pPr>
-            <a:r>
-              <a:rPr sz="1275" b="1">
-                <a:solidFill>
-                  <a:srgbClr val="0B5CAD"/>
-                </a:solidFill>
-                <a:latin typeface="Aptos"/>
-                <a:ea typeface="Aptos"/>
-                <a:cs typeface="Aptos"/>
-              </a:rPr>
-              <a:t>1</a:t>
-            </a:r>
-          </a:p>
-        </p:txBody>
-      </p:sp>
-      <p:sp>
-        <p:nvSpPr>
-          <p:cNvPr id="5" name="矩形 4">
-            <a:extLst>
-              <a:ext uri="{FF2B5EF4-FFF2-40B4-BE49-F238E27FC236}">
-                <a16:creationId xmlns:a16="http://schemas.microsoft.com/office/drawing/2014/main" id="{654EEF8C-527C-4AFC-97B9-453F2A2C1957}"/>
-              </a:ext>
-            </a:extLst>
-          </p:cNvPr>
-          <p:cNvSpPr>
-            <a:spLocks noGrp="1"/>
-          </p:cNvSpPr>
-          <p:nvPr/>
-        </p:nvSpPr>
-        <p:spPr>
-          <a:xfrm>
-            <a:off x="1600200" y="1581150"/>
-            <a:ext cx="3905250" cy="285750"/>
-          </a:xfrm>
-          <a:prstGeom prst="rect">
-            <a:avLst/>
-          </a:prstGeom>
-          <a:noFill/>
-          <a:ln w="0">
-            <a:noFill/>
-            <a:prstDash val="solid"/>
-          </a:ln>
-        </p:spPr>
-        <p:txBody>
-          <a:bodyPr lIns="0" tIns="0" rIns="0" bIns="0" anchor="t">
-            <a:normAutofit fontScale="95238"/>
-          </a:bodyPr>
-          <a:lstStyle/>
-          <a:p>
-            <a:pPr algn="l">
-              <a:lnSpc>
-                <a:spcPct val="105000"/>
-              </a:lnSpc>
-              <a:buNone/>
-              <a:defRPr sz="1875" b="1">
-                <a:solidFill>
-                  <a:srgbClr val="0B1220"/>
-                </a:solidFill>
-                <a:latin typeface="Aptos Display"/>
-                <a:ea typeface="Aptos Display"/>
-                <a:cs typeface="Aptos Display"/>
-              </a:defRPr>
-            </a:pPr>
-            <a:r>
-              <a:rPr sz="1875" b="1">
-                <a:solidFill>
-                  <a:srgbClr val="0B1220"/>
-                </a:solidFill>
-                <a:latin typeface="Aptos Display"/>
-                <a:ea typeface="Aptos Display"/>
-                <a:cs typeface="Aptos Display"/>
-              </a:rPr>
-              <a:t>建立 my-html</a:t>
-            </a:r>
-          </a:p>
-        </p:txBody>
-      </p:sp>
-      <p:sp>
-        <p:nvSpPr>
-          <p:cNvPr id="6" name="矩形 5">
-            <a:extLst>
-              <a:ext uri="{FF2B5EF4-FFF2-40B4-BE49-F238E27FC236}">
-                <a16:creationId xmlns:a16="http://schemas.microsoft.com/office/drawing/2014/main" id="{47281EF3-17F6-4C62-8598-A960C19B733C}"/>
-              </a:ext>
-            </a:extLst>
-          </p:cNvPr>
-          <p:cNvSpPr>
-            <a:spLocks noGrp="1"/>
-          </p:cNvSpPr>
-          <p:nvPr/>
-        </p:nvSpPr>
-        <p:spPr>
-          <a:xfrm>
-            <a:off x="1600200" y="1962150"/>
-            <a:ext cx="3905250" cy="438150"/>
-          </a:xfrm>
-          <a:prstGeom prst="rect">
-            <a:avLst/>
-          </a:prstGeom>
-          <a:noFill/>
-          <a:ln w="0">
-            <a:noFill/>
-            <a:prstDash val="solid"/>
-          </a:ln>
-        </p:spPr>
-        <p:txBody>
-          <a:bodyPr lIns="0" tIns="0" rIns="0" bIns="0" anchor="t">
-            <a:normAutofit/>
-          </a:bodyPr>
-          <a:lstStyle/>
-          <a:p>
-            <a:pPr algn="l">
-              <a:lnSpc>
-                <a:spcPct val="105000"/>
-              </a:lnSpc>
-              <a:buNone/>
-              <a:defRPr sz="1350" b="0">
-                <a:solidFill>
-                  <a:srgbClr val="111827"/>
-                </a:solidFill>
-                <a:latin typeface="Aptos"/>
-                <a:ea typeface="Aptos"/>
-                <a:cs typeface="Aptos"/>
-              </a:defRPr>
-            </a:pPr>
-            <a:r>
-              <a:rPr sz="1350" b="0">
-                <a:solidFill>
-                  <a:srgbClr val="111827"/>
-                </a:solidFill>
-                <a:latin typeface="Aptos"/>
-                <a:ea typeface="Aptos"/>
-                <a:cs typeface="Aptos"/>
-              </a:rPr>
-              <a:t>資料夾內放 index.html，內容寫自己的名字。</a:t>
-            </a:r>
-          </a:p>
-        </p:txBody>
-      </p:sp>
-      <p:sp>
-        <p:nvSpPr>
-          <p:cNvPr id="7" name="橢圓 6">
-            <a:extLst>
-              <a:ext uri="{FF2B5EF4-FFF2-40B4-BE49-F238E27FC236}">
-                <a16:creationId xmlns:a16="http://schemas.microsoft.com/office/drawing/2014/main" id="{BC6BBCFB-6B21-46DD-BF50-32EF745D6392}"/>
-              </a:ext>
-            </a:extLst>
-          </p:cNvPr>
-          <p:cNvSpPr>
-            <a:spLocks noGrp="1"/>
-          </p:cNvSpPr>
-          <p:nvPr/>
-        </p:nvSpPr>
-        <p:spPr>
-          <a:xfrm>
-            <a:off x="6496050" y="1733550"/>
-            <a:ext cx="457200" cy="457200"/>
-          </a:xfrm>
-          <a:prstGeom prst="ellipse">
-            <a:avLst/>
-          </a:prstGeom>
-          <a:solidFill>
-            <a:srgbClr val="E8F3FF"/>
-          </a:solidFill>
-          <a:ln w="9525">
-            <a:solidFill>
-              <a:srgbClr val="2496ED"/>
-            </a:solidFill>
-            <a:prstDash val="solid"/>
-          </a:ln>
-        </p:spPr>
-      </p:sp>
-      <p:sp>
-        <p:nvSpPr>
-          <p:cNvPr id="8" name="矩形 7">
-            <a:extLst>
-              <a:ext uri="{FF2B5EF4-FFF2-40B4-BE49-F238E27FC236}">
-                <a16:creationId xmlns:a16="http://schemas.microsoft.com/office/drawing/2014/main" id="{E52B7A77-9158-4F1B-B9E9-33BCF94B29DD}"/>
-              </a:ext>
-            </a:extLst>
-          </p:cNvPr>
-          <p:cNvSpPr>
-            <a:spLocks noGrp="1"/>
-          </p:cNvSpPr>
-          <p:nvPr/>
-        </p:nvSpPr>
-        <p:spPr>
-          <a:xfrm>
-            <a:off x="6496050" y="1857375"/>
-            <a:ext cx="457200" cy="190500"/>
-          </a:xfrm>
-          <a:prstGeom prst="rect">
-            <a:avLst/>
-          </a:prstGeom>
-          <a:noFill/>
-          <a:ln w="0">
-            <a:noFill/>
-            <a:prstDash val="solid"/>
-          </a:ln>
-        </p:spPr>
-        <p:txBody>
-          <a:bodyPr lIns="0" tIns="0" rIns="0" bIns="0" anchor="t">
-            <a:normAutofit fontScale="93371"/>
-          </a:bodyPr>
-          <a:lstStyle/>
-          <a:p>
-            <a:pPr algn="ctr">
-              <a:lnSpc>
-                <a:spcPct val="105000"/>
-              </a:lnSpc>
-              <a:buNone/>
-              <a:defRPr sz="1275" b="1">
-                <a:solidFill>
-                  <a:srgbClr val="0B5CAD"/>
-                </a:solidFill>
-                <a:latin typeface="Aptos"/>
-                <a:ea typeface="Aptos"/>
-                <a:cs typeface="Aptos"/>
-              </a:defRPr>
-            </a:pPr>
-            <a:r>
-              <a:rPr sz="1275" b="1">
-                <a:solidFill>
-                  <a:srgbClr val="0B5CAD"/>
-                </a:solidFill>
-                <a:latin typeface="Aptos"/>
-                <a:ea typeface="Aptos"/>
-                <a:cs typeface="Aptos"/>
-              </a:rPr>
-              <a:t>2</a:t>
-            </a:r>
-          </a:p>
-        </p:txBody>
-      </p:sp>
-      <p:sp>
-        <p:nvSpPr>
-          <p:cNvPr id="9" name="矩形 8">
-            <a:extLst>
-              <a:ext uri="{FF2B5EF4-FFF2-40B4-BE49-F238E27FC236}">
-                <a16:creationId xmlns:a16="http://schemas.microsoft.com/office/drawing/2014/main" id="{B3910725-E66C-410D-955D-E5ABA6437A68}"/>
-              </a:ext>
-            </a:extLst>
-          </p:cNvPr>
-          <p:cNvSpPr>
-            <a:spLocks noGrp="1"/>
-          </p:cNvSpPr>
-          <p:nvPr/>
-        </p:nvSpPr>
-        <p:spPr>
-          <a:xfrm>
-            <a:off x="7143750" y="1581150"/>
-            <a:ext cx="3905250" cy="285750"/>
-          </a:xfrm>
-          <a:prstGeom prst="rect">
-            <a:avLst/>
-          </a:prstGeom>
-          <a:noFill/>
-          <a:ln w="0">
-            <a:noFill/>
-            <a:prstDash val="solid"/>
-          </a:ln>
-        </p:spPr>
-        <p:txBody>
-          <a:bodyPr lIns="0" tIns="0" rIns="0" bIns="0" anchor="t">
-            <a:normAutofit fontScale="95238"/>
-          </a:bodyPr>
-          <a:lstStyle/>
-          <a:p>
-            <a:pPr algn="l">
-              <a:lnSpc>
-                <a:spcPct val="105000"/>
-              </a:lnSpc>
-              <a:buNone/>
-              <a:defRPr sz="1875" b="1">
-                <a:solidFill>
-                  <a:srgbClr val="0B1220"/>
-                </a:solidFill>
-                <a:latin typeface="Aptos Display"/>
-                <a:ea typeface="Aptos Display"/>
-                <a:cs typeface="Aptos Display"/>
-              </a:defRPr>
-            </a:pPr>
-            <a:r>
-              <a:rPr sz="1875" b="1">
-                <a:solidFill>
-                  <a:srgbClr val="0B1220"/>
-                </a:solidFill>
-                <a:latin typeface="Aptos Display"/>
-                <a:ea typeface="Aptos Display"/>
-                <a:cs typeface="Aptos Display"/>
-              </a:rPr>
-              <a:t>掛載到 Nginx</a:t>
-            </a:r>
-          </a:p>
-        </p:txBody>
-      </p:sp>
-      <p:sp>
-        <p:nvSpPr>
-          <p:cNvPr id="10" name="矩形 9">
-            <a:extLst>
-              <a:ext uri="{FF2B5EF4-FFF2-40B4-BE49-F238E27FC236}">
-                <a16:creationId xmlns:a16="http://schemas.microsoft.com/office/drawing/2014/main" id="{150B8307-1F3D-4DA2-870E-483B88B6C864}"/>
-              </a:ext>
-            </a:extLst>
-          </p:cNvPr>
-          <p:cNvSpPr>
-            <a:spLocks noGrp="1"/>
-          </p:cNvSpPr>
-          <p:nvPr/>
-        </p:nvSpPr>
-        <p:spPr>
-          <a:xfrm>
-            <a:off x="7143750" y="1962150"/>
-            <a:ext cx="3905250" cy="438150"/>
-          </a:xfrm>
-          <a:prstGeom prst="rect">
-            <a:avLst/>
-          </a:prstGeom>
-          <a:noFill/>
-          <a:ln w="0">
-            <a:noFill/>
-            <a:prstDash val="solid"/>
-          </a:ln>
-        </p:spPr>
-        <p:txBody>
-          <a:bodyPr lIns="0" tIns="0" rIns="0" bIns="0" anchor="t">
-            <a:normAutofit/>
-          </a:bodyPr>
-          <a:lstStyle/>
-          <a:p>
-            <a:pPr algn="l">
-              <a:lnSpc>
-                <a:spcPct val="105000"/>
-              </a:lnSpc>
-              <a:buNone/>
-              <a:defRPr sz="1350" b="0">
-                <a:solidFill>
-                  <a:srgbClr val="111827"/>
-                </a:solidFill>
-                <a:latin typeface="Aptos"/>
-                <a:ea typeface="Aptos"/>
-                <a:cs typeface="Aptos"/>
-              </a:defRPr>
-            </a:pPr>
-            <a:r>
-              <a:rPr sz="1350" b="0">
-                <a:solidFill>
-                  <a:srgbClr val="111827"/>
-                </a:solidFill>
-                <a:latin typeface="Aptos"/>
-                <a:ea typeface="Aptos"/>
-                <a:cs typeface="Aptos"/>
-              </a:rPr>
-              <a:t>把 my-html 掛到 /usr/share/nginx/html。</a:t>
-            </a:r>
-          </a:p>
-        </p:txBody>
-      </p:sp>
-      <p:sp>
-        <p:nvSpPr>
-          <p:cNvPr id="11" name="橢圓 10">
-            <a:extLst>
-              <a:ext uri="{FF2B5EF4-FFF2-40B4-BE49-F238E27FC236}">
-                <a16:creationId xmlns:a16="http://schemas.microsoft.com/office/drawing/2014/main" id="{8FE36071-EFC3-4BB2-9935-32567E6F6670}"/>
-              </a:ext>
-            </a:extLst>
-          </p:cNvPr>
-          <p:cNvSpPr>
-            <a:spLocks noGrp="1"/>
-          </p:cNvSpPr>
-          <p:nvPr/>
-        </p:nvSpPr>
-        <p:spPr>
-          <a:xfrm>
-            <a:off x="952500" y="3486150"/>
-            <a:ext cx="457200" cy="457200"/>
-          </a:xfrm>
-          <a:prstGeom prst="ellipse">
-            <a:avLst/>
-          </a:prstGeom>
-          <a:solidFill>
-            <a:srgbClr val="E7F8F2"/>
-          </a:solidFill>
-          <a:ln w="9525">
-            <a:solidFill>
-              <a:srgbClr val="00A97F"/>
-            </a:solidFill>
-            <a:prstDash val="solid"/>
-          </a:ln>
-        </p:spPr>
-      </p:sp>
-      <p:sp>
-        <p:nvSpPr>
-          <p:cNvPr id="12" name="矩形 11">
-            <a:extLst>
-              <a:ext uri="{FF2B5EF4-FFF2-40B4-BE49-F238E27FC236}">
-                <a16:creationId xmlns:a16="http://schemas.microsoft.com/office/drawing/2014/main" id="{59057127-868A-4BDB-9D8B-5DE6B72DBC54}"/>
-              </a:ext>
-            </a:extLst>
-          </p:cNvPr>
-          <p:cNvSpPr>
-            <a:spLocks noGrp="1"/>
-          </p:cNvSpPr>
-          <p:nvPr/>
-        </p:nvSpPr>
-        <p:spPr>
-          <a:xfrm>
-            <a:off x="952500" y="3609975"/>
-            <a:ext cx="457200" cy="190500"/>
-          </a:xfrm>
-          <a:prstGeom prst="rect">
-            <a:avLst/>
-          </a:prstGeom>
-          <a:noFill/>
-          <a:ln w="0">
-            <a:noFill/>
-            <a:prstDash val="solid"/>
-          </a:ln>
-        </p:spPr>
-        <p:txBody>
-          <a:bodyPr lIns="0" tIns="0" rIns="0" bIns="0" anchor="t">
-            <a:normAutofit fontScale="93371"/>
-          </a:bodyPr>
-          <a:lstStyle/>
-          <a:p>
-            <a:pPr algn="ctr">
-              <a:lnSpc>
-                <a:spcPct val="105000"/>
-              </a:lnSpc>
-              <a:buNone/>
-              <a:defRPr sz="1275" b="1">
-                <a:solidFill>
-                  <a:srgbClr val="047857"/>
-                </a:solidFill>
-                <a:latin typeface="Aptos"/>
-                <a:ea typeface="Aptos"/>
-                <a:cs typeface="Aptos"/>
-              </a:defRPr>
-            </a:pPr>
-            <a:r>
-              <a:rPr sz="1275" b="1">
-                <a:solidFill>
-                  <a:srgbClr val="047857"/>
-                </a:solidFill>
-                <a:latin typeface="Aptos"/>
-                <a:ea typeface="Aptos"/>
-                <a:cs typeface="Aptos"/>
-              </a:rPr>
-              <a:t>3</a:t>
-            </a:r>
-          </a:p>
-        </p:txBody>
-      </p:sp>
-      <p:sp>
-        <p:nvSpPr>
-          <p:cNvPr id="13" name="矩形 12">
-            <a:extLst>
-              <a:ext uri="{FF2B5EF4-FFF2-40B4-BE49-F238E27FC236}">
-                <a16:creationId xmlns:a16="http://schemas.microsoft.com/office/drawing/2014/main" id="{40E0B583-8B59-407D-81C2-384A709A0D48}"/>
-              </a:ext>
-            </a:extLst>
-          </p:cNvPr>
-          <p:cNvSpPr>
-            <a:spLocks noGrp="1"/>
-          </p:cNvSpPr>
-          <p:nvPr/>
-        </p:nvSpPr>
-        <p:spPr>
-          <a:xfrm>
-            <a:off x="1600200" y="3333750"/>
-            <a:ext cx="3905250" cy="285750"/>
-          </a:xfrm>
-          <a:prstGeom prst="rect">
-            <a:avLst/>
-          </a:prstGeom>
-          <a:noFill/>
-          <a:ln w="0">
-            <a:noFill/>
-            <a:prstDash val="solid"/>
-          </a:ln>
-        </p:spPr>
-        <p:txBody>
-          <a:bodyPr lIns="0" tIns="0" rIns="0" bIns="0" anchor="t">
-            <a:normAutofit fontScale="95238"/>
-          </a:bodyPr>
-          <a:lstStyle/>
-          <a:p>
-            <a:pPr algn="l">
-              <a:lnSpc>
-                <a:spcPct val="105000"/>
-              </a:lnSpc>
-              <a:buNone/>
-              <a:defRPr sz="1875" b="1">
-                <a:solidFill>
-                  <a:srgbClr val="0B1220"/>
-                </a:solidFill>
-                <a:latin typeface="Aptos Display"/>
-                <a:ea typeface="Aptos Display"/>
-                <a:cs typeface="Aptos Display"/>
-              </a:defRPr>
-            </a:pPr>
-            <a:r>
-              <a:rPr sz="1875" b="1">
-                <a:solidFill>
-                  <a:srgbClr val="0B1220"/>
-                </a:solidFill>
-                <a:latin typeface="Aptos Display"/>
-                <a:ea typeface="Aptos Display"/>
-                <a:cs typeface="Aptos Display"/>
-              </a:rPr>
-              <a:t>瀏覽器確認</a:t>
-            </a:r>
-          </a:p>
-        </p:txBody>
-      </p:sp>
-      <p:sp>
-        <p:nvSpPr>
-          <p:cNvPr id="14" name="矩形 13">
-            <a:extLst>
-              <a:ext uri="{FF2B5EF4-FFF2-40B4-BE49-F238E27FC236}">
-                <a16:creationId xmlns:a16="http://schemas.microsoft.com/office/drawing/2014/main" id="{D21FE4F8-9DE1-421D-9687-6247580343E9}"/>
-              </a:ext>
-            </a:extLst>
-          </p:cNvPr>
-          <p:cNvSpPr>
-            <a:spLocks noGrp="1"/>
-          </p:cNvSpPr>
-          <p:nvPr/>
-        </p:nvSpPr>
-        <p:spPr>
-          <a:xfrm>
-            <a:off x="1600200" y="3714750"/>
-            <a:ext cx="3905250" cy="438150"/>
-          </a:xfrm>
-          <a:prstGeom prst="rect">
-            <a:avLst/>
-          </a:prstGeom>
-          <a:noFill/>
-          <a:ln w="0">
-            <a:noFill/>
-            <a:prstDash val="solid"/>
-          </a:ln>
-        </p:spPr>
-        <p:txBody>
-          <a:bodyPr lIns="0" tIns="0" rIns="0" bIns="0" anchor="t">
-            <a:normAutofit/>
-          </a:bodyPr>
-          <a:lstStyle/>
-          <a:p>
-            <a:pPr algn="l">
-              <a:lnSpc>
-                <a:spcPct val="105000"/>
-              </a:lnSpc>
-              <a:buNone/>
-              <a:defRPr sz="1350" b="0">
-                <a:solidFill>
-                  <a:srgbClr val="111827"/>
-                </a:solidFill>
-                <a:latin typeface="Aptos"/>
-                <a:ea typeface="Aptos"/>
-                <a:cs typeface="Aptos"/>
-              </a:defRPr>
-            </a:pPr>
-            <a:r>
-              <a:rPr sz="1350" b="0">
-                <a:solidFill>
-                  <a:srgbClr val="111827"/>
-                </a:solidFill>
-                <a:latin typeface="Aptos"/>
-                <a:ea typeface="Aptos"/>
-                <a:cs typeface="Aptos"/>
-              </a:rPr>
-              <a:t>打開 localhost:8080，看到自己的內容。</a:t>
-            </a:r>
-          </a:p>
-        </p:txBody>
-      </p:sp>
-      <p:sp>
-        <p:nvSpPr>
-          <p:cNvPr id="15" name="橢圓 14">
-            <a:extLst>
-              <a:ext uri="{FF2B5EF4-FFF2-40B4-BE49-F238E27FC236}">
-                <a16:creationId xmlns:a16="http://schemas.microsoft.com/office/drawing/2014/main" id="{8CA81235-B0D1-4A90-BA75-954D4F5F9107}"/>
-              </a:ext>
-            </a:extLst>
-          </p:cNvPr>
-          <p:cNvSpPr>
-            <a:spLocks noGrp="1"/>
-          </p:cNvSpPr>
-          <p:nvPr/>
-        </p:nvSpPr>
-        <p:spPr>
-          <a:xfrm>
-            <a:off x="6496050" y="3486150"/>
-            <a:ext cx="457200" cy="457200"/>
-          </a:xfrm>
-          <a:prstGeom prst="ellipse">
-            <a:avLst/>
-          </a:prstGeom>
-          <a:solidFill>
-            <a:srgbClr val="E7F8F2"/>
-          </a:solidFill>
-          <a:ln w="9525">
-            <a:solidFill>
-              <a:srgbClr val="00A97F"/>
-            </a:solidFill>
-            <a:prstDash val="solid"/>
-          </a:ln>
-        </p:spPr>
-      </p:sp>
-      <p:sp>
-        <p:nvSpPr>
-          <p:cNvPr id="16" name="矩形 15">
-            <a:extLst>
-              <a:ext uri="{FF2B5EF4-FFF2-40B4-BE49-F238E27FC236}">
-                <a16:creationId xmlns:a16="http://schemas.microsoft.com/office/drawing/2014/main" id="{DFB85B9D-D89F-461F-B9F5-B3192BE0E2FF}"/>
-              </a:ext>
-            </a:extLst>
-          </p:cNvPr>
-          <p:cNvSpPr>
-            <a:spLocks noGrp="1"/>
-          </p:cNvSpPr>
-          <p:nvPr/>
-        </p:nvSpPr>
-        <p:spPr>
-          <a:xfrm>
-            <a:off x="6496050" y="3609975"/>
-            <a:ext cx="457200" cy="190500"/>
-          </a:xfrm>
-          <a:prstGeom prst="rect">
-            <a:avLst/>
-          </a:prstGeom>
-          <a:noFill/>
-          <a:ln w="0">
-            <a:noFill/>
-            <a:prstDash val="solid"/>
-          </a:ln>
-        </p:spPr>
-        <p:txBody>
-          <a:bodyPr lIns="0" tIns="0" rIns="0" bIns="0" anchor="t">
-            <a:normAutofit fontScale="93371"/>
-          </a:bodyPr>
-          <a:lstStyle/>
-          <a:p>
-            <a:pPr algn="ctr">
-              <a:lnSpc>
-                <a:spcPct val="105000"/>
-              </a:lnSpc>
-              <a:buNone/>
-              <a:defRPr sz="1275" b="1">
-                <a:solidFill>
-                  <a:srgbClr val="047857"/>
-                </a:solidFill>
-                <a:latin typeface="Aptos"/>
-                <a:ea typeface="Aptos"/>
-                <a:cs typeface="Aptos"/>
-              </a:defRPr>
-            </a:pPr>
-            <a:r>
-              <a:rPr sz="1275" b="1">
-                <a:solidFill>
-                  <a:srgbClr val="047857"/>
-                </a:solidFill>
-                <a:latin typeface="Aptos"/>
-                <a:ea typeface="Aptos"/>
-                <a:cs typeface="Aptos"/>
-              </a:rPr>
-              <a:t>4</a:t>
-            </a:r>
-          </a:p>
-        </p:txBody>
-      </p:sp>
-      <p:sp>
-        <p:nvSpPr>
-          <p:cNvPr id="17" name="矩形 16">
-            <a:extLst>
-              <a:ext uri="{FF2B5EF4-FFF2-40B4-BE49-F238E27FC236}">
-                <a16:creationId xmlns:a16="http://schemas.microsoft.com/office/drawing/2014/main" id="{CC187838-CB06-46F3-A419-7D3D1D1E5071}"/>
-              </a:ext>
-            </a:extLst>
-          </p:cNvPr>
-          <p:cNvSpPr>
-            <a:spLocks noGrp="1"/>
-          </p:cNvSpPr>
-          <p:nvPr/>
-        </p:nvSpPr>
-        <p:spPr>
-          <a:xfrm>
-            <a:off x="7143750" y="3333750"/>
-            <a:ext cx="3905250" cy="285750"/>
-          </a:xfrm>
-          <a:prstGeom prst="rect">
-            <a:avLst/>
-          </a:prstGeom>
-          <a:noFill/>
-          <a:ln w="0">
-            <a:noFill/>
-            <a:prstDash val="solid"/>
-          </a:ln>
-        </p:spPr>
-        <p:txBody>
-          <a:bodyPr lIns="0" tIns="0" rIns="0" bIns="0" anchor="t">
-            <a:normAutofit fontScale="95238"/>
-          </a:bodyPr>
-          <a:lstStyle/>
-          <a:p>
-            <a:pPr algn="l">
-              <a:lnSpc>
-                <a:spcPct val="105000"/>
-              </a:lnSpc>
-              <a:buNone/>
-              <a:defRPr sz="1875" b="1">
-                <a:solidFill>
-                  <a:srgbClr val="0B1220"/>
-                </a:solidFill>
-                <a:latin typeface="Aptos Display"/>
-                <a:ea typeface="Aptos Display"/>
-                <a:cs typeface="Aptos Display"/>
-              </a:defRPr>
-            </a:pPr>
-            <a:r>
-              <a:rPr sz="1875" b="1">
-                <a:solidFill>
-                  <a:srgbClr val="0B1220"/>
-                </a:solidFill>
-                <a:latin typeface="Aptos Display"/>
-                <a:ea typeface="Aptos Display"/>
-                <a:cs typeface="Aptos Display"/>
-              </a:rPr>
-              <a:t>進容器檢查</a:t>
-            </a:r>
-          </a:p>
-        </p:txBody>
-      </p:sp>
-      <p:sp>
-        <p:nvSpPr>
-          <p:cNvPr id="18" name="矩形 17">
-            <a:extLst>
-              <a:ext uri="{FF2B5EF4-FFF2-40B4-BE49-F238E27FC236}">
-                <a16:creationId xmlns:a16="http://schemas.microsoft.com/office/drawing/2014/main" id="{AC522391-7AB7-460E-8EBF-B63511E485DD}"/>
-              </a:ext>
-            </a:extLst>
-          </p:cNvPr>
-          <p:cNvSpPr>
-            <a:spLocks noGrp="1"/>
-          </p:cNvSpPr>
-          <p:nvPr/>
-        </p:nvSpPr>
-        <p:spPr>
-          <a:xfrm>
-            <a:off x="7143750" y="3714750"/>
-            <a:ext cx="3905250" cy="438150"/>
-          </a:xfrm>
-          <a:prstGeom prst="rect">
-            <a:avLst/>
-          </a:prstGeom>
-          <a:noFill/>
-          <a:ln w="0">
-            <a:noFill/>
-            <a:prstDash val="solid"/>
-          </a:ln>
-        </p:spPr>
-        <p:txBody>
-          <a:bodyPr lIns="0" tIns="0" rIns="0" bIns="0" anchor="t">
-            <a:normAutofit/>
-          </a:bodyPr>
-          <a:lstStyle/>
-          <a:p>
-            <a:pPr algn="l">
-              <a:lnSpc>
-                <a:spcPct val="105000"/>
-              </a:lnSpc>
-              <a:buNone/>
-              <a:defRPr sz="1350" b="0">
-                <a:solidFill>
-                  <a:srgbClr val="111827"/>
-                </a:solidFill>
-                <a:latin typeface="Aptos"/>
-                <a:ea typeface="Aptos"/>
-                <a:cs typeface="Aptos"/>
-              </a:defRPr>
-            </a:pPr>
-            <a:r>
-              <a:rPr sz="1350" b="0">
-                <a:solidFill>
-                  <a:srgbClr val="111827"/>
-                </a:solidFill>
-                <a:latin typeface="Aptos"/>
-                <a:ea typeface="Aptos"/>
-                <a:cs typeface="Aptos"/>
-              </a:rPr>
-              <a:t>cat /usr/share/nginx/html/index.html</a:t>
-            </a:r>
-          </a:p>
-        </p:txBody>
-      </p:sp>
-      <p:sp>
-        <p:nvSpPr>
-          <p:cNvPr id="19" name="矩形: 圓角 18">
-            <a:extLst>
-              <a:ext uri="{FF2B5EF4-FFF2-40B4-BE49-F238E27FC236}">
-                <a16:creationId xmlns:a16="http://schemas.microsoft.com/office/drawing/2014/main" id="{98A4247D-FE4D-4C10-9306-9B618288D947}"/>
-              </a:ext>
-            </a:extLst>
-          </p:cNvPr>
-          <p:cNvSpPr>
-            <a:spLocks noGrp="1"/>
-          </p:cNvSpPr>
-          <p:nvPr/>
-        </p:nvSpPr>
-        <p:spPr>
-          <a:xfrm>
-            <a:off x="1257300" y="5029200"/>
-            <a:ext cx="9677400" cy="952500"/>
+              <a:t>第一堂必會的容器生命週期指令</a:t>
+            </a:r>
+          </a:p>
+        </p:txBody>
+      </p:sp>
+      <p:sp>
+        <p:nvSpPr>
+          <p:cNvPr id="3" name="矩形: 圓角 2">
+            <a:extLst>
+              <a:ext uri="{FF2B5EF4-FFF2-40B4-BE49-F238E27FC236}">
+                <a16:creationId xmlns:a16="http://schemas.microsoft.com/office/drawing/2014/main" id="{01928344-03DB-4672-B876-342328948AFC}"/>
+              </a:ext>
+            </a:extLst>
+          </p:cNvPr>
+          <p:cNvSpPr>
+            <a:spLocks noGrp="1"/>
+          </p:cNvSpPr>
+          <p:nvPr/>
+        </p:nvSpPr>
+        <p:spPr>
+          <a:xfrm>
+            <a:off x="666750" y="1504950"/>
+            <a:ext cx="4762500" cy="3886200"/>
           </a:xfrm>
           <a:prstGeom prst="roundRect">
             <a:avLst>
-              <a:gd name="adj" fmla="val 10000"/>
+              <a:gd name="adj" fmla="val 2451"/>
             </a:avLst>
           </a:prstGeom>
           <a:solidFill>
@@ -24001,21 +23173,21 @@
       </p:sp>
       <p:sp>
         <p:nvSpPr>
-          <p:cNvPr id="20" name="橢圓 19">
-            <a:extLst>
-              <a:ext uri="{FF2B5EF4-FFF2-40B4-BE49-F238E27FC236}">
-                <a16:creationId xmlns:a16="http://schemas.microsoft.com/office/drawing/2014/main" id="{CA76ADCA-5B68-44C2-8873-802D754678F4}"/>
-              </a:ext>
-            </a:extLst>
-          </p:cNvPr>
-          <p:cNvSpPr>
-            <a:spLocks noGrp="1"/>
-          </p:cNvSpPr>
-          <p:nvPr/>
-        </p:nvSpPr>
-        <p:spPr>
-          <a:xfrm>
-            <a:off x="1428750" y="5191125"/>
+          <p:cNvPr id="4" name="橢圓 3">
+            <a:extLst>
+              <a:ext uri="{FF2B5EF4-FFF2-40B4-BE49-F238E27FC236}">
+                <a16:creationId xmlns:a16="http://schemas.microsoft.com/office/drawing/2014/main" id="{831E50CD-71DD-40D9-B178-2A8691ACD8F2}"/>
+              </a:ext>
+            </a:extLst>
+          </p:cNvPr>
+          <p:cNvSpPr>
+            <a:spLocks noGrp="1"/>
+          </p:cNvSpPr>
+          <p:nvPr/>
+        </p:nvSpPr>
+        <p:spPr>
+          <a:xfrm>
+            <a:off x="838200" y="1666875"/>
             <a:ext cx="95250" cy="95250"/>
           </a:xfrm>
           <a:prstGeom prst="ellipse">
@@ -24032,21 +23204,21 @@
       </p:sp>
       <p:sp>
         <p:nvSpPr>
-          <p:cNvPr id="21" name="橢圓 20">
-            <a:extLst>
-              <a:ext uri="{FF2B5EF4-FFF2-40B4-BE49-F238E27FC236}">
-                <a16:creationId xmlns:a16="http://schemas.microsoft.com/office/drawing/2014/main" id="{CFD713CB-4C14-4FC8-AECF-EF51C148CAAB}"/>
-              </a:ext>
-            </a:extLst>
-          </p:cNvPr>
-          <p:cNvSpPr>
-            <a:spLocks noGrp="1"/>
-          </p:cNvSpPr>
-          <p:nvPr/>
-        </p:nvSpPr>
-        <p:spPr>
-          <a:xfrm>
-            <a:off x="1600200" y="5191125"/>
+          <p:cNvPr id="5" name="橢圓 4">
+            <a:extLst>
+              <a:ext uri="{FF2B5EF4-FFF2-40B4-BE49-F238E27FC236}">
+                <a16:creationId xmlns:a16="http://schemas.microsoft.com/office/drawing/2014/main" id="{96A868E7-6A8E-4112-B19C-9640F368C799}"/>
+              </a:ext>
+            </a:extLst>
+          </p:cNvPr>
+          <p:cNvSpPr>
+            <a:spLocks noGrp="1"/>
+          </p:cNvSpPr>
+          <p:nvPr/>
+        </p:nvSpPr>
+        <p:spPr>
+          <a:xfrm>
+            <a:off x="1009650" y="1666875"/>
             <a:ext cx="95250" cy="95250"/>
           </a:xfrm>
           <a:prstGeom prst="ellipse">
@@ -24063,21 +23235,21 @@
       </p:sp>
       <p:sp>
         <p:nvSpPr>
-          <p:cNvPr id="22" name="橢圓 21">
-            <a:extLst>
-              <a:ext uri="{FF2B5EF4-FFF2-40B4-BE49-F238E27FC236}">
-                <a16:creationId xmlns:a16="http://schemas.microsoft.com/office/drawing/2014/main" id="{F364F389-F718-4829-A8B5-667B2A8E1E96}"/>
-              </a:ext>
-            </a:extLst>
-          </p:cNvPr>
-          <p:cNvSpPr>
-            <a:spLocks noGrp="1"/>
-          </p:cNvSpPr>
-          <p:nvPr/>
-        </p:nvSpPr>
-        <p:spPr>
-          <a:xfrm>
-            <a:off x="1771650" y="5191125"/>
+          <p:cNvPr id="6" name="橢圓 5">
+            <a:extLst>
+              <a:ext uri="{FF2B5EF4-FFF2-40B4-BE49-F238E27FC236}">
+                <a16:creationId xmlns:a16="http://schemas.microsoft.com/office/drawing/2014/main" id="{41CA1AE3-6308-40AC-9AE7-EE9D5F5FD19D}"/>
+              </a:ext>
+            </a:extLst>
+          </p:cNvPr>
+          <p:cNvSpPr>
+            <a:spLocks noGrp="1"/>
+          </p:cNvSpPr>
+          <p:nvPr/>
+        </p:nvSpPr>
+        <p:spPr>
+          <a:xfrm>
+            <a:off x="1181100" y="1666875"/>
             <a:ext cx="95250" cy="95250"/>
           </a:xfrm>
           <a:prstGeom prst="ellipse">
@@ -24094,22 +23266,22 @@
       </p:sp>
       <p:sp>
         <p:nvSpPr>
-          <p:cNvPr id="23" name="矩形 22">
-            <a:extLst>
-              <a:ext uri="{FF2B5EF4-FFF2-40B4-BE49-F238E27FC236}">
-                <a16:creationId xmlns:a16="http://schemas.microsoft.com/office/drawing/2014/main" id="{14F2CCEE-4655-4079-95F9-EB8F71838538}"/>
-              </a:ext>
-            </a:extLst>
-          </p:cNvPr>
-          <p:cNvSpPr>
-            <a:spLocks noGrp="1"/>
-          </p:cNvSpPr>
-          <p:nvPr/>
-        </p:nvSpPr>
-        <p:spPr>
-          <a:xfrm>
-            <a:off x="1466850" y="5448300"/>
-            <a:ext cx="9258300" cy="400050"/>
+          <p:cNvPr id="7" name="矩形 6">
+            <a:extLst>
+              <a:ext uri="{FF2B5EF4-FFF2-40B4-BE49-F238E27FC236}">
+                <a16:creationId xmlns:a16="http://schemas.microsoft.com/office/drawing/2014/main" id="{CAA930BD-E992-46A3-9E91-7EC14975E052}"/>
+              </a:ext>
+            </a:extLst>
+          </p:cNvPr>
+          <p:cNvSpPr>
+            <a:spLocks noGrp="1"/>
+          </p:cNvSpPr>
+          <p:nvPr/>
+        </p:nvSpPr>
+        <p:spPr>
+          <a:xfrm>
+            <a:off x="876300" y="1924050"/>
+            <a:ext cx="4343400" cy="3333750"/>
           </a:xfrm>
           <a:prstGeom prst="rect">
             <a:avLst/>
@@ -24122,7 +23294,7 @@
         </p:spPr>
         <p:txBody>
           <a:bodyPr lIns="0" tIns="0" rIns="0" bIns="0" anchor="t">
-            <a:normAutofit fontScale="80128"/>
+            <a:normAutofit/>
           </a:bodyPr>
           <a:lstStyle/>
           <a:p>
@@ -24131,7 +23303,7 @@
                 <a:spcPct val="104000"/>
               </a:lnSpc>
               <a:buNone/>
-              <a:defRPr sz="1575" b="0">
+              <a:defRPr sz="1500" b="0">
                 <a:solidFill>
                   <a:srgbClr val="E5E7EB"/>
                 </a:solidFill>
@@ -24141,7 +23313,7 @@
               </a:defRPr>
             </a:pPr>
             <a:r>
-              <a:rPr sz="1575" b="0">
+              <a:rPr sz="1500" b="0">
                 <a:solidFill>
                   <a:srgbClr val="E5E7EB"/>
                 </a:solidFill>
@@ -24149,7 +23321,7 @@
                 <a:ea typeface="Consolas"/>
                 <a:cs typeface="Consolas"/>
               </a:rPr>
-              <a:t>docker run -d --name course-nginx -p 8080:80 \</a:t>
+              <a:t># 查看狀態</a:t>
             </a:r>
           </a:p>
           <a:p>
@@ -24158,7 +23330,7 @@
                 <a:spcPct val="104000"/>
               </a:lnSpc>
               <a:buNone/>
-              <a:defRPr sz="1575" b="0">
+              <a:defRPr sz="1500" b="0">
                 <a:solidFill>
                   <a:srgbClr val="E5E7EB"/>
                 </a:solidFill>
@@ -24168,7 +23340,7 @@
               </a:defRPr>
             </a:pPr>
             <a:r>
-              <a:rPr sz="1575" b="0">
+              <a:rPr sz="1500" b="0">
                 <a:solidFill>
                   <a:srgbClr val="E5E7EB"/>
                 </a:solidFill>
@@ -24176,60 +23348,295 @@
                 <a:ea typeface="Consolas"/>
                 <a:cs typeface="Consolas"/>
               </a:rPr>
-              <a:t>  -v "${PWD}\my-html:/usr/share/nginx/html:ro" nginx</a:t>
-            </a:r>
-          </a:p>
-        </p:txBody>
-      </p:sp>
-      <p:sp>
-        <p:nvSpPr>
-          <p:cNvPr id="24" name="矩形 23">
-            <a:extLst>
-              <a:ext uri="{FF2B5EF4-FFF2-40B4-BE49-F238E27FC236}">
-                <a16:creationId xmlns:a16="http://schemas.microsoft.com/office/drawing/2014/main" id="{793B7D36-7886-4218-AC77-8A79E6E1B053}"/>
-              </a:ext>
-            </a:extLst>
-          </p:cNvPr>
-          <p:cNvSpPr>
-            <a:spLocks noGrp="1"/>
-          </p:cNvSpPr>
-          <p:nvPr/>
-        </p:nvSpPr>
-        <p:spPr>
-          <a:xfrm>
-            <a:off x="609600" y="6305550"/>
-            <a:ext cx="9906000" cy="13335"/>
-          </a:xfrm>
-          <a:prstGeom prst="rect">
-            <a:avLst/>
+              <a:t>docker ps</a:t>
+            </a:r>
+          </a:p>
+          <a:p>
+            <a:endParaRPr sz="1500" b="0">
+              <a:solidFill>
+                <a:srgbClr val="E5E7EB"/>
+              </a:solidFill>
+              <a:latin typeface="Consolas"/>
+              <a:ea typeface="Consolas"/>
+              <a:cs typeface="Consolas"/>
+            </a:endParaRPr>
+          </a:p>
+          <a:p>
+            <a:pPr algn="l">
+              <a:lnSpc>
+                <a:spcPct val="104000"/>
+              </a:lnSpc>
+              <a:buNone/>
+              <a:defRPr sz="1500" b="0">
+                <a:solidFill>
+                  <a:srgbClr val="E5E7EB"/>
+                </a:solidFill>
+                <a:latin typeface="Consolas"/>
+                <a:ea typeface="Consolas"/>
+                <a:cs typeface="Consolas"/>
+              </a:defRPr>
+            </a:pPr>
+            <a:r>
+              <a:rPr sz="1500" b="0">
+                <a:solidFill>
+                  <a:srgbClr val="E5E7EB"/>
+                </a:solidFill>
+                <a:latin typeface="Consolas"/>
+                <a:ea typeface="Consolas"/>
+                <a:cs typeface="Consolas"/>
+              </a:rPr>
+              <a:t># 查看 log</a:t>
+            </a:r>
+          </a:p>
+          <a:p>
+            <a:pPr algn="l">
+              <a:lnSpc>
+                <a:spcPct val="104000"/>
+              </a:lnSpc>
+              <a:buNone/>
+              <a:defRPr sz="1500" b="0">
+                <a:solidFill>
+                  <a:srgbClr val="E5E7EB"/>
+                </a:solidFill>
+                <a:latin typeface="Consolas"/>
+                <a:ea typeface="Consolas"/>
+                <a:cs typeface="Consolas"/>
+              </a:defRPr>
+            </a:pPr>
+            <a:r>
+              <a:rPr sz="1500" b="0">
+                <a:solidFill>
+                  <a:srgbClr val="E5E7EB"/>
+                </a:solidFill>
+                <a:latin typeface="Consolas"/>
+                <a:ea typeface="Consolas"/>
+                <a:cs typeface="Consolas"/>
+              </a:rPr>
+              <a:t>docker logs my-web</a:t>
+            </a:r>
+          </a:p>
+          <a:p>
+            <a:endParaRPr sz="1500" b="0">
+              <a:solidFill>
+                <a:srgbClr val="E5E7EB"/>
+              </a:solidFill>
+              <a:latin typeface="Consolas"/>
+              <a:ea typeface="Consolas"/>
+              <a:cs typeface="Consolas"/>
+            </a:endParaRPr>
+          </a:p>
+          <a:p>
+            <a:pPr algn="l">
+              <a:lnSpc>
+                <a:spcPct val="104000"/>
+              </a:lnSpc>
+              <a:buNone/>
+              <a:defRPr sz="1500" b="0">
+                <a:solidFill>
+                  <a:srgbClr val="E5E7EB"/>
+                </a:solidFill>
+                <a:latin typeface="Consolas"/>
+                <a:ea typeface="Consolas"/>
+                <a:cs typeface="Consolas"/>
+              </a:defRPr>
+            </a:pPr>
+            <a:r>
+              <a:rPr sz="1500" b="0">
+                <a:solidFill>
+                  <a:srgbClr val="E5E7EB"/>
+                </a:solidFill>
+                <a:latin typeface="Consolas"/>
+                <a:ea typeface="Consolas"/>
+                <a:cs typeface="Consolas"/>
+              </a:rPr>
+              <a:t># 停止與啟動</a:t>
+            </a:r>
+          </a:p>
+          <a:p>
+            <a:pPr algn="l">
+              <a:lnSpc>
+                <a:spcPct val="104000"/>
+              </a:lnSpc>
+              <a:buNone/>
+              <a:defRPr sz="1500" b="0">
+                <a:solidFill>
+                  <a:srgbClr val="E5E7EB"/>
+                </a:solidFill>
+                <a:latin typeface="Consolas"/>
+                <a:ea typeface="Consolas"/>
+                <a:cs typeface="Consolas"/>
+              </a:defRPr>
+            </a:pPr>
+            <a:r>
+              <a:rPr sz="1500" b="0">
+                <a:solidFill>
+                  <a:srgbClr val="E5E7EB"/>
+                </a:solidFill>
+                <a:latin typeface="Consolas"/>
+                <a:ea typeface="Consolas"/>
+                <a:cs typeface="Consolas"/>
+              </a:rPr>
+              <a:t>docker stop my-web</a:t>
+            </a:r>
+          </a:p>
+          <a:p>
+            <a:pPr algn="l">
+              <a:lnSpc>
+                <a:spcPct val="104000"/>
+              </a:lnSpc>
+              <a:buNone/>
+              <a:defRPr sz="1500" b="0">
+                <a:solidFill>
+                  <a:srgbClr val="E5E7EB"/>
+                </a:solidFill>
+                <a:latin typeface="Consolas"/>
+                <a:ea typeface="Consolas"/>
+                <a:cs typeface="Consolas"/>
+              </a:defRPr>
+            </a:pPr>
+            <a:r>
+              <a:rPr sz="1500" b="0">
+                <a:solidFill>
+                  <a:srgbClr val="E5E7EB"/>
+                </a:solidFill>
+                <a:latin typeface="Consolas"/>
+                <a:ea typeface="Consolas"/>
+                <a:cs typeface="Consolas"/>
+              </a:rPr>
+              <a:t>docker start my-web</a:t>
+            </a:r>
+          </a:p>
+          <a:p>
+            <a:endParaRPr sz="1500" b="0">
+              <a:solidFill>
+                <a:srgbClr val="E5E7EB"/>
+              </a:solidFill>
+              <a:latin typeface="Consolas"/>
+              <a:ea typeface="Consolas"/>
+              <a:cs typeface="Consolas"/>
+            </a:endParaRPr>
+          </a:p>
+          <a:p>
+            <a:pPr algn="l">
+              <a:lnSpc>
+                <a:spcPct val="104000"/>
+              </a:lnSpc>
+              <a:buNone/>
+              <a:defRPr sz="1500" b="0">
+                <a:solidFill>
+                  <a:srgbClr val="E5E7EB"/>
+                </a:solidFill>
+                <a:latin typeface="Consolas"/>
+                <a:ea typeface="Consolas"/>
+                <a:cs typeface="Consolas"/>
+              </a:defRPr>
+            </a:pPr>
+            <a:r>
+              <a:rPr sz="1500" b="0">
+                <a:solidFill>
+                  <a:srgbClr val="E5E7EB"/>
+                </a:solidFill>
+                <a:latin typeface="Consolas"/>
+                <a:ea typeface="Consolas"/>
+                <a:cs typeface="Consolas"/>
+              </a:rPr>
+              <a:t># 用完後刪除</a:t>
+            </a:r>
+          </a:p>
+          <a:p>
+            <a:pPr algn="l">
+              <a:lnSpc>
+                <a:spcPct val="104000"/>
+              </a:lnSpc>
+              <a:buNone/>
+              <a:defRPr sz="1500" b="0">
+                <a:solidFill>
+                  <a:srgbClr val="E5E7EB"/>
+                </a:solidFill>
+                <a:latin typeface="Consolas"/>
+                <a:ea typeface="Consolas"/>
+                <a:cs typeface="Consolas"/>
+              </a:defRPr>
+            </a:pPr>
+            <a:r>
+              <a:rPr sz="1500" b="0">
+                <a:solidFill>
+                  <a:srgbClr val="E5E7EB"/>
+                </a:solidFill>
+                <a:latin typeface="Consolas"/>
+                <a:ea typeface="Consolas"/>
+                <a:cs typeface="Consolas"/>
+              </a:rPr>
+              <a:t>docker rm -f my-web</a:t>
+            </a:r>
+          </a:p>
+        </p:txBody>
+      </p:sp>
+      <p:sp>
+        <p:nvSpPr>
+          <p:cNvPr id="8" name="矩形: 圓角 7">
+            <a:extLst>
+              <a:ext uri="{FF2B5EF4-FFF2-40B4-BE49-F238E27FC236}">
+                <a16:creationId xmlns:a16="http://schemas.microsoft.com/office/drawing/2014/main" id="{A2654F34-82C4-4FE2-A051-FC002A93F6C1}"/>
+              </a:ext>
+            </a:extLst>
+          </p:cNvPr>
+          <p:cNvSpPr>
+            <a:spLocks noGrp="1"/>
+          </p:cNvSpPr>
+          <p:nvPr/>
+        </p:nvSpPr>
+        <p:spPr>
+          <a:xfrm>
+            <a:off x="6191250" y="1619250"/>
+            <a:ext cx="4286250" cy="1676400"/>
+          </a:xfrm>
+          <a:prstGeom prst="roundRect">
+            <a:avLst>
+              <a:gd name="adj" fmla="val 6818"/>
+            </a:avLst>
           </a:prstGeom>
           <a:solidFill>
-            <a:srgbClr val="D9E2EC"/>
+            <a:srgbClr val="FFF6DD"/>
           </a:solidFill>
-          <a:ln w="0">
-            <a:noFill/>
-            <a:prstDash val="solid"/>
-          </a:ln>
-        </p:spPr>
-      </p:sp>
-      <p:sp>
-        <p:nvSpPr>
-          <p:cNvPr id="25" name="矩形 24">
-            <a:extLst>
-              <a:ext uri="{FF2B5EF4-FFF2-40B4-BE49-F238E27FC236}">
-                <a16:creationId xmlns:a16="http://schemas.microsoft.com/office/drawing/2014/main" id="{E05C4E82-71DD-4AA6-84F4-6B20CDE78B94}"/>
-              </a:ext>
-            </a:extLst>
-          </p:cNvPr>
-          <p:cNvSpPr>
-            <a:spLocks noGrp="1"/>
-          </p:cNvSpPr>
-          <p:nvPr/>
-        </p:nvSpPr>
-        <p:spPr>
-          <a:xfrm>
-            <a:off x="609600" y="6400800"/>
-            <a:ext cx="2667000" cy="171450"/>
+          <a:ln w="9525">
+            <a:solidFill>
+              <a:srgbClr val="F59E0B"/>
+            </a:solidFill>
+            <a:prstDash val="solid"/>
+          </a:ln>
+        </p:spPr>
+        <p:style>
+          <a:lnRef idx="0">
+            <a:scrgbClr r="0" g="0" b="0"/>
+          </a:lnRef>
+          <a:fillRef idx="0">
+            <a:scrgbClr r="0" g="0" b="0"/>
+          </a:fillRef>
+          <a:effectRef idx="4">
+            <a:scrgbClr r="0" g="0" b="0"/>
+          </a:effectRef>
+          <a:fontRef idx="major"/>
+        </p:style>
+      </p:sp>
+      <p:sp>
+        <p:nvSpPr>
+          <p:cNvPr id="9" name="矩形 8">
+            <a:extLst>
+              <a:ext uri="{FF2B5EF4-FFF2-40B4-BE49-F238E27FC236}">
+                <a16:creationId xmlns:a16="http://schemas.microsoft.com/office/drawing/2014/main" id="{E73EB925-1B76-451F-A4FA-62ECFF471FEB}"/>
+              </a:ext>
+            </a:extLst>
+          </p:cNvPr>
+          <p:cNvSpPr>
+            <a:spLocks noGrp="1"/>
+          </p:cNvSpPr>
+          <p:nvPr/>
+        </p:nvSpPr>
+        <p:spPr>
+          <a:xfrm>
+            <a:off x="6419850" y="1809750"/>
+            <a:ext cx="3829050" cy="304800"/>
           </a:xfrm>
           <a:prstGeom prst="rect">
             <a:avLst/>
@@ -24242,7 +23649,7 @@
         </p:spPr>
         <p:txBody>
           <a:bodyPr lIns="0" tIns="0" rIns="0" bIns="0" anchor="t">
-            <a:normAutofit/>
+            <a:normAutofit fontScale="94062"/>
           </a:bodyPr>
           <a:lstStyle/>
           <a:p>
@@ -24251,6 +23658,386 @@
                 <a:spcPct val="105000"/>
               </a:lnSpc>
               <a:buNone/>
+              <a:defRPr sz="2025" b="1">
+                <a:solidFill>
+                  <a:srgbClr val="B45309"/>
+                </a:solidFill>
+                <a:latin typeface="Aptos Display"/>
+                <a:ea typeface="Aptos Display"/>
+                <a:cs typeface="Aptos Display"/>
+              </a:defRPr>
+            </a:pPr>
+            <a:r>
+              <a:rPr sz="2025" b="1">
+                <a:solidFill>
+                  <a:srgbClr val="B45309"/>
+                </a:solidFill>
+                <a:latin typeface="Aptos Display"/>
+                <a:ea typeface="Aptos Display"/>
+                <a:cs typeface="Aptos Display"/>
+              </a:rPr>
+              <a:t>卡住時先查三件事</a:t>
+            </a:r>
+          </a:p>
+        </p:txBody>
+      </p:sp>
+      <p:sp>
+        <p:nvSpPr>
+          <p:cNvPr id="10" name="矩形 9">
+            <a:extLst>
+              <a:ext uri="{FF2B5EF4-FFF2-40B4-BE49-F238E27FC236}">
+                <a16:creationId xmlns:a16="http://schemas.microsoft.com/office/drawing/2014/main" id="{6C60DB7A-83F3-46B9-A4D4-D908FD6F7262}"/>
+              </a:ext>
+            </a:extLst>
+          </p:cNvPr>
+          <p:cNvSpPr>
+            <a:spLocks noGrp="1"/>
+          </p:cNvSpPr>
+          <p:nvPr/>
+        </p:nvSpPr>
+        <p:spPr>
+          <a:xfrm>
+            <a:off x="6419850" y="2209800"/>
+            <a:ext cx="3829050" cy="895350"/>
+          </a:xfrm>
+          <a:prstGeom prst="rect">
+            <a:avLst/>
+          </a:prstGeom>
+          <a:noFill/>
+          <a:ln w="0">
+            <a:noFill/>
+            <a:prstDash val="solid"/>
+          </a:ln>
+        </p:spPr>
+        <p:txBody>
+          <a:bodyPr lIns="0" tIns="0" rIns="0" bIns="0" anchor="t">
+            <a:normAutofit/>
+          </a:bodyPr>
+          <a:lstStyle/>
+          <a:p>
+            <a:pPr algn="l">
+              <a:lnSpc>
+                <a:spcPct val="105000"/>
+              </a:lnSpc>
+              <a:buNone/>
+              <a:defRPr sz="1575" b="0">
+                <a:solidFill>
+                  <a:srgbClr val="111827"/>
+                </a:solidFill>
+                <a:latin typeface="Aptos"/>
+                <a:ea typeface="Aptos"/>
+                <a:cs typeface="Aptos"/>
+              </a:defRPr>
+            </a:pPr>
+            <a:r>
+              <a:rPr sz="1575" b="0">
+                <a:solidFill>
+                  <a:srgbClr val="111827"/>
+                </a:solidFill>
+                <a:latin typeface="Aptos"/>
+                <a:ea typeface="Aptos"/>
+                <a:cs typeface="Aptos"/>
+              </a:rPr>
+              <a:t>1. Docker Desktop 是否啟動</a:t>
+            </a:r>
+          </a:p>
+          <a:p>
+            <a:pPr algn="l">
+              <a:lnSpc>
+                <a:spcPct val="105000"/>
+              </a:lnSpc>
+              <a:buNone/>
+              <a:defRPr sz="1575" b="0">
+                <a:solidFill>
+                  <a:srgbClr val="111827"/>
+                </a:solidFill>
+                <a:latin typeface="Aptos"/>
+                <a:ea typeface="Aptos"/>
+                <a:cs typeface="Aptos"/>
+              </a:defRPr>
+            </a:pPr>
+            <a:r>
+              <a:rPr sz="1575" b="0">
+                <a:solidFill>
+                  <a:srgbClr val="111827"/>
+                </a:solidFill>
+                <a:latin typeface="Aptos"/>
+                <a:ea typeface="Aptos"/>
+                <a:cs typeface="Aptos"/>
+              </a:rPr>
+              <a:t>2. 容器是否真的 Up</a:t>
+            </a:r>
+          </a:p>
+          <a:p>
+            <a:pPr algn="l">
+              <a:lnSpc>
+                <a:spcPct val="105000"/>
+              </a:lnSpc>
+              <a:buNone/>
+              <a:defRPr sz="1575" b="0">
+                <a:solidFill>
+                  <a:srgbClr val="111827"/>
+                </a:solidFill>
+                <a:latin typeface="Aptos"/>
+                <a:ea typeface="Aptos"/>
+                <a:cs typeface="Aptos"/>
+              </a:defRPr>
+            </a:pPr>
+            <a:r>
+              <a:rPr sz="1575" b="0">
+                <a:solidFill>
+                  <a:srgbClr val="111827"/>
+                </a:solidFill>
+                <a:latin typeface="Aptos"/>
+                <a:ea typeface="Aptos"/>
+                <a:cs typeface="Aptos"/>
+              </a:rPr>
+              <a:t>3. 8080 port 是否被佔用</a:t>
+            </a:r>
+          </a:p>
+        </p:txBody>
+      </p:sp>
+      <p:sp>
+        <p:nvSpPr>
+          <p:cNvPr id="11" name="矩形: 圓角 10">
+            <a:extLst>
+              <a:ext uri="{FF2B5EF4-FFF2-40B4-BE49-F238E27FC236}">
+                <a16:creationId xmlns:a16="http://schemas.microsoft.com/office/drawing/2014/main" id="{709A5C67-8EC2-4D03-BF3E-19FF1B2CC5FF}"/>
+              </a:ext>
+            </a:extLst>
+          </p:cNvPr>
+          <p:cNvSpPr>
+            <a:spLocks noGrp="1"/>
+          </p:cNvSpPr>
+          <p:nvPr/>
+        </p:nvSpPr>
+        <p:spPr>
+          <a:xfrm>
+            <a:off x="6191250" y="3714750"/>
+            <a:ext cx="4286250" cy="1466850"/>
+          </a:xfrm>
+          <a:prstGeom prst="roundRect">
+            <a:avLst>
+              <a:gd name="adj" fmla="val 7792"/>
+            </a:avLst>
+          </a:prstGeom>
+          <a:solidFill>
+            <a:srgbClr val="FFFFFF"/>
+          </a:solidFill>
+          <a:ln w="9525">
+            <a:solidFill>
+              <a:srgbClr val="D9E2EC"/>
+            </a:solidFill>
+            <a:prstDash val="solid"/>
+          </a:ln>
+        </p:spPr>
+        <p:style>
+          <a:lnRef idx="0">
+            <a:scrgbClr r="0" g="0" b="0"/>
+          </a:lnRef>
+          <a:fillRef idx="0">
+            <a:scrgbClr r="0" g="0" b="0"/>
+          </a:fillRef>
+          <a:effectRef idx="4">
+            <a:scrgbClr r="0" g="0" b="0"/>
+          </a:effectRef>
+          <a:fontRef idx="major"/>
+        </p:style>
+      </p:sp>
+      <p:sp>
+        <p:nvSpPr>
+          <p:cNvPr id="12" name="矩形 11">
+            <a:extLst>
+              <a:ext uri="{FF2B5EF4-FFF2-40B4-BE49-F238E27FC236}">
+                <a16:creationId xmlns:a16="http://schemas.microsoft.com/office/drawing/2014/main" id="{EF8E021A-0BBC-4BE3-9D6F-FF53DCD01990}"/>
+              </a:ext>
+            </a:extLst>
+          </p:cNvPr>
+          <p:cNvSpPr>
+            <a:spLocks noGrp="1"/>
+          </p:cNvSpPr>
+          <p:nvPr/>
+        </p:nvSpPr>
+        <p:spPr>
+          <a:xfrm>
+            <a:off x="6419850" y="3905250"/>
+            <a:ext cx="3829050" cy="304800"/>
+          </a:xfrm>
+          <a:prstGeom prst="rect">
+            <a:avLst/>
+          </a:prstGeom>
+          <a:noFill/>
+          <a:ln w="0">
+            <a:noFill/>
+            <a:prstDash val="solid"/>
+          </a:ln>
+        </p:spPr>
+        <p:txBody>
+          <a:bodyPr lIns="0" tIns="0" rIns="0" bIns="0" anchor="t">
+            <a:normAutofit fontScale="94062"/>
+          </a:bodyPr>
+          <a:lstStyle/>
+          <a:p>
+            <a:pPr algn="l">
+              <a:lnSpc>
+                <a:spcPct val="105000"/>
+              </a:lnSpc>
+              <a:buNone/>
+              <a:defRPr sz="2025" b="1">
+                <a:solidFill>
+                  <a:srgbClr val="0B1220"/>
+                </a:solidFill>
+                <a:latin typeface="Aptos Display"/>
+                <a:ea typeface="Aptos Display"/>
+                <a:cs typeface="Aptos Display"/>
+              </a:defRPr>
+            </a:pPr>
+            <a:r>
+              <a:rPr sz="2025" b="1">
+                <a:solidFill>
+                  <a:srgbClr val="0B1220"/>
+                </a:solidFill>
+                <a:latin typeface="Aptos Display"/>
+                <a:ea typeface="Aptos Display"/>
+                <a:cs typeface="Aptos Display"/>
+              </a:rPr>
+              <a:t>刪 Image 前先刪 Container</a:t>
+            </a:r>
+          </a:p>
+        </p:txBody>
+      </p:sp>
+      <p:sp>
+        <p:nvSpPr>
+          <p:cNvPr id="13" name="矩形 12">
+            <a:extLst>
+              <a:ext uri="{FF2B5EF4-FFF2-40B4-BE49-F238E27FC236}">
+                <a16:creationId xmlns:a16="http://schemas.microsoft.com/office/drawing/2014/main" id="{EA15416C-6397-4945-BAE5-1B45BFBA8037}"/>
+              </a:ext>
+            </a:extLst>
+          </p:cNvPr>
+          <p:cNvSpPr>
+            <a:spLocks noGrp="1"/>
+          </p:cNvSpPr>
+          <p:nvPr/>
+        </p:nvSpPr>
+        <p:spPr>
+          <a:xfrm>
+            <a:off x="6419850" y="4305300"/>
+            <a:ext cx="3829050" cy="685800"/>
+          </a:xfrm>
+          <a:prstGeom prst="rect">
+            <a:avLst/>
+          </a:prstGeom>
+          <a:noFill/>
+          <a:ln w="0">
+            <a:noFill/>
+            <a:prstDash val="solid"/>
+          </a:ln>
+        </p:spPr>
+        <p:txBody>
+          <a:bodyPr lIns="0" tIns="0" rIns="0" bIns="0" anchor="t">
+            <a:normAutofit fontScale="95238"/>
+          </a:bodyPr>
+          <a:lstStyle/>
+          <a:p>
+            <a:pPr algn="l">
+              <a:lnSpc>
+                <a:spcPct val="105000"/>
+              </a:lnSpc>
+              <a:buNone/>
+              <a:defRPr sz="1500" b="0">
+                <a:solidFill>
+                  <a:srgbClr val="111827"/>
+                </a:solidFill>
+                <a:latin typeface="Aptos"/>
+                <a:ea typeface="Aptos"/>
+                <a:cs typeface="Aptos"/>
+              </a:defRPr>
+            </a:pPr>
+            <a:r>
+              <a:rPr sz="1500" b="0">
+                <a:solidFill>
+                  <a:srgbClr val="111827"/>
+                </a:solidFill>
+                <a:latin typeface="Aptos"/>
+                <a:ea typeface="Aptos"/>
+                <a:cs typeface="Aptos"/>
+              </a:rPr>
+              <a:t>只要還有容器使用某個 Image，不管容器是否停止，docker rmi 都可能失敗。</a:t>
+            </a:r>
+          </a:p>
+        </p:txBody>
+      </p:sp>
+      <p:sp>
+        <p:nvSpPr>
+          <p:cNvPr id="14" name="矩形 13">
+            <a:extLst>
+              <a:ext uri="{FF2B5EF4-FFF2-40B4-BE49-F238E27FC236}">
+                <a16:creationId xmlns:a16="http://schemas.microsoft.com/office/drawing/2014/main" id="{8C65C2FE-A7DA-4BB7-8191-A2A1861C197F}"/>
+              </a:ext>
+            </a:extLst>
+          </p:cNvPr>
+          <p:cNvSpPr>
+            <a:spLocks noGrp="1"/>
+          </p:cNvSpPr>
+          <p:nvPr/>
+        </p:nvSpPr>
+        <p:spPr>
+          <a:xfrm>
+            <a:off x="609600" y="6305550"/>
+            <a:ext cx="9906000" cy="13335"/>
+          </a:xfrm>
+          <a:prstGeom prst="rect">
+            <a:avLst/>
+          </a:prstGeom>
+          <a:solidFill>
+            <a:srgbClr val="D9E2EC"/>
+          </a:solidFill>
+          <a:ln w="0">
+            <a:noFill/>
+            <a:prstDash val="solid"/>
+          </a:ln>
+        </p:spPr>
+      </p:sp>
+      <p:sp>
+        <p:nvSpPr>
+          <p:cNvPr id="15" name="矩形 14">
+            <a:extLst>
+              <a:ext uri="{FF2B5EF4-FFF2-40B4-BE49-F238E27FC236}">
+                <a16:creationId xmlns:a16="http://schemas.microsoft.com/office/drawing/2014/main" id="{5F78135E-EC87-4A4B-B5DC-67A73CA39602}"/>
+              </a:ext>
+            </a:extLst>
+          </p:cNvPr>
+          <p:cNvSpPr>
+            <a:spLocks noGrp="1"/>
+          </p:cNvSpPr>
+          <p:nvPr/>
+        </p:nvSpPr>
+        <p:spPr>
+          <a:xfrm>
+            <a:off x="609600" y="6400800"/>
+            <a:ext cx="2667000" cy="171450"/>
+          </a:xfrm>
+          <a:prstGeom prst="rect">
+            <a:avLst/>
+          </a:prstGeom>
+          <a:noFill/>
+          <a:ln w="0">
+            <a:noFill/>
+            <a:prstDash val="solid"/>
+          </a:ln>
+        </p:spPr>
+        <p:txBody>
+          <a:bodyPr lIns="0" tIns="0" rIns="0" bIns="0" anchor="t">
+            <a:normAutofit/>
+          </a:bodyPr>
+          <a:lstStyle/>
+          <a:p>
+            <a:pPr algn="l">
+              <a:lnSpc>
+                <a:spcPct val="105000"/>
+              </a:lnSpc>
+              <a:buNone/>
               <a:defRPr sz="825" b="0">
                 <a:solidFill>
                   <a:srgbClr val="64748B"/>
@@ -24276,10 +24063,10 @@
       </p:sp>
       <p:sp>
         <p:nvSpPr>
-          <p:cNvPr id="26" name="矩形 25">
-            <a:extLst>
-              <a:ext uri="{FF2B5EF4-FFF2-40B4-BE49-F238E27FC236}">
-                <a16:creationId xmlns:a16="http://schemas.microsoft.com/office/drawing/2014/main" id="{61C55653-9566-4AC5-8B34-CF732B7D9716}"/>
+          <p:cNvPr id="16" name="矩形 15">
+            <a:extLst>
+              <a:ext uri="{FF2B5EF4-FFF2-40B4-BE49-F238E27FC236}">
+                <a16:creationId xmlns:a16="http://schemas.microsoft.com/office/drawing/2014/main" id="{337E8EB5-2C0A-40C2-A148-0F79CE92CBC9}"/>
               </a:ext>
             </a:extLst>
           </p:cNvPr>
@@ -24331,7 +24118,7 @@
                 <a:ea typeface="Aptos"/>
                 <a:cs typeface="Aptos"/>
               </a:rPr>
-              <a:t>25</a:t>
+              <a:t>26</a:t>
             </a:r>
           </a:p>
         </p:txBody>
@@ -24339,7 +24126,7 @@
     </p:spTree>
     <p:extLst>
       <p:ext uri="{BB962C8B-B14F-4D97-AF65-F5344CB8AC3E}">
-        <p14:creationId xmlns:p14="http://schemas.microsoft.com/office/powerpoint/2010/main" val="1807398680"/>
+        <p14:creationId xmlns:p14="http://schemas.microsoft.com/office/powerpoint/2010/main" val="105072459"/>
       </p:ext>
     </p:extLst>
   </p:cSld>
@@ -24351,11 +24138,11 @@
 
 <file path=ppt/slides/slide29.xml><?xml version="1.0" encoding="utf-8"?>
 <p:sld xmlns:a="http://schemas.openxmlformats.org/drawingml/2006/main" xmlns:r="http://schemas.openxmlformats.org/officeDocument/2006/relationships" xmlns:p="http://schemas.openxmlformats.org/presentationml/2006/main">
-  <p:cSld>
+  <p:cSld name="範例程式碼：狀態查看與清理">
     <p:bg>
       <p:bgPr>
         <a:solidFill>
-          <a:srgbClr val="F6F8FB"/>
+          <a:srgbClr val="0B1220"/>
         </a:solidFill>
         <a:effectLst/>
       </p:bgPr>
@@ -24369,325 +24156,213 @@
       <p:grpSpPr>
         <a:xfrm>
           <a:off x="0" y="0"/>
-          <a:ext cx="0" cy="0"/>
+          <a:ext cx="12192000" cy="6858000"/>
           <a:chOff x="0" y="0"/>
-          <a:chExt cx="0" cy="0"/>
+          <a:chExt cx="12192000" cy="6858000"/>
         </a:xfrm>
       </p:grpSpPr>
       <p:sp>
         <p:nvSpPr>
-          <p:cNvPr id="17" name="矩形 16">
-            <a:extLst>
-              <a:ext uri="{FF2B5EF4-FFF2-40B4-BE49-F238E27FC236}">
-                <a16:creationId xmlns:a16="http://schemas.microsoft.com/office/drawing/2014/main" id="{32D72500-4ECE-4EF4-AF6D-1C7103D552AE}"/>
-              </a:ext>
-            </a:extLst>
-          </p:cNvPr>
-          <p:cNvSpPr>
-            <a:spLocks noGrp="1"/>
-          </p:cNvSpPr>
-          <p:nvPr/>
-        </p:nvSpPr>
-        <p:spPr>
-          <a:xfrm>
-            <a:off x="609600" y="400050"/>
-            <a:ext cx="5905500" cy="228600"/>
-          </a:xfrm>
-          <a:prstGeom prst="rect">
-            <a:avLst/>
-          </a:prstGeom>
-          <a:noFill/>
-          <a:ln w="0">
-            <a:noFill/>
-            <a:prstDash val="solid"/>
-          </a:ln>
-        </p:spPr>
-        <p:txBody>
-          <a:bodyPr lIns="0" tIns="0" rIns="0" bIns="0" anchor="t">
-            <a:normAutofit/>
+          <p:cNvPr id="2" name="AppendixLabel"/>
+          <p:cNvSpPr txBox="1"/>
+          <p:nvPr/>
+        </p:nvSpPr>
+        <p:spPr>
+          <a:xfrm>
+            <a:off x="609600" y="420000"/>
+            <a:ext cx="2600000" cy="260000"/>
+          </a:xfrm>
+          <a:prstGeom prst="rect">
+            <a:avLst/>
+          </a:prstGeom>
+          <a:noFill/>
+          <a:ln>
+            <a:noFill/>
+          </a:ln>
+        </p:spPr>
+        <p:txBody>
+          <a:bodyPr wrap="square" rtlCol="0">
+            <a:spAutoFit/>
           </a:bodyPr>
           <a:lstStyle/>
           <a:p>
-            <a:pPr algn="l">
-              <a:lnSpc>
-                <a:spcPct val="105000"/>
-              </a:lnSpc>
-              <a:buNone/>
-              <a:defRPr sz="900" b="1">
-                <a:solidFill>
-                  <a:srgbClr val="0B5CAD"/>
-                </a:solidFill>
-                <a:latin typeface="Aptos"/>
-                <a:ea typeface="Aptos"/>
-                <a:cs typeface="Aptos"/>
-              </a:defRPr>
-            </a:pPr>
-            <a:r>
-              <a:rPr sz="900" b="1">
-                <a:solidFill>
-                  <a:srgbClr val="0B5CAD"/>
-                </a:solidFill>
-                <a:latin typeface="Aptos"/>
-                <a:ea typeface="Aptos"/>
-                <a:cs typeface="Aptos"/>
-              </a:rPr>
-              <a:t>CONTAINER LIFECYCLE</a:t>
-            </a:r>
-          </a:p>
-        </p:txBody>
-      </p:sp>
-      <p:sp>
-        <p:nvSpPr>
-          <p:cNvPr id="2" name="矩形 1">
-            <a:extLst>
-              <a:ext uri="{FF2B5EF4-FFF2-40B4-BE49-F238E27FC236}">
-                <a16:creationId xmlns:a16="http://schemas.microsoft.com/office/drawing/2014/main" id="{7279AA9D-1CB6-4577-A990-F24C3203D30B}"/>
-              </a:ext>
-            </a:extLst>
-          </p:cNvPr>
-          <p:cNvSpPr>
-            <a:spLocks noGrp="1"/>
-          </p:cNvSpPr>
-          <p:nvPr/>
-        </p:nvSpPr>
-        <p:spPr>
-          <a:xfrm>
-            <a:off x="609600" y="685800"/>
-            <a:ext cx="8572500" cy="609600"/>
-          </a:xfrm>
-          <a:prstGeom prst="rect">
-            <a:avLst/>
-          </a:prstGeom>
-          <a:noFill/>
-          <a:ln w="0">
-            <a:noFill/>
-            <a:prstDash val="solid"/>
-          </a:ln>
-        </p:spPr>
-        <p:txBody>
-          <a:bodyPr lIns="0" tIns="0" rIns="0" bIns="0" anchor="t">
-            <a:normAutofit/>
+            <a:r>
+              <a:rPr lang="zh-TW" sz="1100" b="1">
+                <a:solidFill>
+                  <a:srgbClr val="93C5FD"/>
+                </a:solidFill>
+                <a:latin typeface="Aptos"/>
+                <a:ea typeface="Aptos"/>
+                <a:cs typeface="Aptos"/>
+              </a:rPr>
+              <a:t>CODE EXAMPLE</a:t>
+            </a:r>
+          </a:p>
+        </p:txBody>
+      </p:sp>
+      <p:sp>
+        <p:nvSpPr>
+          <p:cNvPr id="3" name="Title"/>
+          <p:cNvSpPr txBox="1"/>
+          <p:nvPr/>
+        </p:nvSpPr>
+        <p:spPr>
+          <a:xfrm>
+            <a:off x="609600" y="710000"/>
+            <a:ext cx="10600000" cy="560000"/>
+          </a:xfrm>
+          <a:prstGeom prst="rect">
+            <a:avLst/>
+          </a:prstGeom>
+          <a:noFill/>
+          <a:ln>
+            <a:noFill/>
+          </a:ln>
+        </p:spPr>
+        <p:txBody>
+          <a:bodyPr wrap="square" rtlCol="0">
+            <a:spAutoFit/>
           </a:bodyPr>
           <a:lstStyle/>
           <a:p>
-            <a:pPr algn="l">
-              <a:lnSpc>
-                <a:spcPct val="105000"/>
-              </a:lnSpc>
-              <a:buNone/>
-              <a:defRPr sz="2850" b="1">
-                <a:solidFill>
-                  <a:srgbClr val="0B1220"/>
-                </a:solidFill>
-                <a:latin typeface="Aptos Display"/>
-                <a:ea typeface="Aptos Display"/>
-                <a:cs typeface="Aptos Display"/>
-              </a:defRPr>
-            </a:pPr>
-            <a:r>
-              <a:rPr sz="2850" b="1">
-                <a:solidFill>
-                  <a:srgbClr val="0B1220"/>
-                </a:solidFill>
-                <a:latin typeface="Aptos Display"/>
-                <a:ea typeface="Aptos Display"/>
-                <a:cs typeface="Aptos Display"/>
-              </a:rPr>
-              <a:t>第一堂必會的容器生命週期指令</a:t>
-            </a:r>
-          </a:p>
-        </p:txBody>
-      </p:sp>
-      <p:sp>
-        <p:nvSpPr>
-          <p:cNvPr id="3" name="矩形: 圓角 2">
-            <a:extLst>
-              <a:ext uri="{FF2B5EF4-FFF2-40B4-BE49-F238E27FC236}">
-                <a16:creationId xmlns:a16="http://schemas.microsoft.com/office/drawing/2014/main" id="{01928344-03DB-4672-B876-342328948AFC}"/>
-              </a:ext>
-            </a:extLst>
-          </p:cNvPr>
-          <p:cNvSpPr>
-            <a:spLocks noGrp="1"/>
-          </p:cNvSpPr>
-          <p:nvPr/>
-        </p:nvSpPr>
-        <p:spPr>
-          <a:xfrm>
-            <a:off x="666750" y="1504950"/>
-            <a:ext cx="4762500" cy="3886200"/>
+            <a:r>
+              <a:rPr lang="zh-TW" sz="2600" b="1">
+                <a:solidFill>
+                  <a:srgbClr val="F8FAFC"/>
+                </a:solidFill>
+                <a:latin typeface="Aptos"/>
+                <a:ea typeface="Aptos"/>
+                <a:cs typeface="Aptos"/>
+              </a:rPr>
+              <a:t>範例程式碼：狀態查看與清理</a:t>
+            </a:r>
+          </a:p>
+        </p:txBody>
+      </p:sp>
+      <p:sp>
+        <p:nvSpPr>
+          <p:cNvPr id="4" name="Subtitle"/>
+          <p:cNvSpPr txBox="1"/>
+          <p:nvPr/>
+        </p:nvSpPr>
+        <p:spPr>
+          <a:xfrm>
+            <a:off x="609600" y="1260000"/>
+            <a:ext cx="8000000" cy="300000"/>
+          </a:xfrm>
+          <a:prstGeom prst="rect">
+            <a:avLst/>
+          </a:prstGeom>
+          <a:noFill/>
+          <a:ln>
+            <a:noFill/>
+          </a:ln>
+        </p:spPr>
+        <p:txBody>
+          <a:bodyPr wrap="square" rtlCol="0">
+            <a:spAutoFit/>
+          </a:bodyPr>
+          <a:lstStyle/>
+          <a:p>
+            <a:r>
+              <a:rPr lang="zh-TW" sz="1250">
+                <a:solidFill>
+                  <a:srgbClr val="CBD5E1"/>
+                </a:solidFill>
+                <a:latin typeface="Aptos"/>
+                <a:ea typeface="Aptos"/>
+                <a:cs typeface="Aptos"/>
+              </a:rPr>
+              <a:t>第 1 堂 | 可直接照做的完整範例</a:t>
+            </a:r>
+          </a:p>
+        </p:txBody>
+      </p:sp>
+      <p:sp>
+        <p:nvSpPr>
+          <p:cNvPr id="5" name="CodeBackground"/>
+          <p:cNvSpPr/>
+          <p:nvPr/>
+        </p:nvSpPr>
+        <p:spPr>
+          <a:xfrm>
+            <a:off x="609600" y="1680000"/>
+            <a:ext cx="10972800" cy="4370000"/>
           </a:xfrm>
           <a:prstGeom prst="roundRect">
-            <a:avLst>
-              <a:gd name="adj" fmla="val 2451"/>
-            </a:avLst>
+            <a:avLst/>
           </a:prstGeom>
           <a:solidFill>
-            <a:srgbClr val="0B1220"/>
+            <a:srgbClr val="111827"/>
           </a:solidFill>
           <a:ln w="9525">
             <a:solidFill>
-              <a:srgbClr val="1E293B"/>
+              <a:srgbClr val="334155"/>
             </a:solidFill>
-            <a:prstDash val="solid"/>
           </a:ln>
         </p:spPr>
         <p:style>
-          <a:lnRef idx="0">
-            <a:scrgbClr r="0" g="0" b="0"/>
+          <a:lnRef idx="1">
+            <a:schemeClr val="accent1"/>
           </a:lnRef>
-          <a:fillRef idx="0">
-            <a:scrgbClr r="0" g="0" b="0"/>
+          <a:fillRef idx="3">
+            <a:schemeClr val="accent1"/>
           </a:fillRef>
-          <a:effectRef idx="6">
-            <a:scrgbClr r="0" g="0" b="0"/>
+          <a:effectRef idx="2">
+            <a:schemeClr val="accent1"/>
           </a:effectRef>
-          <a:fontRef idx="major"/>
+          <a:fontRef idx="minor">
+            <a:schemeClr val="lt1"/>
+          </a:fontRef>
         </p:style>
-      </p:sp>
-      <p:sp>
-        <p:nvSpPr>
-          <p:cNvPr id="4" name="橢圓 3">
-            <a:extLst>
-              <a:ext uri="{FF2B5EF4-FFF2-40B4-BE49-F238E27FC236}">
-                <a16:creationId xmlns:a16="http://schemas.microsoft.com/office/drawing/2014/main" id="{831E50CD-71DD-40D9-B178-2A8691ACD8F2}"/>
-              </a:ext>
-            </a:extLst>
-          </p:cNvPr>
-          <p:cNvSpPr>
-            <a:spLocks noGrp="1"/>
-          </p:cNvSpPr>
-          <p:nvPr/>
-        </p:nvSpPr>
-        <p:spPr>
-          <a:xfrm>
-            <a:off x="838200" y="1666875"/>
-            <a:ext cx="95250" cy="95250"/>
-          </a:xfrm>
-          <a:prstGeom prst="ellipse">
-            <a:avLst/>
-          </a:prstGeom>
-          <a:solidFill>
-            <a:srgbClr val="FB7185"/>
-          </a:solidFill>
-          <a:ln w="0">
-            <a:noFill/>
-            <a:prstDash val="solid"/>
-          </a:ln>
-        </p:spPr>
-      </p:sp>
-      <p:sp>
-        <p:nvSpPr>
-          <p:cNvPr id="5" name="橢圓 4">
-            <a:extLst>
-              <a:ext uri="{FF2B5EF4-FFF2-40B4-BE49-F238E27FC236}">
-                <a16:creationId xmlns:a16="http://schemas.microsoft.com/office/drawing/2014/main" id="{96A868E7-6A8E-4112-B19C-9640F368C799}"/>
-              </a:ext>
-            </a:extLst>
-          </p:cNvPr>
-          <p:cNvSpPr>
-            <a:spLocks noGrp="1"/>
-          </p:cNvSpPr>
-          <p:nvPr/>
-        </p:nvSpPr>
-        <p:spPr>
-          <a:xfrm>
-            <a:off x="1009650" y="1666875"/>
-            <a:ext cx="95250" cy="95250"/>
-          </a:xfrm>
-          <a:prstGeom prst="ellipse">
-            <a:avLst/>
-          </a:prstGeom>
-          <a:solidFill>
-            <a:srgbClr val="FBBF24"/>
-          </a:solidFill>
-          <a:ln w="0">
-            <a:noFill/>
-            <a:prstDash val="solid"/>
-          </a:ln>
-        </p:spPr>
-      </p:sp>
-      <p:sp>
-        <p:nvSpPr>
-          <p:cNvPr id="6" name="橢圓 5">
-            <a:extLst>
-              <a:ext uri="{FF2B5EF4-FFF2-40B4-BE49-F238E27FC236}">
-                <a16:creationId xmlns:a16="http://schemas.microsoft.com/office/drawing/2014/main" id="{41CA1AE3-6308-40AC-9AE7-EE9D5F5FD19D}"/>
-              </a:ext>
-            </a:extLst>
-          </p:cNvPr>
-          <p:cNvSpPr>
-            <a:spLocks noGrp="1"/>
-          </p:cNvSpPr>
-          <p:nvPr/>
-        </p:nvSpPr>
-        <p:spPr>
-          <a:xfrm>
-            <a:off x="1181100" y="1666875"/>
-            <a:ext cx="95250" cy="95250"/>
-          </a:xfrm>
-          <a:prstGeom prst="ellipse">
-            <a:avLst/>
-          </a:prstGeom>
-          <a:solidFill>
-            <a:srgbClr val="34D399"/>
-          </a:solidFill>
-          <a:ln w="0">
-            <a:noFill/>
-            <a:prstDash val="solid"/>
-          </a:ln>
-        </p:spPr>
-      </p:sp>
-      <p:sp>
-        <p:nvSpPr>
-          <p:cNvPr id="7" name="矩形 6">
-            <a:extLst>
-              <a:ext uri="{FF2B5EF4-FFF2-40B4-BE49-F238E27FC236}">
-                <a16:creationId xmlns:a16="http://schemas.microsoft.com/office/drawing/2014/main" id="{CAA930BD-E992-46A3-9E91-7EC14975E052}"/>
-              </a:ext>
-            </a:extLst>
-          </p:cNvPr>
-          <p:cNvSpPr>
-            <a:spLocks noGrp="1"/>
-          </p:cNvSpPr>
-          <p:nvPr/>
-        </p:nvSpPr>
-        <p:spPr>
-          <a:xfrm>
-            <a:off x="876300" y="1924050"/>
-            <a:ext cx="4343400" cy="3333750"/>
-          </a:xfrm>
-          <a:prstGeom prst="rect">
-            <a:avLst/>
-          </a:prstGeom>
-          <a:noFill/>
-          <a:ln w="0">
-            <a:noFill/>
-            <a:prstDash val="solid"/>
-          </a:ln>
-        </p:spPr>
-        <p:txBody>
-          <a:bodyPr lIns="0" tIns="0" rIns="0" bIns="0" anchor="t">
-            <a:normAutofit/>
+        <p:txBody>
+          <a:bodyPr/>
+          <a:lstStyle/>
+          <a:p>
+            <a:endParaRPr/>
+          </a:p>
+        </p:txBody>
+      </p:sp>
+      <p:sp>
+        <p:nvSpPr>
+          <p:cNvPr id="6" name="Code"/>
+          <p:cNvSpPr txBox="1"/>
+          <p:nvPr/>
+        </p:nvSpPr>
+        <p:spPr>
+          <a:xfrm>
+            <a:off x="810000" y="1870000"/>
+            <a:ext cx="10550000" cy="3980000"/>
+          </a:xfrm>
+          <a:prstGeom prst="rect">
+            <a:avLst/>
+          </a:prstGeom>
+          <a:noFill/>
+          <a:ln>
+            <a:noFill/>
+          </a:ln>
+        </p:spPr>
+        <p:txBody>
+          <a:bodyPr wrap="square" rtlCol="0">
+            <a:spAutoFit/>
           </a:bodyPr>
           <a:lstStyle/>
           <a:p>
-            <a:pPr algn="l">
-              <a:lnSpc>
-                <a:spcPct val="104000"/>
-              </a:lnSpc>
-              <a:buNone/>
-              <a:defRPr sz="1500" b="0">
+            <a:r>
+              <a:rPr lang="zh-TW" sz="1150">
                 <a:solidFill>
                   <a:srgbClr val="E5E7EB"/>
                 </a:solidFill>
                 <a:latin typeface="Consolas"/>
                 <a:ea typeface="Consolas"/>
                 <a:cs typeface="Consolas"/>
-              </a:defRPr>
-            </a:pPr>
-            <a:r>
-              <a:rPr sz="1500" b="0">
+              </a:rPr>
+              <a:t># 查看容器狀態</a:t>
+            </a:r>
+          </a:p>
+          <a:p>
+            <a:r>
+              <a:rPr lang="zh-TW" sz="1150">
                 <a:solidFill>
                   <a:srgbClr val="E5E7EB"/>
                 </a:solidFill>
@@ -24695,26 +24370,25 @@
                 <a:ea typeface="Consolas"/>
                 <a:cs typeface="Consolas"/>
               </a:rPr>
-              <a:t># 查看狀態</a:t>
-            </a:r>
-          </a:p>
-          <a:p>
-            <a:pPr algn="l">
-              <a:lnSpc>
-                <a:spcPct val="104000"/>
-              </a:lnSpc>
-              <a:buNone/>
-              <a:defRPr sz="1500" b="0">
+              <a:t>docker ps</a:t>
+            </a:r>
+          </a:p>
+          <a:p>
+            <a:r>
+              <a:rPr lang="zh-TW" sz="1150">
                 <a:solidFill>
                   <a:srgbClr val="E5E7EB"/>
                 </a:solidFill>
                 <a:latin typeface="Consolas"/>
                 <a:ea typeface="Consolas"/>
                 <a:cs typeface="Consolas"/>
-              </a:defRPr>
-            </a:pPr>
-            <a:r>
-              <a:rPr sz="1500" b="0">
+              </a:rPr>
+              <a:t> </a:t>
+            </a:r>
+          </a:p>
+          <a:p>
+            <a:r>
+              <a:rPr lang="zh-TW" sz="1150">
                 <a:solidFill>
                   <a:srgbClr val="E5E7EB"/>
                 </a:solidFill>
@@ -24722,36 +24396,25 @@
                 <a:ea typeface="Consolas"/>
                 <a:cs typeface="Consolas"/>
               </a:rPr>
-              <a:t>docker ps</a:t>
-            </a:r>
-          </a:p>
-          <a:p>
-            <a:endParaRPr sz="1500" b="0">
-              <a:solidFill>
-                <a:srgbClr val="E5E7EB"/>
-              </a:solidFill>
-              <a:latin typeface="Consolas"/>
-              <a:ea typeface="Consolas"/>
-              <a:cs typeface="Consolas"/>
-            </a:endParaRPr>
-          </a:p>
-          <a:p>
-            <a:pPr algn="l">
-              <a:lnSpc>
-                <a:spcPct val="104000"/>
-              </a:lnSpc>
-              <a:buNone/>
-              <a:defRPr sz="1500" b="0">
+              <a:t># 查看 log</a:t>
+            </a:r>
+          </a:p>
+          <a:p>
+            <a:r>
+              <a:rPr lang="zh-TW" sz="1150">
                 <a:solidFill>
                   <a:srgbClr val="E5E7EB"/>
                 </a:solidFill>
                 <a:latin typeface="Consolas"/>
                 <a:ea typeface="Consolas"/>
                 <a:cs typeface="Consolas"/>
-              </a:defRPr>
-            </a:pPr>
-            <a:r>
-              <a:rPr sz="1500" b="0">
+              </a:rPr>
+              <a:t>docker logs my-web</a:t>
+            </a:r>
+          </a:p>
+          <a:p>
+            <a:r>
+              <a:rPr lang="zh-TW" sz="1150">
                 <a:solidFill>
                   <a:srgbClr val="E5E7EB"/>
                 </a:solidFill>
@@ -24759,26 +24422,25 @@
                 <a:ea typeface="Consolas"/>
                 <a:cs typeface="Consolas"/>
               </a:rPr>
-              <a:t># 查看 log</a:t>
-            </a:r>
-          </a:p>
-          <a:p>
-            <a:pPr algn="l">
-              <a:lnSpc>
-                <a:spcPct val="104000"/>
-              </a:lnSpc>
-              <a:buNone/>
-              <a:defRPr sz="1500" b="0">
+              <a:t> </a:t>
+            </a:r>
+          </a:p>
+          <a:p>
+            <a:r>
+              <a:rPr lang="zh-TW" sz="1150">
                 <a:solidFill>
                   <a:srgbClr val="E5E7EB"/>
                 </a:solidFill>
                 <a:latin typeface="Consolas"/>
                 <a:ea typeface="Consolas"/>
                 <a:cs typeface="Consolas"/>
-              </a:defRPr>
-            </a:pPr>
-            <a:r>
-              <a:rPr sz="1500" b="0">
+              </a:rPr>
+              <a:t># 停止容器</a:t>
+            </a:r>
+          </a:p>
+          <a:p>
+            <a:r>
+              <a:rPr lang="zh-TW" sz="1150">
                 <a:solidFill>
                   <a:srgbClr val="E5E7EB"/>
                 </a:solidFill>
@@ -24786,36 +24448,25 @@
                 <a:ea typeface="Consolas"/>
                 <a:cs typeface="Consolas"/>
               </a:rPr>
-              <a:t>docker logs my-web</a:t>
-            </a:r>
-          </a:p>
-          <a:p>
-            <a:endParaRPr sz="1500" b="0">
-              <a:solidFill>
-                <a:srgbClr val="E5E7EB"/>
-              </a:solidFill>
-              <a:latin typeface="Consolas"/>
-              <a:ea typeface="Consolas"/>
-              <a:cs typeface="Consolas"/>
-            </a:endParaRPr>
-          </a:p>
-          <a:p>
-            <a:pPr algn="l">
-              <a:lnSpc>
-                <a:spcPct val="104000"/>
-              </a:lnSpc>
-              <a:buNone/>
-              <a:defRPr sz="1500" b="0">
+              <a:t>docker stop my-web</a:t>
+            </a:r>
+          </a:p>
+          <a:p>
+            <a:r>
+              <a:rPr lang="zh-TW" sz="1150">
                 <a:solidFill>
                   <a:srgbClr val="E5E7EB"/>
                 </a:solidFill>
                 <a:latin typeface="Consolas"/>
                 <a:ea typeface="Consolas"/>
                 <a:cs typeface="Consolas"/>
-              </a:defRPr>
-            </a:pPr>
-            <a:r>
-              <a:rPr sz="1500" b="0">
+              </a:rPr>
+              <a:t> </a:t>
+            </a:r>
+          </a:p>
+          <a:p>
+            <a:r>
+              <a:rPr lang="zh-TW" sz="1150">
                 <a:solidFill>
                   <a:srgbClr val="E5E7EB"/>
                 </a:solidFill>
@@ -24823,26 +24474,25 @@
                 <a:ea typeface="Consolas"/>
                 <a:cs typeface="Consolas"/>
               </a:rPr>
-              <a:t># 停止與啟動</a:t>
-            </a:r>
-          </a:p>
-          <a:p>
-            <a:pPr algn="l">
-              <a:lnSpc>
-                <a:spcPct val="104000"/>
-              </a:lnSpc>
-              <a:buNone/>
-              <a:defRPr sz="1500" b="0">
+              <a:t># 重新啟動</a:t>
+            </a:r>
+          </a:p>
+          <a:p>
+            <a:r>
+              <a:rPr lang="zh-TW" sz="1150">
                 <a:solidFill>
                   <a:srgbClr val="E5E7EB"/>
                 </a:solidFill>
                 <a:latin typeface="Consolas"/>
                 <a:ea typeface="Consolas"/>
                 <a:cs typeface="Consolas"/>
-              </a:defRPr>
-            </a:pPr>
-            <a:r>
-              <a:rPr sz="1500" b="0">
+              </a:rPr>
+              <a:t>docker start my-web</a:t>
+            </a:r>
+          </a:p>
+          <a:p>
+            <a:r>
+              <a:rPr lang="zh-TW" sz="1150">
                 <a:solidFill>
                   <a:srgbClr val="E5E7EB"/>
                 </a:solidFill>
@@ -24850,26 +24500,25 @@
                 <a:ea typeface="Consolas"/>
                 <a:cs typeface="Consolas"/>
               </a:rPr>
-              <a:t>docker stop my-web</a:t>
-            </a:r>
-          </a:p>
-          <a:p>
-            <a:pPr algn="l">
-              <a:lnSpc>
-                <a:spcPct val="104000"/>
-              </a:lnSpc>
-              <a:buNone/>
-              <a:defRPr sz="1500" b="0">
+              <a:t> </a:t>
+            </a:r>
+          </a:p>
+          <a:p>
+            <a:r>
+              <a:rPr lang="zh-TW" sz="1150">
                 <a:solidFill>
                   <a:srgbClr val="E5E7EB"/>
                 </a:solidFill>
                 <a:latin typeface="Consolas"/>
                 <a:ea typeface="Consolas"/>
                 <a:cs typeface="Consolas"/>
-              </a:defRPr>
-            </a:pPr>
-            <a:r>
-              <a:rPr sz="1500" b="0">
+              </a:rPr>
+              <a:t># 用完後刪除</a:t>
+            </a:r>
+          </a:p>
+          <a:p>
+            <a:r>
+              <a:rPr lang="zh-TW" sz="1150">
                 <a:solidFill>
                   <a:srgbClr val="E5E7EB"/>
                 </a:solidFill>
@@ -24877,70 +24526,6 @@
                 <a:ea typeface="Consolas"/>
                 <a:cs typeface="Consolas"/>
               </a:rPr>
-              <a:t>docker start my-web</a:t>
-            </a:r>
-          </a:p>
-          <a:p>
-            <a:endParaRPr sz="1500" b="0">
-              <a:solidFill>
-                <a:srgbClr val="E5E7EB"/>
-              </a:solidFill>
-              <a:latin typeface="Consolas"/>
-              <a:ea typeface="Consolas"/>
-              <a:cs typeface="Consolas"/>
-            </a:endParaRPr>
-          </a:p>
-          <a:p>
-            <a:pPr algn="l">
-              <a:lnSpc>
-                <a:spcPct val="104000"/>
-              </a:lnSpc>
-              <a:buNone/>
-              <a:defRPr sz="1500" b="0">
-                <a:solidFill>
-                  <a:srgbClr val="E5E7EB"/>
-                </a:solidFill>
-                <a:latin typeface="Consolas"/>
-                <a:ea typeface="Consolas"/>
-                <a:cs typeface="Consolas"/>
-              </a:defRPr>
-            </a:pPr>
-            <a:r>
-              <a:rPr sz="1500" b="0">
-                <a:solidFill>
-                  <a:srgbClr val="E5E7EB"/>
-                </a:solidFill>
-                <a:latin typeface="Consolas"/>
-                <a:ea typeface="Consolas"/>
-                <a:cs typeface="Consolas"/>
-              </a:rPr>
-              <a:t># 用完後刪除</a:t>
-            </a:r>
-          </a:p>
-          <a:p>
-            <a:pPr algn="l">
-              <a:lnSpc>
-                <a:spcPct val="104000"/>
-              </a:lnSpc>
-              <a:buNone/>
-              <a:defRPr sz="1500" b="0">
-                <a:solidFill>
-                  <a:srgbClr val="E5E7EB"/>
-                </a:solidFill>
-                <a:latin typeface="Consolas"/>
-                <a:ea typeface="Consolas"/>
-                <a:cs typeface="Consolas"/>
-              </a:defRPr>
-            </a:pPr>
-            <a:r>
-              <a:rPr sz="1500" b="0">
-                <a:solidFill>
-                  <a:srgbClr val="E5E7EB"/>
-                </a:solidFill>
-                <a:latin typeface="Consolas"/>
-                <a:ea typeface="Consolas"/>
-                <a:cs typeface="Consolas"/>
-              </a:rPr>
               <a:t>docker rm -f my-web</a:t>
             </a:r>
           </a:p>
@@ -24948,561 +24533,83 @@
       </p:sp>
       <p:sp>
         <p:nvSpPr>
-          <p:cNvPr id="8" name="矩形: 圓角 7">
-            <a:extLst>
-              <a:ext uri="{FF2B5EF4-FFF2-40B4-BE49-F238E27FC236}">
-                <a16:creationId xmlns:a16="http://schemas.microsoft.com/office/drawing/2014/main" id="{A2654F34-82C4-4FE2-A051-FC002A93F6C1}"/>
-              </a:ext>
-            </a:extLst>
-          </p:cNvPr>
-          <p:cNvSpPr>
-            <a:spLocks noGrp="1"/>
-          </p:cNvSpPr>
-          <p:nvPr/>
-        </p:nvSpPr>
-        <p:spPr>
-          <a:xfrm>
-            <a:off x="6191250" y="1619250"/>
-            <a:ext cx="4286250" cy="1676400"/>
-          </a:xfrm>
-          <a:prstGeom prst="roundRect">
-            <a:avLst>
-              <a:gd name="adj" fmla="val 6818"/>
-            </a:avLst>
-          </a:prstGeom>
-          <a:solidFill>
-            <a:srgbClr val="FFF6DD"/>
-          </a:solidFill>
-          <a:ln w="9525">
-            <a:solidFill>
-              <a:srgbClr val="F59E0B"/>
-            </a:solidFill>
-            <a:prstDash val="solid"/>
-          </a:ln>
-        </p:spPr>
-        <p:style>
-          <a:lnRef idx="0">
-            <a:scrgbClr r="0" g="0" b="0"/>
-          </a:lnRef>
-          <a:fillRef idx="0">
-            <a:scrgbClr r="0" g="0" b="0"/>
-          </a:fillRef>
-          <a:effectRef idx="4">
-            <a:scrgbClr r="0" g="0" b="0"/>
-          </a:effectRef>
-          <a:fontRef idx="major"/>
-        </p:style>
-      </p:sp>
-      <p:sp>
-        <p:nvSpPr>
-          <p:cNvPr id="9" name="矩形 8">
-            <a:extLst>
-              <a:ext uri="{FF2B5EF4-FFF2-40B4-BE49-F238E27FC236}">
-                <a16:creationId xmlns:a16="http://schemas.microsoft.com/office/drawing/2014/main" id="{E73EB925-1B76-451F-A4FA-62ECFF471FEB}"/>
-              </a:ext>
-            </a:extLst>
-          </p:cNvPr>
-          <p:cNvSpPr>
-            <a:spLocks noGrp="1"/>
-          </p:cNvSpPr>
-          <p:nvPr/>
-        </p:nvSpPr>
-        <p:spPr>
-          <a:xfrm>
-            <a:off x="6419850" y="1809750"/>
-            <a:ext cx="3829050" cy="304800"/>
-          </a:xfrm>
-          <a:prstGeom prst="rect">
-            <a:avLst/>
-          </a:prstGeom>
-          <a:noFill/>
-          <a:ln w="0">
-            <a:noFill/>
-            <a:prstDash val="solid"/>
-          </a:ln>
-        </p:spPr>
-        <p:txBody>
-          <a:bodyPr lIns="0" tIns="0" rIns="0" bIns="0" anchor="t">
-            <a:normAutofit fontScale="94062"/>
+          <p:cNvPr id="7" name="Footer"/>
+          <p:cNvSpPr txBox="1"/>
+          <p:nvPr/>
+        </p:nvSpPr>
+        <p:spPr>
+          <a:xfrm>
+            <a:off x="609600" y="6330000"/>
+            <a:ext cx="7800000" cy="240000"/>
+          </a:xfrm>
+          <a:prstGeom prst="rect">
+            <a:avLst/>
+          </a:prstGeom>
+          <a:noFill/>
+          <a:ln>
+            <a:noFill/>
+          </a:ln>
+        </p:spPr>
+        <p:txBody>
+          <a:bodyPr wrap="square" rtlCol="0">
+            <a:spAutoFit/>
           </a:bodyPr>
           <a:lstStyle/>
           <a:p>
-            <a:pPr algn="l">
-              <a:lnSpc>
-                <a:spcPct val="105000"/>
-              </a:lnSpc>
-              <a:buNone/>
-              <a:defRPr sz="2025" b="1">
-                <a:solidFill>
-                  <a:srgbClr val="B45309"/>
-                </a:solidFill>
-                <a:latin typeface="Aptos Display"/>
-                <a:ea typeface="Aptos Display"/>
-                <a:cs typeface="Aptos Display"/>
-              </a:defRPr>
-            </a:pPr>
-            <a:r>
-              <a:rPr sz="2025" b="1">
-                <a:solidFill>
-                  <a:srgbClr val="B45309"/>
-                </a:solidFill>
-                <a:latin typeface="Aptos Display"/>
-                <a:ea typeface="Aptos Display"/>
-                <a:cs typeface="Aptos Display"/>
-              </a:rPr>
-              <a:t>卡住時先查三件事</a:t>
-            </a:r>
-          </a:p>
-        </p:txBody>
-      </p:sp>
-      <p:sp>
-        <p:nvSpPr>
-          <p:cNvPr id="10" name="矩形 9">
-            <a:extLst>
-              <a:ext uri="{FF2B5EF4-FFF2-40B4-BE49-F238E27FC236}">
-                <a16:creationId xmlns:a16="http://schemas.microsoft.com/office/drawing/2014/main" id="{6C60DB7A-83F3-46B9-A4D4-D908FD6F7262}"/>
-              </a:ext>
-            </a:extLst>
-          </p:cNvPr>
-          <p:cNvSpPr>
-            <a:spLocks noGrp="1"/>
-          </p:cNvSpPr>
-          <p:nvPr/>
-        </p:nvSpPr>
-        <p:spPr>
-          <a:xfrm>
-            <a:off x="6419850" y="2209800"/>
-            <a:ext cx="3829050" cy="895350"/>
-          </a:xfrm>
-          <a:prstGeom prst="rect">
-            <a:avLst/>
-          </a:prstGeom>
-          <a:noFill/>
-          <a:ln w="0">
-            <a:noFill/>
-            <a:prstDash val="solid"/>
-          </a:ln>
-        </p:spPr>
-        <p:txBody>
-          <a:bodyPr lIns="0" tIns="0" rIns="0" bIns="0" anchor="t">
-            <a:normAutofit/>
+            <a:r>
+              <a:rPr lang="zh-TW" sz="900">
+                <a:solidFill>
+                  <a:srgbClr val="94A3B8"/>
+                </a:solidFill>
+                <a:latin typeface="Aptos"/>
+                <a:ea typeface="Aptos"/>
+                <a:cs typeface="Aptos"/>
+              </a:rPr>
+              <a:t>Docker 基礎教學 | 第 1 堂 | 範例程式碼</a:t>
+            </a:r>
+          </a:p>
+        </p:txBody>
+      </p:sp>
+      <p:sp>
+        <p:nvSpPr>
+          <p:cNvPr id="8" name="Page"/>
+          <p:cNvSpPr txBox="1"/>
+          <p:nvPr/>
+        </p:nvSpPr>
+        <p:spPr>
+          <a:xfrm>
+            <a:off x="10850000" y="6330000"/>
+            <a:ext cx="650000" cy="240000"/>
+          </a:xfrm>
+          <a:prstGeom prst="rect">
+            <a:avLst/>
+          </a:prstGeom>
+          <a:noFill/>
+          <a:ln>
+            <a:noFill/>
+          </a:ln>
+        </p:spPr>
+        <p:txBody>
+          <a:bodyPr wrap="square" rtlCol="0">
+            <a:spAutoFit/>
           </a:bodyPr>
           <a:lstStyle/>
           <a:p>
-            <a:pPr algn="l">
-              <a:lnSpc>
-                <a:spcPct val="105000"/>
-              </a:lnSpc>
-              <a:buNone/>
-              <a:defRPr sz="1575" b="0">
-                <a:solidFill>
-                  <a:srgbClr val="111827"/>
-                </a:solidFill>
-                <a:latin typeface="Aptos"/>
-                <a:ea typeface="Aptos"/>
-                <a:cs typeface="Aptos"/>
-              </a:defRPr>
-            </a:pPr>
-            <a:r>
-              <a:rPr sz="1575" b="0">
-                <a:solidFill>
-                  <a:srgbClr val="111827"/>
-                </a:solidFill>
-                <a:latin typeface="Aptos"/>
-                <a:ea typeface="Aptos"/>
-                <a:cs typeface="Aptos"/>
-              </a:rPr>
-              <a:t>1. Docker Desktop 是否啟動</a:t>
-            </a:r>
-          </a:p>
-          <a:p>
-            <a:pPr algn="l">
-              <a:lnSpc>
-                <a:spcPct val="105000"/>
-              </a:lnSpc>
-              <a:buNone/>
-              <a:defRPr sz="1575" b="0">
-                <a:solidFill>
-                  <a:srgbClr val="111827"/>
-                </a:solidFill>
-                <a:latin typeface="Aptos"/>
-                <a:ea typeface="Aptos"/>
-                <a:cs typeface="Aptos"/>
-              </a:defRPr>
-            </a:pPr>
-            <a:r>
-              <a:rPr sz="1575" b="0">
-                <a:solidFill>
-                  <a:srgbClr val="111827"/>
-                </a:solidFill>
-                <a:latin typeface="Aptos"/>
-                <a:ea typeface="Aptos"/>
-                <a:cs typeface="Aptos"/>
-              </a:rPr>
-              <a:t>2. 容器是否真的 Up</a:t>
-            </a:r>
-          </a:p>
-          <a:p>
-            <a:pPr algn="l">
-              <a:lnSpc>
-                <a:spcPct val="105000"/>
-              </a:lnSpc>
-              <a:buNone/>
-              <a:defRPr sz="1575" b="0">
-                <a:solidFill>
-                  <a:srgbClr val="111827"/>
-                </a:solidFill>
-                <a:latin typeface="Aptos"/>
-                <a:ea typeface="Aptos"/>
-                <a:cs typeface="Aptos"/>
-              </a:defRPr>
-            </a:pPr>
-            <a:r>
-              <a:rPr sz="1575" b="0">
-                <a:solidFill>
-                  <a:srgbClr val="111827"/>
-                </a:solidFill>
-                <a:latin typeface="Aptos"/>
-                <a:ea typeface="Aptos"/>
-                <a:cs typeface="Aptos"/>
-              </a:rPr>
-              <a:t>3. 8080 port 是否被佔用</a:t>
-            </a:r>
-          </a:p>
-        </p:txBody>
-      </p:sp>
-      <p:sp>
-        <p:nvSpPr>
-          <p:cNvPr id="11" name="矩形: 圓角 10">
-            <a:extLst>
-              <a:ext uri="{FF2B5EF4-FFF2-40B4-BE49-F238E27FC236}">
-                <a16:creationId xmlns:a16="http://schemas.microsoft.com/office/drawing/2014/main" id="{709A5C67-8EC2-4D03-BF3E-19FF1B2CC5FF}"/>
-              </a:ext>
-            </a:extLst>
-          </p:cNvPr>
-          <p:cNvSpPr>
-            <a:spLocks noGrp="1"/>
-          </p:cNvSpPr>
-          <p:nvPr/>
-        </p:nvSpPr>
-        <p:spPr>
-          <a:xfrm>
-            <a:off x="6191250" y="3714750"/>
-            <a:ext cx="4286250" cy="1466850"/>
-          </a:xfrm>
-          <a:prstGeom prst="roundRect">
-            <a:avLst>
-              <a:gd name="adj" fmla="val 7792"/>
-            </a:avLst>
-          </a:prstGeom>
-          <a:solidFill>
-            <a:srgbClr val="FFFFFF"/>
-          </a:solidFill>
-          <a:ln w="9525">
-            <a:solidFill>
-              <a:srgbClr val="D9E2EC"/>
-            </a:solidFill>
-            <a:prstDash val="solid"/>
-          </a:ln>
-        </p:spPr>
-        <p:style>
-          <a:lnRef idx="0">
-            <a:scrgbClr r="0" g="0" b="0"/>
-          </a:lnRef>
-          <a:fillRef idx="0">
-            <a:scrgbClr r="0" g="0" b="0"/>
-          </a:fillRef>
-          <a:effectRef idx="4">
-            <a:scrgbClr r="0" g="0" b="0"/>
-          </a:effectRef>
-          <a:fontRef idx="major"/>
-        </p:style>
-      </p:sp>
-      <p:sp>
-        <p:nvSpPr>
-          <p:cNvPr id="12" name="矩形 11">
-            <a:extLst>
-              <a:ext uri="{FF2B5EF4-FFF2-40B4-BE49-F238E27FC236}">
-                <a16:creationId xmlns:a16="http://schemas.microsoft.com/office/drawing/2014/main" id="{EF8E021A-0BBC-4BE3-9D6F-FF53DCD01990}"/>
-              </a:ext>
-            </a:extLst>
-          </p:cNvPr>
-          <p:cNvSpPr>
-            <a:spLocks noGrp="1"/>
-          </p:cNvSpPr>
-          <p:nvPr/>
-        </p:nvSpPr>
-        <p:spPr>
-          <a:xfrm>
-            <a:off x="6419850" y="3905250"/>
-            <a:ext cx="3829050" cy="304800"/>
-          </a:xfrm>
-          <a:prstGeom prst="rect">
-            <a:avLst/>
-          </a:prstGeom>
-          <a:noFill/>
-          <a:ln w="0">
-            <a:noFill/>
-            <a:prstDash val="solid"/>
-          </a:ln>
-        </p:spPr>
-        <p:txBody>
-          <a:bodyPr lIns="0" tIns="0" rIns="0" bIns="0" anchor="t">
-            <a:normAutofit fontScale="94062"/>
-          </a:bodyPr>
-          <a:lstStyle/>
-          <a:p>
-            <a:pPr algn="l">
-              <a:lnSpc>
-                <a:spcPct val="105000"/>
-              </a:lnSpc>
-              <a:buNone/>
-              <a:defRPr sz="2025" b="1">
-                <a:solidFill>
-                  <a:srgbClr val="0B1220"/>
-                </a:solidFill>
-                <a:latin typeface="Aptos Display"/>
-                <a:ea typeface="Aptos Display"/>
-                <a:cs typeface="Aptos Display"/>
-              </a:defRPr>
-            </a:pPr>
-            <a:r>
-              <a:rPr sz="2025" b="1">
-                <a:solidFill>
-                  <a:srgbClr val="0B1220"/>
-                </a:solidFill>
-                <a:latin typeface="Aptos Display"/>
-                <a:ea typeface="Aptos Display"/>
-                <a:cs typeface="Aptos Display"/>
-              </a:rPr>
-              <a:t>刪 Image 前先刪 Container</a:t>
-            </a:r>
-          </a:p>
-        </p:txBody>
-      </p:sp>
-      <p:sp>
-        <p:nvSpPr>
-          <p:cNvPr id="13" name="矩形 12">
-            <a:extLst>
-              <a:ext uri="{FF2B5EF4-FFF2-40B4-BE49-F238E27FC236}">
-                <a16:creationId xmlns:a16="http://schemas.microsoft.com/office/drawing/2014/main" id="{EA15416C-6397-4945-BAE5-1B45BFBA8037}"/>
-              </a:ext>
-            </a:extLst>
-          </p:cNvPr>
-          <p:cNvSpPr>
-            <a:spLocks noGrp="1"/>
-          </p:cNvSpPr>
-          <p:nvPr/>
-        </p:nvSpPr>
-        <p:spPr>
-          <a:xfrm>
-            <a:off x="6419850" y="4305300"/>
-            <a:ext cx="3829050" cy="685800"/>
-          </a:xfrm>
-          <a:prstGeom prst="rect">
-            <a:avLst/>
-          </a:prstGeom>
-          <a:noFill/>
-          <a:ln w="0">
-            <a:noFill/>
-            <a:prstDash val="solid"/>
-          </a:ln>
-        </p:spPr>
-        <p:txBody>
-          <a:bodyPr lIns="0" tIns="0" rIns="0" bIns="0" anchor="t">
-            <a:normAutofit fontScale="95238"/>
-          </a:bodyPr>
-          <a:lstStyle/>
-          <a:p>
-            <a:pPr algn="l">
-              <a:lnSpc>
-                <a:spcPct val="105000"/>
-              </a:lnSpc>
-              <a:buNone/>
-              <a:defRPr sz="1500" b="0">
-                <a:solidFill>
-                  <a:srgbClr val="111827"/>
-                </a:solidFill>
-                <a:latin typeface="Aptos"/>
-                <a:ea typeface="Aptos"/>
-                <a:cs typeface="Aptos"/>
-              </a:defRPr>
-            </a:pPr>
-            <a:r>
-              <a:rPr sz="1500" b="0">
-                <a:solidFill>
-                  <a:srgbClr val="111827"/>
-                </a:solidFill>
-                <a:latin typeface="Aptos"/>
-                <a:ea typeface="Aptos"/>
-                <a:cs typeface="Aptos"/>
-              </a:rPr>
-              <a:t>只要還有容器使用某個 Image，不管容器是否停止，docker rmi 都可能失敗。</a:t>
-            </a:r>
-          </a:p>
-        </p:txBody>
-      </p:sp>
-      <p:sp>
-        <p:nvSpPr>
-          <p:cNvPr id="14" name="矩形 13">
-            <a:extLst>
-              <a:ext uri="{FF2B5EF4-FFF2-40B4-BE49-F238E27FC236}">
-                <a16:creationId xmlns:a16="http://schemas.microsoft.com/office/drawing/2014/main" id="{8C65C2FE-A7DA-4BB7-8191-A2A1861C197F}"/>
-              </a:ext>
-            </a:extLst>
-          </p:cNvPr>
-          <p:cNvSpPr>
-            <a:spLocks noGrp="1"/>
-          </p:cNvSpPr>
-          <p:nvPr/>
-        </p:nvSpPr>
-        <p:spPr>
-          <a:xfrm>
-            <a:off x="609600" y="6305550"/>
-            <a:ext cx="9906000" cy="13335"/>
-          </a:xfrm>
-          <a:prstGeom prst="rect">
-            <a:avLst/>
-          </a:prstGeom>
-          <a:solidFill>
-            <a:srgbClr val="D9E2EC"/>
-          </a:solidFill>
-          <a:ln w="0">
-            <a:noFill/>
-            <a:prstDash val="solid"/>
-          </a:ln>
-        </p:spPr>
-      </p:sp>
-      <p:sp>
-        <p:nvSpPr>
-          <p:cNvPr id="15" name="矩形 14">
-            <a:extLst>
-              <a:ext uri="{FF2B5EF4-FFF2-40B4-BE49-F238E27FC236}">
-                <a16:creationId xmlns:a16="http://schemas.microsoft.com/office/drawing/2014/main" id="{5F78135E-EC87-4A4B-B5DC-67A73CA39602}"/>
-              </a:ext>
-            </a:extLst>
-          </p:cNvPr>
-          <p:cNvSpPr>
-            <a:spLocks noGrp="1"/>
-          </p:cNvSpPr>
-          <p:nvPr/>
-        </p:nvSpPr>
-        <p:spPr>
-          <a:xfrm>
-            <a:off x="609600" y="6400800"/>
-            <a:ext cx="2667000" cy="171450"/>
-          </a:xfrm>
-          <a:prstGeom prst="rect">
-            <a:avLst/>
-          </a:prstGeom>
-          <a:noFill/>
-          <a:ln w="0">
-            <a:noFill/>
-            <a:prstDash val="solid"/>
-          </a:ln>
-        </p:spPr>
-        <p:txBody>
-          <a:bodyPr lIns="0" tIns="0" rIns="0" bIns="0" anchor="t">
-            <a:normAutofit/>
-          </a:bodyPr>
-          <a:lstStyle/>
-          <a:p>
-            <a:pPr algn="l">
-              <a:lnSpc>
-                <a:spcPct val="105000"/>
-              </a:lnSpc>
-              <a:buNone/>
-              <a:defRPr sz="825" b="0">
-                <a:solidFill>
-                  <a:srgbClr val="64748B"/>
-                </a:solidFill>
-                <a:latin typeface="Aptos"/>
-                <a:ea typeface="Aptos"/>
-                <a:cs typeface="Aptos"/>
-              </a:defRPr>
-            </a:pPr>
-            <a:r>
-              <a:rPr sz="825" b="0">
-                <a:solidFill>
-                  <a:srgbClr val="64748B"/>
-                </a:solidFill>
-                <a:latin typeface="Aptos"/>
-                <a:ea typeface="Aptos"/>
-                <a:cs typeface="Aptos"/>
-              </a:rPr>
-              <a:t>Docker 基礎教學 | 第 1 堂</a:t>
-            </a:r>
-          </a:p>
-        </p:txBody>
-      </p:sp>
-      <p:sp>
-        <p:nvSpPr>
-          <p:cNvPr id="16" name="矩形 15">
-            <a:extLst>
-              <a:ext uri="{FF2B5EF4-FFF2-40B4-BE49-F238E27FC236}">
-                <a16:creationId xmlns:a16="http://schemas.microsoft.com/office/drawing/2014/main" id="{337E8EB5-2C0A-40C2-A148-0F79CE92CBC9}"/>
-              </a:ext>
-            </a:extLst>
-          </p:cNvPr>
-          <p:cNvSpPr>
-            <a:spLocks noGrp="1"/>
-          </p:cNvSpPr>
-          <p:nvPr/>
-        </p:nvSpPr>
-        <p:spPr>
-          <a:xfrm>
-            <a:off x="11010900" y="6381750"/>
-            <a:ext cx="571500" cy="190500"/>
-          </a:xfrm>
-          <a:prstGeom prst="rect">
-            <a:avLst/>
-          </a:prstGeom>
-          <a:noFill/>
-          <a:ln w="0">
-            <a:noFill/>
-            <a:prstDash val="solid"/>
-          </a:ln>
-        </p:spPr>
-        <p:txBody>
-          <a:bodyPr lIns="0" tIns="0" rIns="0" bIns="0" anchor="t">
-            <a:normAutofit/>
-          </a:bodyPr>
-          <a:lstStyle/>
-          <a:p>
-            <a:pPr algn="r">
-              <a:lnSpc>
-                <a:spcPct val="105000"/>
-              </a:lnSpc>
-              <a:buNone/>
-              <a:defRPr sz="900" b="1">
-                <a:solidFill>
-                  <a:srgbClr val="64748B"/>
-                </a:solidFill>
-                <a:latin typeface="Aptos"/>
-                <a:ea typeface="Aptos"/>
-                <a:cs typeface="Aptos"/>
-              </a:defRPr>
-            </a:pPr>
-            <a:r>
-              <a:rPr sz="900" b="1">
-                <a:solidFill>
-                  <a:srgbClr val="64748B"/>
-                </a:solidFill>
-                <a:latin typeface="Aptos"/>
-                <a:ea typeface="Aptos"/>
-                <a:cs typeface="Aptos"/>
-              </a:rPr>
-              <a:t>26</a:t>
+            <a:r>
+              <a:rPr lang="zh-TW" sz="900">
+                <a:solidFill>
+                  <a:srgbClr val="94A3B8"/>
+                </a:solidFill>
+                <a:latin typeface="Aptos"/>
+                <a:ea typeface="Aptos"/>
+                <a:cs typeface="Aptos"/>
+              </a:rPr>
+              <a:t>CODE</a:t>
             </a:r>
           </a:p>
         </p:txBody>
       </p:sp>
     </p:spTree>
-    <p:extLst>
-      <p:ext uri="{BB962C8B-B14F-4D97-AF65-F5344CB8AC3E}">
-        <p14:creationId xmlns:p14="http://schemas.microsoft.com/office/powerpoint/2010/main" val="105072459"/>
-      </p:ext>
-    </p:extLst>
   </p:cSld>
   <p:clrMapOvr>
     <a:masterClrMapping/>
@@ -26893,487 +26000,6 @@
 
 <file path=ppt/slides/slide30.xml><?xml version="1.0" encoding="utf-8"?>
 <p:sld xmlns:a="http://schemas.openxmlformats.org/drawingml/2006/main" xmlns:r="http://schemas.openxmlformats.org/officeDocument/2006/relationships" xmlns:p="http://schemas.openxmlformats.org/presentationml/2006/main">
-  <p:cSld name="範例程式碼：狀態查看與清理">
-    <p:bg>
-      <p:bgPr>
-        <a:solidFill>
-          <a:srgbClr val="0B1220"/>
-        </a:solidFill>
-        <a:effectLst/>
-      </p:bgPr>
-    </p:bg>
-    <p:spTree>
-      <p:nvGrpSpPr>
-        <p:cNvPr id="1" name=""/>
-        <p:cNvGrpSpPr/>
-        <p:nvPr/>
-      </p:nvGrpSpPr>
-      <p:grpSpPr>
-        <a:xfrm>
-          <a:off x="0" y="0"/>
-          <a:ext cx="12192000" cy="6858000"/>
-          <a:chOff x="0" y="0"/>
-          <a:chExt cx="12192000" cy="6858000"/>
-        </a:xfrm>
-      </p:grpSpPr>
-      <p:sp>
-        <p:nvSpPr>
-          <p:cNvPr id="2" name="AppendixLabel"/>
-          <p:cNvSpPr txBox="1"/>
-          <p:nvPr/>
-        </p:nvSpPr>
-        <p:spPr>
-          <a:xfrm>
-            <a:off x="609600" y="420000"/>
-            <a:ext cx="2600000" cy="260000"/>
-          </a:xfrm>
-          <a:prstGeom prst="rect">
-            <a:avLst/>
-          </a:prstGeom>
-          <a:noFill/>
-          <a:ln>
-            <a:noFill/>
-          </a:ln>
-        </p:spPr>
-        <p:txBody>
-          <a:bodyPr wrap="square" rtlCol="0">
-            <a:spAutoFit/>
-          </a:bodyPr>
-          <a:lstStyle/>
-          <a:p>
-            <a:r>
-              <a:rPr lang="zh-TW" sz="1100" b="1">
-                <a:solidFill>
-                  <a:srgbClr val="93C5FD"/>
-                </a:solidFill>
-                <a:latin typeface="Aptos"/>
-                <a:ea typeface="Aptos"/>
-                <a:cs typeface="Aptos"/>
-              </a:rPr>
-              <a:t>CODE EXAMPLE</a:t>
-            </a:r>
-          </a:p>
-        </p:txBody>
-      </p:sp>
-      <p:sp>
-        <p:nvSpPr>
-          <p:cNvPr id="3" name="Title"/>
-          <p:cNvSpPr txBox="1"/>
-          <p:nvPr/>
-        </p:nvSpPr>
-        <p:spPr>
-          <a:xfrm>
-            <a:off x="609600" y="710000"/>
-            <a:ext cx="10600000" cy="560000"/>
-          </a:xfrm>
-          <a:prstGeom prst="rect">
-            <a:avLst/>
-          </a:prstGeom>
-          <a:noFill/>
-          <a:ln>
-            <a:noFill/>
-          </a:ln>
-        </p:spPr>
-        <p:txBody>
-          <a:bodyPr wrap="square" rtlCol="0">
-            <a:spAutoFit/>
-          </a:bodyPr>
-          <a:lstStyle/>
-          <a:p>
-            <a:r>
-              <a:rPr lang="zh-TW" sz="2600" b="1">
-                <a:solidFill>
-                  <a:srgbClr val="F8FAFC"/>
-                </a:solidFill>
-                <a:latin typeface="Aptos"/>
-                <a:ea typeface="Aptos"/>
-                <a:cs typeface="Aptos"/>
-              </a:rPr>
-              <a:t>範例程式碼：狀態查看與清理</a:t>
-            </a:r>
-          </a:p>
-        </p:txBody>
-      </p:sp>
-      <p:sp>
-        <p:nvSpPr>
-          <p:cNvPr id="4" name="Subtitle"/>
-          <p:cNvSpPr txBox="1"/>
-          <p:nvPr/>
-        </p:nvSpPr>
-        <p:spPr>
-          <a:xfrm>
-            <a:off x="609600" y="1260000"/>
-            <a:ext cx="8000000" cy="300000"/>
-          </a:xfrm>
-          <a:prstGeom prst="rect">
-            <a:avLst/>
-          </a:prstGeom>
-          <a:noFill/>
-          <a:ln>
-            <a:noFill/>
-          </a:ln>
-        </p:spPr>
-        <p:txBody>
-          <a:bodyPr wrap="square" rtlCol="0">
-            <a:spAutoFit/>
-          </a:bodyPr>
-          <a:lstStyle/>
-          <a:p>
-            <a:r>
-              <a:rPr lang="zh-TW" sz="1250">
-                <a:solidFill>
-                  <a:srgbClr val="CBD5E1"/>
-                </a:solidFill>
-                <a:latin typeface="Aptos"/>
-                <a:ea typeface="Aptos"/>
-                <a:cs typeface="Aptos"/>
-              </a:rPr>
-              <a:t>第 1 堂 | 可直接照做的完整範例</a:t>
-            </a:r>
-          </a:p>
-        </p:txBody>
-      </p:sp>
-      <p:sp>
-        <p:nvSpPr>
-          <p:cNvPr id="5" name="CodeBackground"/>
-          <p:cNvSpPr/>
-          <p:nvPr/>
-        </p:nvSpPr>
-        <p:spPr>
-          <a:xfrm>
-            <a:off x="609600" y="1680000"/>
-            <a:ext cx="10972800" cy="4370000"/>
-          </a:xfrm>
-          <a:prstGeom prst="roundRect">
-            <a:avLst/>
-          </a:prstGeom>
-          <a:solidFill>
-            <a:srgbClr val="111827"/>
-          </a:solidFill>
-          <a:ln w="9525">
-            <a:solidFill>
-              <a:srgbClr val="334155"/>
-            </a:solidFill>
-          </a:ln>
-        </p:spPr>
-        <p:style>
-          <a:lnRef idx="1">
-            <a:schemeClr val="accent1"/>
-          </a:lnRef>
-          <a:fillRef idx="3">
-            <a:schemeClr val="accent1"/>
-          </a:fillRef>
-          <a:effectRef idx="2">
-            <a:schemeClr val="accent1"/>
-          </a:effectRef>
-          <a:fontRef idx="minor">
-            <a:schemeClr val="lt1"/>
-          </a:fontRef>
-        </p:style>
-        <p:txBody>
-          <a:bodyPr/>
-          <a:lstStyle/>
-          <a:p>
-            <a:endParaRPr/>
-          </a:p>
-        </p:txBody>
-      </p:sp>
-      <p:sp>
-        <p:nvSpPr>
-          <p:cNvPr id="6" name="Code"/>
-          <p:cNvSpPr txBox="1"/>
-          <p:nvPr/>
-        </p:nvSpPr>
-        <p:spPr>
-          <a:xfrm>
-            <a:off x="810000" y="1870000"/>
-            <a:ext cx="10550000" cy="3980000"/>
-          </a:xfrm>
-          <a:prstGeom prst="rect">
-            <a:avLst/>
-          </a:prstGeom>
-          <a:noFill/>
-          <a:ln>
-            <a:noFill/>
-          </a:ln>
-        </p:spPr>
-        <p:txBody>
-          <a:bodyPr wrap="square" rtlCol="0">
-            <a:spAutoFit/>
-          </a:bodyPr>
-          <a:lstStyle/>
-          <a:p>
-            <a:r>
-              <a:rPr lang="zh-TW" sz="1150">
-                <a:solidFill>
-                  <a:srgbClr val="E5E7EB"/>
-                </a:solidFill>
-                <a:latin typeface="Consolas"/>
-                <a:ea typeface="Consolas"/>
-                <a:cs typeface="Consolas"/>
-              </a:rPr>
-              <a:t># 查看容器狀態</a:t>
-            </a:r>
-          </a:p>
-          <a:p>
-            <a:r>
-              <a:rPr lang="zh-TW" sz="1150">
-                <a:solidFill>
-                  <a:srgbClr val="E5E7EB"/>
-                </a:solidFill>
-                <a:latin typeface="Consolas"/>
-                <a:ea typeface="Consolas"/>
-                <a:cs typeface="Consolas"/>
-              </a:rPr>
-              <a:t>docker ps</a:t>
-            </a:r>
-          </a:p>
-          <a:p>
-            <a:r>
-              <a:rPr lang="zh-TW" sz="1150">
-                <a:solidFill>
-                  <a:srgbClr val="E5E7EB"/>
-                </a:solidFill>
-                <a:latin typeface="Consolas"/>
-                <a:ea typeface="Consolas"/>
-                <a:cs typeface="Consolas"/>
-              </a:rPr>
-              <a:t> </a:t>
-            </a:r>
-          </a:p>
-          <a:p>
-            <a:r>
-              <a:rPr lang="zh-TW" sz="1150">
-                <a:solidFill>
-                  <a:srgbClr val="E5E7EB"/>
-                </a:solidFill>
-                <a:latin typeface="Consolas"/>
-                <a:ea typeface="Consolas"/>
-                <a:cs typeface="Consolas"/>
-              </a:rPr>
-              <a:t># 查看 log</a:t>
-            </a:r>
-          </a:p>
-          <a:p>
-            <a:r>
-              <a:rPr lang="zh-TW" sz="1150">
-                <a:solidFill>
-                  <a:srgbClr val="E5E7EB"/>
-                </a:solidFill>
-                <a:latin typeface="Consolas"/>
-                <a:ea typeface="Consolas"/>
-                <a:cs typeface="Consolas"/>
-              </a:rPr>
-              <a:t>docker logs my-web</a:t>
-            </a:r>
-          </a:p>
-          <a:p>
-            <a:r>
-              <a:rPr lang="zh-TW" sz="1150">
-                <a:solidFill>
-                  <a:srgbClr val="E5E7EB"/>
-                </a:solidFill>
-                <a:latin typeface="Consolas"/>
-                <a:ea typeface="Consolas"/>
-                <a:cs typeface="Consolas"/>
-              </a:rPr>
-              <a:t> </a:t>
-            </a:r>
-          </a:p>
-          <a:p>
-            <a:r>
-              <a:rPr lang="zh-TW" sz="1150">
-                <a:solidFill>
-                  <a:srgbClr val="E5E7EB"/>
-                </a:solidFill>
-                <a:latin typeface="Consolas"/>
-                <a:ea typeface="Consolas"/>
-                <a:cs typeface="Consolas"/>
-              </a:rPr>
-              <a:t># 停止容器</a:t>
-            </a:r>
-          </a:p>
-          <a:p>
-            <a:r>
-              <a:rPr lang="zh-TW" sz="1150">
-                <a:solidFill>
-                  <a:srgbClr val="E5E7EB"/>
-                </a:solidFill>
-                <a:latin typeface="Consolas"/>
-                <a:ea typeface="Consolas"/>
-                <a:cs typeface="Consolas"/>
-              </a:rPr>
-              <a:t>docker stop my-web</a:t>
-            </a:r>
-          </a:p>
-          <a:p>
-            <a:r>
-              <a:rPr lang="zh-TW" sz="1150">
-                <a:solidFill>
-                  <a:srgbClr val="E5E7EB"/>
-                </a:solidFill>
-                <a:latin typeface="Consolas"/>
-                <a:ea typeface="Consolas"/>
-                <a:cs typeface="Consolas"/>
-              </a:rPr>
-              <a:t> </a:t>
-            </a:r>
-          </a:p>
-          <a:p>
-            <a:r>
-              <a:rPr lang="zh-TW" sz="1150">
-                <a:solidFill>
-                  <a:srgbClr val="E5E7EB"/>
-                </a:solidFill>
-                <a:latin typeface="Consolas"/>
-                <a:ea typeface="Consolas"/>
-                <a:cs typeface="Consolas"/>
-              </a:rPr>
-              <a:t># 重新啟動</a:t>
-            </a:r>
-          </a:p>
-          <a:p>
-            <a:r>
-              <a:rPr lang="zh-TW" sz="1150">
-                <a:solidFill>
-                  <a:srgbClr val="E5E7EB"/>
-                </a:solidFill>
-                <a:latin typeface="Consolas"/>
-                <a:ea typeface="Consolas"/>
-                <a:cs typeface="Consolas"/>
-              </a:rPr>
-              <a:t>docker start my-web</a:t>
-            </a:r>
-          </a:p>
-          <a:p>
-            <a:r>
-              <a:rPr lang="zh-TW" sz="1150">
-                <a:solidFill>
-                  <a:srgbClr val="E5E7EB"/>
-                </a:solidFill>
-                <a:latin typeface="Consolas"/>
-                <a:ea typeface="Consolas"/>
-                <a:cs typeface="Consolas"/>
-              </a:rPr>
-              <a:t> </a:t>
-            </a:r>
-          </a:p>
-          <a:p>
-            <a:r>
-              <a:rPr lang="zh-TW" sz="1150">
-                <a:solidFill>
-                  <a:srgbClr val="E5E7EB"/>
-                </a:solidFill>
-                <a:latin typeface="Consolas"/>
-                <a:ea typeface="Consolas"/>
-                <a:cs typeface="Consolas"/>
-              </a:rPr>
-              <a:t># 用完後刪除</a:t>
-            </a:r>
-          </a:p>
-          <a:p>
-            <a:r>
-              <a:rPr lang="zh-TW" sz="1150">
-                <a:solidFill>
-                  <a:srgbClr val="E5E7EB"/>
-                </a:solidFill>
-                <a:latin typeface="Consolas"/>
-                <a:ea typeface="Consolas"/>
-                <a:cs typeface="Consolas"/>
-              </a:rPr>
-              <a:t>docker rm -f my-web</a:t>
-            </a:r>
-          </a:p>
-        </p:txBody>
-      </p:sp>
-      <p:sp>
-        <p:nvSpPr>
-          <p:cNvPr id="7" name="Footer"/>
-          <p:cNvSpPr txBox="1"/>
-          <p:nvPr/>
-        </p:nvSpPr>
-        <p:spPr>
-          <a:xfrm>
-            <a:off x="609600" y="6330000"/>
-            <a:ext cx="7800000" cy="240000"/>
-          </a:xfrm>
-          <a:prstGeom prst="rect">
-            <a:avLst/>
-          </a:prstGeom>
-          <a:noFill/>
-          <a:ln>
-            <a:noFill/>
-          </a:ln>
-        </p:spPr>
-        <p:txBody>
-          <a:bodyPr wrap="square" rtlCol="0">
-            <a:spAutoFit/>
-          </a:bodyPr>
-          <a:lstStyle/>
-          <a:p>
-            <a:r>
-              <a:rPr lang="zh-TW" sz="900">
-                <a:solidFill>
-                  <a:srgbClr val="94A3B8"/>
-                </a:solidFill>
-                <a:latin typeface="Aptos"/>
-                <a:ea typeface="Aptos"/>
-                <a:cs typeface="Aptos"/>
-              </a:rPr>
-              <a:t>Docker 基礎教學 | 第 1 堂 | 範例程式碼</a:t>
-            </a:r>
-          </a:p>
-        </p:txBody>
-      </p:sp>
-      <p:sp>
-        <p:nvSpPr>
-          <p:cNvPr id="8" name="Page"/>
-          <p:cNvSpPr txBox="1"/>
-          <p:nvPr/>
-        </p:nvSpPr>
-        <p:spPr>
-          <a:xfrm>
-            <a:off x="10850000" y="6330000"/>
-            <a:ext cx="650000" cy="240000"/>
-          </a:xfrm>
-          <a:prstGeom prst="rect">
-            <a:avLst/>
-          </a:prstGeom>
-          <a:noFill/>
-          <a:ln>
-            <a:noFill/>
-          </a:ln>
-        </p:spPr>
-        <p:txBody>
-          <a:bodyPr wrap="square" rtlCol="0">
-            <a:spAutoFit/>
-          </a:bodyPr>
-          <a:lstStyle/>
-          <a:p>
-            <a:r>
-              <a:rPr lang="zh-TW" sz="900">
-                <a:solidFill>
-                  <a:srgbClr val="94A3B8"/>
-                </a:solidFill>
-                <a:latin typeface="Aptos"/>
-                <a:ea typeface="Aptos"/>
-                <a:cs typeface="Aptos"/>
-              </a:rPr>
-              <a:t>CODE</a:t>
-            </a:r>
-          </a:p>
-        </p:txBody>
-      </p:sp>
-    </p:spTree>
-  </p:cSld>
-  <p:clrMapOvr>
-    <a:masterClrMapping/>
-  </p:clrMapOvr>
-</p:sld>
-</file>
-
-<file path=ppt/slides/slide31.xml><?xml version="1.0" encoding="utf-8"?>
-<p:sld xmlns:a="http://schemas.openxmlformats.org/drawingml/2006/main" xmlns:r="http://schemas.openxmlformats.org/officeDocument/2006/relationships" xmlns:p="http://schemas.openxmlformats.org/presentationml/2006/main">
   <p:cSld>
     <p:bg>
       <p:bgPr>
@@ -27475,7 +26101,7 @@
         </p:nvSpPr>
         <p:spPr>
           <a:xfrm>
-            <a:off x="609600" y="685800"/>
+            <a:off x="2400300" y="2423106"/>
             <a:ext cx="8572500" cy="609600"/>
           </a:xfrm>
           <a:prstGeom prst="rect">
@@ -27508,7 +26134,7 @@
               </a:defRPr>
             </a:pPr>
             <a:r>
-              <a:rPr sz="2850" b="1">
+              <a:rPr sz="2850" b="1" dirty="0" err="1">
                 <a:solidFill>
                   <a:srgbClr val="FFFFFF"/>
                 </a:solidFill>
@@ -27516,461 +26142,60 @@
                 <a:ea typeface="Aptos Display"/>
                 <a:cs typeface="Aptos Display"/>
               </a:rPr>
-              <a:t>實作題 P3 + Bonus：清理與 Nginx 自我檢查</a:t>
-            </a:r>
-          </a:p>
-        </p:txBody>
-      </p:sp>
-      <p:sp>
-        <p:nvSpPr>
-          <p:cNvPr id="3" name="矩形: 圓角 2">
-            <a:extLst>
-              <a:ext uri="{FF2B5EF4-FFF2-40B4-BE49-F238E27FC236}">
-                <a16:creationId xmlns:a16="http://schemas.microsoft.com/office/drawing/2014/main" id="{BAD4DD0C-AB44-4DB1-A664-313AB63A2C32}"/>
-              </a:ext>
-            </a:extLst>
-          </p:cNvPr>
-          <p:cNvSpPr>
-            <a:spLocks noGrp="1"/>
-          </p:cNvSpPr>
-          <p:nvPr/>
-        </p:nvSpPr>
-        <p:spPr>
-          <a:xfrm>
-            <a:off x="914400" y="1676400"/>
-            <a:ext cx="4762500" cy="2476500"/>
-          </a:xfrm>
-          <a:prstGeom prst="roundRect">
-            <a:avLst>
-              <a:gd name="adj" fmla="val 4615"/>
-            </a:avLst>
-          </a:prstGeom>
-          <a:solidFill>
-            <a:srgbClr val="111827"/>
-          </a:solidFill>
-          <a:ln w="9525">
-            <a:solidFill>
-              <a:srgbClr val="60A5FA"/>
-            </a:solidFill>
-            <a:prstDash val="solid"/>
-          </a:ln>
-        </p:spPr>
-        <p:style>
-          <a:lnRef idx="0">
-            <a:scrgbClr r="0" g="0" b="0"/>
-          </a:lnRef>
-          <a:fillRef idx="0">
-            <a:scrgbClr r="0" g="0" b="0"/>
-          </a:fillRef>
-          <a:effectRef idx="4">
-            <a:scrgbClr r="0" g="0" b="0"/>
-          </a:effectRef>
-          <a:fontRef idx="major"/>
-        </p:style>
-      </p:sp>
-      <p:sp>
-        <p:nvSpPr>
-          <p:cNvPr id="4" name="矩形 3">
-            <a:extLst>
-              <a:ext uri="{FF2B5EF4-FFF2-40B4-BE49-F238E27FC236}">
-                <a16:creationId xmlns:a16="http://schemas.microsoft.com/office/drawing/2014/main" id="{F79E48D5-BF1E-49DD-B337-8A74A5193B3F}"/>
-              </a:ext>
-            </a:extLst>
-          </p:cNvPr>
-          <p:cNvSpPr>
-            <a:spLocks noGrp="1"/>
-          </p:cNvSpPr>
-          <p:nvPr/>
-        </p:nvSpPr>
-        <p:spPr>
-          <a:xfrm>
-            <a:off x="1143000" y="1866900"/>
-            <a:ext cx="4305300" cy="304800"/>
-          </a:xfrm>
-          <a:prstGeom prst="rect">
-            <a:avLst/>
-          </a:prstGeom>
-          <a:noFill/>
-          <a:ln w="0">
-            <a:noFill/>
-            <a:prstDash val="solid"/>
-          </a:ln>
-        </p:spPr>
-        <p:txBody>
-          <a:bodyPr lIns="0" tIns="0" rIns="0" bIns="0" anchor="t">
-            <a:normAutofit fontScale="90703"/>
-          </a:bodyPr>
-          <a:lstStyle/>
-          <a:p>
-            <a:pPr algn="l">
-              <a:lnSpc>
-                <a:spcPct val="105000"/>
-              </a:lnSpc>
-              <a:buNone/>
-              <a:defRPr sz="2100" b="1">
-                <a:solidFill>
-                  <a:srgbClr val="93C5FD"/>
+              <a:t>實作題</a:t>
+            </a:r>
+            <a:r>
+              <a:rPr sz="2850" b="1" dirty="0">
+                <a:solidFill>
+                  <a:srgbClr val="FFFFFF"/>
                 </a:solidFill>
                 <a:latin typeface="Aptos Display"/>
                 <a:ea typeface="Aptos Display"/>
                 <a:cs typeface="Aptos Display"/>
-              </a:defRPr>
-            </a:pPr>
-            <a:r>
-              <a:rPr sz="2100" b="1">
-                <a:solidFill>
-                  <a:srgbClr val="93C5FD"/>
+              </a:rPr>
+              <a:t> Bonus：</a:t>
+            </a:r>
+            <a:r>
+              <a:rPr lang="zh-TW" altLang="en-US" sz="2850" b="1" dirty="0">
+                <a:solidFill>
+                  <a:srgbClr val="FFFFFF"/>
                 </a:solidFill>
                 <a:latin typeface="Aptos Display"/>
                 <a:ea typeface="Aptos Display"/>
                 <a:cs typeface="Aptos Display"/>
               </a:rPr>
-              <a:t>P3：清理練習</a:t>
-            </a:r>
-          </a:p>
-        </p:txBody>
-      </p:sp>
-      <p:sp>
-        <p:nvSpPr>
-          <p:cNvPr id="5" name="矩形 4">
-            <a:extLst>
-              <a:ext uri="{FF2B5EF4-FFF2-40B4-BE49-F238E27FC236}">
-                <a16:creationId xmlns:a16="http://schemas.microsoft.com/office/drawing/2014/main" id="{93AB7213-19A9-4E3D-BB39-5993C645C901}"/>
-              </a:ext>
-            </a:extLst>
-          </p:cNvPr>
-          <p:cNvSpPr>
-            <a:spLocks noGrp="1"/>
-          </p:cNvSpPr>
-          <p:nvPr/>
-        </p:nvSpPr>
-        <p:spPr>
-          <a:xfrm>
-            <a:off x="1143000" y="2266950"/>
-            <a:ext cx="4305300" cy="1695450"/>
-          </a:xfrm>
-          <a:prstGeom prst="rect">
-            <a:avLst/>
-          </a:prstGeom>
-          <a:noFill/>
-          <a:ln w="0">
-            <a:noFill/>
-            <a:prstDash val="solid"/>
-          </a:ln>
-        </p:spPr>
-        <p:txBody>
-          <a:bodyPr lIns="0" tIns="0" rIns="0" bIns="0" anchor="t">
-            <a:normAutofit/>
-          </a:bodyPr>
-          <a:lstStyle/>
-          <a:p>
-            <a:pPr algn="l">
-              <a:lnSpc>
-                <a:spcPct val="105000"/>
-              </a:lnSpc>
-              <a:buNone/>
-              <a:defRPr sz="1500" b="0">
-                <a:solidFill>
-                  <a:srgbClr val="E2E8F0"/>
-                </a:solidFill>
-                <a:latin typeface="Aptos"/>
-                <a:ea typeface="Aptos"/>
-                <a:cs typeface="Aptos"/>
-              </a:defRPr>
-            </a:pPr>
-            <a:r>
-              <a:rPr sz="1500" b="0">
-                <a:solidFill>
-                  <a:srgbClr val="E2E8F0"/>
-                </a:solidFill>
-                <a:latin typeface="Aptos"/>
-                <a:ea typeface="Aptos"/>
-                <a:cs typeface="Aptos"/>
-              </a:rPr>
-              <a:t>docker rm -f course-nginx</a:t>
-            </a:r>
-          </a:p>
-          <a:p>
-            <a:endParaRPr sz="1500" b="0">
-              <a:solidFill>
-                <a:srgbClr val="E2E8F0"/>
-              </a:solidFill>
-              <a:latin typeface="Aptos"/>
-              <a:ea typeface="Aptos"/>
-              <a:cs typeface="Aptos"/>
-            </a:endParaRPr>
-          </a:p>
-          <a:p>
-            <a:pPr algn="l">
-              <a:lnSpc>
-                <a:spcPct val="105000"/>
-              </a:lnSpc>
-              <a:buNone/>
-              <a:defRPr sz="1500" b="0">
-                <a:solidFill>
-                  <a:srgbClr val="E2E8F0"/>
-                </a:solidFill>
-                <a:latin typeface="Aptos"/>
-                <a:ea typeface="Aptos"/>
-                <a:cs typeface="Aptos"/>
-              </a:defRPr>
-            </a:pPr>
-            <a:r>
-              <a:rPr sz="1500" b="0">
-                <a:solidFill>
-                  <a:srgbClr val="E2E8F0"/>
-                </a:solidFill>
-                <a:latin typeface="Aptos"/>
-                <a:ea typeface="Aptos"/>
-                <a:cs typeface="Aptos"/>
-              </a:rPr>
-              <a:t>docker rmi python:3.11 python:3.11-alpine</a:t>
-            </a:r>
-          </a:p>
-          <a:p>
-            <a:endParaRPr sz="1500" b="0">
-              <a:solidFill>
-                <a:srgbClr val="E2E8F0"/>
-              </a:solidFill>
-              <a:latin typeface="Aptos"/>
-              <a:ea typeface="Aptos"/>
-              <a:cs typeface="Aptos"/>
-            </a:endParaRPr>
-          </a:p>
-          <a:p>
-            <a:pPr algn="l">
-              <a:lnSpc>
-                <a:spcPct val="105000"/>
-              </a:lnSpc>
-              <a:buNone/>
-              <a:defRPr sz="1500" b="0">
-                <a:solidFill>
-                  <a:srgbClr val="E2E8F0"/>
-                </a:solidFill>
-                <a:latin typeface="Aptos"/>
-                <a:ea typeface="Aptos"/>
-                <a:cs typeface="Aptos"/>
-              </a:defRPr>
-            </a:pPr>
-            <a:r>
-              <a:rPr sz="1500" b="0">
-                <a:solidFill>
-                  <a:srgbClr val="E2E8F0"/>
-                </a:solidFill>
-                <a:latin typeface="Aptos"/>
-                <a:ea typeface="Aptos"/>
-                <a:cs typeface="Aptos"/>
-              </a:rPr>
-              <a:t>確認 docker ps -a 和 docker images。</a:t>
-            </a:r>
-          </a:p>
-        </p:txBody>
-      </p:sp>
-      <p:sp>
-        <p:nvSpPr>
-          <p:cNvPr id="6" name="矩形: 圓角 5">
-            <a:extLst>
-              <a:ext uri="{FF2B5EF4-FFF2-40B4-BE49-F238E27FC236}">
-                <a16:creationId xmlns:a16="http://schemas.microsoft.com/office/drawing/2014/main" id="{1E695BE6-9D9D-442C-8186-97915C2EB928}"/>
-              </a:ext>
-            </a:extLst>
-          </p:cNvPr>
-          <p:cNvSpPr>
-            <a:spLocks noGrp="1"/>
-          </p:cNvSpPr>
-          <p:nvPr/>
-        </p:nvSpPr>
-        <p:spPr>
-          <a:xfrm>
-            <a:off x="6515100" y="1676400"/>
-            <a:ext cx="4762500" cy="2476500"/>
-          </a:xfrm>
-          <a:prstGeom prst="roundRect">
-            <a:avLst>
-              <a:gd name="adj" fmla="val 4615"/>
-            </a:avLst>
-          </a:prstGeom>
-          <a:solidFill>
-            <a:srgbClr val="111827"/>
-          </a:solidFill>
-          <a:ln w="9525">
-            <a:solidFill>
-              <a:srgbClr val="34D399"/>
-            </a:solidFill>
-            <a:prstDash val="solid"/>
-          </a:ln>
-        </p:spPr>
-        <p:style>
-          <a:lnRef idx="0">
-            <a:scrgbClr r="0" g="0" b="0"/>
-          </a:lnRef>
-          <a:fillRef idx="0">
-            <a:scrgbClr r="0" g="0" b="0"/>
-          </a:fillRef>
-          <a:effectRef idx="4">
-            <a:scrgbClr r="0" g="0" b="0"/>
-          </a:effectRef>
-          <a:fontRef idx="major"/>
-        </p:style>
-      </p:sp>
-      <p:sp>
-        <p:nvSpPr>
-          <p:cNvPr id="7" name="矩形 6">
-            <a:extLst>
-              <a:ext uri="{FF2B5EF4-FFF2-40B4-BE49-F238E27FC236}">
-                <a16:creationId xmlns:a16="http://schemas.microsoft.com/office/drawing/2014/main" id="{A0F24D3E-6F01-4956-B8C7-0DB447A0F6EA}"/>
-              </a:ext>
-            </a:extLst>
-          </p:cNvPr>
-          <p:cNvSpPr>
-            <a:spLocks noGrp="1"/>
-          </p:cNvSpPr>
-          <p:nvPr/>
-        </p:nvSpPr>
-        <p:spPr>
-          <a:xfrm>
-            <a:off x="6743700" y="1866900"/>
-            <a:ext cx="4305300" cy="304800"/>
-          </a:xfrm>
-          <a:prstGeom prst="rect">
-            <a:avLst/>
-          </a:prstGeom>
-          <a:noFill/>
-          <a:ln w="0">
-            <a:noFill/>
-            <a:prstDash val="solid"/>
-          </a:ln>
-        </p:spPr>
-        <p:txBody>
-          <a:bodyPr lIns="0" tIns="0" rIns="0" bIns="0" anchor="t">
-            <a:normAutofit fontScale="90703"/>
-          </a:bodyPr>
-          <a:lstStyle/>
-          <a:p>
-            <a:pPr algn="l">
-              <a:lnSpc>
-                <a:spcPct val="105000"/>
-              </a:lnSpc>
-              <a:buNone/>
-              <a:defRPr sz="2100" b="1">
-                <a:solidFill>
-                  <a:srgbClr val="86EFAC"/>
+              <a:t>重新下載</a:t>
+            </a:r>
+            <a:r>
+              <a:rPr lang="en-US" altLang="zh-TW" sz="2850" b="1" dirty="0">
+                <a:solidFill>
+                  <a:srgbClr val="FFFFFF"/>
                 </a:solidFill>
                 <a:latin typeface="Aptos Display"/>
                 <a:ea typeface="Aptos Display"/>
                 <a:cs typeface="Aptos Display"/>
-              </a:defRPr>
-            </a:pPr>
-            <a:r>
-              <a:rPr sz="2100" b="1">
-                <a:solidFill>
-                  <a:srgbClr val="86EFAC"/>
+              </a:rPr>
+              <a:t>nginx </a:t>
+            </a:r>
+            <a:r>
+              <a:rPr lang="zh-TW" altLang="en-US" sz="2850" b="1" dirty="0">
+                <a:solidFill>
+                  <a:srgbClr val="FFFFFF"/>
                 </a:solidFill>
                 <a:latin typeface="Aptos Display"/>
                 <a:ea typeface="Aptos Display"/>
                 <a:cs typeface="Aptos Display"/>
               </a:rPr>
-              <a:t>Bonus：Nginx 自我檢查</a:t>
-            </a:r>
-          </a:p>
-        </p:txBody>
-      </p:sp>
-      <p:sp>
-        <p:nvSpPr>
-          <p:cNvPr id="8" name="矩形 7">
-            <a:extLst>
-              <a:ext uri="{FF2B5EF4-FFF2-40B4-BE49-F238E27FC236}">
-                <a16:creationId xmlns:a16="http://schemas.microsoft.com/office/drawing/2014/main" id="{54266A0B-9CBD-475D-ABB6-8F2798F07920}"/>
-              </a:ext>
-            </a:extLst>
-          </p:cNvPr>
-          <p:cNvSpPr>
-            <a:spLocks noGrp="1"/>
-          </p:cNvSpPr>
-          <p:nvPr/>
-        </p:nvSpPr>
-        <p:spPr>
-          <a:xfrm>
-            <a:off x="6743700" y="2266950"/>
-            <a:ext cx="4305300" cy="1695450"/>
-          </a:xfrm>
-          <a:prstGeom prst="rect">
-            <a:avLst/>
-          </a:prstGeom>
-          <a:noFill/>
-          <a:ln w="0">
-            <a:noFill/>
-            <a:prstDash val="solid"/>
-          </a:ln>
-        </p:spPr>
-        <p:txBody>
-          <a:bodyPr lIns="0" tIns="0" rIns="0" bIns="0" anchor="t">
-            <a:normAutofit/>
-          </a:bodyPr>
-          <a:lstStyle/>
-          <a:p>
-            <a:pPr algn="l">
-              <a:lnSpc>
-                <a:spcPct val="105000"/>
-              </a:lnSpc>
-              <a:buNone/>
-              <a:defRPr sz="1500" b="0">
-                <a:solidFill>
-                  <a:srgbClr val="E2E8F0"/>
-                </a:solidFill>
-                <a:latin typeface="Aptos"/>
-                <a:ea typeface="Aptos"/>
-                <a:cs typeface="Aptos"/>
-              </a:defRPr>
-            </a:pPr>
-            <a:r>
-              <a:rPr sz="1500" b="0">
-                <a:solidFill>
-                  <a:srgbClr val="E2E8F0"/>
-                </a:solidFill>
-                <a:latin typeface="Aptos"/>
-                <a:ea typeface="Aptos"/>
-                <a:cs typeface="Aptos"/>
-              </a:rPr>
-              <a:t>照著附錄指令，重新跑一次 Nginx 容器。</a:t>
-            </a:r>
-          </a:p>
-          <a:p>
-            <a:endParaRPr sz="1500" b="0">
+              <a:t>製作精美的網站</a:t>
+            </a:r>
+            <a:endParaRPr sz="2850" b="1" dirty="0">
               <a:solidFill>
-                <a:srgbClr val="E2E8F0"/>
+                <a:srgbClr val="FFFFFF"/>
               </a:solidFill>
-              <a:latin typeface="Aptos"/>
-              <a:ea typeface="Aptos"/>
-              <a:cs typeface="Aptos"/>
+              <a:latin typeface="Aptos Display"/>
+              <a:ea typeface="Aptos Display"/>
+              <a:cs typeface="Aptos Display"/>
             </a:endParaRPr>
-          </a:p>
-          <a:p>
-            <a:pPr algn="l">
-              <a:lnSpc>
-                <a:spcPct val="105000"/>
-              </a:lnSpc>
-              <a:buNone/>
-              <a:defRPr sz="1500" b="0">
-                <a:solidFill>
-                  <a:srgbClr val="E2E8F0"/>
-                </a:solidFill>
-                <a:latin typeface="Aptos"/>
-                <a:ea typeface="Aptos"/>
-                <a:cs typeface="Aptos"/>
-              </a:defRPr>
-            </a:pPr>
-            <a:r>
-              <a:rPr sz="1500" b="0">
-                <a:solidFill>
-                  <a:srgbClr val="E2E8F0"/>
-                </a:solidFill>
-                <a:latin typeface="Aptos"/>
-                <a:ea typeface="Aptos"/>
-                <a:cs typeface="Aptos"/>
-              </a:rPr>
-              <a:t>換成 course-nginx-check / 8081:80，確認頁面、ps/logs 後清理。</a:t>
-            </a:r>
           </a:p>
         </p:txBody>
       </p:sp>

--- a/slides/docker-session1-basics-setup.pptx
+++ b/slides/docker-session1-basics-setup.pptx
@@ -138,6 +138,11 @@
       </a:defRPr>
     </a:lvl9pPr>
   </p:defaultTextStyle>
+  <p:extLst>
+    <p:ext uri="{EFAFB233-063F-42B5-8137-9DF3F51BA10A}">
+      <p15:sldGuideLst xmlns:p15="http://schemas.microsoft.com/office/powerpoint/2012/main"/>
+    </p:ext>
+  </p:extLst>
 </p:presentation>
 </file>
 
@@ -6017,7 +6022,7 @@
         </p:spPr>
         <p:txBody>
           <a:bodyPr lIns="0" tIns="0" rIns="0" bIns="0" anchor="t">
-            <a:normAutofit fontScale="61911" lnSpcReduction="10000"/>
+            <a:normAutofit fontScale="54411" lnSpcReduction="20000"/>
           </a:bodyPr>
           <a:lstStyle/>
           <a:p>
@@ -6188,7 +6193,7 @@
         </p:spPr>
         <p:txBody>
           <a:bodyPr lIns="0" tIns="0" rIns="0" bIns="0" anchor="t">
-            <a:normAutofit fontScale="61911" lnSpcReduction="10000"/>
+            <a:normAutofit fontScale="54411" lnSpcReduction="20000"/>
           </a:bodyPr>
           <a:lstStyle/>
           <a:p>
@@ -6359,7 +6364,7 @@
         </p:spPr>
         <p:txBody>
           <a:bodyPr lIns="0" tIns="0" rIns="0" bIns="0" anchor="t">
-            <a:normAutofit fontScale="61911" lnSpcReduction="10000"/>
+            <a:normAutofit fontScale="54411" lnSpcReduction="20000"/>
           </a:bodyPr>
           <a:lstStyle/>
           <a:p>
@@ -7385,7 +7390,7 @@
         </p:spPr>
         <p:txBody>
           <a:bodyPr lIns="0" tIns="0" rIns="0" bIns="0" anchor="t">
-            <a:normAutofit fontScale="82197" lnSpcReduction="10000"/>
+            <a:normAutofit fontScale="89697" lnSpcReduction="20000"/>
           </a:bodyPr>
           <a:lstStyle/>
           <a:p>
@@ -7583,7 +7588,7 @@
         </p:spPr>
         <p:txBody>
           <a:bodyPr lIns="0" tIns="0" rIns="0" bIns="0" anchor="t">
-            <a:normAutofit fontScale="82197" lnSpcReduction="10000"/>
+            <a:normAutofit fontScale="89697" lnSpcReduction="20000"/>
           </a:bodyPr>
           <a:lstStyle/>
           <a:p>
@@ -12105,7 +12110,7 @@
         </p:spPr>
         <p:txBody>
           <a:bodyPr lIns="0" tIns="0" rIns="0" bIns="0" anchor="t">
-            <a:normAutofit fontScale="64734" lnSpcReduction="10000"/>
+            <a:normAutofit fontScale="64734" lnSpcReduction="20000"/>
           </a:bodyPr>
           <a:lstStyle/>
           <a:p>
@@ -13263,7 +13268,7 @@
         </p:spPr>
         <p:txBody>
           <a:bodyPr lIns="0" tIns="0" rIns="0" bIns="0" anchor="t">
-            <a:normAutofit fontScale="84656" lnSpcReduction="10000"/>
+            <a:normAutofit fontScale="92156" lnSpcReduction="10000"/>
           </a:bodyPr>
           <a:lstStyle/>
           <a:p>
@@ -13325,7 +13330,7 @@
         </p:spPr>
         <p:txBody>
           <a:bodyPr lIns="0" tIns="0" rIns="0" bIns="0" anchor="t">
-            <a:normAutofit fontScale="84656" lnSpcReduction="10000"/>
+            <a:normAutofit fontScale="92156" lnSpcReduction="10000"/>
           </a:bodyPr>
           <a:lstStyle/>
           <a:p>
@@ -13453,7 +13458,7 @@
         </p:spPr>
         <p:txBody>
           <a:bodyPr lIns="0" tIns="0" rIns="0" bIns="0" anchor="t">
-            <a:normAutofit fontScale="84656" lnSpcReduction="10000"/>
+            <a:normAutofit fontScale="92156" lnSpcReduction="10000"/>
           </a:bodyPr>
           <a:lstStyle/>
           <a:p>
@@ -13515,7 +13520,7 @@
         </p:spPr>
         <p:txBody>
           <a:bodyPr lIns="0" tIns="0" rIns="0" bIns="0" anchor="t">
-            <a:normAutofit fontScale="84656" lnSpcReduction="10000"/>
+            <a:normAutofit fontScale="92156" lnSpcReduction="10000"/>
           </a:bodyPr>
           <a:lstStyle/>
           <a:p>
@@ -13643,7 +13648,7 @@
         </p:spPr>
         <p:txBody>
           <a:bodyPr lIns="0" tIns="0" rIns="0" bIns="0" anchor="t">
-            <a:normAutofit fontScale="84656" lnSpcReduction="10000"/>
+            <a:normAutofit fontScale="92156" lnSpcReduction="10000"/>
           </a:bodyPr>
           <a:lstStyle/>
           <a:p>
@@ -13705,7 +13710,7 @@
         </p:spPr>
         <p:txBody>
           <a:bodyPr lIns="0" tIns="0" rIns="0" bIns="0" anchor="t">
-            <a:normAutofit fontScale="84656" lnSpcReduction="10000"/>
+            <a:normAutofit fontScale="92156" lnSpcReduction="10000"/>
           </a:bodyPr>
           <a:lstStyle/>
           <a:p>
@@ -13833,7 +13838,7 @@
         </p:spPr>
         <p:txBody>
           <a:bodyPr lIns="0" tIns="0" rIns="0" bIns="0" anchor="t">
-            <a:normAutofit fontScale="84656" lnSpcReduction="10000"/>
+            <a:normAutofit fontScale="92156" lnSpcReduction="10000"/>
           </a:bodyPr>
           <a:lstStyle/>
           <a:p>
@@ -13895,7 +13900,7 @@
         </p:spPr>
         <p:txBody>
           <a:bodyPr lIns="0" tIns="0" rIns="0" bIns="0" anchor="t">
-            <a:normAutofit fontScale="84656" lnSpcReduction="10000"/>
+            <a:normAutofit fontScale="92156" lnSpcReduction="10000"/>
           </a:bodyPr>
           <a:lstStyle/>
           <a:p>
@@ -21181,7 +21186,7 @@
         </p:spPr>
         <p:txBody>
           <a:bodyPr lIns="0" tIns="0" rIns="0" bIns="0" anchor="t">
-            <a:normAutofit fontScale="61873" lnSpcReduction="10000"/>
+            <a:normAutofit fontScale="61873" lnSpcReduction="20000"/>
           </a:bodyPr>
           <a:lstStyle/>
           <a:p>
@@ -33089,7 +33094,7 @@
                 <a:latin typeface="Consolas"/>
                 <a:cs typeface="Consolas"/>
               </a:rPr>
-              <a:t>install</a:t>
+              <a:t>--install</a:t>
             </a:r>
             <a:endParaRPr sz="3200" dirty="0">
               <a:solidFill>

--- a/slides/docker-session1-basics-setup.pptx
+++ b/slides/docker-session1-basics-setup.pptx
@@ -11956,8 +11956,8 @@
         </p:nvSpPr>
         <p:spPr>
           <a:xfrm>
-            <a:off x="1600200" y="4914900"/>
-            <a:ext cx="8991600" cy="742950"/>
+            <a:off x="1600199" y="4914900"/>
+            <a:ext cx="9182595" cy="999012"/>
           </a:xfrm>
           <a:prstGeom prst="roundRect">
             <a:avLst>
@@ -12097,7 +12097,7 @@
         <p:spPr>
           <a:xfrm>
             <a:off x="1809750" y="5334000"/>
-            <a:ext cx="8572500" cy="190500"/>
+            <a:ext cx="8572500" cy="323850"/>
           </a:xfrm>
           <a:prstGeom prst="rect">
             <a:avLst/>
@@ -12110,7 +12110,7 @@
         </p:spPr>
         <p:txBody>
           <a:bodyPr lIns="0" tIns="0" rIns="0" bIns="0" anchor="t">
-            <a:normAutofit fontScale="64734" lnSpcReduction="20000"/>
+            <a:normAutofit fontScale="57234" lnSpcReduction="20000"/>
           </a:bodyPr>
           <a:lstStyle/>
           <a:p>
@@ -12129,13 +12129,38 @@
               </a:defRPr>
             </a:pPr>
             <a:r>
-              <a:rPr sz="2100" b="0">
+              <a:rPr lang="en-US" sz="2100" b="0" dirty="0">
                 <a:solidFill>
                   <a:srgbClr val="E5E7EB"/>
                 </a:solidFill>
                 <a:latin typeface="Consolas"/>
                 <a:ea typeface="Consolas"/>
                 <a:cs typeface="Consolas"/>
+              </a:rPr>
+              <a:t>docker pull hello-world</a:t>
+            </a:r>
+          </a:p>
+          <a:p>
+            <a:pPr algn="l">
+              <a:lnSpc>
+                <a:spcPct val="104000"/>
+              </a:lnSpc>
+              <a:buNone/>
+              <a:defRPr sz="2100" b="0">
+                <a:solidFill>
+                  <a:srgbClr val="E5E7EB"/>
+                </a:solidFill>
+                <a:latin typeface="Consolas"/>
+                <a:ea typeface="Consolas"/>
+                <a:cs typeface="Consolas"/>
+              </a:defRPr>
+            </a:pPr>
+            <a:r>
+              <a:rPr sz="2100" dirty="0">
+                <a:solidFill>
+                  <a:srgbClr val="E5E7EB"/>
+                </a:solidFill>
+                <a:latin typeface="Consolas"/>
               </a:rPr>
               <a:t>docker run hello-world</a:t>
             </a:r>
@@ -12648,7 +12673,7 @@
               </a:defRPr>
             </a:pPr>
             <a:r>
-              <a:rPr sz="1575" b="0">
+              <a:rPr sz="1575" b="0" dirty="0">
                 <a:solidFill>
                   <a:srgbClr val="E5E7EB"/>
                 </a:solidFill>
@@ -12656,65 +12681,20 @@
                 <a:ea typeface="Consolas"/>
                 <a:cs typeface="Consolas"/>
               </a:rPr>
-              <a:t># 拉取映像檔</a:t>
-            </a:r>
-          </a:p>
-          <a:p>
-            <a:pPr algn="l">
-              <a:lnSpc>
-                <a:spcPct val="104000"/>
-              </a:lnSpc>
-              <a:buNone/>
-              <a:defRPr sz="1575" b="0">
+              <a:t># </a:t>
+            </a:r>
+            <a:r>
+              <a:rPr sz="1575" b="0" dirty="0" err="1">
                 <a:solidFill>
                   <a:srgbClr val="E5E7EB"/>
                 </a:solidFill>
                 <a:latin typeface="Consolas"/>
                 <a:ea typeface="Consolas"/>
                 <a:cs typeface="Consolas"/>
-              </a:defRPr>
-            </a:pPr>
-            <a:r>
-              <a:rPr sz="1575" b="0">
-                <a:solidFill>
-                  <a:srgbClr val="E5E7EB"/>
-                </a:solidFill>
-                <a:latin typeface="Consolas"/>
-                <a:ea typeface="Consolas"/>
-                <a:cs typeface="Consolas"/>
-              </a:rPr>
-              <a:t>docker pull python:3.11</a:t>
-            </a:r>
-          </a:p>
-          <a:p>
-            <a:pPr algn="l">
-              <a:lnSpc>
-                <a:spcPct val="104000"/>
-              </a:lnSpc>
-              <a:buNone/>
-              <a:defRPr sz="1575" b="0">
-                <a:solidFill>
-                  <a:srgbClr val="E5E7EB"/>
-                </a:solidFill>
-                <a:latin typeface="Consolas"/>
-                <a:ea typeface="Consolas"/>
-                <a:cs typeface="Consolas"/>
-              </a:defRPr>
-            </a:pPr>
-            <a:r>
-              <a:rPr sz="1575" b="0">
-                <a:solidFill>
-                  <a:srgbClr val="E5E7EB"/>
-                </a:solidFill>
-                <a:latin typeface="Consolas"/>
-                <a:ea typeface="Consolas"/>
-                <a:cs typeface="Consolas"/>
-              </a:rPr>
-              <a:t>docker pull python:3.11-slim</a:t>
-            </a:r>
-          </a:p>
-          <a:p>
-            <a:endParaRPr sz="1575" b="0">
+              </a:rPr>
+              <a:t>拉取映像檔</a:t>
+            </a:r>
+            <a:endParaRPr sz="1575" b="0" dirty="0">
               <a:solidFill>
                 <a:srgbClr val="E5E7EB"/>
               </a:solidFill>
@@ -12739,7 +12719,7 @@
               </a:defRPr>
             </a:pPr>
             <a:r>
-              <a:rPr sz="1575" b="0">
+              <a:rPr sz="1575" b="0" dirty="0">
                 <a:solidFill>
                   <a:srgbClr val="E5E7EB"/>
                 </a:solidFill>
@@ -12747,8 +12727,37 @@
                 <a:ea typeface="Consolas"/>
                 <a:cs typeface="Consolas"/>
               </a:rPr>
-              <a:t># 查看本機映像檔</a:t>
-            </a:r>
+              <a:t>docker pull </a:t>
+            </a:r>
+            <a:r>
+              <a:rPr lang="en-US" sz="1575" b="0" dirty="0">
+                <a:solidFill>
+                  <a:srgbClr val="E5E7EB"/>
+                </a:solidFill>
+                <a:latin typeface="Consolas"/>
+                <a:ea typeface="Consolas"/>
+                <a:cs typeface="Consolas"/>
+              </a:rPr>
+              <a:t>hello-world</a:t>
+            </a:r>
+            <a:endParaRPr sz="1575" b="0" dirty="0">
+              <a:solidFill>
+                <a:srgbClr val="E5E7EB"/>
+              </a:solidFill>
+              <a:latin typeface="Consolas"/>
+              <a:ea typeface="Consolas"/>
+              <a:cs typeface="Consolas"/>
+            </a:endParaRPr>
+          </a:p>
+          <a:p>
+            <a:endParaRPr sz="1575" b="0" dirty="0">
+              <a:solidFill>
+                <a:srgbClr val="E5E7EB"/>
+              </a:solidFill>
+              <a:latin typeface="Consolas"/>
+              <a:ea typeface="Consolas"/>
+              <a:cs typeface="Consolas"/>
+            </a:endParaRPr>
           </a:p>
           <a:p>
             <a:pPr algn="l">
@@ -12766,7 +12775,7 @@
               </a:defRPr>
             </a:pPr>
             <a:r>
-              <a:rPr sz="1575" b="0">
+              <a:rPr sz="1575" b="0" dirty="0">
                 <a:solidFill>
                   <a:srgbClr val="E5E7EB"/>
                 </a:solidFill>
@@ -12774,8 +12783,132 @@
                 <a:ea typeface="Consolas"/>
                 <a:cs typeface="Consolas"/>
               </a:rPr>
+              <a:t># </a:t>
+            </a:r>
+            <a:r>
+              <a:rPr sz="1575" b="0" dirty="0" err="1">
+                <a:solidFill>
+                  <a:srgbClr val="E5E7EB"/>
+                </a:solidFill>
+                <a:latin typeface="Consolas"/>
+                <a:ea typeface="Consolas"/>
+                <a:cs typeface="Consolas"/>
+              </a:rPr>
+              <a:t>查看本機映像檔</a:t>
+            </a:r>
+            <a:endParaRPr sz="1575" b="0" dirty="0">
+              <a:solidFill>
+                <a:srgbClr val="E5E7EB"/>
+              </a:solidFill>
+              <a:latin typeface="Consolas"/>
+              <a:ea typeface="Consolas"/>
+              <a:cs typeface="Consolas"/>
+            </a:endParaRPr>
+          </a:p>
+          <a:p>
+            <a:pPr algn="l">
+              <a:lnSpc>
+                <a:spcPct val="104000"/>
+              </a:lnSpc>
+              <a:buNone/>
+              <a:defRPr sz="1575" b="0">
+                <a:solidFill>
+                  <a:srgbClr val="E5E7EB"/>
+                </a:solidFill>
+                <a:latin typeface="Consolas"/>
+                <a:ea typeface="Consolas"/>
+                <a:cs typeface="Consolas"/>
+              </a:defRPr>
+            </a:pPr>
+            <a:r>
+              <a:rPr sz="1575" b="0" dirty="0">
+                <a:solidFill>
+                  <a:srgbClr val="E5E7EB"/>
+                </a:solidFill>
+                <a:latin typeface="Consolas"/>
+                <a:ea typeface="Consolas"/>
+                <a:cs typeface="Consolas"/>
+              </a:rPr>
               <a:t>docker images</a:t>
             </a:r>
+            <a:endParaRPr lang="en-US" sz="1575" b="0" dirty="0">
+              <a:solidFill>
+                <a:srgbClr val="E5E7EB"/>
+              </a:solidFill>
+              <a:latin typeface="Consolas"/>
+              <a:ea typeface="Consolas"/>
+              <a:cs typeface="Consolas"/>
+            </a:endParaRPr>
+          </a:p>
+          <a:p>
+            <a:pPr algn="l">
+              <a:lnSpc>
+                <a:spcPct val="104000"/>
+              </a:lnSpc>
+              <a:buNone/>
+              <a:defRPr sz="1575" b="0">
+                <a:solidFill>
+                  <a:srgbClr val="E5E7EB"/>
+                </a:solidFill>
+                <a:latin typeface="Consolas"/>
+                <a:ea typeface="Consolas"/>
+                <a:cs typeface="Consolas"/>
+              </a:defRPr>
+            </a:pPr>
+            <a:endParaRPr lang="en-US" sz="1575" dirty="0">
+              <a:solidFill>
+                <a:srgbClr val="E5E7EB"/>
+              </a:solidFill>
+              <a:latin typeface="Consolas"/>
+              <a:ea typeface="Consolas"/>
+              <a:cs typeface="Consolas"/>
+            </a:endParaRPr>
+          </a:p>
+          <a:p>
+            <a:pPr algn="l">
+              <a:lnSpc>
+                <a:spcPct val="104000"/>
+              </a:lnSpc>
+              <a:buNone/>
+              <a:defRPr sz="1575" b="0">
+                <a:solidFill>
+                  <a:srgbClr val="E5E7EB"/>
+                </a:solidFill>
+                <a:latin typeface="Consolas"/>
+                <a:ea typeface="Consolas"/>
+                <a:cs typeface="Consolas"/>
+              </a:defRPr>
+            </a:pPr>
+            <a:r>
+              <a:rPr lang="en-US" sz="1575" dirty="0">
+                <a:solidFill>
+                  <a:srgbClr val="E5E7EB"/>
+                </a:solidFill>
+                <a:latin typeface="Consolas"/>
+                <a:ea typeface="Consolas"/>
+                <a:cs typeface="Consolas"/>
+              </a:rPr>
+              <a:t>d</a:t>
+            </a:r>
+            <a:r>
+              <a:rPr lang="en-US" sz="1575" b="0" dirty="0">
+                <a:solidFill>
+                  <a:srgbClr val="E5E7EB"/>
+                </a:solidFill>
+                <a:latin typeface="Consolas"/>
+                <a:ea typeface="Consolas"/>
+                <a:cs typeface="Consolas"/>
+              </a:rPr>
+              <a:t>ocker run hello-world</a:t>
+            </a:r>
+            <a:endParaRPr sz="1575" b="0" dirty="0">
+              <a:solidFill>
+                <a:srgbClr val="E5E7EB"/>
+              </a:solidFill>
+              <a:latin typeface="Consolas"/>
+              <a:ea typeface="Consolas"/>
+              <a:cs typeface="Consolas"/>
+            </a:endParaRPr>
           </a:p>
         </p:txBody>
       </p:sp>
@@ -12968,7 +13101,7 @@
               </a:defRPr>
             </a:pPr>
             <a:r>
-              <a:rPr sz="1575" b="0">
+              <a:rPr sz="1575" b="0" dirty="0">
                 <a:solidFill>
                   <a:srgbClr val="E5E7EB"/>
                 </a:solidFill>
@@ -12979,7 +13112,7 @@
               <a:t># </a:t>
             </a:r>
             <a:r>
-              <a:rPr sz="1575">
+              <a:rPr sz="1575" dirty="0" err="1">
                 <a:solidFill>
                   <a:srgbClr val="E5E7EB"/>
                 </a:solidFill>
@@ -12989,36 +13122,7 @@
               </a:rPr>
               <a:t>查看container</a:t>
             </a:r>
-          </a:p>
-          <a:p>
-            <a:pPr algn="l">
-              <a:lnSpc>
-                <a:spcPct val="104000"/>
-              </a:lnSpc>
-              <a:buNone/>
-              <a:defRPr sz="1575" b="0">
-                <a:solidFill>
-                  <a:srgbClr val="E5E7EB"/>
-                </a:solidFill>
-                <a:latin typeface="Consolas"/>
-                <a:ea typeface="Consolas"/>
-                <a:cs typeface="Consolas"/>
-              </a:defRPr>
-            </a:pPr>
-            <a:r>
-              <a:rPr sz="1575" b="0">
-                <a:solidFill>
-                  <a:srgbClr val="E5E7EB"/>
-                </a:solidFill>
-                <a:latin typeface="Consolas"/>
-                <a:ea typeface="Consolas"/>
-                <a:cs typeface="Consolas"/>
-              </a:rPr>
-              <a:t>docker ps</a:t>
-            </a:r>
-          </a:p>
-          <a:p>
-            <a:endParaRPr sz="1575" b="0">
+            <a:endParaRPr sz="1575" dirty="0">
               <a:solidFill>
                 <a:srgbClr val="E5E7EB"/>
               </a:solidFill>
@@ -13043,7 +13147,7 @@
               </a:defRPr>
             </a:pPr>
             <a:r>
-              <a:rPr sz="1575" b="0">
+              <a:rPr sz="1575" b="0" dirty="0">
                 <a:solidFill>
                   <a:srgbClr val="E5E7EB"/>
                 </a:solidFill>
@@ -13051,8 +13155,48 @@
                 <a:ea typeface="Consolas"/>
                 <a:cs typeface="Consolas"/>
               </a:rPr>
-              <a:t># 刪除映像檔</a:t>
-            </a:r>
+              <a:t>docker </a:t>
+            </a:r>
+            <a:r>
+              <a:rPr sz="1575" b="0" dirty="0" err="1">
+                <a:solidFill>
+                  <a:srgbClr val="E5E7EB"/>
+                </a:solidFill>
+                <a:latin typeface="Consolas"/>
+                <a:ea typeface="Consolas"/>
+                <a:cs typeface="Consolas"/>
+              </a:rPr>
+              <a:t>ps</a:t>
+            </a:r>
+            <a:r>
+              <a:rPr lang="en-US" sz="1575" b="0" dirty="0">
+                <a:solidFill>
+                  <a:srgbClr val="E5E7EB"/>
+                </a:solidFill>
+                <a:latin typeface="Consolas"/>
+                <a:ea typeface="Consolas"/>
+                <a:cs typeface="Consolas"/>
+              </a:rPr>
+              <a:t> -a</a:t>
+            </a:r>
+            <a:endParaRPr sz="1575" b="0" dirty="0">
+              <a:solidFill>
+                <a:srgbClr val="E5E7EB"/>
+              </a:solidFill>
+              <a:latin typeface="Consolas"/>
+              <a:ea typeface="Consolas"/>
+              <a:cs typeface="Consolas"/>
+            </a:endParaRPr>
+          </a:p>
+          <a:p>
+            <a:endParaRPr sz="1575" b="0" dirty="0">
+              <a:solidFill>
+                <a:srgbClr val="E5E7EB"/>
+              </a:solidFill>
+              <a:latin typeface="Consolas"/>
+              <a:ea typeface="Consolas"/>
+              <a:cs typeface="Consolas"/>
+            </a:endParaRPr>
           </a:p>
           <a:p>
             <a:pPr algn="l">
@@ -13070,7 +13214,7 @@
               </a:defRPr>
             </a:pPr>
             <a:r>
-              <a:rPr sz="1575" b="0">
+              <a:rPr sz="1575" b="0" dirty="0">
                 <a:solidFill>
                   <a:srgbClr val="E5E7EB"/>
                 </a:solidFill>
@@ -13078,8 +13222,27 @@
                 <a:ea typeface="Consolas"/>
                 <a:cs typeface="Consolas"/>
               </a:rPr>
-              <a:t>docker rmi python:3.11</a:t>
-            </a:r>
+              <a:t># </a:t>
+            </a:r>
+            <a:r>
+              <a:rPr sz="1575" b="0" dirty="0" err="1">
+                <a:solidFill>
+                  <a:srgbClr val="E5E7EB"/>
+                </a:solidFill>
+                <a:latin typeface="Consolas"/>
+                <a:ea typeface="Consolas"/>
+                <a:cs typeface="Consolas"/>
+              </a:rPr>
+              <a:t>刪除映像檔</a:t>
+            </a:r>
+            <a:endParaRPr sz="1575" b="0" dirty="0">
+              <a:solidFill>
+                <a:srgbClr val="E5E7EB"/>
+              </a:solidFill>
+              <a:latin typeface="Consolas"/>
+              <a:ea typeface="Consolas"/>
+              <a:cs typeface="Consolas"/>
+            </a:endParaRPr>
           </a:p>
           <a:p>
             <a:pPr algn="l">
@@ -13097,7 +13260,7 @@
               </a:defRPr>
             </a:pPr>
             <a:r>
-              <a:rPr sz="1575" b="0">
+              <a:rPr sz="1575" b="0" dirty="0">
                 <a:solidFill>
                   <a:srgbClr val="E5E7EB"/>
                 </a:solidFill>
@@ -13105,8 +13268,95 @@
                 <a:ea typeface="Consolas"/>
                 <a:cs typeface="Consolas"/>
               </a:rPr>
-              <a:t>docker rmi abc123def456</a:t>
-            </a:r>
+              <a:t>docker rm</a:t>
+            </a:r>
+            <a:r>
+              <a:rPr lang="en-US" sz="1575" dirty="0">
+                <a:solidFill>
+                  <a:srgbClr val="E5E7EB"/>
+                </a:solidFill>
+                <a:latin typeface="Consolas"/>
+                <a:ea typeface="Consolas"/>
+                <a:cs typeface="Consolas"/>
+              </a:rPr>
+              <a:t> abc123</a:t>
+            </a:r>
+            <a:endParaRPr sz="1575" b="0" dirty="0">
+              <a:solidFill>
+                <a:srgbClr val="E5E7EB"/>
+              </a:solidFill>
+              <a:latin typeface="Consolas"/>
+              <a:ea typeface="Consolas"/>
+              <a:cs typeface="Consolas"/>
+            </a:endParaRPr>
+          </a:p>
+          <a:p>
+            <a:pPr algn="l">
+              <a:lnSpc>
+                <a:spcPct val="104000"/>
+              </a:lnSpc>
+              <a:buNone/>
+              <a:defRPr sz="1575" b="0">
+                <a:solidFill>
+                  <a:srgbClr val="E5E7EB"/>
+                </a:solidFill>
+                <a:latin typeface="Consolas"/>
+                <a:ea typeface="Consolas"/>
+                <a:cs typeface="Consolas"/>
+              </a:defRPr>
+            </a:pPr>
+            <a:r>
+              <a:rPr sz="1575" b="0" dirty="0">
+                <a:solidFill>
+                  <a:srgbClr val="E5E7EB"/>
+                </a:solidFill>
+                <a:latin typeface="Consolas"/>
+                <a:ea typeface="Consolas"/>
+                <a:cs typeface="Consolas"/>
+              </a:rPr>
+              <a:t>docker </a:t>
+            </a:r>
+            <a:r>
+              <a:rPr sz="1575" b="0" dirty="0" err="1">
+                <a:solidFill>
+                  <a:srgbClr val="E5E7EB"/>
+                </a:solidFill>
+                <a:latin typeface="Consolas"/>
+                <a:ea typeface="Consolas"/>
+                <a:cs typeface="Consolas"/>
+              </a:rPr>
+              <a:t>rmi</a:t>
+            </a:r>
+            <a:r>
+              <a:rPr sz="1575" b="0" dirty="0">
+                <a:solidFill>
+                  <a:srgbClr val="E5E7EB"/>
+                </a:solidFill>
+                <a:latin typeface="Consolas"/>
+                <a:ea typeface="Consolas"/>
+                <a:cs typeface="Consolas"/>
+              </a:rPr>
+              <a:t> </a:t>
+            </a:r>
+            <a:r>
+              <a:rPr lang="en-US" sz="1575" b="0" dirty="0">
+                <a:solidFill>
+                  <a:srgbClr val="E5E7EB"/>
+                </a:solidFill>
+                <a:latin typeface="Consolas"/>
+                <a:ea typeface="Consolas"/>
+                <a:cs typeface="Consolas"/>
+              </a:rPr>
+              <a:t>hello-world</a:t>
+            </a:r>
+            <a:endParaRPr sz="1575" b="0" dirty="0">
+              <a:solidFill>
+                <a:srgbClr val="E5E7EB"/>
+              </a:solidFill>
+              <a:latin typeface="Consolas"/>
+              <a:ea typeface="Consolas"/>
+              <a:cs typeface="Consolas"/>
+            </a:endParaRPr>
           </a:p>
         </p:txBody>
       </p:sp>
@@ -36709,7 +36959,7 @@
               </a:defRPr>
             </a:pPr>
             <a:r>
-              <a:rPr sz="1800" b="0">
+              <a:rPr sz="1800" b="0" dirty="0">
                 <a:solidFill>
                   <a:srgbClr val="E5E7EB"/>
                 </a:solidFill>
@@ -36721,7 +36971,7 @@
             </a:r>
           </a:p>
           <a:p>
-            <a:endParaRPr sz="1800" b="0">
+            <a:endParaRPr sz="1800" b="0" dirty="0">
               <a:solidFill>
                 <a:srgbClr val="E5E7EB"/>
               </a:solidFill>
@@ -36746,7 +36996,7 @@
               </a:defRPr>
             </a:pPr>
             <a:r>
-              <a:rPr sz="1800" b="0">
+              <a:rPr sz="1800" b="0" dirty="0">
                 <a:solidFill>
                   <a:srgbClr val="E5E7EB"/>
                 </a:solidFill>

--- a/slides/docker-session1-basics-setup.pptx
+++ b/slides/docker-session1-basics-setup.pptx
@@ -5,7 +5,7 @@
     <p:sldMasterId id="2147483648" r:id="rId1"/>
   </p:sldMasterIdLst>
   <p:notesMasterIdLst>
-    <p:notesMasterId r:id="rId34"/>
+    <p:notesMasterId r:id="rId32"/>
   </p:notesMasterIdLst>
   <p:sldIdLst>
     <p:sldId id="256" r:id="rId2"/>
@@ -38,8 +38,6 @@
     <p:sldId id="283" r:id="rId29"/>
     <p:sldId id="284" r:id="rId30"/>
     <p:sldId id="285" r:id="rId31"/>
-    <p:sldId id="286" r:id="rId32"/>
-    <p:sldId id="287" r:id="rId33"/>
   </p:sldIdLst>
   <p:sldSz cx="12192000" cy="6858000"/>
   <p:notesSz cx="6858000" cy="9144000"/>
@@ -2043,156 +2041,6 @@
 </file>
 
 <file path=ppt/notesSlides/notesSlide30.xml><?xml version="1.0" encoding="utf-8"?>
-<p:notes xmlns:a="http://schemas.openxmlformats.org/drawingml/2006/main" xmlns:r="http://schemas.openxmlformats.org/officeDocument/2006/relationships" xmlns:p="http://schemas.openxmlformats.org/presentationml/2006/main">
-  <p:cSld>
-    <p:spTree>
-      <p:nvGrpSpPr>
-        <p:cNvPr id="1" name=""/>
-        <p:cNvGrpSpPr/>
-        <p:nvPr/>
-      </p:nvGrpSpPr>
-      <p:grpSpPr>
-        <a:xfrm>
-          <a:off x="0" y="0"/>
-          <a:ext cx="0" cy="0"/>
-          <a:chOff x="0" y="0"/>
-          <a:chExt cx="0" cy="0"/>
-        </a:xfrm>
-      </p:grpSpPr>
-      <p:sp>
-        <p:nvSpPr>
-          <p:cNvPr id="2" name="Slide Image Placeholder 1"/>
-          <p:cNvSpPr>
-            <a:spLocks noGrp="1" noRot="1" noChangeAspect="1"/>
-          </p:cNvSpPr>
-          <p:nvPr>
-            <p:ph type="sldImg"/>
-          </p:nvPr>
-        </p:nvSpPr>
-        <p:spPr/>
-      </p:sp>
-      <p:sp>
-        <p:nvSpPr>
-          <p:cNvPr id="3" name="Notes Placeholder 2"/>
-          <p:cNvSpPr>
-            <a:spLocks noGrp="1"/>
-          </p:cNvSpPr>
-          <p:nvPr>
-            <p:ph type="body" idx="1"/>
-          </p:nvPr>
-        </p:nvSpPr>
-        <p:spPr/>
-        <p:txBody>
-          <a:bodyPr/>
-          <a:lstStyle/>
-          <a:p>
-            <a:endParaRPr/>
-          </a:p>
-        </p:txBody>
-      </p:sp>
-      <p:sp>
-        <p:nvSpPr>
-          <p:cNvPr id="4" name="Slide Number Placeholder 3"/>
-          <p:cNvSpPr>
-            <a:spLocks noGrp="1"/>
-          </p:cNvSpPr>
-          <p:nvPr>
-            <p:ph type="sldNum" idx="5"/>
-          </p:nvPr>
-        </p:nvSpPr>
-        <p:spPr/>
-        <p:txBody>
-          <a:bodyPr/>
-          <a:lstStyle/>
-          <a:p>
-            <a:endParaRPr/>
-          </a:p>
-        </p:txBody>
-      </p:sp>
-    </p:spTree>
-  </p:cSld>
-  <p:clrMapOvr>
-    <a:masterClrMapping/>
-  </p:clrMapOvr>
-</p:notes>
-</file>
-
-<file path=ppt/notesSlides/notesSlide31.xml><?xml version="1.0" encoding="utf-8"?>
-<p:notes xmlns:a="http://schemas.openxmlformats.org/drawingml/2006/main" xmlns:r="http://schemas.openxmlformats.org/officeDocument/2006/relationships" xmlns:p="http://schemas.openxmlformats.org/presentationml/2006/main">
-  <p:cSld>
-    <p:spTree>
-      <p:nvGrpSpPr>
-        <p:cNvPr id="1" name=""/>
-        <p:cNvGrpSpPr/>
-        <p:nvPr/>
-      </p:nvGrpSpPr>
-      <p:grpSpPr>
-        <a:xfrm>
-          <a:off x="0" y="0"/>
-          <a:ext cx="0" cy="0"/>
-          <a:chOff x="0" y="0"/>
-          <a:chExt cx="0" cy="0"/>
-        </a:xfrm>
-      </p:grpSpPr>
-      <p:sp>
-        <p:nvSpPr>
-          <p:cNvPr id="2" name="Slide Image Placeholder 1"/>
-          <p:cNvSpPr>
-            <a:spLocks noGrp="1" noRot="1" noChangeAspect="1"/>
-          </p:cNvSpPr>
-          <p:nvPr>
-            <p:ph type="sldImg"/>
-          </p:nvPr>
-        </p:nvSpPr>
-        <p:spPr/>
-      </p:sp>
-      <p:sp>
-        <p:nvSpPr>
-          <p:cNvPr id="3" name="Notes Placeholder 2"/>
-          <p:cNvSpPr>
-            <a:spLocks noGrp="1"/>
-          </p:cNvSpPr>
-          <p:nvPr>
-            <p:ph type="body" idx="1"/>
-          </p:nvPr>
-        </p:nvSpPr>
-        <p:spPr/>
-        <p:txBody>
-          <a:bodyPr/>
-          <a:lstStyle/>
-          <a:p>
-            <a:endParaRPr/>
-          </a:p>
-        </p:txBody>
-      </p:sp>
-      <p:sp>
-        <p:nvSpPr>
-          <p:cNvPr id="4" name="Slide Number Placeholder 3"/>
-          <p:cNvSpPr>
-            <a:spLocks noGrp="1"/>
-          </p:cNvSpPr>
-          <p:nvPr>
-            <p:ph type="sldNum" idx="5"/>
-          </p:nvPr>
-        </p:nvSpPr>
-        <p:spPr/>
-        <p:txBody>
-          <a:bodyPr/>
-          <a:lstStyle/>
-          <a:p>
-            <a:endParaRPr/>
-          </a:p>
-        </p:txBody>
-      </p:sp>
-    </p:spTree>
-  </p:cSld>
-  <p:clrMapOvr>
-    <a:masterClrMapping/>
-  </p:clrMapOvr>
-</p:notes>
-</file>
-
-<file path=ppt/notesSlides/notesSlide32.xml><?xml version="1.0" encoding="utf-8"?>
 <p:notes xmlns:a="http://schemas.openxmlformats.org/drawingml/2006/main" xmlns:r="http://schemas.openxmlformats.org/officeDocument/2006/relationships" xmlns:p="http://schemas.openxmlformats.org/presentationml/2006/main">
   <p:cSld>
     <p:spTree>
@@ -28815,7 +28663,7 @@
                 <a:ea typeface="Consolas"/>
                 <a:cs typeface="Consolas"/>
               </a:rPr>
-              <a:t># 進入 Nginx 容器（Nginx 用的是 sh，不是 bash）</a:t>
+              <a:t># 進入 Nginx 容器（進入 Nginx 容器）</a:t>
             </a:r>
           </a:p>
           <a:p>
@@ -28828,7 +28676,7 @@
                 <a:ea typeface="Consolas"/>
                 <a:cs typeface="Consolas"/>
               </a:rPr>
-              <a:t>docker exec -it my-web sh</a:t>
+              <a:t>docker exec -it my-web bash</a:t>
             </a:r>
           </a:p>
           <a:p>
@@ -28893,7 +28741,7 @@
                 <a:ea typeface="Consolas"/>
                 <a:cs typeface="Consolas"/>
               </a:rPr>
-              <a:t>```sh</a:t>
+              <a:t>```bash</a:t>
             </a:r>
           </a:p>
           <a:p>
@@ -31305,7 +31153,7 @@
               </a:defRPr>
             </a:pPr>
             <a:r>
-              <a:rPr sz="1500" b="0">
+              <a:rPr lang="en-US" sz="1500" b="0" dirty="0">
                 <a:solidFill>
                   <a:srgbClr val="E5E7EB"/>
                 </a:solidFill>
@@ -31313,7 +31161,7 @@
                 <a:ea typeface="Consolas"/>
                 <a:cs typeface="Consolas"/>
               </a:rPr>
-              <a:t># 查看狀態</a:t>
+              <a:t>Docker pull</a:t>
             </a:r>
           </a:p>
           <a:p>
@@ -31331,20 +31179,7 @@
                 <a:cs typeface="Consolas"/>
               </a:defRPr>
             </a:pPr>
-            <a:r>
-              <a:rPr sz="1500" b="0">
-                <a:solidFill>
-                  <a:srgbClr val="E5E7EB"/>
-                </a:solidFill>
-                <a:latin typeface="Consolas"/>
-                <a:ea typeface="Consolas"/>
-                <a:cs typeface="Consolas"/>
-              </a:rPr>
-              <a:t>docker ps</a:t>
-            </a:r>
-          </a:p>
-          <a:p>
-            <a:endParaRPr sz="1500" b="0">
+            <a:endParaRPr lang="en-US" sz="1500" dirty="0">
               <a:solidFill>
                 <a:srgbClr val="E5E7EB"/>
               </a:solidFill>
@@ -31369,7 +31204,7 @@
               </a:defRPr>
             </a:pPr>
             <a:r>
-              <a:rPr sz="1500" b="0">
+              <a:rPr lang="en-US" sz="1500" dirty="0">
                 <a:solidFill>
                   <a:srgbClr val="E5E7EB"/>
                 </a:solidFill>
@@ -31377,7 +31212,7 @@
                 <a:ea typeface="Consolas"/>
                 <a:cs typeface="Consolas"/>
               </a:rPr>
-              <a:t># 查看 log</a:t>
+              <a:t>docker images</a:t>
             </a:r>
           </a:p>
           <a:p>
@@ -31396,7 +31231,7 @@
               </a:defRPr>
             </a:pPr>
             <a:r>
-              <a:rPr sz="1500" b="0">
+              <a:rPr lang="en-US" sz="1500" dirty="0">
                 <a:solidFill>
                   <a:srgbClr val="E5E7EB"/>
                 </a:solidFill>
@@ -31404,11 +31239,47 @@
                 <a:ea typeface="Consolas"/>
                 <a:cs typeface="Consolas"/>
               </a:rPr>
-              <a:t>docker logs my-web</a:t>
-            </a:r>
-          </a:p>
-          <a:p>
-            <a:endParaRPr sz="1500" b="0">
+              <a:t>Docker run </a:t>
+            </a:r>
+          </a:p>
+          <a:p>
+            <a:pPr algn="l">
+              <a:lnSpc>
+                <a:spcPct val="104000"/>
+              </a:lnSpc>
+              <a:buNone/>
+              <a:defRPr sz="1500" b="0">
+                <a:solidFill>
+                  <a:srgbClr val="E5E7EB"/>
+                </a:solidFill>
+                <a:latin typeface="Consolas"/>
+                <a:ea typeface="Consolas"/>
+                <a:cs typeface="Consolas"/>
+              </a:defRPr>
+            </a:pPr>
+            <a:r>
+              <a:rPr sz="1500" b="0" dirty="0">
+                <a:solidFill>
+                  <a:srgbClr val="E5E7EB"/>
+                </a:solidFill>
+                <a:latin typeface="Consolas"/>
+                <a:ea typeface="Consolas"/>
+                <a:cs typeface="Consolas"/>
+              </a:rPr>
+              <a:t>docker </a:t>
+            </a:r>
+            <a:r>
+              <a:rPr sz="1500" b="0" dirty="0" err="1">
+                <a:solidFill>
+                  <a:srgbClr val="E5E7EB"/>
+                </a:solidFill>
+                <a:latin typeface="Consolas"/>
+                <a:ea typeface="Consolas"/>
+                <a:cs typeface="Consolas"/>
+              </a:rPr>
+              <a:t>ps</a:t>
+            </a:r>
+            <a:endParaRPr sz="1500" b="0" dirty="0">
               <a:solidFill>
                 <a:srgbClr val="E5E7EB"/>
               </a:solidFill>
@@ -31432,74 +31303,7 @@
                 <a:cs typeface="Consolas"/>
               </a:defRPr>
             </a:pPr>
-            <a:r>
-              <a:rPr sz="1500" b="0">
-                <a:solidFill>
-                  <a:srgbClr val="E5E7EB"/>
-                </a:solidFill>
-                <a:latin typeface="Consolas"/>
-                <a:ea typeface="Consolas"/>
-                <a:cs typeface="Consolas"/>
-              </a:rPr>
-              <a:t># 停止與啟動</a:t>
-            </a:r>
-          </a:p>
-          <a:p>
-            <a:pPr algn="l">
-              <a:lnSpc>
-                <a:spcPct val="104000"/>
-              </a:lnSpc>
-              <a:buNone/>
-              <a:defRPr sz="1500" b="0">
-                <a:solidFill>
-                  <a:srgbClr val="E5E7EB"/>
-                </a:solidFill>
-                <a:latin typeface="Consolas"/>
-                <a:ea typeface="Consolas"/>
-                <a:cs typeface="Consolas"/>
-              </a:defRPr>
-            </a:pPr>
-            <a:r>
-              <a:rPr sz="1500" b="0">
-                <a:solidFill>
-                  <a:srgbClr val="E5E7EB"/>
-                </a:solidFill>
-                <a:latin typeface="Consolas"/>
-                <a:ea typeface="Consolas"/>
-                <a:cs typeface="Consolas"/>
-              </a:rPr>
-              <a:t>docker stop my-web</a:t>
-            </a:r>
-          </a:p>
-          <a:p>
-            <a:pPr algn="l">
-              <a:lnSpc>
-                <a:spcPct val="104000"/>
-              </a:lnSpc>
-              <a:buNone/>
-              <a:defRPr sz="1500" b="0">
-                <a:solidFill>
-                  <a:srgbClr val="E5E7EB"/>
-                </a:solidFill>
-                <a:latin typeface="Consolas"/>
-                <a:ea typeface="Consolas"/>
-                <a:cs typeface="Consolas"/>
-              </a:defRPr>
-            </a:pPr>
-            <a:r>
-              <a:rPr sz="1500" b="0">
-                <a:solidFill>
-                  <a:srgbClr val="E5E7EB"/>
-                </a:solidFill>
-                <a:latin typeface="Consolas"/>
-                <a:ea typeface="Consolas"/>
-                <a:cs typeface="Consolas"/>
-              </a:rPr>
-              <a:t>docker start my-web</a:t>
-            </a:r>
-          </a:p>
-          <a:p>
-            <a:endParaRPr sz="1500" b="0">
+            <a:endParaRPr lang="en-US" sz="1500" dirty="0">
               <a:solidFill>
                 <a:srgbClr val="E5E7EB"/>
               </a:solidFill>
@@ -31509,6 +31313,40 @@
             </a:endParaRPr>
           </a:p>
           <a:p>
+            <a:pPr>
+              <a:lnSpc>
+                <a:spcPct val="104000"/>
+              </a:lnSpc>
+              <a:defRPr sz="1500" b="0">
+                <a:solidFill>
+                  <a:srgbClr val="E5E7EB"/>
+                </a:solidFill>
+                <a:latin typeface="Consolas"/>
+                <a:ea typeface="Consolas"/>
+                <a:cs typeface="Consolas"/>
+              </a:defRPr>
+            </a:pPr>
+            <a:r>
+              <a:rPr lang="en" altLang="zh-TW" sz="1500">
+                <a:solidFill>
+                  <a:srgbClr val="E5E7EB"/>
+                </a:solidFill>
+                <a:latin typeface="Consolas"/>
+                <a:ea typeface="Consolas"/>
+                <a:cs typeface="Consolas"/>
+              </a:rPr>
+              <a:t>docker start my-web</a:t>
+            </a:r>
+            <a:endParaRPr lang="en-US" sz="1500" dirty="0">
+              <a:solidFill>
+                <a:srgbClr val="E5E7EB"/>
+              </a:solidFill>
+              <a:latin typeface="Consolas"/>
+              <a:ea typeface="Consolas"/>
+              <a:cs typeface="Consolas"/>
+            </a:endParaRPr>
+          </a:p>
+          <a:p>
             <a:pPr algn="l">
               <a:lnSpc>
                 <a:spcPct val="104000"/>
@@ -31524,7 +31362,7 @@
               </a:defRPr>
             </a:pPr>
             <a:r>
-              <a:rPr sz="1500" b="0">
+              <a:rPr sz="1500" b="0" dirty="0">
                 <a:solidFill>
                   <a:srgbClr val="E5E7EB"/>
                 </a:solidFill>
@@ -31532,7 +31370,7 @@
                 <a:ea typeface="Consolas"/>
                 <a:cs typeface="Consolas"/>
               </a:rPr>
-              <a:t># 用完後刪除</a:t>
+              <a:t>docker stop my-web</a:t>
             </a:r>
           </a:p>
           <a:p>
@@ -31550,17 +31388,140 @@
                 <a:cs typeface="Consolas"/>
               </a:defRPr>
             </a:pPr>
-            <a:r>
-              <a:rPr sz="1500" b="0">
+            <a:endParaRPr lang="en-US" sz="1500" dirty="0">
+              <a:solidFill>
+                <a:srgbClr val="E5E7EB"/>
+              </a:solidFill>
+              <a:latin typeface="Consolas"/>
+              <a:ea typeface="Consolas"/>
+              <a:cs typeface="Consolas"/>
+            </a:endParaRPr>
+          </a:p>
+          <a:p>
+            <a:pPr algn="l">
+              <a:lnSpc>
+                <a:spcPct val="104000"/>
+              </a:lnSpc>
+              <a:buNone/>
+              <a:defRPr sz="1500" b="0">
                 <a:solidFill>
                   <a:srgbClr val="E5E7EB"/>
                 </a:solidFill>
                 <a:latin typeface="Consolas"/>
                 <a:ea typeface="Consolas"/>
                 <a:cs typeface="Consolas"/>
-              </a:rPr>
-              <a:t>docker rm -f my-web</a:t>
-            </a:r>
+              </a:defRPr>
+            </a:pPr>
+            <a:r>
+              <a:rPr sz="1500" b="0" dirty="0">
+                <a:solidFill>
+                  <a:srgbClr val="E5E7EB"/>
+                </a:solidFill>
+                <a:latin typeface="Consolas"/>
+                <a:ea typeface="Consolas"/>
+                <a:cs typeface="Consolas"/>
+              </a:rPr>
+              <a:t>docker rm my-web</a:t>
+            </a:r>
+            <a:endParaRPr lang="en-US" sz="1500" b="0" dirty="0">
+              <a:solidFill>
+                <a:srgbClr val="E5E7EB"/>
+              </a:solidFill>
+              <a:latin typeface="Consolas"/>
+              <a:ea typeface="Consolas"/>
+              <a:cs typeface="Consolas"/>
+            </a:endParaRPr>
+          </a:p>
+          <a:p>
+            <a:pPr algn="l">
+              <a:lnSpc>
+                <a:spcPct val="104000"/>
+              </a:lnSpc>
+              <a:buNone/>
+              <a:defRPr sz="1500" b="0">
+                <a:solidFill>
+                  <a:srgbClr val="E5E7EB"/>
+                </a:solidFill>
+                <a:latin typeface="Consolas"/>
+                <a:ea typeface="Consolas"/>
+                <a:cs typeface="Consolas"/>
+              </a:defRPr>
+            </a:pPr>
+            <a:r>
+              <a:rPr lang="en-US" sz="1500" dirty="0">
+                <a:solidFill>
+                  <a:srgbClr val="E5E7EB"/>
+                </a:solidFill>
+                <a:latin typeface="Consolas"/>
+                <a:ea typeface="Consolas"/>
+                <a:cs typeface="Consolas"/>
+              </a:rPr>
+              <a:t>Docker </a:t>
+            </a:r>
+            <a:r>
+              <a:rPr lang="en-US" sz="1500" dirty="0" err="1">
+                <a:solidFill>
+                  <a:srgbClr val="E5E7EB"/>
+                </a:solidFill>
+                <a:latin typeface="Consolas"/>
+                <a:ea typeface="Consolas"/>
+                <a:cs typeface="Consolas"/>
+              </a:rPr>
+              <a:t>rmi</a:t>
+            </a:r>
+            <a:r>
+              <a:rPr lang="en-US" sz="1500" dirty="0">
+                <a:solidFill>
+                  <a:srgbClr val="E5E7EB"/>
+                </a:solidFill>
+                <a:latin typeface="Consolas"/>
+                <a:ea typeface="Consolas"/>
+                <a:cs typeface="Consolas"/>
+              </a:rPr>
+              <a:t> my-image</a:t>
+            </a:r>
+            <a:br>
+              <a:rPr lang="en-US" sz="1500" b="0" dirty="0">
+                <a:solidFill>
+                  <a:srgbClr val="E5E7EB"/>
+                </a:solidFill>
+                <a:latin typeface="Consolas"/>
+                <a:ea typeface="Consolas"/>
+                <a:cs typeface="Consolas"/>
+              </a:rPr>
+            </a:br>
+            <a:endParaRPr lang="en-US" sz="1500" b="0" dirty="0">
+              <a:solidFill>
+                <a:srgbClr val="E5E7EB"/>
+              </a:solidFill>
+              <a:latin typeface="Consolas"/>
+              <a:ea typeface="Consolas"/>
+              <a:cs typeface="Consolas"/>
+            </a:endParaRPr>
+          </a:p>
+          <a:p>
+            <a:pPr algn="l">
+              <a:lnSpc>
+                <a:spcPct val="104000"/>
+              </a:lnSpc>
+              <a:buNone/>
+              <a:defRPr sz="1500" b="0">
+                <a:solidFill>
+                  <a:srgbClr val="E5E7EB"/>
+                </a:solidFill>
+                <a:latin typeface="Consolas"/>
+                <a:ea typeface="Consolas"/>
+                <a:cs typeface="Consolas"/>
+              </a:defRPr>
+            </a:pPr>
+            <a:endParaRPr sz="1500" b="0" dirty="0">
+              <a:solidFill>
+                <a:srgbClr val="E5E7EB"/>
+              </a:solidFill>
+              <a:latin typeface="Consolas"/>
+              <a:ea typeface="Consolas"/>
+              <a:cs typeface="Consolas"/>
+            </a:endParaRPr>
           </a:p>
         </p:txBody>
       </p:sp>
@@ -32119,966 +32080,6 @@
     <p:extLst>
       <p:ext uri="{BB962C8B-B14F-4D97-AF65-F5344CB8AC3E}">
         <p14:creationId xmlns:p14="http://schemas.microsoft.com/office/powerpoint/2010/main" val="105072459"/>
-      </p:ext>
-    </p:extLst>
-  </p:cSld>
-  <p:clrMapOvr>
-    <a:masterClrMapping/>
-  </p:clrMapOvr>
-</p:sld>
-</file>
-
-<file path=ppt/slides/slide31.xml><?xml version="1.0" encoding="utf-8"?>
-<p:sld xmlns:a="http://schemas.openxmlformats.org/drawingml/2006/main" xmlns:r="http://schemas.openxmlformats.org/officeDocument/2006/relationships" xmlns:p="http://schemas.openxmlformats.org/presentationml/2006/main">
-  <p:cSld>
-    <p:bg>
-      <p:bgPr>
-        <a:solidFill>
-          <a:srgbClr val="0B1220"/>
-        </a:solidFill>
-        <a:effectLst/>
-      </p:bgPr>
-    </p:bg>
-    <p:spTree>
-      <p:nvGrpSpPr>
-        <p:cNvPr id="1" name=""/>
-        <p:cNvGrpSpPr/>
-        <p:nvPr/>
-      </p:nvGrpSpPr>
-      <p:grpSpPr>
-        <a:xfrm>
-          <a:off x="0" y="0"/>
-          <a:ext cx="0" cy="0"/>
-          <a:chOff x="0" y="0"/>
-          <a:chExt cx="0" cy="0"/>
-        </a:xfrm>
-      </p:grpSpPr>
-      <p:sp>
-        <p:nvSpPr>
-          <p:cNvPr id="2" name="AppendixLabel">
-            <a:extLst>
-              <a:ext uri="{FF2B5EF4-FFF2-40B4-BE49-F238E27FC236}">
-                <a16:creationId xmlns:a16="http://schemas.microsoft.com/office/drawing/2014/main" id="{A4408DFC-CA80-4941-91C3-6E7F6124482F}"/>
-              </a:ext>
-            </a:extLst>
-          </p:cNvPr>
-          <p:cNvSpPr>
-            <a:spLocks noGrp="1"/>
-          </p:cNvSpPr>
-          <p:nvPr/>
-        </p:nvSpPr>
-        <p:spPr>
-          <a:xfrm>
-            <a:off x="609600" y="420000"/>
-            <a:ext cx="2600000" cy="260000"/>
-          </a:xfrm>
-          <a:prstGeom prst="rect">
-            <a:avLst/>
-          </a:prstGeom>
-          <a:noFill/>
-          <a:ln>
-            <a:noFill/>
-          </a:ln>
-        </p:spPr>
-        <p:txBody>
-          <a:bodyPr wrap="square">
-            <a:spAutoFit/>
-          </a:bodyPr>
-          <a:lstStyle/>
-          <a:p>
-            <a:r>
-              <a:rPr sz="1100" b="1">
-                <a:solidFill>
-                  <a:srgbClr val="93C5FD"/>
-                </a:solidFill>
-                <a:latin typeface="Aptos"/>
-                <a:ea typeface="Aptos"/>
-                <a:cs typeface="Aptos"/>
-              </a:rPr>
-              <a:t>CODE EXAMPLE</a:t>
-            </a:r>
-          </a:p>
-        </p:txBody>
-      </p:sp>
-      <p:sp>
-        <p:nvSpPr>
-          <p:cNvPr id="3" name="Title">
-            <a:extLst>
-              <a:ext uri="{FF2B5EF4-FFF2-40B4-BE49-F238E27FC236}">
-                <a16:creationId xmlns:a16="http://schemas.microsoft.com/office/drawing/2014/main" id="{86F0687E-C3A7-4AF5-A619-802075626CB1}"/>
-              </a:ext>
-            </a:extLst>
-          </p:cNvPr>
-          <p:cNvSpPr>
-            <a:spLocks noGrp="1"/>
-          </p:cNvSpPr>
-          <p:nvPr/>
-        </p:nvSpPr>
-        <p:spPr>
-          <a:xfrm>
-            <a:off x="609600" y="710000"/>
-            <a:ext cx="10600000" cy="560000"/>
-          </a:xfrm>
-          <a:prstGeom prst="rect">
-            <a:avLst/>
-          </a:prstGeom>
-          <a:noFill/>
-          <a:ln>
-            <a:noFill/>
-          </a:ln>
-        </p:spPr>
-        <p:txBody>
-          <a:bodyPr wrap="square">
-            <a:spAutoFit/>
-          </a:bodyPr>
-          <a:lstStyle/>
-          <a:p>
-            <a:r>
-              <a:rPr sz="2600" b="1">
-                <a:solidFill>
-                  <a:srgbClr val="F8FAFC"/>
-                </a:solidFill>
-                <a:latin typeface="Aptos"/>
-                <a:ea typeface="Aptos"/>
-                <a:cs typeface="Aptos"/>
-              </a:rPr>
-              <a:t>範例程式碼：狀態查看與清理</a:t>
-            </a:r>
-          </a:p>
-        </p:txBody>
-      </p:sp>
-      <p:sp>
-        <p:nvSpPr>
-          <p:cNvPr id="4" name="Subtitle">
-            <a:extLst>
-              <a:ext uri="{FF2B5EF4-FFF2-40B4-BE49-F238E27FC236}">
-                <a16:creationId xmlns:a16="http://schemas.microsoft.com/office/drawing/2014/main" id="{CB35FE43-61E5-4A11-AA18-9CE4C9932CB9}"/>
-              </a:ext>
-            </a:extLst>
-          </p:cNvPr>
-          <p:cNvSpPr>
-            <a:spLocks noGrp="1"/>
-          </p:cNvSpPr>
-          <p:nvPr/>
-        </p:nvSpPr>
-        <p:spPr>
-          <a:xfrm>
-            <a:off x="609600" y="1260000"/>
-            <a:ext cx="8000000" cy="300000"/>
-          </a:xfrm>
-          <a:prstGeom prst="rect">
-            <a:avLst/>
-          </a:prstGeom>
-          <a:noFill/>
-          <a:ln>
-            <a:noFill/>
-          </a:ln>
-        </p:spPr>
-        <p:txBody>
-          <a:bodyPr wrap="square">
-            <a:spAutoFit/>
-          </a:bodyPr>
-          <a:lstStyle/>
-          <a:p>
-            <a:r>
-              <a:rPr sz="1250">
-                <a:solidFill>
-                  <a:srgbClr val="CBD5E1"/>
-                </a:solidFill>
-                <a:latin typeface="Aptos"/>
-                <a:ea typeface="Aptos"/>
-                <a:cs typeface="Aptos"/>
-              </a:rPr>
-              <a:t>第 1 堂 | 可直接照做的完整範例</a:t>
-            </a:r>
-          </a:p>
-        </p:txBody>
-      </p:sp>
-      <p:sp>
-        <p:nvSpPr>
-          <p:cNvPr id="5" name="CodeBackground">
-            <a:extLst>
-              <a:ext uri="{FF2B5EF4-FFF2-40B4-BE49-F238E27FC236}">
-                <a16:creationId xmlns:a16="http://schemas.microsoft.com/office/drawing/2014/main" id="{321AB862-4B55-4EE0-86F2-4FE675C0F2DF}"/>
-              </a:ext>
-            </a:extLst>
-          </p:cNvPr>
-          <p:cNvSpPr>
-            <a:spLocks noGrp="1"/>
-          </p:cNvSpPr>
-          <p:nvPr/>
-        </p:nvSpPr>
-        <p:spPr>
-          <a:xfrm>
-            <a:off x="609600" y="1680000"/>
-            <a:ext cx="10972800" cy="4370000"/>
-          </a:xfrm>
-          <a:prstGeom prst="roundRect">
-            <a:avLst/>
-          </a:prstGeom>
-          <a:solidFill>
-            <a:srgbClr val="111827"/>
-          </a:solidFill>
-          <a:ln w="9525">
-            <a:solidFill>
-              <a:srgbClr val="334155"/>
-            </a:solidFill>
-          </a:ln>
-        </p:spPr>
-        <p:style>
-          <a:lnRef idx="1">
-            <a:schemeClr val="accent1"/>
-          </a:lnRef>
-          <a:fillRef idx="3">
-            <a:schemeClr val="accent1"/>
-          </a:fillRef>
-          <a:effectRef idx="2">
-            <a:schemeClr val="accent1"/>
-          </a:effectRef>
-          <a:fontRef idx="minor">
-            <a:schemeClr val="lt1"/>
-          </a:fontRef>
-        </p:style>
-        <p:txBody>
-          <a:bodyPr/>
-          <a:lstStyle/>
-          <a:p>
-            <a:endParaRPr/>
-          </a:p>
-        </p:txBody>
-      </p:sp>
-      <p:sp>
-        <p:nvSpPr>
-          <p:cNvPr id="6" name="Code">
-            <a:extLst>
-              <a:ext uri="{FF2B5EF4-FFF2-40B4-BE49-F238E27FC236}">
-                <a16:creationId xmlns:a16="http://schemas.microsoft.com/office/drawing/2014/main" id="{136F3273-AAAE-489B-B10E-814A78339306}"/>
-              </a:ext>
-            </a:extLst>
-          </p:cNvPr>
-          <p:cNvSpPr>
-            <a:spLocks noGrp="1"/>
-          </p:cNvSpPr>
-          <p:nvPr/>
-        </p:nvSpPr>
-        <p:spPr>
-          <a:xfrm>
-            <a:off x="810000" y="1870000"/>
-            <a:ext cx="10550000" cy="3980000"/>
-          </a:xfrm>
-          <a:prstGeom prst="rect">
-            <a:avLst/>
-          </a:prstGeom>
-          <a:noFill/>
-          <a:ln>
-            <a:noFill/>
-          </a:ln>
-        </p:spPr>
-        <p:txBody>
-          <a:bodyPr wrap="square">
-            <a:spAutoFit/>
-          </a:bodyPr>
-          <a:lstStyle/>
-          <a:p>
-            <a:r>
-              <a:rPr sz="1150">
-                <a:solidFill>
-                  <a:srgbClr val="E5E7EB"/>
-                </a:solidFill>
-                <a:latin typeface="Consolas"/>
-                <a:ea typeface="Consolas"/>
-                <a:cs typeface="Consolas"/>
-              </a:rPr>
-              <a:t># 查看容器狀態</a:t>
-            </a:r>
-          </a:p>
-          <a:p>
-            <a:r>
-              <a:rPr sz="1150">
-                <a:solidFill>
-                  <a:srgbClr val="E5E7EB"/>
-                </a:solidFill>
-                <a:latin typeface="Consolas"/>
-                <a:ea typeface="Consolas"/>
-                <a:cs typeface="Consolas"/>
-              </a:rPr>
-              <a:t>docker ps</a:t>
-            </a:r>
-          </a:p>
-          <a:p>
-            <a:r>
-              <a:rPr sz="1150">
-                <a:solidFill>
-                  <a:srgbClr val="E5E7EB"/>
-                </a:solidFill>
-                <a:latin typeface="Consolas"/>
-                <a:ea typeface="Consolas"/>
-                <a:cs typeface="Consolas"/>
-              </a:rPr>
-              <a:t> </a:t>
-            </a:r>
-          </a:p>
-          <a:p>
-            <a:r>
-              <a:rPr sz="1150">
-                <a:solidFill>
-                  <a:srgbClr val="E5E7EB"/>
-                </a:solidFill>
-                <a:latin typeface="Consolas"/>
-                <a:ea typeface="Consolas"/>
-                <a:cs typeface="Consolas"/>
-              </a:rPr>
-              <a:t># 查看 log</a:t>
-            </a:r>
-          </a:p>
-          <a:p>
-            <a:r>
-              <a:rPr sz="1150">
-                <a:solidFill>
-                  <a:srgbClr val="E5E7EB"/>
-                </a:solidFill>
-                <a:latin typeface="Consolas"/>
-                <a:ea typeface="Consolas"/>
-                <a:cs typeface="Consolas"/>
-              </a:rPr>
-              <a:t>docker logs my-web</a:t>
-            </a:r>
-          </a:p>
-          <a:p>
-            <a:r>
-              <a:rPr sz="1150">
-                <a:solidFill>
-                  <a:srgbClr val="E5E7EB"/>
-                </a:solidFill>
-                <a:latin typeface="Consolas"/>
-                <a:ea typeface="Consolas"/>
-                <a:cs typeface="Consolas"/>
-              </a:rPr>
-              <a:t> </a:t>
-            </a:r>
-          </a:p>
-          <a:p>
-            <a:r>
-              <a:rPr sz="1150">
-                <a:solidFill>
-                  <a:srgbClr val="E5E7EB"/>
-                </a:solidFill>
-                <a:latin typeface="Consolas"/>
-                <a:ea typeface="Consolas"/>
-                <a:cs typeface="Consolas"/>
-              </a:rPr>
-              <a:t># 停止容器</a:t>
-            </a:r>
-          </a:p>
-          <a:p>
-            <a:r>
-              <a:rPr sz="1150">
-                <a:solidFill>
-                  <a:srgbClr val="E5E7EB"/>
-                </a:solidFill>
-                <a:latin typeface="Consolas"/>
-                <a:ea typeface="Consolas"/>
-                <a:cs typeface="Consolas"/>
-              </a:rPr>
-              <a:t>docker stop my-web</a:t>
-            </a:r>
-          </a:p>
-          <a:p>
-            <a:r>
-              <a:rPr sz="1150">
-                <a:solidFill>
-                  <a:srgbClr val="E5E7EB"/>
-                </a:solidFill>
-                <a:latin typeface="Consolas"/>
-                <a:ea typeface="Consolas"/>
-                <a:cs typeface="Consolas"/>
-              </a:rPr>
-              <a:t> </a:t>
-            </a:r>
-          </a:p>
-          <a:p>
-            <a:r>
-              <a:rPr sz="1150">
-                <a:solidFill>
-                  <a:srgbClr val="E5E7EB"/>
-                </a:solidFill>
-                <a:latin typeface="Consolas"/>
-                <a:ea typeface="Consolas"/>
-                <a:cs typeface="Consolas"/>
-              </a:rPr>
-              <a:t># 重新啟動</a:t>
-            </a:r>
-          </a:p>
-          <a:p>
-            <a:r>
-              <a:rPr sz="1150">
-                <a:solidFill>
-                  <a:srgbClr val="E5E7EB"/>
-                </a:solidFill>
-                <a:latin typeface="Consolas"/>
-                <a:ea typeface="Consolas"/>
-                <a:cs typeface="Consolas"/>
-              </a:rPr>
-              <a:t>docker start my-web</a:t>
-            </a:r>
-          </a:p>
-          <a:p>
-            <a:r>
-              <a:rPr sz="1150">
-                <a:solidFill>
-                  <a:srgbClr val="E5E7EB"/>
-                </a:solidFill>
-                <a:latin typeface="Consolas"/>
-                <a:ea typeface="Consolas"/>
-                <a:cs typeface="Consolas"/>
-              </a:rPr>
-              <a:t> </a:t>
-            </a:r>
-          </a:p>
-          <a:p>
-            <a:r>
-              <a:rPr sz="1150">
-                <a:solidFill>
-                  <a:srgbClr val="E5E7EB"/>
-                </a:solidFill>
-                <a:latin typeface="Consolas"/>
-                <a:ea typeface="Consolas"/>
-                <a:cs typeface="Consolas"/>
-              </a:rPr>
-              <a:t># 用完後刪除</a:t>
-            </a:r>
-          </a:p>
-          <a:p>
-            <a:r>
-              <a:rPr sz="1150">
-                <a:solidFill>
-                  <a:srgbClr val="E5E7EB"/>
-                </a:solidFill>
-                <a:latin typeface="Consolas"/>
-                <a:ea typeface="Consolas"/>
-                <a:cs typeface="Consolas"/>
-              </a:rPr>
-              <a:t>docker rm -f my-web</a:t>
-            </a:r>
-          </a:p>
-        </p:txBody>
-      </p:sp>
-      <p:sp>
-        <p:nvSpPr>
-          <p:cNvPr id="7" name="Footer">
-            <a:extLst>
-              <a:ext uri="{FF2B5EF4-FFF2-40B4-BE49-F238E27FC236}">
-                <a16:creationId xmlns:a16="http://schemas.microsoft.com/office/drawing/2014/main" id="{62C6F8A4-2B9F-45F2-903A-ED355CE48710}"/>
-              </a:ext>
-            </a:extLst>
-          </p:cNvPr>
-          <p:cNvSpPr>
-            <a:spLocks noGrp="1"/>
-          </p:cNvSpPr>
-          <p:nvPr/>
-        </p:nvSpPr>
-        <p:spPr>
-          <a:xfrm>
-            <a:off x="609600" y="6330000"/>
-            <a:ext cx="7800000" cy="240000"/>
-          </a:xfrm>
-          <a:prstGeom prst="rect">
-            <a:avLst/>
-          </a:prstGeom>
-          <a:noFill/>
-          <a:ln>
-            <a:noFill/>
-          </a:ln>
-        </p:spPr>
-        <p:txBody>
-          <a:bodyPr wrap="square">
-            <a:spAutoFit/>
-          </a:bodyPr>
-          <a:lstStyle/>
-          <a:p>
-            <a:r>
-              <a:rPr sz="900">
-                <a:solidFill>
-                  <a:srgbClr val="94A3B8"/>
-                </a:solidFill>
-                <a:latin typeface="Aptos"/>
-                <a:ea typeface="Aptos"/>
-                <a:cs typeface="Aptos"/>
-              </a:rPr>
-              <a:t>Docker 基礎教學 | 第 1 堂 | 範例程式碼</a:t>
-            </a:r>
-          </a:p>
-        </p:txBody>
-      </p:sp>
-      <p:sp>
-        <p:nvSpPr>
-          <p:cNvPr id="8" name="Page">
-            <a:extLst>
-              <a:ext uri="{FF2B5EF4-FFF2-40B4-BE49-F238E27FC236}">
-                <a16:creationId xmlns:a16="http://schemas.microsoft.com/office/drawing/2014/main" id="{3CDBF697-4044-4F49-9783-98BDC244E866}"/>
-              </a:ext>
-            </a:extLst>
-          </p:cNvPr>
-          <p:cNvSpPr>
-            <a:spLocks noGrp="1"/>
-          </p:cNvSpPr>
-          <p:nvPr/>
-        </p:nvSpPr>
-        <p:spPr>
-          <a:xfrm>
-            <a:off x="10850000" y="6330000"/>
-            <a:ext cx="650000" cy="240000"/>
-          </a:xfrm>
-          <a:prstGeom prst="rect">
-            <a:avLst/>
-          </a:prstGeom>
-          <a:noFill/>
-          <a:ln>
-            <a:noFill/>
-          </a:ln>
-        </p:spPr>
-        <p:txBody>
-          <a:bodyPr wrap="square">
-            <a:spAutoFit/>
-          </a:bodyPr>
-          <a:lstStyle/>
-          <a:p>
-            <a:r>
-              <a:rPr sz="900">
-                <a:solidFill>
-                  <a:srgbClr val="94A3B8"/>
-                </a:solidFill>
-                <a:latin typeface="Aptos"/>
-                <a:ea typeface="Aptos"/>
-                <a:cs typeface="Aptos"/>
-              </a:rPr>
-              <a:t>CODE</a:t>
-            </a:r>
-          </a:p>
-        </p:txBody>
-      </p:sp>
-    </p:spTree>
-    <p:extLst>
-      <p:ext uri="{BB962C8B-B14F-4D97-AF65-F5344CB8AC3E}">
-        <p14:creationId xmlns:p14="http://schemas.microsoft.com/office/powerpoint/2010/main" val="1256055509"/>
-      </p:ext>
-    </p:extLst>
-  </p:cSld>
-  <p:clrMapOvr>
-    <a:masterClrMapping/>
-  </p:clrMapOvr>
-</p:sld>
-</file>
-
-<file path=ppt/slides/slide32.xml><?xml version="1.0" encoding="utf-8"?>
-<p:sld xmlns:a="http://schemas.openxmlformats.org/drawingml/2006/main" xmlns:r="http://schemas.openxmlformats.org/officeDocument/2006/relationships" xmlns:p="http://schemas.openxmlformats.org/presentationml/2006/main">
-  <p:cSld>
-    <p:bg>
-      <p:bgPr>
-        <a:solidFill>
-          <a:srgbClr val="0B1220"/>
-        </a:solidFill>
-        <a:effectLst/>
-      </p:bgPr>
-    </p:bg>
-    <p:spTree>
-      <p:nvGrpSpPr>
-        <p:cNvPr id="1" name=""/>
-        <p:cNvGrpSpPr/>
-        <p:nvPr/>
-      </p:nvGrpSpPr>
-      <p:grpSpPr>
-        <a:xfrm>
-          <a:off x="0" y="0"/>
-          <a:ext cx="0" cy="0"/>
-          <a:chOff x="0" y="0"/>
-          <a:chExt cx="0" cy="0"/>
-        </a:xfrm>
-      </p:grpSpPr>
-      <p:sp>
-        <p:nvSpPr>
-          <p:cNvPr id="14" name="矩形 13">
-            <a:extLst>
-              <a:ext uri="{FF2B5EF4-FFF2-40B4-BE49-F238E27FC236}">
-                <a16:creationId xmlns:a16="http://schemas.microsoft.com/office/drawing/2014/main" id="{72C7E7D4-B893-4462-9810-1E279C5F2708}"/>
-              </a:ext>
-            </a:extLst>
-          </p:cNvPr>
-          <p:cNvSpPr>
-            <a:spLocks noGrp="1"/>
-          </p:cNvSpPr>
-          <p:nvPr/>
-        </p:nvSpPr>
-        <p:spPr>
-          <a:xfrm>
-            <a:off x="609600" y="400050"/>
-            <a:ext cx="5905500" cy="228600"/>
-          </a:xfrm>
-          <a:prstGeom prst="rect">
-            <a:avLst/>
-          </a:prstGeom>
-          <a:noFill/>
-          <a:ln w="0">
-            <a:noFill/>
-            <a:prstDash val="solid"/>
-          </a:ln>
-        </p:spPr>
-        <p:txBody>
-          <a:bodyPr lIns="0" tIns="0" rIns="0" bIns="0" anchor="t">
-            <a:normAutofit/>
-          </a:bodyPr>
-          <a:lstStyle/>
-          <a:p>
-            <a:pPr algn="l">
-              <a:lnSpc>
-                <a:spcPct val="105000"/>
-              </a:lnSpc>
-              <a:buNone/>
-              <a:defRPr sz="900" b="1">
-                <a:solidFill>
-                  <a:srgbClr val="A5B4FC"/>
-                </a:solidFill>
-                <a:latin typeface="Aptos"/>
-                <a:ea typeface="Aptos"/>
-                <a:cs typeface="Aptos"/>
-              </a:defRPr>
-            </a:pPr>
-            <a:r>
-              <a:rPr sz="900" b="1">
-                <a:solidFill>
-                  <a:srgbClr val="A5B4FC"/>
-                </a:solidFill>
-                <a:latin typeface="Aptos"/>
-                <a:ea typeface="Aptos"/>
-                <a:cs typeface="Aptos"/>
-              </a:rPr>
-              <a:t>EXERCISE P3 / BONUS C1</a:t>
-            </a:r>
-          </a:p>
-        </p:txBody>
-      </p:sp>
-      <p:sp>
-        <p:nvSpPr>
-          <p:cNvPr id="2" name="矩形 1">
-            <a:extLst>
-              <a:ext uri="{FF2B5EF4-FFF2-40B4-BE49-F238E27FC236}">
-                <a16:creationId xmlns:a16="http://schemas.microsoft.com/office/drawing/2014/main" id="{8FED1CD1-FB83-4277-AB4B-4A6C645FB1AD}"/>
-              </a:ext>
-            </a:extLst>
-          </p:cNvPr>
-          <p:cNvSpPr>
-            <a:spLocks noGrp="1"/>
-          </p:cNvSpPr>
-          <p:nvPr/>
-        </p:nvSpPr>
-        <p:spPr>
-          <a:xfrm>
-            <a:off x="2400300" y="2423106"/>
-            <a:ext cx="8572500" cy="609600"/>
-          </a:xfrm>
-          <a:prstGeom prst="rect">
-            <a:avLst/>
-          </a:prstGeom>
-          <a:noFill/>
-          <a:ln w="0">
-            <a:noFill/>
-            <a:prstDash val="solid"/>
-          </a:ln>
-        </p:spPr>
-        <p:txBody>
-          <a:bodyPr lIns="0" tIns="0" rIns="0" bIns="0" anchor="t">
-            <a:normAutofit/>
-          </a:bodyPr>
-          <a:lstStyle/>
-          <a:p>
-            <a:pPr algn="l">
-              <a:lnSpc>
-                <a:spcPct val="105000"/>
-              </a:lnSpc>
-              <a:buNone/>
-              <a:defRPr sz="2850" b="1">
-                <a:solidFill>
-                  <a:srgbClr val="FFFFFF"/>
-                </a:solidFill>
-                <a:latin typeface="Aptos Display"/>
-                <a:ea typeface="Aptos Display"/>
-                <a:cs typeface="Aptos Display"/>
-              </a:defRPr>
-            </a:pPr>
-            <a:r>
-              <a:rPr sz="2850" b="1">
-                <a:solidFill>
-                  <a:srgbClr val="FFFFFF"/>
-                </a:solidFill>
-                <a:latin typeface="Aptos Display"/>
-                <a:ea typeface="Aptos Display"/>
-                <a:cs typeface="Aptos Display"/>
-              </a:rPr>
-              <a:t>實作題 Bonus：重新下載nginx 製作精美的網站</a:t>
-            </a:r>
-          </a:p>
-        </p:txBody>
-      </p:sp>
-      <p:sp>
-        <p:nvSpPr>
-          <p:cNvPr id="9" name="矩形: 圓角 8">
-            <a:extLst>
-              <a:ext uri="{FF2B5EF4-FFF2-40B4-BE49-F238E27FC236}">
-                <a16:creationId xmlns:a16="http://schemas.microsoft.com/office/drawing/2014/main" id="{D87A694D-E621-4177-98CF-3E0B2FEC89D8}"/>
-              </a:ext>
-            </a:extLst>
-          </p:cNvPr>
-          <p:cNvSpPr>
-            <a:spLocks noGrp="1"/>
-          </p:cNvSpPr>
-          <p:nvPr/>
-        </p:nvSpPr>
-        <p:spPr>
-          <a:xfrm>
-            <a:off x="2095500" y="4857750"/>
-            <a:ext cx="8001000" cy="571500"/>
-          </a:xfrm>
-          <a:prstGeom prst="roundRect">
-            <a:avLst>
-              <a:gd name="adj" fmla="val 20000"/>
-            </a:avLst>
-          </a:prstGeom>
-          <a:solidFill>
-            <a:srgbClr val="FFFFFF">
-              <a:alpha val="8000"/>
-            </a:srgbClr>
-          </a:solidFill>
-          <a:ln w="9525">
-            <a:solidFill>
-              <a:srgbClr val="FFFFFF">
-                <a:alpha val="22000"/>
-              </a:srgbClr>
-            </a:solidFill>
-            <a:prstDash val="solid"/>
-          </a:ln>
-        </p:spPr>
-      </p:sp>
-      <p:sp>
-        <p:nvSpPr>
-          <p:cNvPr id="10" name="矩形 9">
-            <a:extLst>
-              <a:ext uri="{FF2B5EF4-FFF2-40B4-BE49-F238E27FC236}">
-                <a16:creationId xmlns:a16="http://schemas.microsoft.com/office/drawing/2014/main" id="{BE639150-D833-424C-9874-5B77D0CAEF12}"/>
-              </a:ext>
-            </a:extLst>
-          </p:cNvPr>
-          <p:cNvSpPr>
-            <a:spLocks noGrp="1"/>
-          </p:cNvSpPr>
-          <p:nvPr/>
-        </p:nvSpPr>
-        <p:spPr>
-          <a:xfrm>
-            <a:off x="2400300" y="5029200"/>
-            <a:ext cx="7391400" cy="247650"/>
-          </a:xfrm>
-          <a:prstGeom prst="rect">
-            <a:avLst/>
-          </a:prstGeom>
-          <a:noFill/>
-          <a:ln w="0">
-            <a:noFill/>
-            <a:prstDash val="solid"/>
-          </a:ln>
-        </p:spPr>
-        <p:txBody>
-          <a:bodyPr lIns="0" tIns="0" rIns="0" bIns="0" anchor="t">
-            <a:normAutofit fontScale="93479" lnSpcReduction="10000"/>
-          </a:bodyPr>
-          <a:lstStyle/>
-          <a:p>
-            <a:pPr algn="ctr">
-              <a:lnSpc>
-                <a:spcPct val="105000"/>
-              </a:lnSpc>
-              <a:buNone/>
-              <a:defRPr sz="1800" b="1">
-                <a:solidFill>
-                  <a:srgbClr val="FFFFFF"/>
-                </a:solidFill>
-                <a:latin typeface="Aptos Display"/>
-                <a:ea typeface="Aptos Display"/>
-                <a:cs typeface="Aptos Display"/>
-              </a:defRPr>
-            </a:pPr>
-            <a:r>
-              <a:rPr sz="1800" b="1">
-                <a:solidFill>
-                  <a:srgbClr val="FFFFFF"/>
-                </a:solidFill>
-                <a:latin typeface="Aptos Display"/>
-                <a:ea typeface="Aptos Display"/>
-                <a:cs typeface="Aptos Display"/>
-              </a:rPr>
-              <a:t>下一堂：Flask 容器、容器管理與 Volume。</a:t>
-            </a:r>
-          </a:p>
-        </p:txBody>
-      </p:sp>
-      <p:sp>
-        <p:nvSpPr>
-          <p:cNvPr id="11" name="矩形 10">
-            <a:extLst>
-              <a:ext uri="{FF2B5EF4-FFF2-40B4-BE49-F238E27FC236}">
-                <a16:creationId xmlns:a16="http://schemas.microsoft.com/office/drawing/2014/main" id="{FA6290D6-6784-4055-926C-618888BB8EF9}"/>
-              </a:ext>
-            </a:extLst>
-          </p:cNvPr>
-          <p:cNvSpPr>
-            <a:spLocks noGrp="1"/>
-          </p:cNvSpPr>
-          <p:nvPr/>
-        </p:nvSpPr>
-        <p:spPr>
-          <a:xfrm>
-            <a:off x="609600" y="6305550"/>
-            <a:ext cx="9906000" cy="13335"/>
-          </a:xfrm>
-          <a:prstGeom prst="rect">
-            <a:avLst/>
-          </a:prstGeom>
-          <a:solidFill>
-            <a:srgbClr val="334155"/>
-          </a:solidFill>
-          <a:ln w="0">
-            <a:noFill/>
-            <a:prstDash val="solid"/>
-          </a:ln>
-        </p:spPr>
-      </p:sp>
-      <p:sp>
-        <p:nvSpPr>
-          <p:cNvPr id="12" name="矩形 11">
-            <a:extLst>
-              <a:ext uri="{FF2B5EF4-FFF2-40B4-BE49-F238E27FC236}">
-                <a16:creationId xmlns:a16="http://schemas.microsoft.com/office/drawing/2014/main" id="{8086612F-89D9-4D26-83B0-C466220FB5B7}"/>
-              </a:ext>
-            </a:extLst>
-          </p:cNvPr>
-          <p:cNvSpPr>
-            <a:spLocks noGrp="1"/>
-          </p:cNvSpPr>
-          <p:nvPr/>
-        </p:nvSpPr>
-        <p:spPr>
-          <a:xfrm>
-            <a:off x="609600" y="6400800"/>
-            <a:ext cx="2667000" cy="171450"/>
-          </a:xfrm>
-          <a:prstGeom prst="rect">
-            <a:avLst/>
-          </a:prstGeom>
-          <a:noFill/>
-          <a:ln w="0">
-            <a:noFill/>
-            <a:prstDash val="solid"/>
-          </a:ln>
-        </p:spPr>
-        <p:txBody>
-          <a:bodyPr lIns="0" tIns="0" rIns="0" bIns="0" anchor="t">
-            <a:normAutofit/>
-          </a:bodyPr>
-          <a:lstStyle/>
-          <a:p>
-            <a:pPr algn="l">
-              <a:lnSpc>
-                <a:spcPct val="105000"/>
-              </a:lnSpc>
-              <a:buNone/>
-              <a:defRPr sz="825" b="0">
-                <a:solidFill>
-                  <a:srgbClr val="CBD5E1"/>
-                </a:solidFill>
-                <a:latin typeface="Aptos"/>
-                <a:ea typeface="Aptos"/>
-                <a:cs typeface="Aptos"/>
-              </a:defRPr>
-            </a:pPr>
-            <a:r>
-              <a:rPr sz="825" b="0">
-                <a:solidFill>
-                  <a:srgbClr val="CBD5E1"/>
-                </a:solidFill>
-                <a:latin typeface="Aptos"/>
-                <a:ea typeface="Aptos"/>
-                <a:cs typeface="Aptos"/>
-              </a:rPr>
-              <a:t>Docker 基礎教學 | 第 1 堂</a:t>
-            </a:r>
-          </a:p>
-        </p:txBody>
-      </p:sp>
-      <p:sp>
-        <p:nvSpPr>
-          <p:cNvPr id="13" name="矩形 12">
-            <a:extLst>
-              <a:ext uri="{FF2B5EF4-FFF2-40B4-BE49-F238E27FC236}">
-                <a16:creationId xmlns:a16="http://schemas.microsoft.com/office/drawing/2014/main" id="{6A2C9CC0-E593-440A-8016-F499F9E3DA1F}"/>
-              </a:ext>
-            </a:extLst>
-          </p:cNvPr>
-          <p:cNvSpPr>
-            <a:spLocks noGrp="1"/>
-          </p:cNvSpPr>
-          <p:nvPr/>
-        </p:nvSpPr>
-        <p:spPr>
-          <a:xfrm>
-            <a:off x="11010900" y="6381750"/>
-            <a:ext cx="571500" cy="190500"/>
-          </a:xfrm>
-          <a:prstGeom prst="rect">
-            <a:avLst/>
-          </a:prstGeom>
-          <a:noFill/>
-          <a:ln w="0">
-            <a:noFill/>
-            <a:prstDash val="solid"/>
-          </a:ln>
-        </p:spPr>
-        <p:txBody>
-          <a:bodyPr lIns="0" tIns="0" rIns="0" bIns="0" anchor="t">
-            <a:normAutofit/>
-          </a:bodyPr>
-          <a:lstStyle/>
-          <a:p>
-            <a:pPr algn="r">
-              <a:lnSpc>
-                <a:spcPct val="105000"/>
-              </a:lnSpc>
-              <a:buNone/>
-              <a:defRPr sz="900" b="1">
-                <a:solidFill>
-                  <a:srgbClr val="CBD5E1"/>
-                </a:solidFill>
-                <a:latin typeface="Aptos"/>
-                <a:ea typeface="Aptos"/>
-                <a:cs typeface="Aptos"/>
-              </a:defRPr>
-            </a:pPr>
-            <a:r>
-              <a:rPr sz="900" b="1">
-                <a:solidFill>
-                  <a:srgbClr val="CBD5E1"/>
-                </a:solidFill>
-                <a:latin typeface="Aptos"/>
-                <a:ea typeface="Aptos"/>
-                <a:cs typeface="Aptos"/>
-              </a:rPr>
-              <a:t>32</a:t>
-            </a:r>
-          </a:p>
-        </p:txBody>
-      </p:sp>
-    </p:spTree>
-    <p:extLst>
-      <p:ext uri="{BB962C8B-B14F-4D97-AF65-F5344CB8AC3E}">
-        <p14:creationId xmlns:p14="http://schemas.microsoft.com/office/powerpoint/2010/main" val="1925916989"/>
       </p:ext>
     </p:extLst>
   </p:cSld>
